--- a/Forward-Deployed-Engineering_Executive-Deck.pptx
+++ b/Forward-Deployed-Engineering_Executive-Deck.pptx
@@ -9,6 +9,14 @@
     <p:sldId id="257" r:id="rId8"/>
     <p:sldId id="258" r:id="rId9"/>
     <p:sldId id="259" r:id="rId10"/>
+    <p:sldId id="260" r:id="rId11"/>
+    <p:sldId id="261" r:id="rId12"/>
+    <p:sldId id="262" r:id="rId13"/>
+    <p:sldId id="263" r:id="rId14"/>
+    <p:sldId id="264" r:id="rId15"/>
+    <p:sldId id="265" r:id="rId16"/>
+    <p:sldId id="266" r:id="rId17"/>
+    <p:sldId id="267" r:id="rId18"/>
   </p:sldIdLst>
   <p:sldSz cx="12191695" cy="6858000" type="screen4x3"/>
   <p:notesSz cx="6858000" cy="9144000"/>
@@ -4477,6 +4485,2468 @@
 </p:sld>
 </file>
 
+<file path=ppt/slides/slide10.xml><?xml version="1.0" encoding="utf-8"?>
+<p:sld xmlns:a="http://schemas.openxmlformats.org/drawingml/2006/main" xmlns:p="http://schemas.openxmlformats.org/presentationml/2006/main" xmlns:r="http://schemas.openxmlformats.org/officeDocument/2006/relationships">
+  <p:cSld>
+    <p:spTree>
+      <p:nvGrpSpPr>
+        <p:cNvPr id="1" name=""/>
+        <p:cNvGrpSpPr/>
+        <p:nvPr/>
+      </p:nvGrpSpPr>
+      <p:grpSpPr/>
+      <p:sp>
+        <p:nvSpPr>
+          <p:cNvPr id="2" name="TextBox 1"/>
+          <p:cNvSpPr txBox="1"/>
+          <p:nvPr/>
+        </p:nvSpPr>
+        <p:spPr>
+          <a:xfrm>
+            <a:off x="502920" y="292608"/>
+            <a:ext cx="11185855" cy="685800"/>
+          </a:xfrm>
+          <a:prstGeom prst="rect">
+            <a:avLst/>
+          </a:prstGeom>
+          <a:noFill/>
+        </p:spPr>
+        <p:txBody>
+          <a:bodyPr wrap="square" anchor="t" lIns="0" rIns="0" tIns="0" bIns="0">
+            <a:spAutoFit/>
+          </a:bodyPr>
+          <a:lstStyle/>
+          <a:p>
+            <a:pPr algn="l">
+              <a:lnSpc>
+                <a:spcPct val="105000"/>
+              </a:lnSpc>
+              <a:spcAft>
+                <a:spcPts val="0"/>
+              </a:spcAft>
+            </a:pPr>
+            <a:r>
+              <a:rPr sz="1800" b="1">
+                <a:solidFill>
+                  <a:srgbClr val="000000"/>
+                </a:solidFill>
+                <a:latin typeface="Arial"/>
+              </a:rPr>
+              <a:t>Stripe's user-proximate engineering culture is a long-standing form of forward deployment</a:t>
+            </a:r>
+          </a:p>
+        </p:txBody>
+      </p:sp>
+      <p:cxnSp>
+        <p:nvCxnSpPr>
+          <p:cNvPr id="3" name="Connector 2"/>
+          <p:cNvCxnSpPr/>
+          <p:nvPr/>
+        </p:nvCxnSpPr>
+        <p:spPr>
+          <a:xfrm>
+            <a:off x="502920" y="896112"/>
+            <a:ext cx="11185855" cy="0"/>
+          </a:xfrm>
+          <a:prstGeom prst="line">
+            <a:avLst/>
+          </a:prstGeom>
+          <a:ln w="19050">
+            <a:solidFill>
+              <a:srgbClr val="000000"/>
+            </a:solidFill>
+          </a:ln>
+          <a:effectLst/>
+        </p:spPr>
+      </p:cxnSp>
+      <p:sp>
+        <p:nvSpPr>
+          <p:cNvPr id="4" name="TextBox 3"/>
+          <p:cNvSpPr txBox="1"/>
+          <p:nvPr/>
+        </p:nvSpPr>
+        <p:spPr>
+          <a:xfrm>
+            <a:off x="502920" y="1005840"/>
+            <a:ext cx="11185855" cy="320040"/>
+          </a:xfrm>
+          <a:prstGeom prst="rect">
+            <a:avLst/>
+          </a:prstGeom>
+          <a:noFill/>
+        </p:spPr>
+        <p:txBody>
+          <a:bodyPr wrap="square" anchor="t" lIns="0" rIns="0" tIns="0" bIns="0">
+            <a:spAutoFit/>
+          </a:bodyPr>
+          <a:lstStyle/>
+          <a:p>
+            <a:pPr algn="l">
+              <a:lnSpc>
+                <a:spcPct val="105000"/>
+              </a:lnSpc>
+              <a:spcAft>
+                <a:spcPts val="0"/>
+              </a:spcAft>
+            </a:pPr>
+            <a:r>
+              <a:rPr sz="1600" b="1">
+                <a:solidFill>
+                  <a:srgbClr val="000000"/>
+                </a:solidFill>
+                <a:latin typeface="Arial"/>
+              </a:rPr>
+              <a:t>Backup: Stripe — model, motivation, differentiation and impact</a:t>
+            </a:r>
+          </a:p>
+        </p:txBody>
+      </p:sp>
+      <p:sp>
+        <p:nvSpPr>
+          <p:cNvPr id="5" name="TextBox 4"/>
+          <p:cNvSpPr txBox="1"/>
+          <p:nvPr/>
+        </p:nvSpPr>
+        <p:spPr>
+          <a:xfrm>
+            <a:off x="502920" y="1755648"/>
+            <a:ext cx="2624328" cy="256032"/>
+          </a:xfrm>
+          <a:prstGeom prst="rect">
+            <a:avLst/>
+          </a:prstGeom>
+          <a:noFill/>
+        </p:spPr>
+        <p:txBody>
+          <a:bodyPr wrap="square" anchor="t" lIns="0" rIns="0" tIns="0" bIns="0">
+            <a:spAutoFit/>
+          </a:bodyPr>
+          <a:lstStyle/>
+          <a:p>
+            <a:pPr algn="l">
+              <a:lnSpc>
+                <a:spcPct val="100000"/>
+              </a:lnSpc>
+              <a:spcAft>
+                <a:spcPts val="0"/>
+              </a:spcAft>
+            </a:pPr>
+            <a:r>
+              <a:rPr sz="1050" b="1">
+                <a:solidFill>
+                  <a:srgbClr val="000000"/>
+                </a:solidFill>
+                <a:latin typeface="Arial"/>
+              </a:rPr>
+              <a:t>What the model looks like</a:t>
+            </a:r>
+          </a:p>
+        </p:txBody>
+      </p:sp>
+      <p:cxnSp>
+        <p:nvCxnSpPr>
+          <p:cNvPr id="6" name="Connector 5"/>
+          <p:cNvCxnSpPr/>
+          <p:nvPr/>
+        </p:nvCxnSpPr>
+        <p:spPr>
+          <a:xfrm>
+            <a:off x="502920" y="2048256"/>
+            <a:ext cx="2624328" cy="0"/>
+          </a:xfrm>
+          <a:prstGeom prst="line">
+            <a:avLst/>
+          </a:prstGeom>
+          <a:ln w="12700">
+            <a:solidFill>
+              <a:srgbClr val="000000"/>
+            </a:solidFill>
+          </a:ln>
+          <a:effectLst/>
+        </p:spPr>
+      </p:cxnSp>
+      <p:sp>
+        <p:nvSpPr>
+          <p:cNvPr id="7" name="TextBox 6"/>
+          <p:cNvSpPr txBox="1"/>
+          <p:nvPr/>
+        </p:nvSpPr>
+        <p:spPr>
+          <a:xfrm>
+            <a:off x="502920" y="2231136"/>
+            <a:ext cx="2624328" cy="4023360"/>
+          </a:xfrm>
+          <a:prstGeom prst="rect">
+            <a:avLst/>
+          </a:prstGeom>
+          <a:noFill/>
+        </p:spPr>
+        <p:txBody>
+          <a:bodyPr wrap="square" anchor="t" lIns="0" rIns="0" tIns="0" bIns="0">
+            <a:spAutoFit/>
+          </a:bodyPr>
+          <a:lstStyle/>
+          <a:p>
+            <a:pPr algn="l">
+              <a:lnSpc>
+                <a:spcPct val="120000"/>
+              </a:lnSpc>
+              <a:spcAft>
+                <a:spcPts val="1600"/>
+              </a:spcAft>
+            </a:pPr>
+            <a:r>
+              <a:rPr sz="1050" b="0">
+                <a:solidFill>
+                  <a:srgbClr val="000000"/>
+                </a:solidFill>
+                <a:latin typeface="Arial"/>
+              </a:rPr>
+              <a:t>•  </a:t>
+            </a:r>
+            <a:r>
+              <a:rPr sz="1050" b="0">
+                <a:solidFill>
+                  <a:srgbClr val="000000"/>
+                </a:solidFill>
+                <a:latin typeface="Arial"/>
+              </a:rPr>
+              <a:t>Engineers work directly with users — a founding practice</a:t>
+            </a:r>
+          </a:p>
+          <a:p>
+            <a:pPr algn="l">
+              <a:lnSpc>
+                <a:spcPct val="120000"/>
+              </a:lnSpc>
+              <a:spcAft>
+                <a:spcPts val="1600"/>
+              </a:spcAft>
+            </a:pPr>
+            <a:r>
+              <a:rPr sz="1050" b="0">
+                <a:solidFill>
+                  <a:srgbClr val="000000"/>
+                </a:solidFill>
+                <a:latin typeface="Arial"/>
+              </a:rPr>
+              <a:t>•  </a:t>
+            </a:r>
+            <a:r>
+              <a:rPr sz="1050" b="0">
+                <a:solidFill>
+                  <a:srgbClr val="000000"/>
+                </a:solidFill>
+                <a:latin typeface="Arial"/>
+              </a:rPr>
+              <a:t>Solution engineers embedded in key enterprise accounts</a:t>
+            </a:r>
+          </a:p>
+          <a:p>
+            <a:pPr algn="l">
+              <a:lnSpc>
+                <a:spcPct val="120000"/>
+              </a:lnSpc>
+              <a:spcAft>
+                <a:spcPts val="1600"/>
+              </a:spcAft>
+            </a:pPr>
+            <a:r>
+              <a:rPr sz="1050" b="0">
+                <a:solidFill>
+                  <a:srgbClr val="000000"/>
+                </a:solidFill>
+                <a:latin typeface="Arial"/>
+              </a:rPr>
+              <a:t>•  </a:t>
+            </a:r>
+            <a:r>
+              <a:rPr sz="1050" b="0">
+                <a:solidFill>
+                  <a:srgbClr val="000000"/>
+                </a:solidFill>
+                <a:latin typeface="Arial"/>
+              </a:rPr>
+              <a:t>Direct user contact expected of product engineers</a:t>
+            </a:r>
+          </a:p>
+        </p:txBody>
+      </p:sp>
+      <p:sp>
+        <p:nvSpPr>
+          <p:cNvPr id="8" name="TextBox 7"/>
+          <p:cNvSpPr txBox="1"/>
+          <p:nvPr/>
+        </p:nvSpPr>
+        <p:spPr>
+          <a:xfrm>
+            <a:off x="3355848" y="1755648"/>
+            <a:ext cx="2624328" cy="256032"/>
+          </a:xfrm>
+          <a:prstGeom prst="rect">
+            <a:avLst/>
+          </a:prstGeom>
+          <a:noFill/>
+        </p:spPr>
+        <p:txBody>
+          <a:bodyPr wrap="square" anchor="t" lIns="0" rIns="0" tIns="0" bIns="0">
+            <a:spAutoFit/>
+          </a:bodyPr>
+          <a:lstStyle/>
+          <a:p>
+            <a:pPr algn="l">
+              <a:lnSpc>
+                <a:spcPct val="100000"/>
+              </a:lnSpc>
+              <a:spcAft>
+                <a:spcPts val="0"/>
+              </a:spcAft>
+            </a:pPr>
+            <a:r>
+              <a:rPr sz="1050" b="1">
+                <a:solidFill>
+                  <a:srgbClr val="000000"/>
+                </a:solidFill>
+                <a:latin typeface="Arial"/>
+              </a:rPr>
+              <a:t>Why they moved to it</a:t>
+            </a:r>
+          </a:p>
+        </p:txBody>
+      </p:sp>
+      <p:cxnSp>
+        <p:nvCxnSpPr>
+          <p:cNvPr id="9" name="Connector 8"/>
+          <p:cNvCxnSpPr/>
+          <p:nvPr/>
+        </p:nvCxnSpPr>
+        <p:spPr>
+          <a:xfrm>
+            <a:off x="3355848" y="2048256"/>
+            <a:ext cx="2624328" cy="0"/>
+          </a:xfrm>
+          <a:prstGeom prst="line">
+            <a:avLst/>
+          </a:prstGeom>
+          <a:ln w="12700">
+            <a:solidFill>
+              <a:srgbClr val="000000"/>
+            </a:solidFill>
+          </a:ln>
+          <a:effectLst/>
+        </p:spPr>
+      </p:cxnSp>
+      <p:sp>
+        <p:nvSpPr>
+          <p:cNvPr id="10" name="TextBox 9"/>
+          <p:cNvSpPr txBox="1"/>
+          <p:nvPr/>
+        </p:nvSpPr>
+        <p:spPr>
+          <a:xfrm>
+            <a:off x="3355848" y="2231136"/>
+            <a:ext cx="2624328" cy="4023360"/>
+          </a:xfrm>
+          <a:prstGeom prst="rect">
+            <a:avLst/>
+          </a:prstGeom>
+          <a:noFill/>
+        </p:spPr>
+        <p:txBody>
+          <a:bodyPr wrap="square" anchor="t" lIns="0" rIns="0" tIns="0" bIns="0">
+            <a:spAutoFit/>
+          </a:bodyPr>
+          <a:lstStyle/>
+          <a:p>
+            <a:pPr algn="l">
+              <a:lnSpc>
+                <a:spcPct val="120000"/>
+              </a:lnSpc>
+              <a:spcAft>
+                <a:spcPts val="1600"/>
+              </a:spcAft>
+            </a:pPr>
+            <a:r>
+              <a:rPr sz="1050" b="0">
+                <a:solidFill>
+                  <a:srgbClr val="000000"/>
+                </a:solidFill>
+                <a:latin typeface="Arial"/>
+              </a:rPr>
+              <a:t>•  </a:t>
+            </a:r>
+            <a:r>
+              <a:rPr sz="1050" b="0">
+                <a:solidFill>
+                  <a:srgbClr val="000000"/>
+                </a:solidFill>
+                <a:latin typeface="Arial"/>
+              </a:rPr>
+              <a:t>A developer-first product required first-hand user understanding</a:t>
+            </a:r>
+          </a:p>
+          <a:p>
+            <a:pPr algn="l">
+              <a:lnSpc>
+                <a:spcPct val="120000"/>
+              </a:lnSpc>
+              <a:spcAft>
+                <a:spcPts val="1600"/>
+              </a:spcAft>
+            </a:pPr>
+            <a:r>
+              <a:rPr sz="1050" b="0">
+                <a:solidFill>
+                  <a:srgbClr val="000000"/>
+                </a:solidFill>
+                <a:latin typeface="Arial"/>
+              </a:rPr>
+              <a:t>•  </a:t>
+            </a:r>
+            <a:r>
+              <a:rPr sz="1050" b="0">
+                <a:solidFill>
+                  <a:srgbClr val="000000"/>
+                </a:solidFill>
+                <a:latin typeface="Arial"/>
+              </a:rPr>
+              <a:t>Enterprise payments complexity could not be specified remotely</a:t>
+            </a:r>
+          </a:p>
+        </p:txBody>
+      </p:sp>
+      <p:sp>
+        <p:nvSpPr>
+          <p:cNvPr id="11" name="TextBox 10"/>
+          <p:cNvSpPr txBox="1"/>
+          <p:nvPr/>
+        </p:nvSpPr>
+        <p:spPr>
+          <a:xfrm>
+            <a:off x="6208776" y="1755648"/>
+            <a:ext cx="2624328" cy="256032"/>
+          </a:xfrm>
+          <a:prstGeom prst="rect">
+            <a:avLst/>
+          </a:prstGeom>
+          <a:noFill/>
+        </p:spPr>
+        <p:txBody>
+          <a:bodyPr wrap="square" anchor="t" lIns="0" rIns="0" tIns="0" bIns="0">
+            <a:spAutoFit/>
+          </a:bodyPr>
+          <a:lstStyle/>
+          <a:p>
+            <a:pPr algn="l">
+              <a:lnSpc>
+                <a:spcPct val="100000"/>
+              </a:lnSpc>
+              <a:spcAft>
+                <a:spcPts val="0"/>
+              </a:spcAft>
+            </a:pPr>
+            <a:r>
+              <a:rPr sz="1050" b="1">
+                <a:solidFill>
+                  <a:srgbClr val="000000"/>
+                </a:solidFill>
+                <a:latin typeface="Arial"/>
+              </a:rPr>
+              <a:t>What sets it apart</a:t>
+            </a:r>
+          </a:p>
+        </p:txBody>
+      </p:sp>
+      <p:cxnSp>
+        <p:nvCxnSpPr>
+          <p:cNvPr id="12" name="Connector 11"/>
+          <p:cNvCxnSpPr/>
+          <p:nvPr/>
+        </p:nvCxnSpPr>
+        <p:spPr>
+          <a:xfrm>
+            <a:off x="6208776" y="2048256"/>
+            <a:ext cx="2624328" cy="0"/>
+          </a:xfrm>
+          <a:prstGeom prst="line">
+            <a:avLst/>
+          </a:prstGeom>
+          <a:ln w="12700">
+            <a:solidFill>
+              <a:srgbClr val="000000"/>
+            </a:solidFill>
+          </a:ln>
+          <a:effectLst/>
+        </p:spPr>
+      </p:cxnSp>
+      <p:sp>
+        <p:nvSpPr>
+          <p:cNvPr id="13" name="TextBox 12"/>
+          <p:cNvSpPr txBox="1"/>
+          <p:nvPr/>
+        </p:nvSpPr>
+        <p:spPr>
+          <a:xfrm>
+            <a:off x="6208776" y="2231136"/>
+            <a:ext cx="2624328" cy="4023360"/>
+          </a:xfrm>
+          <a:prstGeom prst="rect">
+            <a:avLst/>
+          </a:prstGeom>
+          <a:noFill/>
+        </p:spPr>
+        <p:txBody>
+          <a:bodyPr wrap="square" anchor="t" lIns="0" rIns="0" tIns="0" bIns="0">
+            <a:spAutoFit/>
+          </a:bodyPr>
+          <a:lstStyle/>
+          <a:p>
+            <a:pPr algn="l">
+              <a:lnSpc>
+                <a:spcPct val="120000"/>
+              </a:lnSpc>
+              <a:spcAft>
+                <a:spcPts val="1600"/>
+              </a:spcAft>
+            </a:pPr>
+            <a:r>
+              <a:rPr sz="1050" b="0">
+                <a:solidFill>
+                  <a:srgbClr val="000000"/>
+                </a:solidFill>
+                <a:latin typeface="Arial"/>
+              </a:rPr>
+              <a:t>•  </a:t>
+            </a:r>
+            <a:r>
+              <a:rPr sz="1050" b="0">
+                <a:solidFill>
+                  <a:srgbClr val="000000"/>
+                </a:solidFill>
+                <a:latin typeface="Arial"/>
+              </a:rPr>
+              <a:t>Cultural rather than organizational — proximity is the default</a:t>
+            </a:r>
+          </a:p>
+          <a:p>
+            <a:pPr algn="l">
+              <a:lnSpc>
+                <a:spcPct val="120000"/>
+              </a:lnSpc>
+              <a:spcAft>
+                <a:spcPts val="1600"/>
+              </a:spcAft>
+            </a:pPr>
+            <a:r>
+              <a:rPr sz="1050" b="0">
+                <a:solidFill>
+                  <a:srgbClr val="000000"/>
+                </a:solidFill>
+                <a:latin typeface="Arial"/>
+              </a:rPr>
+              <a:t>•  </a:t>
+            </a:r>
+            <a:r>
+              <a:rPr sz="1050" b="0">
+                <a:solidFill>
+                  <a:srgbClr val="000000"/>
+                </a:solidFill>
+                <a:latin typeface="Arial"/>
+              </a:rPr>
+              <a:t>API design shaped by continuous developer feedback</a:t>
+            </a:r>
+          </a:p>
+        </p:txBody>
+      </p:sp>
+      <p:sp>
+        <p:nvSpPr>
+          <p:cNvPr id="14" name="TextBox 13"/>
+          <p:cNvSpPr txBox="1"/>
+          <p:nvPr/>
+        </p:nvSpPr>
+        <p:spPr>
+          <a:xfrm>
+            <a:off x="9061704" y="1755648"/>
+            <a:ext cx="2624328" cy="256032"/>
+          </a:xfrm>
+          <a:prstGeom prst="rect">
+            <a:avLst/>
+          </a:prstGeom>
+          <a:noFill/>
+        </p:spPr>
+        <p:txBody>
+          <a:bodyPr wrap="square" anchor="t" lIns="0" rIns="0" tIns="0" bIns="0">
+            <a:spAutoFit/>
+          </a:bodyPr>
+          <a:lstStyle/>
+          <a:p>
+            <a:pPr algn="l">
+              <a:lnSpc>
+                <a:spcPct val="100000"/>
+              </a:lnSpc>
+              <a:spcAft>
+                <a:spcPts val="0"/>
+              </a:spcAft>
+            </a:pPr>
+            <a:r>
+              <a:rPr sz="1050" b="1">
+                <a:solidFill>
+                  <a:srgbClr val="000000"/>
+                </a:solidFill>
+                <a:latin typeface="Arial"/>
+              </a:rPr>
+              <a:t>Impact to date</a:t>
+            </a:r>
+          </a:p>
+        </p:txBody>
+      </p:sp>
+      <p:cxnSp>
+        <p:nvCxnSpPr>
+          <p:cNvPr id="15" name="Connector 14"/>
+          <p:cNvCxnSpPr/>
+          <p:nvPr/>
+        </p:nvCxnSpPr>
+        <p:spPr>
+          <a:xfrm>
+            <a:off x="9061704" y="2048256"/>
+            <a:ext cx="2624328" cy="0"/>
+          </a:xfrm>
+          <a:prstGeom prst="line">
+            <a:avLst/>
+          </a:prstGeom>
+          <a:ln w="12700">
+            <a:solidFill>
+              <a:srgbClr val="000000"/>
+            </a:solidFill>
+          </a:ln>
+          <a:effectLst/>
+        </p:spPr>
+      </p:cxnSp>
+      <p:sp>
+        <p:nvSpPr>
+          <p:cNvPr id="16" name="TextBox 15"/>
+          <p:cNvSpPr txBox="1"/>
+          <p:nvPr/>
+        </p:nvSpPr>
+        <p:spPr>
+          <a:xfrm>
+            <a:off x="9061704" y="2231136"/>
+            <a:ext cx="2624328" cy="4023360"/>
+          </a:xfrm>
+          <a:prstGeom prst="rect">
+            <a:avLst/>
+          </a:prstGeom>
+          <a:noFill/>
+        </p:spPr>
+        <p:txBody>
+          <a:bodyPr wrap="square" anchor="t" lIns="0" rIns="0" tIns="0" bIns="0">
+            <a:spAutoFit/>
+          </a:bodyPr>
+          <a:lstStyle/>
+          <a:p>
+            <a:pPr algn="l">
+              <a:lnSpc>
+                <a:spcPct val="120000"/>
+              </a:lnSpc>
+              <a:spcAft>
+                <a:spcPts val="1600"/>
+              </a:spcAft>
+            </a:pPr>
+            <a:r>
+              <a:rPr sz="1050" b="0">
+                <a:solidFill>
+                  <a:srgbClr val="000000"/>
+                </a:solidFill>
+                <a:latin typeface="Arial"/>
+              </a:rPr>
+              <a:t>•  </a:t>
+            </a:r>
+            <a:r>
+              <a:rPr sz="1050" b="0">
+                <a:solidFill>
+                  <a:srgbClr val="000000"/>
+                </a:solidFill>
+                <a:latin typeface="Arial"/>
+              </a:rPr>
+              <a:t>User-proximate engineering credited for product velocity and enterprise wins</a:t>
+            </a:r>
+          </a:p>
+          <a:p>
+            <a:pPr algn="l">
+              <a:lnSpc>
+                <a:spcPct val="120000"/>
+              </a:lnSpc>
+              <a:spcAft>
+                <a:spcPts val="1600"/>
+              </a:spcAft>
+            </a:pPr>
+            <a:r>
+              <a:rPr sz="1050" b="0">
+                <a:solidFill>
+                  <a:srgbClr val="000000"/>
+                </a:solidFill>
+                <a:latin typeface="Arial"/>
+              </a:rPr>
+              <a:t>•  </a:t>
+            </a:r>
+            <a:r>
+              <a:rPr sz="1050" b="0">
+                <a:solidFill>
+                  <a:srgbClr val="000000"/>
+                </a:solidFill>
+                <a:latin typeface="Arial"/>
+              </a:rPr>
+              <a:t>Developer experience widely treated as the industry benchmark</a:t>
+            </a:r>
+          </a:p>
+        </p:txBody>
+      </p:sp>
+      <p:cxnSp>
+        <p:nvCxnSpPr>
+          <p:cNvPr id="17" name="Connector 16"/>
+          <p:cNvCxnSpPr/>
+          <p:nvPr/>
+        </p:nvCxnSpPr>
+        <p:spPr>
+          <a:xfrm>
+            <a:off x="502920" y="6510528"/>
+            <a:ext cx="11185855" cy="0"/>
+          </a:xfrm>
+          <a:prstGeom prst="line">
+            <a:avLst/>
+          </a:prstGeom>
+          <a:ln w="6350">
+            <a:solidFill>
+              <a:srgbClr val="BFBFBF"/>
+            </a:solidFill>
+          </a:ln>
+          <a:effectLst/>
+        </p:spPr>
+      </p:cxnSp>
+      <p:sp>
+        <p:nvSpPr>
+          <p:cNvPr id="18" name="TextBox 17"/>
+          <p:cNvSpPr txBox="1"/>
+          <p:nvPr/>
+        </p:nvSpPr>
+        <p:spPr>
+          <a:xfrm>
+            <a:off x="502920" y="6583680"/>
+            <a:ext cx="9601200" cy="228600"/>
+          </a:xfrm>
+          <a:prstGeom prst="rect">
+            <a:avLst/>
+          </a:prstGeom>
+          <a:noFill/>
+        </p:spPr>
+        <p:txBody>
+          <a:bodyPr wrap="square" anchor="t" lIns="0" rIns="0" tIns="0" bIns="0">
+            <a:spAutoFit/>
+          </a:bodyPr>
+          <a:lstStyle/>
+          <a:p>
+            <a:pPr algn="l">
+              <a:lnSpc>
+                <a:spcPct val="100000"/>
+              </a:lnSpc>
+              <a:spcAft>
+                <a:spcPts val="0"/>
+              </a:spcAft>
+            </a:pPr>
+            <a:r>
+              <a:rPr sz="750" b="0">
+                <a:solidFill>
+                  <a:srgbClr val="8C8C8C"/>
+                </a:solidFill>
+                <a:latin typeface="Arial"/>
+              </a:rPr>
+              <a:t>Source: Stripe public statements, founder interviews and press coverage</a:t>
+            </a:r>
+          </a:p>
+        </p:txBody>
+      </p:sp>
+      <p:sp>
+        <p:nvSpPr>
+          <p:cNvPr id="19" name="TextBox 18"/>
+          <p:cNvSpPr txBox="1"/>
+          <p:nvPr/>
+        </p:nvSpPr>
+        <p:spPr>
+          <a:xfrm>
+            <a:off x="11228832" y="6583680"/>
+            <a:ext cx="457200" cy="228600"/>
+          </a:xfrm>
+          <a:prstGeom prst="rect">
+            <a:avLst/>
+          </a:prstGeom>
+          <a:noFill/>
+        </p:spPr>
+        <p:txBody>
+          <a:bodyPr wrap="square" anchor="t" lIns="0" rIns="0" tIns="0" bIns="0">
+            <a:spAutoFit/>
+          </a:bodyPr>
+          <a:lstStyle/>
+          <a:p>
+            <a:pPr algn="r">
+              <a:lnSpc>
+                <a:spcPct val="100000"/>
+              </a:lnSpc>
+              <a:spcAft>
+                <a:spcPts val="0"/>
+              </a:spcAft>
+            </a:pPr>
+            <a:r>
+              <a:rPr sz="800" b="0">
+                <a:solidFill>
+                  <a:srgbClr val="8C8C8C"/>
+                </a:solidFill>
+                <a:latin typeface="Arial"/>
+              </a:rPr>
+              <a:t>10</a:t>
+            </a:r>
+          </a:p>
+        </p:txBody>
+      </p:sp>
+    </p:spTree>
+  </p:cSld>
+  <p:clrMapOvr>
+    <a:masterClrMapping/>
+  </p:clrMapOvr>
+</p:sld>
+</file>
+
+<file path=ppt/slides/slide11.xml><?xml version="1.0" encoding="utf-8"?>
+<p:sld xmlns:a="http://schemas.openxmlformats.org/drawingml/2006/main" xmlns:p="http://schemas.openxmlformats.org/presentationml/2006/main" xmlns:r="http://schemas.openxmlformats.org/officeDocument/2006/relationships">
+  <p:cSld>
+    <p:spTree>
+      <p:nvGrpSpPr>
+        <p:cNvPr id="1" name=""/>
+        <p:cNvGrpSpPr/>
+        <p:nvPr/>
+      </p:nvGrpSpPr>
+      <p:grpSpPr/>
+      <p:sp>
+        <p:nvSpPr>
+          <p:cNvPr id="2" name="TextBox 1"/>
+          <p:cNvSpPr txBox="1"/>
+          <p:nvPr/>
+        </p:nvSpPr>
+        <p:spPr>
+          <a:xfrm>
+            <a:off x="502920" y="292608"/>
+            <a:ext cx="11185855" cy="685800"/>
+          </a:xfrm>
+          <a:prstGeom prst="rect">
+            <a:avLst/>
+          </a:prstGeom>
+          <a:noFill/>
+        </p:spPr>
+        <p:txBody>
+          <a:bodyPr wrap="square" anchor="t" lIns="0" rIns="0" tIns="0" bIns="0">
+            <a:spAutoFit/>
+          </a:bodyPr>
+          <a:lstStyle/>
+          <a:p>
+            <a:pPr algn="l">
+              <a:lnSpc>
+                <a:spcPct val="105000"/>
+              </a:lnSpc>
+              <a:spcAft>
+                <a:spcPts val="0"/>
+              </a:spcAft>
+            </a:pPr>
+            <a:r>
+              <a:rPr sz="1800" b="1">
+                <a:solidFill>
+                  <a:srgbClr val="000000"/>
+                </a:solidFill>
+                <a:latin typeface="Arial"/>
+              </a:rPr>
+              <a:t>Brex points its forward-deployed engineers inward, rebuilding its own operations around AI</a:t>
+            </a:r>
+          </a:p>
+        </p:txBody>
+      </p:sp>
+      <p:cxnSp>
+        <p:nvCxnSpPr>
+          <p:cNvPr id="3" name="Connector 2"/>
+          <p:cNvCxnSpPr/>
+          <p:nvPr/>
+        </p:nvCxnSpPr>
+        <p:spPr>
+          <a:xfrm>
+            <a:off x="502920" y="896112"/>
+            <a:ext cx="11185855" cy="0"/>
+          </a:xfrm>
+          <a:prstGeom prst="line">
+            <a:avLst/>
+          </a:prstGeom>
+          <a:ln w="19050">
+            <a:solidFill>
+              <a:srgbClr val="000000"/>
+            </a:solidFill>
+          </a:ln>
+          <a:effectLst/>
+        </p:spPr>
+      </p:cxnSp>
+      <p:sp>
+        <p:nvSpPr>
+          <p:cNvPr id="4" name="TextBox 3"/>
+          <p:cNvSpPr txBox="1"/>
+          <p:nvPr/>
+        </p:nvSpPr>
+        <p:spPr>
+          <a:xfrm>
+            <a:off x="502920" y="1005840"/>
+            <a:ext cx="11185855" cy="320040"/>
+          </a:xfrm>
+          <a:prstGeom prst="rect">
+            <a:avLst/>
+          </a:prstGeom>
+          <a:noFill/>
+        </p:spPr>
+        <p:txBody>
+          <a:bodyPr wrap="square" anchor="t" lIns="0" rIns="0" tIns="0" bIns="0">
+            <a:spAutoFit/>
+          </a:bodyPr>
+          <a:lstStyle/>
+          <a:p>
+            <a:pPr algn="l">
+              <a:lnSpc>
+                <a:spcPct val="105000"/>
+              </a:lnSpc>
+              <a:spcAft>
+                <a:spcPts val="0"/>
+              </a:spcAft>
+            </a:pPr>
+            <a:r>
+              <a:rPr sz="1600" b="1">
+                <a:solidFill>
+                  <a:srgbClr val="000000"/>
+                </a:solidFill>
+                <a:latin typeface="Arial"/>
+              </a:rPr>
+              <a:t>Backup: Brex — model, motivation, differentiation and impact</a:t>
+            </a:r>
+          </a:p>
+        </p:txBody>
+      </p:sp>
+      <p:sp>
+        <p:nvSpPr>
+          <p:cNvPr id="5" name="TextBox 4"/>
+          <p:cNvSpPr txBox="1"/>
+          <p:nvPr/>
+        </p:nvSpPr>
+        <p:spPr>
+          <a:xfrm>
+            <a:off x="502920" y="1755648"/>
+            <a:ext cx="2624328" cy="256032"/>
+          </a:xfrm>
+          <a:prstGeom prst="rect">
+            <a:avLst/>
+          </a:prstGeom>
+          <a:noFill/>
+        </p:spPr>
+        <p:txBody>
+          <a:bodyPr wrap="square" anchor="t" lIns="0" rIns="0" tIns="0" bIns="0">
+            <a:spAutoFit/>
+          </a:bodyPr>
+          <a:lstStyle/>
+          <a:p>
+            <a:pPr algn="l">
+              <a:lnSpc>
+                <a:spcPct val="100000"/>
+              </a:lnSpc>
+              <a:spcAft>
+                <a:spcPts val="0"/>
+              </a:spcAft>
+            </a:pPr>
+            <a:r>
+              <a:rPr sz="1050" b="1">
+                <a:solidFill>
+                  <a:srgbClr val="000000"/>
+                </a:solidFill>
+                <a:latin typeface="Arial"/>
+              </a:rPr>
+              <a:t>What the model looks like</a:t>
+            </a:r>
+          </a:p>
+        </p:txBody>
+      </p:sp>
+      <p:cxnSp>
+        <p:nvCxnSpPr>
+          <p:cNvPr id="6" name="Connector 5"/>
+          <p:cNvCxnSpPr/>
+          <p:nvPr/>
+        </p:nvCxnSpPr>
+        <p:spPr>
+          <a:xfrm>
+            <a:off x="502920" y="2048256"/>
+            <a:ext cx="2624328" cy="0"/>
+          </a:xfrm>
+          <a:prstGeom prst="line">
+            <a:avLst/>
+          </a:prstGeom>
+          <a:ln w="12700">
+            <a:solidFill>
+              <a:srgbClr val="000000"/>
+            </a:solidFill>
+          </a:ln>
+          <a:effectLst/>
+        </p:spPr>
+      </p:cxnSp>
+      <p:sp>
+        <p:nvSpPr>
+          <p:cNvPr id="7" name="TextBox 6"/>
+          <p:cNvSpPr txBox="1"/>
+          <p:nvPr/>
+        </p:nvSpPr>
+        <p:spPr>
+          <a:xfrm>
+            <a:off x="502920" y="2231136"/>
+            <a:ext cx="2624328" cy="4023360"/>
+          </a:xfrm>
+          <a:prstGeom prst="rect">
+            <a:avLst/>
+          </a:prstGeom>
+          <a:noFill/>
+        </p:spPr>
+        <p:txBody>
+          <a:bodyPr wrap="square" anchor="t" lIns="0" rIns="0" tIns="0" bIns="0">
+            <a:spAutoFit/>
+          </a:bodyPr>
+          <a:lstStyle/>
+          <a:p>
+            <a:pPr algn="l">
+              <a:lnSpc>
+                <a:spcPct val="120000"/>
+              </a:lnSpc>
+              <a:spcAft>
+                <a:spcPts val="1600"/>
+              </a:spcAft>
+            </a:pPr>
+            <a:r>
+              <a:rPr sz="1050" b="0">
+                <a:solidFill>
+                  <a:srgbClr val="000000"/>
+                </a:solidFill>
+                <a:latin typeface="Arial"/>
+              </a:rPr>
+              <a:t>•  </a:t>
+            </a:r>
+            <a:r>
+              <a:rPr sz="1050" b="0">
+                <a:solidFill>
+                  <a:srgbClr val="000000"/>
+                </a:solidFill>
+                <a:latin typeface="Arial"/>
+              </a:rPr>
+              <a:t>AI engineers embedded within internal business teams</a:t>
+            </a:r>
+          </a:p>
+          <a:p>
+            <a:pPr algn="l">
+              <a:lnSpc>
+                <a:spcPct val="120000"/>
+              </a:lnSpc>
+              <a:spcAft>
+                <a:spcPts val="1600"/>
+              </a:spcAft>
+            </a:pPr>
+            <a:r>
+              <a:rPr sz="1050" b="0">
+                <a:solidFill>
+                  <a:srgbClr val="000000"/>
+                </a:solidFill>
+                <a:latin typeface="Arial"/>
+              </a:rPr>
+              <a:t>•  </a:t>
+            </a:r>
+            <a:r>
+              <a:rPr sz="1050" b="0">
+                <a:solidFill>
+                  <a:srgbClr val="000000"/>
+                </a:solidFill>
+                <a:latin typeface="Arial"/>
+              </a:rPr>
+              <a:t>Core workflows redesigned around AI-native tooling</a:t>
+            </a:r>
+          </a:p>
+          <a:p>
+            <a:pPr algn="l">
+              <a:lnSpc>
+                <a:spcPct val="120000"/>
+              </a:lnSpc>
+              <a:spcAft>
+                <a:spcPts val="1600"/>
+              </a:spcAft>
+            </a:pPr>
+            <a:r>
+              <a:rPr sz="1050" b="0">
+                <a:solidFill>
+                  <a:srgbClr val="000000"/>
+                </a:solidFill>
+                <a:latin typeface="Arial"/>
+              </a:rPr>
+              <a:t>•  </a:t>
+            </a:r>
+            <a:r>
+              <a:rPr sz="1050" b="0">
+                <a:solidFill>
+                  <a:srgbClr val="000000"/>
+                </a:solidFill>
+                <a:latin typeface="Arial"/>
+              </a:rPr>
+              <a:t>Adoption managed as an explicit leadership mandate</a:t>
+            </a:r>
+          </a:p>
+        </p:txBody>
+      </p:sp>
+      <p:sp>
+        <p:nvSpPr>
+          <p:cNvPr id="8" name="TextBox 7"/>
+          <p:cNvSpPr txBox="1"/>
+          <p:nvPr/>
+        </p:nvSpPr>
+        <p:spPr>
+          <a:xfrm>
+            <a:off x="3355848" y="1755648"/>
+            <a:ext cx="2624328" cy="256032"/>
+          </a:xfrm>
+          <a:prstGeom prst="rect">
+            <a:avLst/>
+          </a:prstGeom>
+          <a:noFill/>
+        </p:spPr>
+        <p:txBody>
+          <a:bodyPr wrap="square" anchor="t" lIns="0" rIns="0" tIns="0" bIns="0">
+            <a:spAutoFit/>
+          </a:bodyPr>
+          <a:lstStyle/>
+          <a:p>
+            <a:pPr algn="l">
+              <a:lnSpc>
+                <a:spcPct val="100000"/>
+              </a:lnSpc>
+              <a:spcAft>
+                <a:spcPts val="0"/>
+              </a:spcAft>
+            </a:pPr>
+            <a:r>
+              <a:rPr sz="1050" b="1">
+                <a:solidFill>
+                  <a:srgbClr val="000000"/>
+                </a:solidFill>
+                <a:latin typeface="Arial"/>
+              </a:rPr>
+              <a:t>Why they moved to it</a:t>
+            </a:r>
+          </a:p>
+        </p:txBody>
+      </p:sp>
+      <p:cxnSp>
+        <p:nvCxnSpPr>
+          <p:cNvPr id="9" name="Connector 8"/>
+          <p:cNvCxnSpPr/>
+          <p:nvPr/>
+        </p:nvCxnSpPr>
+        <p:spPr>
+          <a:xfrm>
+            <a:off x="3355848" y="2048256"/>
+            <a:ext cx="2624328" cy="0"/>
+          </a:xfrm>
+          <a:prstGeom prst="line">
+            <a:avLst/>
+          </a:prstGeom>
+          <a:ln w="12700">
+            <a:solidFill>
+              <a:srgbClr val="000000"/>
+            </a:solidFill>
+          </a:ln>
+          <a:effectLst/>
+        </p:spPr>
+      </p:cxnSp>
+      <p:sp>
+        <p:nvSpPr>
+          <p:cNvPr id="10" name="TextBox 9"/>
+          <p:cNvSpPr txBox="1"/>
+          <p:nvPr/>
+        </p:nvSpPr>
+        <p:spPr>
+          <a:xfrm>
+            <a:off x="3355848" y="2231136"/>
+            <a:ext cx="2624328" cy="4023360"/>
+          </a:xfrm>
+          <a:prstGeom prst="rect">
+            <a:avLst/>
+          </a:prstGeom>
+          <a:noFill/>
+        </p:spPr>
+        <p:txBody>
+          <a:bodyPr wrap="square" anchor="t" lIns="0" rIns="0" tIns="0" bIns="0">
+            <a:spAutoFit/>
+          </a:bodyPr>
+          <a:lstStyle/>
+          <a:p>
+            <a:pPr algn="l">
+              <a:lnSpc>
+                <a:spcPct val="120000"/>
+              </a:lnSpc>
+              <a:spcAft>
+                <a:spcPts val="1600"/>
+              </a:spcAft>
+            </a:pPr>
+            <a:r>
+              <a:rPr sz="1050" b="0">
+                <a:solidFill>
+                  <a:srgbClr val="000000"/>
+                </a:solidFill>
+                <a:latin typeface="Arial"/>
+              </a:rPr>
+              <a:t>•  </a:t>
+            </a:r>
+            <a:r>
+              <a:rPr sz="1050" b="0">
+                <a:solidFill>
+                  <a:srgbClr val="000000"/>
+                </a:solidFill>
+                <a:latin typeface="Arial"/>
+              </a:rPr>
+              <a:t>Fintech margin pressure demanded step-change productivity</a:t>
+            </a:r>
+          </a:p>
+          <a:p>
+            <a:pPr algn="l">
+              <a:lnSpc>
+                <a:spcPct val="120000"/>
+              </a:lnSpc>
+              <a:spcAft>
+                <a:spcPts val="1600"/>
+              </a:spcAft>
+            </a:pPr>
+            <a:r>
+              <a:rPr sz="1050" b="0">
+                <a:solidFill>
+                  <a:srgbClr val="000000"/>
+                </a:solidFill>
+                <a:latin typeface="Arial"/>
+              </a:rPr>
+              <a:t>•  </a:t>
+            </a:r>
+            <a:r>
+              <a:rPr sz="1050" b="0">
+                <a:solidFill>
+                  <a:srgbClr val="000000"/>
+                </a:solidFill>
+                <a:latin typeface="Arial"/>
+              </a:rPr>
+              <a:t>Leadership prioritized internal AI adoption ahead of external products</a:t>
+            </a:r>
+          </a:p>
+        </p:txBody>
+      </p:sp>
+      <p:sp>
+        <p:nvSpPr>
+          <p:cNvPr id="11" name="TextBox 10"/>
+          <p:cNvSpPr txBox="1"/>
+          <p:nvPr/>
+        </p:nvSpPr>
+        <p:spPr>
+          <a:xfrm>
+            <a:off x="6208776" y="1755648"/>
+            <a:ext cx="2624328" cy="256032"/>
+          </a:xfrm>
+          <a:prstGeom prst="rect">
+            <a:avLst/>
+          </a:prstGeom>
+          <a:noFill/>
+        </p:spPr>
+        <p:txBody>
+          <a:bodyPr wrap="square" anchor="t" lIns="0" rIns="0" tIns="0" bIns="0">
+            <a:spAutoFit/>
+          </a:bodyPr>
+          <a:lstStyle/>
+          <a:p>
+            <a:pPr algn="l">
+              <a:lnSpc>
+                <a:spcPct val="100000"/>
+              </a:lnSpc>
+              <a:spcAft>
+                <a:spcPts val="0"/>
+              </a:spcAft>
+            </a:pPr>
+            <a:r>
+              <a:rPr sz="1050" b="1">
+                <a:solidFill>
+                  <a:srgbClr val="000000"/>
+                </a:solidFill>
+                <a:latin typeface="Arial"/>
+              </a:rPr>
+              <a:t>What sets it apart</a:t>
+            </a:r>
+          </a:p>
+        </p:txBody>
+      </p:sp>
+      <p:cxnSp>
+        <p:nvCxnSpPr>
+          <p:cNvPr id="12" name="Connector 11"/>
+          <p:cNvCxnSpPr/>
+          <p:nvPr/>
+        </p:nvCxnSpPr>
+        <p:spPr>
+          <a:xfrm>
+            <a:off x="6208776" y="2048256"/>
+            <a:ext cx="2624328" cy="0"/>
+          </a:xfrm>
+          <a:prstGeom prst="line">
+            <a:avLst/>
+          </a:prstGeom>
+          <a:ln w="12700">
+            <a:solidFill>
+              <a:srgbClr val="000000"/>
+            </a:solidFill>
+          </a:ln>
+          <a:effectLst/>
+        </p:spPr>
+      </p:cxnSp>
+      <p:sp>
+        <p:nvSpPr>
+          <p:cNvPr id="13" name="TextBox 12"/>
+          <p:cNvSpPr txBox="1"/>
+          <p:nvPr/>
+        </p:nvSpPr>
+        <p:spPr>
+          <a:xfrm>
+            <a:off x="6208776" y="2231136"/>
+            <a:ext cx="2624328" cy="4023360"/>
+          </a:xfrm>
+          <a:prstGeom prst="rect">
+            <a:avLst/>
+          </a:prstGeom>
+          <a:noFill/>
+        </p:spPr>
+        <p:txBody>
+          <a:bodyPr wrap="square" anchor="t" lIns="0" rIns="0" tIns="0" bIns="0">
+            <a:spAutoFit/>
+          </a:bodyPr>
+          <a:lstStyle/>
+          <a:p>
+            <a:pPr algn="l">
+              <a:lnSpc>
+                <a:spcPct val="120000"/>
+              </a:lnSpc>
+              <a:spcAft>
+                <a:spcPts val="1600"/>
+              </a:spcAft>
+            </a:pPr>
+            <a:r>
+              <a:rPr sz="1050" b="0">
+                <a:solidFill>
+                  <a:srgbClr val="000000"/>
+                </a:solidFill>
+                <a:latin typeface="Arial"/>
+              </a:rPr>
+              <a:t>•  </a:t>
+            </a:r>
+            <a:r>
+              <a:rPr sz="1050" b="0">
+                <a:solidFill>
+                  <a:srgbClr val="000000"/>
+                </a:solidFill>
+                <a:latin typeface="Arial"/>
+              </a:rPr>
+              <a:t>Internal-first: its own operations serve as the proving ground</a:t>
+            </a:r>
+          </a:p>
+          <a:p>
+            <a:pPr algn="l">
+              <a:lnSpc>
+                <a:spcPct val="120000"/>
+              </a:lnSpc>
+              <a:spcAft>
+                <a:spcPts val="1600"/>
+              </a:spcAft>
+            </a:pPr>
+            <a:r>
+              <a:rPr sz="1050" b="0">
+                <a:solidFill>
+                  <a:srgbClr val="000000"/>
+                </a:solidFill>
+                <a:latin typeface="Arial"/>
+              </a:rPr>
+              <a:t>•  </a:t>
+            </a:r>
+            <a:r>
+              <a:rPr sz="1050" b="0">
+                <a:solidFill>
+                  <a:srgbClr val="000000"/>
+                </a:solidFill>
+                <a:latin typeface="Arial"/>
+              </a:rPr>
+              <a:t>Embedded engineers accountable for adoption, not just delivery</a:t>
+            </a:r>
+          </a:p>
+        </p:txBody>
+      </p:sp>
+      <p:sp>
+        <p:nvSpPr>
+          <p:cNvPr id="14" name="TextBox 13"/>
+          <p:cNvSpPr txBox="1"/>
+          <p:nvPr/>
+        </p:nvSpPr>
+        <p:spPr>
+          <a:xfrm>
+            <a:off x="9061704" y="1755648"/>
+            <a:ext cx="2624328" cy="256032"/>
+          </a:xfrm>
+          <a:prstGeom prst="rect">
+            <a:avLst/>
+          </a:prstGeom>
+          <a:noFill/>
+        </p:spPr>
+        <p:txBody>
+          <a:bodyPr wrap="square" anchor="t" lIns="0" rIns="0" tIns="0" bIns="0">
+            <a:spAutoFit/>
+          </a:bodyPr>
+          <a:lstStyle/>
+          <a:p>
+            <a:pPr algn="l">
+              <a:lnSpc>
+                <a:spcPct val="100000"/>
+              </a:lnSpc>
+              <a:spcAft>
+                <a:spcPts val="0"/>
+              </a:spcAft>
+            </a:pPr>
+            <a:r>
+              <a:rPr sz="1050" b="1">
+                <a:solidFill>
+                  <a:srgbClr val="000000"/>
+                </a:solidFill>
+                <a:latin typeface="Arial"/>
+              </a:rPr>
+              <a:t>Impact to date</a:t>
+            </a:r>
+          </a:p>
+        </p:txBody>
+      </p:sp>
+      <p:cxnSp>
+        <p:nvCxnSpPr>
+          <p:cNvPr id="15" name="Connector 14"/>
+          <p:cNvCxnSpPr/>
+          <p:nvPr/>
+        </p:nvCxnSpPr>
+        <p:spPr>
+          <a:xfrm>
+            <a:off x="9061704" y="2048256"/>
+            <a:ext cx="2624328" cy="0"/>
+          </a:xfrm>
+          <a:prstGeom prst="line">
+            <a:avLst/>
+          </a:prstGeom>
+          <a:ln w="12700">
+            <a:solidFill>
+              <a:srgbClr val="000000"/>
+            </a:solidFill>
+          </a:ln>
+          <a:effectLst/>
+        </p:spPr>
+      </p:cxnSp>
+      <p:sp>
+        <p:nvSpPr>
+          <p:cNvPr id="16" name="TextBox 15"/>
+          <p:cNvSpPr txBox="1"/>
+          <p:nvPr/>
+        </p:nvSpPr>
+        <p:spPr>
+          <a:xfrm>
+            <a:off x="9061704" y="2231136"/>
+            <a:ext cx="2624328" cy="4023360"/>
+          </a:xfrm>
+          <a:prstGeom prst="rect">
+            <a:avLst/>
+          </a:prstGeom>
+          <a:noFill/>
+        </p:spPr>
+        <p:txBody>
+          <a:bodyPr wrap="square" anchor="t" lIns="0" rIns="0" tIns="0" bIns="0">
+            <a:spAutoFit/>
+          </a:bodyPr>
+          <a:lstStyle/>
+          <a:p>
+            <a:pPr algn="l">
+              <a:lnSpc>
+                <a:spcPct val="120000"/>
+              </a:lnSpc>
+              <a:spcAft>
+                <a:spcPts val="1600"/>
+              </a:spcAft>
+            </a:pPr>
+            <a:r>
+              <a:rPr sz="1050" b="0">
+                <a:solidFill>
+                  <a:srgbClr val="000000"/>
+                </a:solidFill>
+                <a:latin typeface="Arial"/>
+              </a:rPr>
+              <a:t>•  </a:t>
+            </a:r>
+            <a:r>
+              <a:rPr sz="1050" b="0">
+                <a:solidFill>
+                  <a:srgbClr val="000000"/>
+                </a:solidFill>
+                <a:latin typeface="Arial"/>
+              </a:rPr>
+              <a:t>Leadership reports company-wide daily AI usage</a:t>
+            </a:r>
+          </a:p>
+          <a:p>
+            <a:pPr algn="l">
+              <a:lnSpc>
+                <a:spcPct val="120000"/>
+              </a:lnSpc>
+              <a:spcAft>
+                <a:spcPts val="1600"/>
+              </a:spcAft>
+            </a:pPr>
+            <a:r>
+              <a:rPr sz="1050" b="0">
+                <a:solidFill>
+                  <a:srgbClr val="000000"/>
+                </a:solidFill>
+                <a:latin typeface="Arial"/>
+              </a:rPr>
+              <a:t>•  </a:t>
+            </a:r>
+            <a:r>
+              <a:rPr sz="1050" b="0">
+                <a:solidFill>
+                  <a:srgbClr val="000000"/>
+                </a:solidFill>
+                <a:latin typeface="Arial"/>
+              </a:rPr>
+              <a:t>Workflow redesign publicly discussed as a productivity driver</a:t>
+            </a:r>
+          </a:p>
+        </p:txBody>
+      </p:sp>
+      <p:cxnSp>
+        <p:nvCxnSpPr>
+          <p:cNvPr id="17" name="Connector 16"/>
+          <p:cNvCxnSpPr/>
+          <p:nvPr/>
+        </p:nvCxnSpPr>
+        <p:spPr>
+          <a:xfrm>
+            <a:off x="502920" y="6510528"/>
+            <a:ext cx="11185855" cy="0"/>
+          </a:xfrm>
+          <a:prstGeom prst="line">
+            <a:avLst/>
+          </a:prstGeom>
+          <a:ln w="6350">
+            <a:solidFill>
+              <a:srgbClr val="BFBFBF"/>
+            </a:solidFill>
+          </a:ln>
+          <a:effectLst/>
+        </p:spPr>
+      </p:cxnSp>
+      <p:sp>
+        <p:nvSpPr>
+          <p:cNvPr id="18" name="TextBox 17"/>
+          <p:cNvSpPr txBox="1"/>
+          <p:nvPr/>
+        </p:nvSpPr>
+        <p:spPr>
+          <a:xfrm>
+            <a:off x="502920" y="6583680"/>
+            <a:ext cx="9601200" cy="228600"/>
+          </a:xfrm>
+          <a:prstGeom prst="rect">
+            <a:avLst/>
+          </a:prstGeom>
+          <a:noFill/>
+        </p:spPr>
+        <p:txBody>
+          <a:bodyPr wrap="square" anchor="t" lIns="0" rIns="0" tIns="0" bIns="0">
+            <a:spAutoFit/>
+          </a:bodyPr>
+          <a:lstStyle/>
+          <a:p>
+            <a:pPr algn="l">
+              <a:lnSpc>
+                <a:spcPct val="100000"/>
+              </a:lnSpc>
+              <a:spcAft>
+                <a:spcPts val="0"/>
+              </a:spcAft>
+            </a:pPr>
+            <a:r>
+              <a:rPr sz="750" b="0">
+                <a:solidFill>
+                  <a:srgbClr val="8C8C8C"/>
+                </a:solidFill>
+                <a:latin typeface="Arial"/>
+              </a:rPr>
+              <a:t>Source: Brex leadership statements and press coverage</a:t>
+            </a:r>
+          </a:p>
+        </p:txBody>
+      </p:sp>
+      <p:sp>
+        <p:nvSpPr>
+          <p:cNvPr id="19" name="TextBox 18"/>
+          <p:cNvSpPr txBox="1"/>
+          <p:nvPr/>
+        </p:nvSpPr>
+        <p:spPr>
+          <a:xfrm>
+            <a:off x="11228832" y="6583680"/>
+            <a:ext cx="457200" cy="228600"/>
+          </a:xfrm>
+          <a:prstGeom prst="rect">
+            <a:avLst/>
+          </a:prstGeom>
+          <a:noFill/>
+        </p:spPr>
+        <p:txBody>
+          <a:bodyPr wrap="square" anchor="t" lIns="0" rIns="0" tIns="0" bIns="0">
+            <a:spAutoFit/>
+          </a:bodyPr>
+          <a:lstStyle/>
+          <a:p>
+            <a:pPr algn="r">
+              <a:lnSpc>
+                <a:spcPct val="100000"/>
+              </a:lnSpc>
+              <a:spcAft>
+                <a:spcPts val="0"/>
+              </a:spcAft>
+            </a:pPr>
+            <a:r>
+              <a:rPr sz="800" b="0">
+                <a:solidFill>
+                  <a:srgbClr val="8C8C8C"/>
+                </a:solidFill>
+                <a:latin typeface="Arial"/>
+              </a:rPr>
+              <a:t>11</a:t>
+            </a:r>
+          </a:p>
+        </p:txBody>
+      </p:sp>
+    </p:spTree>
+  </p:cSld>
+  <p:clrMapOvr>
+    <a:masterClrMapping/>
+  </p:clrMapOvr>
+</p:sld>
+</file>
+
+<file path=ppt/slides/slide12.xml><?xml version="1.0" encoding="utf-8"?>
+<p:sld xmlns:a="http://schemas.openxmlformats.org/drawingml/2006/main" xmlns:p="http://schemas.openxmlformats.org/presentationml/2006/main" xmlns:r="http://schemas.openxmlformats.org/officeDocument/2006/relationships">
+  <p:cSld>
+    <p:spTree>
+      <p:nvGrpSpPr>
+        <p:cNvPr id="1" name=""/>
+        <p:cNvGrpSpPr/>
+        <p:nvPr/>
+      </p:nvGrpSpPr>
+      <p:grpSpPr/>
+      <p:sp>
+        <p:nvSpPr>
+          <p:cNvPr id="2" name="TextBox 1"/>
+          <p:cNvSpPr txBox="1"/>
+          <p:nvPr/>
+        </p:nvSpPr>
+        <p:spPr>
+          <a:xfrm>
+            <a:off x="502920" y="292608"/>
+            <a:ext cx="11185855" cy="685800"/>
+          </a:xfrm>
+          <a:prstGeom prst="rect">
+            <a:avLst/>
+          </a:prstGeom>
+          <a:noFill/>
+        </p:spPr>
+        <p:txBody>
+          <a:bodyPr wrap="square" anchor="t" lIns="0" rIns="0" tIns="0" bIns="0">
+            <a:spAutoFit/>
+          </a:bodyPr>
+          <a:lstStyle/>
+          <a:p>
+            <a:pPr algn="l">
+              <a:lnSpc>
+                <a:spcPct val="105000"/>
+              </a:lnSpc>
+              <a:spcAft>
+                <a:spcPts val="0"/>
+              </a:spcAft>
+            </a:pPr>
+            <a:r>
+              <a:rPr sz="1800" b="1">
+                <a:solidFill>
+                  <a:srgbClr val="000000"/>
+                </a:solidFill>
+                <a:latin typeface="Arial"/>
+              </a:rPr>
+              <a:t>Plaid deploys engineers into customer integration teams to make integrations faster and stickier</a:t>
+            </a:r>
+          </a:p>
+        </p:txBody>
+      </p:sp>
+      <p:cxnSp>
+        <p:nvCxnSpPr>
+          <p:cNvPr id="3" name="Connector 2"/>
+          <p:cNvCxnSpPr/>
+          <p:nvPr/>
+        </p:nvCxnSpPr>
+        <p:spPr>
+          <a:xfrm>
+            <a:off x="502920" y="896112"/>
+            <a:ext cx="11185855" cy="0"/>
+          </a:xfrm>
+          <a:prstGeom prst="line">
+            <a:avLst/>
+          </a:prstGeom>
+          <a:ln w="19050">
+            <a:solidFill>
+              <a:srgbClr val="000000"/>
+            </a:solidFill>
+          </a:ln>
+          <a:effectLst/>
+        </p:spPr>
+      </p:cxnSp>
+      <p:sp>
+        <p:nvSpPr>
+          <p:cNvPr id="4" name="TextBox 3"/>
+          <p:cNvSpPr txBox="1"/>
+          <p:nvPr/>
+        </p:nvSpPr>
+        <p:spPr>
+          <a:xfrm>
+            <a:off x="502920" y="1005840"/>
+            <a:ext cx="11185855" cy="320040"/>
+          </a:xfrm>
+          <a:prstGeom prst="rect">
+            <a:avLst/>
+          </a:prstGeom>
+          <a:noFill/>
+        </p:spPr>
+        <p:txBody>
+          <a:bodyPr wrap="square" anchor="t" lIns="0" rIns="0" tIns="0" bIns="0">
+            <a:spAutoFit/>
+          </a:bodyPr>
+          <a:lstStyle/>
+          <a:p>
+            <a:pPr algn="l">
+              <a:lnSpc>
+                <a:spcPct val="105000"/>
+              </a:lnSpc>
+              <a:spcAft>
+                <a:spcPts val="0"/>
+              </a:spcAft>
+            </a:pPr>
+            <a:r>
+              <a:rPr sz="1600" b="1">
+                <a:solidFill>
+                  <a:srgbClr val="000000"/>
+                </a:solidFill>
+                <a:latin typeface="Arial"/>
+              </a:rPr>
+              <a:t>Backup: Plaid — model, motivation, differentiation and impact</a:t>
+            </a:r>
+          </a:p>
+        </p:txBody>
+      </p:sp>
+      <p:sp>
+        <p:nvSpPr>
+          <p:cNvPr id="5" name="TextBox 4"/>
+          <p:cNvSpPr txBox="1"/>
+          <p:nvPr/>
+        </p:nvSpPr>
+        <p:spPr>
+          <a:xfrm>
+            <a:off x="502920" y="1755648"/>
+            <a:ext cx="2624328" cy="256032"/>
+          </a:xfrm>
+          <a:prstGeom prst="rect">
+            <a:avLst/>
+          </a:prstGeom>
+          <a:noFill/>
+        </p:spPr>
+        <p:txBody>
+          <a:bodyPr wrap="square" anchor="t" lIns="0" rIns="0" tIns="0" bIns="0">
+            <a:spAutoFit/>
+          </a:bodyPr>
+          <a:lstStyle/>
+          <a:p>
+            <a:pPr algn="l">
+              <a:lnSpc>
+                <a:spcPct val="100000"/>
+              </a:lnSpc>
+              <a:spcAft>
+                <a:spcPts val="0"/>
+              </a:spcAft>
+            </a:pPr>
+            <a:r>
+              <a:rPr sz="1050" b="1">
+                <a:solidFill>
+                  <a:srgbClr val="000000"/>
+                </a:solidFill>
+                <a:latin typeface="Arial"/>
+              </a:rPr>
+              <a:t>What the model looks like</a:t>
+            </a:r>
+          </a:p>
+        </p:txBody>
+      </p:sp>
+      <p:cxnSp>
+        <p:nvCxnSpPr>
+          <p:cNvPr id="6" name="Connector 5"/>
+          <p:cNvCxnSpPr/>
+          <p:nvPr/>
+        </p:nvCxnSpPr>
+        <p:spPr>
+          <a:xfrm>
+            <a:off x="502920" y="2048256"/>
+            <a:ext cx="2624328" cy="0"/>
+          </a:xfrm>
+          <a:prstGeom prst="line">
+            <a:avLst/>
+          </a:prstGeom>
+          <a:ln w="12700">
+            <a:solidFill>
+              <a:srgbClr val="000000"/>
+            </a:solidFill>
+          </a:ln>
+          <a:effectLst/>
+        </p:spPr>
+      </p:cxnSp>
+      <p:sp>
+        <p:nvSpPr>
+          <p:cNvPr id="7" name="TextBox 6"/>
+          <p:cNvSpPr txBox="1"/>
+          <p:nvPr/>
+        </p:nvSpPr>
+        <p:spPr>
+          <a:xfrm>
+            <a:off x="502920" y="2231136"/>
+            <a:ext cx="2624328" cy="4023360"/>
+          </a:xfrm>
+          <a:prstGeom prst="rect">
+            <a:avLst/>
+          </a:prstGeom>
+          <a:noFill/>
+        </p:spPr>
+        <p:txBody>
+          <a:bodyPr wrap="square" anchor="t" lIns="0" rIns="0" tIns="0" bIns="0">
+            <a:spAutoFit/>
+          </a:bodyPr>
+          <a:lstStyle/>
+          <a:p>
+            <a:pPr algn="l">
+              <a:lnSpc>
+                <a:spcPct val="120000"/>
+              </a:lnSpc>
+              <a:spcAft>
+                <a:spcPts val="1600"/>
+              </a:spcAft>
+            </a:pPr>
+            <a:r>
+              <a:rPr sz="1050" b="0">
+                <a:solidFill>
+                  <a:srgbClr val="000000"/>
+                </a:solidFill>
+                <a:latin typeface="Arial"/>
+              </a:rPr>
+              <a:t>•  </a:t>
+            </a:r>
+            <a:r>
+              <a:rPr sz="1050" b="0">
+                <a:solidFill>
+                  <a:srgbClr val="000000"/>
+                </a:solidFill>
+                <a:latin typeface="Arial"/>
+              </a:rPr>
+              <a:t>FDEs work alongside customer engineers during onboarding and expansion</a:t>
+            </a:r>
+          </a:p>
+          <a:p>
+            <a:pPr algn="l">
+              <a:lnSpc>
+                <a:spcPct val="120000"/>
+              </a:lnSpc>
+              <a:spcAft>
+                <a:spcPts val="1600"/>
+              </a:spcAft>
+            </a:pPr>
+            <a:r>
+              <a:rPr sz="1050" b="0">
+                <a:solidFill>
+                  <a:srgbClr val="000000"/>
+                </a:solidFill>
+                <a:latin typeface="Arial"/>
+              </a:rPr>
+              <a:t>•  </a:t>
+            </a:r>
+            <a:r>
+              <a:rPr sz="1050" b="0">
+                <a:solidFill>
+                  <a:srgbClr val="000000"/>
+                </a:solidFill>
+                <a:latin typeface="Arial"/>
+              </a:rPr>
+              <a:t>Hands-on integration work against customer systems</a:t>
+            </a:r>
+          </a:p>
+        </p:txBody>
+      </p:sp>
+      <p:sp>
+        <p:nvSpPr>
+          <p:cNvPr id="8" name="TextBox 7"/>
+          <p:cNvSpPr txBox="1"/>
+          <p:nvPr/>
+        </p:nvSpPr>
+        <p:spPr>
+          <a:xfrm>
+            <a:off x="3355848" y="1755648"/>
+            <a:ext cx="2624328" cy="256032"/>
+          </a:xfrm>
+          <a:prstGeom prst="rect">
+            <a:avLst/>
+          </a:prstGeom>
+          <a:noFill/>
+        </p:spPr>
+        <p:txBody>
+          <a:bodyPr wrap="square" anchor="t" lIns="0" rIns="0" tIns="0" bIns="0">
+            <a:spAutoFit/>
+          </a:bodyPr>
+          <a:lstStyle/>
+          <a:p>
+            <a:pPr algn="l">
+              <a:lnSpc>
+                <a:spcPct val="100000"/>
+              </a:lnSpc>
+              <a:spcAft>
+                <a:spcPts val="0"/>
+              </a:spcAft>
+            </a:pPr>
+            <a:r>
+              <a:rPr sz="1050" b="1">
+                <a:solidFill>
+                  <a:srgbClr val="000000"/>
+                </a:solidFill>
+                <a:latin typeface="Arial"/>
+              </a:rPr>
+              <a:t>Why they moved to it</a:t>
+            </a:r>
+          </a:p>
+        </p:txBody>
+      </p:sp>
+      <p:cxnSp>
+        <p:nvCxnSpPr>
+          <p:cNvPr id="9" name="Connector 8"/>
+          <p:cNvCxnSpPr/>
+          <p:nvPr/>
+        </p:nvCxnSpPr>
+        <p:spPr>
+          <a:xfrm>
+            <a:off x="3355848" y="2048256"/>
+            <a:ext cx="2624328" cy="0"/>
+          </a:xfrm>
+          <a:prstGeom prst="line">
+            <a:avLst/>
+          </a:prstGeom>
+          <a:ln w="12700">
+            <a:solidFill>
+              <a:srgbClr val="000000"/>
+            </a:solidFill>
+          </a:ln>
+          <a:effectLst/>
+        </p:spPr>
+      </p:cxnSp>
+      <p:sp>
+        <p:nvSpPr>
+          <p:cNvPr id="10" name="TextBox 9"/>
+          <p:cNvSpPr txBox="1"/>
+          <p:nvPr/>
+        </p:nvSpPr>
+        <p:spPr>
+          <a:xfrm>
+            <a:off x="3355848" y="2231136"/>
+            <a:ext cx="2624328" cy="4023360"/>
+          </a:xfrm>
+          <a:prstGeom prst="rect">
+            <a:avLst/>
+          </a:prstGeom>
+          <a:noFill/>
+        </p:spPr>
+        <p:txBody>
+          <a:bodyPr wrap="square" anchor="t" lIns="0" rIns="0" tIns="0" bIns="0">
+            <a:spAutoFit/>
+          </a:bodyPr>
+          <a:lstStyle/>
+          <a:p>
+            <a:pPr algn="l">
+              <a:lnSpc>
+                <a:spcPct val="120000"/>
+              </a:lnSpc>
+              <a:spcAft>
+                <a:spcPts val="1600"/>
+              </a:spcAft>
+            </a:pPr>
+            <a:r>
+              <a:rPr sz="1050" b="0">
+                <a:solidFill>
+                  <a:srgbClr val="000000"/>
+                </a:solidFill>
+                <a:latin typeface="Arial"/>
+              </a:rPr>
+              <a:t>•  </a:t>
+            </a:r>
+            <a:r>
+              <a:rPr sz="1050" b="0">
+                <a:solidFill>
+                  <a:srgbClr val="000000"/>
+                </a:solidFill>
+                <a:latin typeface="Arial"/>
+              </a:rPr>
+              <a:t>Integration timelines gated revenue for Plaid and its customers</a:t>
+            </a:r>
+          </a:p>
+          <a:p>
+            <a:pPr algn="l">
+              <a:lnSpc>
+                <a:spcPct val="120000"/>
+              </a:lnSpc>
+              <a:spcAft>
+                <a:spcPts val="1600"/>
+              </a:spcAft>
+            </a:pPr>
+            <a:r>
+              <a:rPr sz="1050" b="0">
+                <a:solidFill>
+                  <a:srgbClr val="000000"/>
+                </a:solidFill>
+                <a:latin typeface="Arial"/>
+              </a:rPr>
+              <a:t>•  </a:t>
+            </a:r>
+            <a:r>
+              <a:rPr sz="1050" b="0">
+                <a:solidFill>
+                  <a:srgbClr val="000000"/>
+                </a:solidFill>
+                <a:latin typeface="Arial"/>
+              </a:rPr>
+              <a:t>Bank and fintech data complexity exceeded documentation-led support</a:t>
+            </a:r>
+          </a:p>
+        </p:txBody>
+      </p:sp>
+      <p:sp>
+        <p:nvSpPr>
+          <p:cNvPr id="11" name="TextBox 10"/>
+          <p:cNvSpPr txBox="1"/>
+          <p:nvPr/>
+        </p:nvSpPr>
+        <p:spPr>
+          <a:xfrm>
+            <a:off x="6208776" y="1755648"/>
+            <a:ext cx="2624328" cy="256032"/>
+          </a:xfrm>
+          <a:prstGeom prst="rect">
+            <a:avLst/>
+          </a:prstGeom>
+          <a:noFill/>
+        </p:spPr>
+        <p:txBody>
+          <a:bodyPr wrap="square" anchor="t" lIns="0" rIns="0" tIns="0" bIns="0">
+            <a:spAutoFit/>
+          </a:bodyPr>
+          <a:lstStyle/>
+          <a:p>
+            <a:pPr algn="l">
+              <a:lnSpc>
+                <a:spcPct val="100000"/>
+              </a:lnSpc>
+              <a:spcAft>
+                <a:spcPts val="0"/>
+              </a:spcAft>
+            </a:pPr>
+            <a:r>
+              <a:rPr sz="1050" b="1">
+                <a:solidFill>
+                  <a:srgbClr val="000000"/>
+                </a:solidFill>
+                <a:latin typeface="Arial"/>
+              </a:rPr>
+              <a:t>What sets it apart</a:t>
+            </a:r>
+          </a:p>
+        </p:txBody>
+      </p:sp>
+      <p:cxnSp>
+        <p:nvCxnSpPr>
+          <p:cNvPr id="12" name="Connector 11"/>
+          <p:cNvCxnSpPr/>
+          <p:nvPr/>
+        </p:nvCxnSpPr>
+        <p:spPr>
+          <a:xfrm>
+            <a:off x="6208776" y="2048256"/>
+            <a:ext cx="2624328" cy="0"/>
+          </a:xfrm>
+          <a:prstGeom prst="line">
+            <a:avLst/>
+          </a:prstGeom>
+          <a:ln w="12700">
+            <a:solidFill>
+              <a:srgbClr val="000000"/>
+            </a:solidFill>
+          </a:ln>
+          <a:effectLst/>
+        </p:spPr>
+      </p:cxnSp>
+      <p:sp>
+        <p:nvSpPr>
+          <p:cNvPr id="13" name="TextBox 12"/>
+          <p:cNvSpPr txBox="1"/>
+          <p:nvPr/>
+        </p:nvSpPr>
+        <p:spPr>
+          <a:xfrm>
+            <a:off x="6208776" y="2231136"/>
+            <a:ext cx="2624328" cy="4023360"/>
+          </a:xfrm>
+          <a:prstGeom prst="rect">
+            <a:avLst/>
+          </a:prstGeom>
+          <a:noFill/>
+        </p:spPr>
+        <p:txBody>
+          <a:bodyPr wrap="square" anchor="t" lIns="0" rIns="0" tIns="0" bIns="0">
+            <a:spAutoFit/>
+          </a:bodyPr>
+          <a:lstStyle/>
+          <a:p>
+            <a:pPr algn="l">
+              <a:lnSpc>
+                <a:spcPct val="120000"/>
+              </a:lnSpc>
+              <a:spcAft>
+                <a:spcPts val="1600"/>
+              </a:spcAft>
+            </a:pPr>
+            <a:r>
+              <a:rPr sz="1050" b="0">
+                <a:solidFill>
+                  <a:srgbClr val="000000"/>
+                </a:solidFill>
+                <a:latin typeface="Arial"/>
+              </a:rPr>
+              <a:t>•  </a:t>
+            </a:r>
+            <a:r>
+              <a:rPr sz="1050" b="0">
+                <a:solidFill>
+                  <a:srgbClr val="000000"/>
+                </a:solidFill>
+                <a:latin typeface="Arial"/>
+              </a:rPr>
+              <a:t>Deep bank and fintech data expertise applied in customer codebases</a:t>
+            </a:r>
+          </a:p>
+          <a:p>
+            <a:pPr algn="l">
+              <a:lnSpc>
+                <a:spcPct val="120000"/>
+              </a:lnSpc>
+              <a:spcAft>
+                <a:spcPts val="1600"/>
+              </a:spcAft>
+            </a:pPr>
+            <a:r>
+              <a:rPr sz="1050" b="0">
+                <a:solidFill>
+                  <a:srgbClr val="000000"/>
+                </a:solidFill>
+                <a:latin typeface="Arial"/>
+              </a:rPr>
+              <a:t>•  </a:t>
+            </a:r>
+            <a:r>
+              <a:rPr sz="1050" b="0">
+                <a:solidFill>
+                  <a:srgbClr val="000000"/>
+                </a:solidFill>
+                <a:latin typeface="Arial"/>
+              </a:rPr>
+              <a:t>Embedded position surfaces product gaps early</a:t>
+            </a:r>
+          </a:p>
+        </p:txBody>
+      </p:sp>
+      <p:sp>
+        <p:nvSpPr>
+          <p:cNvPr id="14" name="TextBox 13"/>
+          <p:cNvSpPr txBox="1"/>
+          <p:nvPr/>
+        </p:nvSpPr>
+        <p:spPr>
+          <a:xfrm>
+            <a:off x="9061704" y="1755648"/>
+            <a:ext cx="2624328" cy="256032"/>
+          </a:xfrm>
+          <a:prstGeom prst="rect">
+            <a:avLst/>
+          </a:prstGeom>
+          <a:noFill/>
+        </p:spPr>
+        <p:txBody>
+          <a:bodyPr wrap="square" anchor="t" lIns="0" rIns="0" tIns="0" bIns="0">
+            <a:spAutoFit/>
+          </a:bodyPr>
+          <a:lstStyle/>
+          <a:p>
+            <a:pPr algn="l">
+              <a:lnSpc>
+                <a:spcPct val="100000"/>
+              </a:lnSpc>
+              <a:spcAft>
+                <a:spcPts val="0"/>
+              </a:spcAft>
+            </a:pPr>
+            <a:r>
+              <a:rPr sz="1050" b="1">
+                <a:solidFill>
+                  <a:srgbClr val="000000"/>
+                </a:solidFill>
+                <a:latin typeface="Arial"/>
+              </a:rPr>
+              <a:t>Impact to date</a:t>
+            </a:r>
+          </a:p>
+        </p:txBody>
+      </p:sp>
+      <p:cxnSp>
+        <p:nvCxnSpPr>
+          <p:cNvPr id="15" name="Connector 14"/>
+          <p:cNvCxnSpPr/>
+          <p:nvPr/>
+        </p:nvCxnSpPr>
+        <p:spPr>
+          <a:xfrm>
+            <a:off x="9061704" y="2048256"/>
+            <a:ext cx="2624328" cy="0"/>
+          </a:xfrm>
+          <a:prstGeom prst="line">
+            <a:avLst/>
+          </a:prstGeom>
+          <a:ln w="12700">
+            <a:solidFill>
+              <a:srgbClr val="000000"/>
+            </a:solidFill>
+          </a:ln>
+          <a:effectLst/>
+        </p:spPr>
+      </p:cxnSp>
+      <p:sp>
+        <p:nvSpPr>
+          <p:cNvPr id="16" name="TextBox 15"/>
+          <p:cNvSpPr txBox="1"/>
+          <p:nvPr/>
+        </p:nvSpPr>
+        <p:spPr>
+          <a:xfrm>
+            <a:off x="9061704" y="2231136"/>
+            <a:ext cx="2624328" cy="4023360"/>
+          </a:xfrm>
+          <a:prstGeom prst="rect">
+            <a:avLst/>
+          </a:prstGeom>
+          <a:noFill/>
+        </p:spPr>
+        <p:txBody>
+          <a:bodyPr wrap="square" anchor="t" lIns="0" rIns="0" tIns="0" bIns="0">
+            <a:spAutoFit/>
+          </a:bodyPr>
+          <a:lstStyle/>
+          <a:p>
+            <a:pPr algn="l">
+              <a:lnSpc>
+                <a:spcPct val="120000"/>
+              </a:lnSpc>
+              <a:spcAft>
+                <a:spcPts val="1600"/>
+              </a:spcAft>
+            </a:pPr>
+            <a:r>
+              <a:rPr sz="1050" b="0">
+                <a:solidFill>
+                  <a:srgbClr val="000000"/>
+                </a:solidFill>
+                <a:latin typeface="Arial"/>
+              </a:rPr>
+              <a:t>•  </a:t>
+            </a:r>
+            <a:r>
+              <a:rPr sz="1050" b="0">
+                <a:solidFill>
+                  <a:srgbClr val="000000"/>
+                </a:solidFill>
+                <a:latin typeface="Arial"/>
+              </a:rPr>
+              <a:t>Publicly cites materially faster enterprise integrations</a:t>
+            </a:r>
+          </a:p>
+          <a:p>
+            <a:pPr algn="l">
+              <a:lnSpc>
+                <a:spcPct val="120000"/>
+              </a:lnSpc>
+              <a:spcAft>
+                <a:spcPts val="1600"/>
+              </a:spcAft>
+            </a:pPr>
+            <a:r>
+              <a:rPr sz="1050" b="0">
+                <a:solidFill>
+                  <a:srgbClr val="000000"/>
+                </a:solidFill>
+                <a:latin typeface="Arial"/>
+              </a:rPr>
+              <a:t>•  </a:t>
+            </a:r>
+            <a:r>
+              <a:rPr sz="1050" b="0">
+                <a:solidFill>
+                  <a:srgbClr val="000000"/>
+                </a:solidFill>
+                <a:latin typeface="Arial"/>
+              </a:rPr>
+              <a:t>Deeper, harder-to-displace customer relationships</a:t>
+            </a:r>
+          </a:p>
+        </p:txBody>
+      </p:sp>
+      <p:cxnSp>
+        <p:nvCxnSpPr>
+          <p:cNvPr id="17" name="Connector 16"/>
+          <p:cNvCxnSpPr/>
+          <p:nvPr/>
+        </p:nvCxnSpPr>
+        <p:spPr>
+          <a:xfrm>
+            <a:off x="502920" y="6510528"/>
+            <a:ext cx="11185855" cy="0"/>
+          </a:xfrm>
+          <a:prstGeom prst="line">
+            <a:avLst/>
+          </a:prstGeom>
+          <a:ln w="6350">
+            <a:solidFill>
+              <a:srgbClr val="BFBFBF"/>
+            </a:solidFill>
+          </a:ln>
+          <a:effectLst/>
+        </p:spPr>
+      </p:cxnSp>
+      <p:sp>
+        <p:nvSpPr>
+          <p:cNvPr id="18" name="TextBox 17"/>
+          <p:cNvSpPr txBox="1"/>
+          <p:nvPr/>
+        </p:nvSpPr>
+        <p:spPr>
+          <a:xfrm>
+            <a:off x="502920" y="6583680"/>
+            <a:ext cx="9601200" cy="228600"/>
+          </a:xfrm>
+          <a:prstGeom prst="rect">
+            <a:avLst/>
+          </a:prstGeom>
+          <a:noFill/>
+        </p:spPr>
+        <p:txBody>
+          <a:bodyPr wrap="square" anchor="t" lIns="0" rIns="0" tIns="0" bIns="0">
+            <a:spAutoFit/>
+          </a:bodyPr>
+          <a:lstStyle/>
+          <a:p>
+            <a:pPr algn="l">
+              <a:lnSpc>
+                <a:spcPct val="100000"/>
+              </a:lnSpc>
+              <a:spcAft>
+                <a:spcPts val="0"/>
+              </a:spcAft>
+            </a:pPr>
+            <a:r>
+              <a:rPr sz="750" b="0">
+                <a:solidFill>
+                  <a:srgbClr val="8C8C8C"/>
+                </a:solidFill>
+                <a:latin typeface="Arial"/>
+              </a:rPr>
+              <a:t>Source: Plaid public statements, job postings and press coverage</a:t>
+            </a:r>
+          </a:p>
+        </p:txBody>
+      </p:sp>
+      <p:sp>
+        <p:nvSpPr>
+          <p:cNvPr id="19" name="TextBox 18"/>
+          <p:cNvSpPr txBox="1"/>
+          <p:nvPr/>
+        </p:nvSpPr>
+        <p:spPr>
+          <a:xfrm>
+            <a:off x="11228832" y="6583680"/>
+            <a:ext cx="457200" cy="228600"/>
+          </a:xfrm>
+          <a:prstGeom prst="rect">
+            <a:avLst/>
+          </a:prstGeom>
+          <a:noFill/>
+        </p:spPr>
+        <p:txBody>
+          <a:bodyPr wrap="square" anchor="t" lIns="0" rIns="0" tIns="0" bIns="0">
+            <a:spAutoFit/>
+          </a:bodyPr>
+          <a:lstStyle/>
+          <a:p>
+            <a:pPr algn="r">
+              <a:lnSpc>
+                <a:spcPct val="100000"/>
+              </a:lnSpc>
+              <a:spcAft>
+                <a:spcPts val="0"/>
+              </a:spcAft>
+            </a:pPr>
+            <a:r>
+              <a:rPr sz="800" b="0">
+                <a:solidFill>
+                  <a:srgbClr val="8C8C8C"/>
+                </a:solidFill>
+                <a:latin typeface="Arial"/>
+              </a:rPr>
+              <a:t>12</a:t>
+            </a:r>
+          </a:p>
+        </p:txBody>
+      </p:sp>
+    </p:spTree>
+  </p:cSld>
+  <p:clrMapOvr>
+    <a:masterClrMapping/>
+  </p:clrMapOvr>
+</p:sld>
+</file>
+
 <file path=ppt/slides/slide2.xml><?xml version="1.0" encoding="utf-8"?>
 <p:sld xmlns:a="http://schemas.openxmlformats.org/drawingml/2006/main" xmlns:p="http://schemas.openxmlformats.org/presentationml/2006/main" xmlns:r="http://schemas.openxmlformats.org/officeDocument/2006/relationships">
   <p:cSld>
@@ -9781,6 +12251,3738 @@
                 <a:latin typeface="Arial"/>
               </a:rPr>
               <a:t>4</a:t>
+            </a:r>
+          </a:p>
+        </p:txBody>
+      </p:sp>
+    </p:spTree>
+  </p:cSld>
+  <p:clrMapOvr>
+    <a:masterClrMapping/>
+  </p:clrMapOvr>
+</p:sld>
+</file>
+
+<file path=ppt/slides/slide5.xml><?xml version="1.0" encoding="utf-8"?>
+<p:sld xmlns:a="http://schemas.openxmlformats.org/drawingml/2006/main" xmlns:p="http://schemas.openxmlformats.org/presentationml/2006/main" xmlns:r="http://schemas.openxmlformats.org/officeDocument/2006/relationships">
+  <p:cSld>
+    <p:spTree>
+      <p:nvGrpSpPr>
+        <p:cNvPr id="1" name=""/>
+        <p:cNvGrpSpPr/>
+        <p:nvPr/>
+      </p:nvGrpSpPr>
+      <p:grpSpPr/>
+      <p:sp>
+        <p:nvSpPr>
+          <p:cNvPr id="2" name="TextBox 1"/>
+          <p:cNvSpPr txBox="1"/>
+          <p:nvPr/>
+        </p:nvSpPr>
+        <p:spPr>
+          <a:xfrm>
+            <a:off x="502920" y="2880360"/>
+            <a:ext cx="11185855" cy="457200"/>
+          </a:xfrm>
+          <a:prstGeom prst="rect">
+            <a:avLst/>
+          </a:prstGeom>
+          <a:noFill/>
+        </p:spPr>
+        <p:txBody>
+          <a:bodyPr wrap="square" anchor="t" lIns="0" rIns="0" tIns="0" bIns="0">
+            <a:spAutoFit/>
+          </a:bodyPr>
+          <a:lstStyle/>
+          <a:p>
+            <a:pPr algn="l">
+              <a:lnSpc>
+                <a:spcPct val="100000"/>
+              </a:lnSpc>
+              <a:spcAft>
+                <a:spcPts val="0"/>
+              </a:spcAft>
+            </a:pPr>
+            <a:r>
+              <a:rPr sz="2400" b="1">
+                <a:solidFill>
+                  <a:srgbClr val="000000"/>
+                </a:solidFill>
+                <a:latin typeface="Arial"/>
+              </a:rPr>
+              <a:t>Backup</a:t>
+            </a:r>
+          </a:p>
+        </p:txBody>
+      </p:sp>
+      <p:cxnSp>
+        <p:nvCxnSpPr>
+          <p:cNvPr id="3" name="Connector 2"/>
+          <p:cNvCxnSpPr/>
+          <p:nvPr/>
+        </p:nvCxnSpPr>
+        <p:spPr>
+          <a:xfrm>
+            <a:off x="502920" y="3401568"/>
+            <a:ext cx="2011680" cy="0"/>
+          </a:xfrm>
+          <a:prstGeom prst="line">
+            <a:avLst/>
+          </a:prstGeom>
+          <a:ln w="19050">
+            <a:solidFill>
+              <a:srgbClr val="000000"/>
+            </a:solidFill>
+          </a:ln>
+          <a:effectLst/>
+        </p:spPr>
+      </p:cxnSp>
+      <p:sp>
+        <p:nvSpPr>
+          <p:cNvPr id="4" name="TextBox 3"/>
+          <p:cNvSpPr txBox="1"/>
+          <p:nvPr/>
+        </p:nvSpPr>
+        <p:spPr>
+          <a:xfrm>
+            <a:off x="502920" y="3547872"/>
+            <a:ext cx="11185855" cy="320040"/>
+          </a:xfrm>
+          <a:prstGeom prst="rect">
+            <a:avLst/>
+          </a:prstGeom>
+          <a:noFill/>
+        </p:spPr>
+        <p:txBody>
+          <a:bodyPr wrap="square" anchor="t" lIns="0" rIns="0" tIns="0" bIns="0">
+            <a:spAutoFit/>
+          </a:bodyPr>
+          <a:lstStyle/>
+          <a:p>
+            <a:pPr algn="l">
+              <a:lnSpc>
+                <a:spcPct val="100000"/>
+              </a:lnSpc>
+              <a:spcAft>
+                <a:spcPts val="0"/>
+              </a:spcAft>
+            </a:pPr>
+            <a:r>
+              <a:rPr sz="1200" b="0">
+                <a:solidFill>
+                  <a:srgbClr val="595959"/>
+                </a:solidFill>
+                <a:latin typeface="Arial"/>
+              </a:rPr>
+              <a:t>One-pager per exemplar: model, motivation, differentiation and impact</a:t>
+            </a:r>
+          </a:p>
+        </p:txBody>
+      </p:sp>
+      <p:cxnSp>
+        <p:nvCxnSpPr>
+          <p:cNvPr id="5" name="Connector 4"/>
+          <p:cNvCxnSpPr/>
+          <p:nvPr/>
+        </p:nvCxnSpPr>
+        <p:spPr>
+          <a:xfrm>
+            <a:off x="502920" y="6510528"/>
+            <a:ext cx="11185855" cy="0"/>
+          </a:xfrm>
+          <a:prstGeom prst="line">
+            <a:avLst/>
+          </a:prstGeom>
+          <a:ln w="6350">
+            <a:solidFill>
+              <a:srgbClr val="BFBFBF"/>
+            </a:solidFill>
+          </a:ln>
+          <a:effectLst/>
+        </p:spPr>
+      </p:cxnSp>
+      <p:sp>
+        <p:nvSpPr>
+          <p:cNvPr id="6" name="TextBox 5"/>
+          <p:cNvSpPr txBox="1"/>
+          <p:nvPr/>
+        </p:nvSpPr>
+        <p:spPr>
+          <a:xfrm>
+            <a:off x="11228832" y="6583680"/>
+            <a:ext cx="457200" cy="228600"/>
+          </a:xfrm>
+          <a:prstGeom prst="rect">
+            <a:avLst/>
+          </a:prstGeom>
+          <a:noFill/>
+        </p:spPr>
+        <p:txBody>
+          <a:bodyPr wrap="square" anchor="t" lIns="0" rIns="0" tIns="0" bIns="0">
+            <a:spAutoFit/>
+          </a:bodyPr>
+          <a:lstStyle/>
+          <a:p>
+            <a:pPr algn="r">
+              <a:lnSpc>
+                <a:spcPct val="100000"/>
+              </a:lnSpc>
+              <a:spcAft>
+                <a:spcPts val="0"/>
+              </a:spcAft>
+            </a:pPr>
+            <a:r>
+              <a:rPr sz="800" b="0">
+                <a:solidFill>
+                  <a:srgbClr val="8C8C8C"/>
+                </a:solidFill>
+                <a:latin typeface="Arial"/>
+              </a:rPr>
+              <a:t>5</a:t>
+            </a:r>
+          </a:p>
+        </p:txBody>
+      </p:sp>
+    </p:spTree>
+  </p:cSld>
+  <p:clrMapOvr>
+    <a:masterClrMapping/>
+  </p:clrMapOvr>
+</p:sld>
+</file>
+
+<file path=ppt/slides/slide6.xml><?xml version="1.0" encoding="utf-8"?>
+<p:sld xmlns:a="http://schemas.openxmlformats.org/drawingml/2006/main" xmlns:p="http://schemas.openxmlformats.org/presentationml/2006/main" xmlns:r="http://schemas.openxmlformats.org/officeDocument/2006/relationships">
+  <p:cSld>
+    <p:spTree>
+      <p:nvGrpSpPr>
+        <p:cNvPr id="1" name=""/>
+        <p:cNvGrpSpPr/>
+        <p:nvPr/>
+      </p:nvGrpSpPr>
+      <p:grpSpPr/>
+      <p:sp>
+        <p:nvSpPr>
+          <p:cNvPr id="2" name="TextBox 1"/>
+          <p:cNvSpPr txBox="1"/>
+          <p:nvPr/>
+        </p:nvSpPr>
+        <p:spPr>
+          <a:xfrm>
+            <a:off x="502920" y="292608"/>
+            <a:ext cx="11185855" cy="685800"/>
+          </a:xfrm>
+          <a:prstGeom prst="rect">
+            <a:avLst/>
+          </a:prstGeom>
+          <a:noFill/>
+        </p:spPr>
+        <p:txBody>
+          <a:bodyPr wrap="square" anchor="t" lIns="0" rIns="0" tIns="0" bIns="0">
+            <a:spAutoFit/>
+          </a:bodyPr>
+          <a:lstStyle/>
+          <a:p>
+            <a:pPr algn="l">
+              <a:lnSpc>
+                <a:spcPct val="105000"/>
+              </a:lnSpc>
+              <a:spcAft>
+                <a:spcPts val="0"/>
+              </a:spcAft>
+            </a:pPr>
+            <a:r>
+              <a:rPr sz="1800" b="1">
+                <a:solidFill>
+                  <a:srgbClr val="000000"/>
+                </a:solidFill>
+                <a:latin typeface="Arial"/>
+              </a:rPr>
+              <a:t>Palantir created the forward-deployed model and built its commercial engine around it</a:t>
+            </a:r>
+          </a:p>
+        </p:txBody>
+      </p:sp>
+      <p:cxnSp>
+        <p:nvCxnSpPr>
+          <p:cNvPr id="3" name="Connector 2"/>
+          <p:cNvCxnSpPr/>
+          <p:nvPr/>
+        </p:nvCxnSpPr>
+        <p:spPr>
+          <a:xfrm>
+            <a:off x="502920" y="896112"/>
+            <a:ext cx="11185855" cy="0"/>
+          </a:xfrm>
+          <a:prstGeom prst="line">
+            <a:avLst/>
+          </a:prstGeom>
+          <a:ln w="19050">
+            <a:solidFill>
+              <a:srgbClr val="000000"/>
+            </a:solidFill>
+          </a:ln>
+          <a:effectLst/>
+        </p:spPr>
+      </p:cxnSp>
+      <p:sp>
+        <p:nvSpPr>
+          <p:cNvPr id="4" name="TextBox 3"/>
+          <p:cNvSpPr txBox="1"/>
+          <p:nvPr/>
+        </p:nvSpPr>
+        <p:spPr>
+          <a:xfrm>
+            <a:off x="502920" y="1005840"/>
+            <a:ext cx="11185855" cy="320040"/>
+          </a:xfrm>
+          <a:prstGeom prst="rect">
+            <a:avLst/>
+          </a:prstGeom>
+          <a:noFill/>
+        </p:spPr>
+        <p:txBody>
+          <a:bodyPr wrap="square" anchor="t" lIns="0" rIns="0" tIns="0" bIns="0">
+            <a:spAutoFit/>
+          </a:bodyPr>
+          <a:lstStyle/>
+          <a:p>
+            <a:pPr algn="l">
+              <a:lnSpc>
+                <a:spcPct val="105000"/>
+              </a:lnSpc>
+              <a:spcAft>
+                <a:spcPts val="0"/>
+              </a:spcAft>
+            </a:pPr>
+            <a:r>
+              <a:rPr sz="1600" b="1">
+                <a:solidFill>
+                  <a:srgbClr val="000000"/>
+                </a:solidFill>
+                <a:latin typeface="Arial"/>
+              </a:rPr>
+              <a:t>Backup: Palantir — model, motivation, differentiation and impact</a:t>
+            </a:r>
+          </a:p>
+        </p:txBody>
+      </p:sp>
+      <p:sp>
+        <p:nvSpPr>
+          <p:cNvPr id="5" name="TextBox 4"/>
+          <p:cNvSpPr txBox="1"/>
+          <p:nvPr/>
+        </p:nvSpPr>
+        <p:spPr>
+          <a:xfrm>
+            <a:off x="502920" y="1755648"/>
+            <a:ext cx="2624328" cy="256032"/>
+          </a:xfrm>
+          <a:prstGeom prst="rect">
+            <a:avLst/>
+          </a:prstGeom>
+          <a:noFill/>
+        </p:spPr>
+        <p:txBody>
+          <a:bodyPr wrap="square" anchor="t" lIns="0" rIns="0" tIns="0" bIns="0">
+            <a:spAutoFit/>
+          </a:bodyPr>
+          <a:lstStyle/>
+          <a:p>
+            <a:pPr algn="l">
+              <a:lnSpc>
+                <a:spcPct val="100000"/>
+              </a:lnSpc>
+              <a:spcAft>
+                <a:spcPts val="0"/>
+              </a:spcAft>
+            </a:pPr>
+            <a:r>
+              <a:rPr sz="1050" b="1">
+                <a:solidFill>
+                  <a:srgbClr val="000000"/>
+                </a:solidFill>
+                <a:latin typeface="Arial"/>
+              </a:rPr>
+              <a:t>What the model looks like</a:t>
+            </a:r>
+          </a:p>
+        </p:txBody>
+      </p:sp>
+      <p:cxnSp>
+        <p:nvCxnSpPr>
+          <p:cNvPr id="6" name="Connector 5"/>
+          <p:cNvCxnSpPr/>
+          <p:nvPr/>
+        </p:nvCxnSpPr>
+        <p:spPr>
+          <a:xfrm>
+            <a:off x="502920" y="2048256"/>
+            <a:ext cx="2624328" cy="0"/>
+          </a:xfrm>
+          <a:prstGeom prst="line">
+            <a:avLst/>
+          </a:prstGeom>
+          <a:ln w="12700">
+            <a:solidFill>
+              <a:srgbClr val="000000"/>
+            </a:solidFill>
+          </a:ln>
+          <a:effectLst/>
+        </p:spPr>
+      </p:cxnSp>
+      <p:sp>
+        <p:nvSpPr>
+          <p:cNvPr id="7" name="TextBox 6"/>
+          <p:cNvSpPr txBox="1"/>
+          <p:nvPr/>
+        </p:nvSpPr>
+        <p:spPr>
+          <a:xfrm>
+            <a:off x="502920" y="2231136"/>
+            <a:ext cx="2624328" cy="4023360"/>
+          </a:xfrm>
+          <a:prstGeom prst="rect">
+            <a:avLst/>
+          </a:prstGeom>
+          <a:noFill/>
+        </p:spPr>
+        <p:txBody>
+          <a:bodyPr wrap="square" anchor="t" lIns="0" rIns="0" tIns="0" bIns="0">
+            <a:spAutoFit/>
+          </a:bodyPr>
+          <a:lstStyle/>
+          <a:p>
+            <a:pPr algn="l">
+              <a:lnSpc>
+                <a:spcPct val="120000"/>
+              </a:lnSpc>
+              <a:spcAft>
+                <a:spcPts val="1600"/>
+              </a:spcAft>
+            </a:pPr>
+            <a:r>
+              <a:rPr sz="1050" b="0">
+                <a:solidFill>
+                  <a:srgbClr val="000000"/>
+                </a:solidFill>
+                <a:latin typeface="Arial"/>
+              </a:rPr>
+              <a:t>•  </a:t>
+            </a:r>
+            <a:r>
+              <a:rPr sz="1050" b="0">
+                <a:solidFill>
+                  <a:srgbClr val="000000"/>
+                </a:solidFill>
+                <a:latin typeface="Arial"/>
+              </a:rPr>
+              <a:t>FDEs deploy on-site within customer operations</a:t>
+            </a:r>
+          </a:p>
+          <a:p>
+            <a:pPr algn="l">
+              <a:lnSpc>
+                <a:spcPct val="120000"/>
+              </a:lnSpc>
+              <a:spcAft>
+                <a:spcPts val="1600"/>
+              </a:spcAft>
+            </a:pPr>
+            <a:r>
+              <a:rPr sz="1050" b="0">
+                <a:solidFill>
+                  <a:srgbClr val="000000"/>
+                </a:solidFill>
+                <a:latin typeface="Arial"/>
+              </a:rPr>
+              <a:t>•  </a:t>
+            </a:r>
+            <a:r>
+              <a:rPr sz="1050" b="0">
+                <a:solidFill>
+                  <a:srgbClr val="000000"/>
+                </a:solidFill>
+                <a:latin typeface="Arial"/>
+              </a:rPr>
+              <a:t>Two roles: domain-facing specialists and product-focused engineers</a:t>
+            </a:r>
+          </a:p>
+          <a:p>
+            <a:pPr algn="l">
+              <a:lnSpc>
+                <a:spcPct val="120000"/>
+              </a:lnSpc>
+              <a:spcAft>
+                <a:spcPts val="1600"/>
+              </a:spcAft>
+            </a:pPr>
+            <a:r>
+              <a:rPr sz="1050" b="0">
+                <a:solidFill>
+                  <a:srgbClr val="000000"/>
+                </a:solidFill>
+                <a:latin typeface="Arial"/>
+              </a:rPr>
+              <a:t>•  </a:t>
+            </a:r>
+            <a:r>
+              <a:rPr sz="1050" b="0">
+                <a:solidFill>
+                  <a:srgbClr val="000000"/>
+                </a:solidFill>
+                <a:latin typeface="Arial"/>
+              </a:rPr>
+              <a:t>Build directly on Foundry and AIP against live customer data</a:t>
+            </a:r>
+          </a:p>
+          <a:p>
+            <a:pPr algn="l">
+              <a:lnSpc>
+                <a:spcPct val="120000"/>
+              </a:lnSpc>
+              <a:spcAft>
+                <a:spcPts val="1600"/>
+              </a:spcAft>
+            </a:pPr>
+            <a:r>
+              <a:rPr sz="1050" b="0">
+                <a:solidFill>
+                  <a:srgbClr val="000000"/>
+                </a:solidFill>
+                <a:latin typeface="Arial"/>
+              </a:rPr>
+              <a:t>•  </a:t>
+            </a:r>
+            <a:r>
+              <a:rPr sz="1050" b="0">
+                <a:solidFill>
+                  <a:srgbClr val="000000"/>
+                </a:solidFill>
+                <a:latin typeface="Arial"/>
+              </a:rPr>
+              <a:t>Multi-week bootcamps deliver working software before contracts scale</a:t>
+            </a:r>
+          </a:p>
+        </p:txBody>
+      </p:sp>
+      <p:sp>
+        <p:nvSpPr>
+          <p:cNvPr id="8" name="TextBox 7"/>
+          <p:cNvSpPr txBox="1"/>
+          <p:nvPr/>
+        </p:nvSpPr>
+        <p:spPr>
+          <a:xfrm>
+            <a:off x="3355848" y="1755648"/>
+            <a:ext cx="2624328" cy="256032"/>
+          </a:xfrm>
+          <a:prstGeom prst="rect">
+            <a:avLst/>
+          </a:prstGeom>
+          <a:noFill/>
+        </p:spPr>
+        <p:txBody>
+          <a:bodyPr wrap="square" anchor="t" lIns="0" rIns="0" tIns="0" bIns="0">
+            <a:spAutoFit/>
+          </a:bodyPr>
+          <a:lstStyle/>
+          <a:p>
+            <a:pPr algn="l">
+              <a:lnSpc>
+                <a:spcPct val="100000"/>
+              </a:lnSpc>
+              <a:spcAft>
+                <a:spcPts val="0"/>
+              </a:spcAft>
+            </a:pPr>
+            <a:r>
+              <a:rPr sz="1050" b="1">
+                <a:solidFill>
+                  <a:srgbClr val="000000"/>
+                </a:solidFill>
+                <a:latin typeface="Arial"/>
+              </a:rPr>
+              <a:t>Why they moved to it</a:t>
+            </a:r>
+          </a:p>
+        </p:txBody>
+      </p:sp>
+      <p:cxnSp>
+        <p:nvCxnSpPr>
+          <p:cNvPr id="9" name="Connector 8"/>
+          <p:cNvCxnSpPr/>
+          <p:nvPr/>
+        </p:nvCxnSpPr>
+        <p:spPr>
+          <a:xfrm>
+            <a:off x="3355848" y="2048256"/>
+            <a:ext cx="2624328" cy="0"/>
+          </a:xfrm>
+          <a:prstGeom prst="line">
+            <a:avLst/>
+          </a:prstGeom>
+          <a:ln w="12700">
+            <a:solidFill>
+              <a:srgbClr val="000000"/>
+            </a:solidFill>
+          </a:ln>
+          <a:effectLst/>
+        </p:spPr>
+      </p:cxnSp>
+      <p:sp>
+        <p:nvSpPr>
+          <p:cNvPr id="10" name="TextBox 9"/>
+          <p:cNvSpPr txBox="1"/>
+          <p:nvPr/>
+        </p:nvSpPr>
+        <p:spPr>
+          <a:xfrm>
+            <a:off x="3355848" y="2231136"/>
+            <a:ext cx="2624328" cy="4023360"/>
+          </a:xfrm>
+          <a:prstGeom prst="rect">
+            <a:avLst/>
+          </a:prstGeom>
+          <a:noFill/>
+        </p:spPr>
+        <p:txBody>
+          <a:bodyPr wrap="square" anchor="t" lIns="0" rIns="0" tIns="0" bIns="0">
+            <a:spAutoFit/>
+          </a:bodyPr>
+          <a:lstStyle/>
+          <a:p>
+            <a:pPr algn="l">
+              <a:lnSpc>
+                <a:spcPct val="120000"/>
+              </a:lnSpc>
+              <a:spcAft>
+                <a:spcPts val="1600"/>
+              </a:spcAft>
+            </a:pPr>
+            <a:r>
+              <a:rPr sz="1050" b="0">
+                <a:solidFill>
+                  <a:srgbClr val="000000"/>
+                </a:solidFill>
+                <a:latin typeface="Arial"/>
+              </a:rPr>
+              <a:t>•  </a:t>
+            </a:r>
+            <a:r>
+              <a:rPr sz="1050" b="0">
+                <a:solidFill>
+                  <a:srgbClr val="000000"/>
+                </a:solidFill>
+                <a:latin typeface="Arial"/>
+              </a:rPr>
+              <a:t>Government and industrial clients could not specify requirements upfront</a:t>
+            </a:r>
+          </a:p>
+          <a:p>
+            <a:pPr algn="l">
+              <a:lnSpc>
+                <a:spcPct val="120000"/>
+              </a:lnSpc>
+              <a:spcAft>
+                <a:spcPts val="1600"/>
+              </a:spcAft>
+            </a:pPr>
+            <a:r>
+              <a:rPr sz="1050" b="0">
+                <a:solidFill>
+                  <a:srgbClr val="000000"/>
+                </a:solidFill>
+                <a:latin typeface="Arial"/>
+              </a:rPr>
+              <a:t>•  </a:t>
+            </a:r>
+            <a:r>
+              <a:rPr sz="1050" b="0">
+                <a:solidFill>
+                  <a:srgbClr val="000000"/>
+                </a:solidFill>
+                <a:latin typeface="Arial"/>
+              </a:rPr>
+              <a:t>Complex, sensitive data environments demanded on-site iteration</a:t>
+            </a:r>
+          </a:p>
+          <a:p>
+            <a:pPr algn="l">
+              <a:lnSpc>
+                <a:spcPct val="120000"/>
+              </a:lnSpc>
+              <a:spcAft>
+                <a:spcPts val="1600"/>
+              </a:spcAft>
+            </a:pPr>
+            <a:r>
+              <a:rPr sz="1050" b="0">
+                <a:solidFill>
+                  <a:srgbClr val="000000"/>
+                </a:solidFill>
+                <a:latin typeface="Arial"/>
+              </a:rPr>
+              <a:t>•  </a:t>
+            </a:r>
+            <a:r>
+              <a:rPr sz="1050" b="0">
+                <a:solidFill>
+                  <a:srgbClr val="000000"/>
+                </a:solidFill>
+                <a:latin typeface="Arial"/>
+              </a:rPr>
+              <a:t>Conventional software sales failed to demonstrate value in these settings</a:t>
+            </a:r>
+          </a:p>
+        </p:txBody>
+      </p:sp>
+      <p:sp>
+        <p:nvSpPr>
+          <p:cNvPr id="11" name="TextBox 10"/>
+          <p:cNvSpPr txBox="1"/>
+          <p:nvPr/>
+        </p:nvSpPr>
+        <p:spPr>
+          <a:xfrm>
+            <a:off x="6208776" y="1755648"/>
+            <a:ext cx="2624328" cy="256032"/>
+          </a:xfrm>
+          <a:prstGeom prst="rect">
+            <a:avLst/>
+          </a:prstGeom>
+          <a:noFill/>
+        </p:spPr>
+        <p:txBody>
+          <a:bodyPr wrap="square" anchor="t" lIns="0" rIns="0" tIns="0" bIns="0">
+            <a:spAutoFit/>
+          </a:bodyPr>
+          <a:lstStyle/>
+          <a:p>
+            <a:pPr algn="l">
+              <a:lnSpc>
+                <a:spcPct val="100000"/>
+              </a:lnSpc>
+              <a:spcAft>
+                <a:spcPts val="0"/>
+              </a:spcAft>
+            </a:pPr>
+            <a:r>
+              <a:rPr sz="1050" b="1">
+                <a:solidFill>
+                  <a:srgbClr val="000000"/>
+                </a:solidFill>
+                <a:latin typeface="Arial"/>
+              </a:rPr>
+              <a:t>What sets it apart</a:t>
+            </a:r>
+          </a:p>
+        </p:txBody>
+      </p:sp>
+      <p:cxnSp>
+        <p:nvCxnSpPr>
+          <p:cNvPr id="12" name="Connector 11"/>
+          <p:cNvCxnSpPr/>
+          <p:nvPr/>
+        </p:nvCxnSpPr>
+        <p:spPr>
+          <a:xfrm>
+            <a:off x="6208776" y="2048256"/>
+            <a:ext cx="2624328" cy="0"/>
+          </a:xfrm>
+          <a:prstGeom prst="line">
+            <a:avLst/>
+          </a:prstGeom>
+          <a:ln w="12700">
+            <a:solidFill>
+              <a:srgbClr val="000000"/>
+            </a:solidFill>
+          </a:ln>
+          <a:effectLst/>
+        </p:spPr>
+      </p:cxnSp>
+      <p:sp>
+        <p:nvSpPr>
+          <p:cNvPr id="13" name="TextBox 12"/>
+          <p:cNvSpPr txBox="1"/>
+          <p:nvPr/>
+        </p:nvSpPr>
+        <p:spPr>
+          <a:xfrm>
+            <a:off x="6208776" y="2231136"/>
+            <a:ext cx="2624328" cy="4023360"/>
+          </a:xfrm>
+          <a:prstGeom prst="rect">
+            <a:avLst/>
+          </a:prstGeom>
+          <a:noFill/>
+        </p:spPr>
+        <p:txBody>
+          <a:bodyPr wrap="square" anchor="t" lIns="0" rIns="0" tIns="0" bIns="0">
+            <a:spAutoFit/>
+          </a:bodyPr>
+          <a:lstStyle/>
+          <a:p>
+            <a:pPr algn="l">
+              <a:lnSpc>
+                <a:spcPct val="120000"/>
+              </a:lnSpc>
+              <a:spcAft>
+                <a:spcPts val="1600"/>
+              </a:spcAft>
+            </a:pPr>
+            <a:r>
+              <a:rPr sz="1050" b="0">
+                <a:solidFill>
+                  <a:srgbClr val="000000"/>
+                </a:solidFill>
+                <a:latin typeface="Arial"/>
+              </a:rPr>
+              <a:t>•  </a:t>
+            </a:r>
+            <a:r>
+              <a:rPr sz="1050" b="0">
+                <a:solidFill>
+                  <a:srgbClr val="000000"/>
+                </a:solidFill>
+                <a:latin typeface="Arial"/>
+              </a:rPr>
+              <a:t>FDE is the core commercial motion, not a services add-on</a:t>
+            </a:r>
+          </a:p>
+          <a:p>
+            <a:pPr algn="l">
+              <a:lnSpc>
+                <a:spcPct val="120000"/>
+              </a:lnSpc>
+              <a:spcAft>
+                <a:spcPts val="1600"/>
+              </a:spcAft>
+            </a:pPr>
+            <a:r>
+              <a:rPr sz="1050" b="0">
+                <a:solidFill>
+                  <a:srgbClr val="000000"/>
+                </a:solidFill>
+                <a:latin typeface="Arial"/>
+              </a:rPr>
+              <a:t>•  </a:t>
+            </a:r>
+            <a:r>
+              <a:rPr sz="1050" b="0">
+                <a:solidFill>
+                  <a:srgbClr val="000000"/>
+                </a:solidFill>
+                <a:latin typeface="Arial"/>
+              </a:rPr>
+              <a:t>Field learnings flow directly into the product roadmap</a:t>
+            </a:r>
+          </a:p>
+          <a:p>
+            <a:pPr algn="l">
+              <a:lnSpc>
+                <a:spcPct val="120000"/>
+              </a:lnSpc>
+              <a:spcAft>
+                <a:spcPts val="1600"/>
+              </a:spcAft>
+            </a:pPr>
+            <a:r>
+              <a:rPr sz="1050" b="0">
+                <a:solidFill>
+                  <a:srgbClr val="000000"/>
+                </a:solidFill>
+                <a:latin typeface="Arial"/>
+              </a:rPr>
+              <a:t>•  </a:t>
+            </a:r>
+            <a:r>
+              <a:rPr sz="1050" b="0">
+                <a:solidFill>
+                  <a:srgbClr val="000000"/>
+                </a:solidFill>
+                <a:latin typeface="Arial"/>
+              </a:rPr>
+              <a:t>Engineers ship product code — not consulting deliverables</a:t>
+            </a:r>
+          </a:p>
+        </p:txBody>
+      </p:sp>
+      <p:sp>
+        <p:nvSpPr>
+          <p:cNvPr id="14" name="TextBox 13"/>
+          <p:cNvSpPr txBox="1"/>
+          <p:nvPr/>
+        </p:nvSpPr>
+        <p:spPr>
+          <a:xfrm>
+            <a:off x="9061704" y="1755648"/>
+            <a:ext cx="2624328" cy="256032"/>
+          </a:xfrm>
+          <a:prstGeom prst="rect">
+            <a:avLst/>
+          </a:prstGeom>
+          <a:noFill/>
+        </p:spPr>
+        <p:txBody>
+          <a:bodyPr wrap="square" anchor="t" lIns="0" rIns="0" tIns="0" bIns="0">
+            <a:spAutoFit/>
+          </a:bodyPr>
+          <a:lstStyle/>
+          <a:p>
+            <a:pPr algn="l">
+              <a:lnSpc>
+                <a:spcPct val="100000"/>
+              </a:lnSpc>
+              <a:spcAft>
+                <a:spcPts val="0"/>
+              </a:spcAft>
+            </a:pPr>
+            <a:r>
+              <a:rPr sz="1050" b="1">
+                <a:solidFill>
+                  <a:srgbClr val="000000"/>
+                </a:solidFill>
+                <a:latin typeface="Arial"/>
+              </a:rPr>
+              <a:t>Impact to date</a:t>
+            </a:r>
+          </a:p>
+        </p:txBody>
+      </p:sp>
+      <p:cxnSp>
+        <p:nvCxnSpPr>
+          <p:cNvPr id="15" name="Connector 14"/>
+          <p:cNvCxnSpPr/>
+          <p:nvPr/>
+        </p:nvCxnSpPr>
+        <p:spPr>
+          <a:xfrm>
+            <a:off x="9061704" y="2048256"/>
+            <a:ext cx="2624328" cy="0"/>
+          </a:xfrm>
+          <a:prstGeom prst="line">
+            <a:avLst/>
+          </a:prstGeom>
+          <a:ln w="12700">
+            <a:solidFill>
+              <a:srgbClr val="000000"/>
+            </a:solidFill>
+          </a:ln>
+          <a:effectLst/>
+        </p:spPr>
+      </p:cxnSp>
+      <p:sp>
+        <p:nvSpPr>
+          <p:cNvPr id="16" name="TextBox 15"/>
+          <p:cNvSpPr txBox="1"/>
+          <p:nvPr/>
+        </p:nvSpPr>
+        <p:spPr>
+          <a:xfrm>
+            <a:off x="9061704" y="2231136"/>
+            <a:ext cx="2624328" cy="4023360"/>
+          </a:xfrm>
+          <a:prstGeom prst="rect">
+            <a:avLst/>
+          </a:prstGeom>
+          <a:noFill/>
+        </p:spPr>
+        <p:txBody>
+          <a:bodyPr wrap="square" anchor="t" lIns="0" rIns="0" tIns="0" bIns="0">
+            <a:spAutoFit/>
+          </a:bodyPr>
+          <a:lstStyle/>
+          <a:p>
+            <a:pPr algn="l">
+              <a:lnSpc>
+                <a:spcPct val="120000"/>
+              </a:lnSpc>
+              <a:spcAft>
+                <a:spcPts val="1600"/>
+              </a:spcAft>
+            </a:pPr>
+            <a:r>
+              <a:rPr sz="1050" b="0">
+                <a:solidFill>
+                  <a:srgbClr val="000000"/>
+                </a:solidFill>
+                <a:latin typeface="Arial"/>
+              </a:rPr>
+              <a:t>•  </a:t>
+            </a:r>
+            <a:r>
+              <a:rPr sz="1050" b="0">
+                <a:solidFill>
+                  <a:srgbClr val="000000"/>
+                </a:solidFill>
+                <a:latin typeface="Arial"/>
+              </a:rPr>
+              <a:t>Credits FDE-led AIP bootcamps for accelerating US commercial growth on earnings calls</a:t>
+            </a:r>
+          </a:p>
+          <a:p>
+            <a:pPr algn="l">
+              <a:lnSpc>
+                <a:spcPct val="120000"/>
+              </a:lnSpc>
+              <a:spcAft>
+                <a:spcPts val="1600"/>
+              </a:spcAft>
+            </a:pPr>
+            <a:r>
+              <a:rPr sz="1050" b="0">
+                <a:solidFill>
+                  <a:srgbClr val="000000"/>
+                </a:solidFill>
+                <a:latin typeface="Arial"/>
+              </a:rPr>
+              <a:t>•  </a:t>
+            </a:r>
+            <a:r>
+              <a:rPr sz="1050" b="0">
+                <a:solidFill>
+                  <a:srgbClr val="000000"/>
+                </a:solidFill>
+                <a:latin typeface="Arial"/>
+              </a:rPr>
+              <a:t>Sustained expansion within existing accounts publicly highlighted</a:t>
+            </a:r>
+          </a:p>
+          <a:p>
+            <a:pPr algn="l">
+              <a:lnSpc>
+                <a:spcPct val="120000"/>
+              </a:lnSpc>
+              <a:spcAft>
+                <a:spcPts val="1600"/>
+              </a:spcAft>
+            </a:pPr>
+            <a:r>
+              <a:rPr sz="1050" b="0">
+                <a:solidFill>
+                  <a:srgbClr val="000000"/>
+                </a:solidFill>
+                <a:latin typeface="Arial"/>
+              </a:rPr>
+              <a:t>•  </a:t>
+            </a:r>
+            <a:r>
+              <a:rPr sz="1050" b="0">
+                <a:solidFill>
+                  <a:srgbClr val="000000"/>
+                </a:solidFill>
+                <a:latin typeface="Arial"/>
+              </a:rPr>
+              <a:t>Model now widely emulated across the industry</a:t>
+            </a:r>
+          </a:p>
+        </p:txBody>
+      </p:sp>
+      <p:cxnSp>
+        <p:nvCxnSpPr>
+          <p:cNvPr id="17" name="Connector 16"/>
+          <p:cNvCxnSpPr/>
+          <p:nvPr/>
+        </p:nvCxnSpPr>
+        <p:spPr>
+          <a:xfrm>
+            <a:off x="502920" y="6510528"/>
+            <a:ext cx="11185855" cy="0"/>
+          </a:xfrm>
+          <a:prstGeom prst="line">
+            <a:avLst/>
+          </a:prstGeom>
+          <a:ln w="6350">
+            <a:solidFill>
+              <a:srgbClr val="BFBFBF"/>
+            </a:solidFill>
+          </a:ln>
+          <a:effectLst/>
+        </p:spPr>
+      </p:cxnSp>
+      <p:sp>
+        <p:nvSpPr>
+          <p:cNvPr id="18" name="TextBox 17"/>
+          <p:cNvSpPr txBox="1"/>
+          <p:nvPr/>
+        </p:nvSpPr>
+        <p:spPr>
+          <a:xfrm>
+            <a:off x="502920" y="6583680"/>
+            <a:ext cx="9601200" cy="228600"/>
+          </a:xfrm>
+          <a:prstGeom prst="rect">
+            <a:avLst/>
+          </a:prstGeom>
+          <a:noFill/>
+        </p:spPr>
+        <p:txBody>
+          <a:bodyPr wrap="square" anchor="t" lIns="0" rIns="0" tIns="0" bIns="0">
+            <a:spAutoFit/>
+          </a:bodyPr>
+          <a:lstStyle/>
+          <a:p>
+            <a:pPr algn="l">
+              <a:lnSpc>
+                <a:spcPct val="100000"/>
+              </a:lnSpc>
+              <a:spcAft>
+                <a:spcPts val="0"/>
+              </a:spcAft>
+            </a:pPr>
+            <a:r>
+              <a:rPr sz="750" b="0">
+                <a:solidFill>
+                  <a:srgbClr val="8C8C8C"/>
+                </a:solidFill>
+                <a:latin typeface="Arial"/>
+              </a:rPr>
+              <a:t>Source: Palantir earnings calls, S-1 and public statements</a:t>
+            </a:r>
+          </a:p>
+        </p:txBody>
+      </p:sp>
+      <p:sp>
+        <p:nvSpPr>
+          <p:cNvPr id="19" name="TextBox 18"/>
+          <p:cNvSpPr txBox="1"/>
+          <p:nvPr/>
+        </p:nvSpPr>
+        <p:spPr>
+          <a:xfrm>
+            <a:off x="11228832" y="6583680"/>
+            <a:ext cx="457200" cy="228600"/>
+          </a:xfrm>
+          <a:prstGeom prst="rect">
+            <a:avLst/>
+          </a:prstGeom>
+          <a:noFill/>
+        </p:spPr>
+        <p:txBody>
+          <a:bodyPr wrap="square" anchor="t" lIns="0" rIns="0" tIns="0" bIns="0">
+            <a:spAutoFit/>
+          </a:bodyPr>
+          <a:lstStyle/>
+          <a:p>
+            <a:pPr algn="r">
+              <a:lnSpc>
+                <a:spcPct val="100000"/>
+              </a:lnSpc>
+              <a:spcAft>
+                <a:spcPts val="0"/>
+              </a:spcAft>
+            </a:pPr>
+            <a:r>
+              <a:rPr sz="800" b="0">
+                <a:solidFill>
+                  <a:srgbClr val="8C8C8C"/>
+                </a:solidFill>
+                <a:latin typeface="Arial"/>
+              </a:rPr>
+              <a:t>6</a:t>
+            </a:r>
+          </a:p>
+        </p:txBody>
+      </p:sp>
+    </p:spTree>
+  </p:cSld>
+  <p:clrMapOvr>
+    <a:masterClrMapping/>
+  </p:clrMapOvr>
+</p:sld>
+</file>
+
+<file path=ppt/slides/slide7.xml><?xml version="1.0" encoding="utf-8"?>
+<p:sld xmlns:a="http://schemas.openxmlformats.org/drawingml/2006/main" xmlns:p="http://schemas.openxmlformats.org/presentationml/2006/main" xmlns:r="http://schemas.openxmlformats.org/officeDocument/2006/relationships">
+  <p:cSld>
+    <p:spTree>
+      <p:nvGrpSpPr>
+        <p:cNvPr id="1" name=""/>
+        <p:cNvGrpSpPr/>
+        <p:nvPr/>
+      </p:nvGrpSpPr>
+      <p:grpSpPr/>
+      <p:sp>
+        <p:nvSpPr>
+          <p:cNvPr id="2" name="TextBox 1"/>
+          <p:cNvSpPr txBox="1"/>
+          <p:nvPr/>
+        </p:nvSpPr>
+        <p:spPr>
+          <a:xfrm>
+            <a:off x="502920" y="292608"/>
+            <a:ext cx="11185855" cy="685800"/>
+          </a:xfrm>
+          <a:prstGeom prst="rect">
+            <a:avLst/>
+          </a:prstGeom>
+          <a:noFill/>
+        </p:spPr>
+        <p:txBody>
+          <a:bodyPr wrap="square" anchor="t" lIns="0" rIns="0" tIns="0" bIns="0">
+            <a:spAutoFit/>
+          </a:bodyPr>
+          <a:lstStyle/>
+          <a:p>
+            <a:pPr algn="l">
+              <a:lnSpc>
+                <a:spcPct val="105000"/>
+              </a:lnSpc>
+              <a:spcAft>
+                <a:spcPts val="0"/>
+              </a:spcAft>
+            </a:pPr>
+            <a:r>
+              <a:rPr sz="1800" b="1">
+                <a:solidFill>
+                  <a:srgbClr val="000000"/>
+                </a:solidFill>
+                <a:latin typeface="Arial"/>
+              </a:rPr>
+              <a:t>Uber's embedded ops–engineering pairing powered city-by-city scaling and is now a product it sells</a:t>
+            </a:r>
+          </a:p>
+        </p:txBody>
+      </p:sp>
+      <p:cxnSp>
+        <p:nvCxnSpPr>
+          <p:cNvPr id="3" name="Connector 2"/>
+          <p:cNvCxnSpPr/>
+          <p:nvPr/>
+        </p:nvCxnSpPr>
+        <p:spPr>
+          <a:xfrm>
+            <a:off x="502920" y="896112"/>
+            <a:ext cx="11185855" cy="0"/>
+          </a:xfrm>
+          <a:prstGeom prst="line">
+            <a:avLst/>
+          </a:prstGeom>
+          <a:ln w="19050">
+            <a:solidFill>
+              <a:srgbClr val="000000"/>
+            </a:solidFill>
+          </a:ln>
+          <a:effectLst/>
+        </p:spPr>
+      </p:cxnSp>
+      <p:sp>
+        <p:nvSpPr>
+          <p:cNvPr id="4" name="TextBox 3"/>
+          <p:cNvSpPr txBox="1"/>
+          <p:nvPr/>
+        </p:nvSpPr>
+        <p:spPr>
+          <a:xfrm>
+            <a:off x="502920" y="1005840"/>
+            <a:ext cx="11185855" cy="320040"/>
+          </a:xfrm>
+          <a:prstGeom prst="rect">
+            <a:avLst/>
+          </a:prstGeom>
+          <a:noFill/>
+        </p:spPr>
+        <p:txBody>
+          <a:bodyPr wrap="square" anchor="t" lIns="0" rIns="0" tIns="0" bIns="0">
+            <a:spAutoFit/>
+          </a:bodyPr>
+          <a:lstStyle/>
+          <a:p>
+            <a:pPr algn="l">
+              <a:lnSpc>
+                <a:spcPct val="105000"/>
+              </a:lnSpc>
+              <a:spcAft>
+                <a:spcPts val="0"/>
+              </a:spcAft>
+            </a:pPr>
+            <a:r>
+              <a:rPr sz="1600" b="1">
+                <a:solidFill>
+                  <a:srgbClr val="000000"/>
+                </a:solidFill>
+                <a:latin typeface="Arial"/>
+              </a:rPr>
+              <a:t>Backup: Uber — model, motivation, differentiation and impact</a:t>
+            </a:r>
+          </a:p>
+        </p:txBody>
+      </p:sp>
+      <p:sp>
+        <p:nvSpPr>
+          <p:cNvPr id="5" name="TextBox 4"/>
+          <p:cNvSpPr txBox="1"/>
+          <p:nvPr/>
+        </p:nvSpPr>
+        <p:spPr>
+          <a:xfrm>
+            <a:off x="502920" y="1755648"/>
+            <a:ext cx="2624328" cy="256032"/>
+          </a:xfrm>
+          <a:prstGeom prst="rect">
+            <a:avLst/>
+          </a:prstGeom>
+          <a:noFill/>
+        </p:spPr>
+        <p:txBody>
+          <a:bodyPr wrap="square" anchor="t" lIns="0" rIns="0" tIns="0" bIns="0">
+            <a:spAutoFit/>
+          </a:bodyPr>
+          <a:lstStyle/>
+          <a:p>
+            <a:pPr algn="l">
+              <a:lnSpc>
+                <a:spcPct val="100000"/>
+              </a:lnSpc>
+              <a:spcAft>
+                <a:spcPts val="0"/>
+              </a:spcAft>
+            </a:pPr>
+            <a:r>
+              <a:rPr sz="1050" b="1">
+                <a:solidFill>
+                  <a:srgbClr val="000000"/>
+                </a:solidFill>
+                <a:latin typeface="Arial"/>
+              </a:rPr>
+              <a:t>What the model looks like</a:t>
+            </a:r>
+          </a:p>
+        </p:txBody>
+      </p:sp>
+      <p:cxnSp>
+        <p:nvCxnSpPr>
+          <p:cNvPr id="6" name="Connector 5"/>
+          <p:cNvCxnSpPr/>
+          <p:nvPr/>
+        </p:nvCxnSpPr>
+        <p:spPr>
+          <a:xfrm>
+            <a:off x="502920" y="2048256"/>
+            <a:ext cx="2624328" cy="0"/>
+          </a:xfrm>
+          <a:prstGeom prst="line">
+            <a:avLst/>
+          </a:prstGeom>
+          <a:ln w="12700">
+            <a:solidFill>
+              <a:srgbClr val="000000"/>
+            </a:solidFill>
+          </a:ln>
+          <a:effectLst/>
+        </p:spPr>
+      </p:cxnSp>
+      <p:sp>
+        <p:nvSpPr>
+          <p:cNvPr id="7" name="TextBox 6"/>
+          <p:cNvSpPr txBox="1"/>
+          <p:nvPr/>
+        </p:nvSpPr>
+        <p:spPr>
+          <a:xfrm>
+            <a:off x="502920" y="2231136"/>
+            <a:ext cx="2624328" cy="4023360"/>
+          </a:xfrm>
+          <a:prstGeom prst="rect">
+            <a:avLst/>
+          </a:prstGeom>
+          <a:noFill/>
+        </p:spPr>
+        <p:txBody>
+          <a:bodyPr wrap="square" anchor="t" lIns="0" rIns="0" tIns="0" bIns="0">
+            <a:spAutoFit/>
+          </a:bodyPr>
+          <a:lstStyle/>
+          <a:p>
+            <a:pPr algn="l">
+              <a:lnSpc>
+                <a:spcPct val="120000"/>
+              </a:lnSpc>
+              <a:spcAft>
+                <a:spcPts val="1600"/>
+              </a:spcAft>
+            </a:pPr>
+            <a:r>
+              <a:rPr sz="1050" b="0">
+                <a:solidFill>
+                  <a:srgbClr val="000000"/>
+                </a:solidFill>
+                <a:latin typeface="Arial"/>
+              </a:rPr>
+              <a:t>•  </a:t>
+            </a:r>
+            <a:r>
+              <a:rPr sz="1050" b="0">
+                <a:solidFill>
+                  <a:srgbClr val="000000"/>
+                </a:solidFill>
+                <a:latin typeface="Arial"/>
+              </a:rPr>
+              <a:t>Engineers embedded with city operations teams through the scaling era</a:t>
+            </a:r>
+          </a:p>
+          <a:p>
+            <a:pPr algn="l">
+              <a:lnSpc>
+                <a:spcPct val="120000"/>
+              </a:lnSpc>
+              <a:spcAft>
+                <a:spcPts val="1600"/>
+              </a:spcAft>
+            </a:pPr>
+            <a:r>
+              <a:rPr sz="1050" b="0">
+                <a:solidFill>
+                  <a:srgbClr val="000000"/>
+                </a:solidFill>
+                <a:latin typeface="Arial"/>
+              </a:rPr>
+              <a:t>•  </a:t>
+            </a:r>
+            <a:r>
+              <a:rPr sz="1050" b="0">
+                <a:solidFill>
+                  <a:srgbClr val="000000"/>
+                </a:solidFill>
+                <a:latin typeface="Arial"/>
+              </a:rPr>
+              <a:t>City teams owned the P&amp;L; engineers tuned marketplace levers locally</a:t>
+            </a:r>
+          </a:p>
+          <a:p>
+            <a:pPr algn="l">
+              <a:lnSpc>
+                <a:spcPct val="120000"/>
+              </a:lnSpc>
+              <a:spcAft>
+                <a:spcPts val="1600"/>
+              </a:spcAft>
+            </a:pPr>
+            <a:r>
+              <a:rPr sz="1050" b="0">
+                <a:solidFill>
+                  <a:srgbClr val="000000"/>
+                </a:solidFill>
+                <a:latin typeface="Arial"/>
+              </a:rPr>
+              <a:t>•  </a:t>
+            </a:r>
+            <a:r>
+              <a:rPr sz="1050" b="0">
+                <a:solidFill>
+                  <a:srgbClr val="000000"/>
+                </a:solidFill>
+                <a:latin typeface="Arial"/>
+              </a:rPr>
+              <a:t>Model now offered externally to enterprises via Uber AI Solutions</a:t>
+            </a:r>
+          </a:p>
+        </p:txBody>
+      </p:sp>
+      <p:sp>
+        <p:nvSpPr>
+          <p:cNvPr id="8" name="TextBox 7"/>
+          <p:cNvSpPr txBox="1"/>
+          <p:nvPr/>
+        </p:nvSpPr>
+        <p:spPr>
+          <a:xfrm>
+            <a:off x="3355848" y="1755648"/>
+            <a:ext cx="2624328" cy="256032"/>
+          </a:xfrm>
+          <a:prstGeom prst="rect">
+            <a:avLst/>
+          </a:prstGeom>
+          <a:noFill/>
+        </p:spPr>
+        <p:txBody>
+          <a:bodyPr wrap="square" anchor="t" lIns="0" rIns="0" tIns="0" bIns="0">
+            <a:spAutoFit/>
+          </a:bodyPr>
+          <a:lstStyle/>
+          <a:p>
+            <a:pPr algn="l">
+              <a:lnSpc>
+                <a:spcPct val="100000"/>
+              </a:lnSpc>
+              <a:spcAft>
+                <a:spcPts val="0"/>
+              </a:spcAft>
+            </a:pPr>
+            <a:r>
+              <a:rPr sz="1050" b="1">
+                <a:solidFill>
+                  <a:srgbClr val="000000"/>
+                </a:solidFill>
+                <a:latin typeface="Arial"/>
+              </a:rPr>
+              <a:t>Why they moved to it</a:t>
+            </a:r>
+          </a:p>
+        </p:txBody>
+      </p:sp>
+      <p:cxnSp>
+        <p:nvCxnSpPr>
+          <p:cNvPr id="9" name="Connector 8"/>
+          <p:cNvCxnSpPr/>
+          <p:nvPr/>
+        </p:nvCxnSpPr>
+        <p:spPr>
+          <a:xfrm>
+            <a:off x="3355848" y="2048256"/>
+            <a:ext cx="2624328" cy="0"/>
+          </a:xfrm>
+          <a:prstGeom prst="line">
+            <a:avLst/>
+          </a:prstGeom>
+          <a:ln w="12700">
+            <a:solidFill>
+              <a:srgbClr val="000000"/>
+            </a:solidFill>
+          </a:ln>
+          <a:effectLst/>
+        </p:spPr>
+      </p:cxnSp>
+      <p:sp>
+        <p:nvSpPr>
+          <p:cNvPr id="10" name="TextBox 9"/>
+          <p:cNvSpPr txBox="1"/>
+          <p:nvPr/>
+        </p:nvSpPr>
+        <p:spPr>
+          <a:xfrm>
+            <a:off x="3355848" y="2231136"/>
+            <a:ext cx="2624328" cy="4023360"/>
+          </a:xfrm>
+          <a:prstGeom prst="rect">
+            <a:avLst/>
+          </a:prstGeom>
+          <a:noFill/>
+        </p:spPr>
+        <p:txBody>
+          <a:bodyPr wrap="square" anchor="t" lIns="0" rIns="0" tIns="0" bIns="0">
+            <a:spAutoFit/>
+          </a:bodyPr>
+          <a:lstStyle/>
+          <a:p>
+            <a:pPr algn="l">
+              <a:lnSpc>
+                <a:spcPct val="120000"/>
+              </a:lnSpc>
+              <a:spcAft>
+                <a:spcPts val="1600"/>
+              </a:spcAft>
+            </a:pPr>
+            <a:r>
+              <a:rPr sz="1050" b="0">
+                <a:solidFill>
+                  <a:srgbClr val="000000"/>
+                </a:solidFill>
+                <a:latin typeface="Arial"/>
+              </a:rPr>
+              <a:t>•  </a:t>
+            </a:r>
+            <a:r>
+              <a:rPr sz="1050" b="0">
+                <a:solidFill>
+                  <a:srgbClr val="000000"/>
+                </a:solidFill>
+                <a:latin typeface="Arial"/>
+              </a:rPr>
+              <a:t>Every city market behaved differently; central roadmaps were too slow</a:t>
+            </a:r>
+          </a:p>
+          <a:p>
+            <a:pPr algn="l">
+              <a:lnSpc>
+                <a:spcPct val="120000"/>
+              </a:lnSpc>
+              <a:spcAft>
+                <a:spcPts val="1600"/>
+              </a:spcAft>
+            </a:pPr>
+            <a:r>
+              <a:rPr sz="1050" b="0">
+                <a:solidFill>
+                  <a:srgbClr val="000000"/>
+                </a:solidFill>
+                <a:latin typeface="Arial"/>
+              </a:rPr>
+              <a:t>•  </a:t>
+            </a:r>
+            <a:r>
+              <a:rPr sz="1050" b="0">
+                <a:solidFill>
+                  <a:srgbClr val="000000"/>
+                </a:solidFill>
+                <a:latin typeface="Arial"/>
+              </a:rPr>
+              <a:t>Launch speed was existential in winner-take-most markets</a:t>
+            </a:r>
+          </a:p>
+          <a:p>
+            <a:pPr algn="l">
+              <a:lnSpc>
+                <a:spcPct val="120000"/>
+              </a:lnSpc>
+              <a:spcAft>
+                <a:spcPts val="1600"/>
+              </a:spcAft>
+            </a:pPr>
+            <a:r>
+              <a:rPr sz="1050" b="0">
+                <a:solidFill>
+                  <a:srgbClr val="000000"/>
+                </a:solidFill>
+                <a:latin typeface="Arial"/>
+              </a:rPr>
+              <a:t>•  </a:t>
+            </a:r>
+            <a:r>
+              <a:rPr sz="1050" b="0">
+                <a:solidFill>
+                  <a:srgbClr val="000000"/>
+                </a:solidFill>
+                <a:latin typeface="Arial"/>
+              </a:rPr>
+              <a:t>Operational data lived in the field, not at headquarters</a:t>
+            </a:r>
+          </a:p>
+        </p:txBody>
+      </p:sp>
+      <p:sp>
+        <p:nvSpPr>
+          <p:cNvPr id="11" name="TextBox 10"/>
+          <p:cNvSpPr txBox="1"/>
+          <p:nvPr/>
+        </p:nvSpPr>
+        <p:spPr>
+          <a:xfrm>
+            <a:off x="6208776" y="1755648"/>
+            <a:ext cx="2624328" cy="256032"/>
+          </a:xfrm>
+          <a:prstGeom prst="rect">
+            <a:avLst/>
+          </a:prstGeom>
+          <a:noFill/>
+        </p:spPr>
+        <p:txBody>
+          <a:bodyPr wrap="square" anchor="t" lIns="0" rIns="0" tIns="0" bIns="0">
+            <a:spAutoFit/>
+          </a:bodyPr>
+          <a:lstStyle/>
+          <a:p>
+            <a:pPr algn="l">
+              <a:lnSpc>
+                <a:spcPct val="100000"/>
+              </a:lnSpc>
+              <a:spcAft>
+                <a:spcPts val="0"/>
+              </a:spcAft>
+            </a:pPr>
+            <a:r>
+              <a:rPr sz="1050" b="1">
+                <a:solidFill>
+                  <a:srgbClr val="000000"/>
+                </a:solidFill>
+                <a:latin typeface="Arial"/>
+              </a:rPr>
+              <a:t>What sets it apart</a:t>
+            </a:r>
+          </a:p>
+        </p:txBody>
+      </p:sp>
+      <p:cxnSp>
+        <p:nvCxnSpPr>
+          <p:cNvPr id="12" name="Connector 11"/>
+          <p:cNvCxnSpPr/>
+          <p:nvPr/>
+        </p:nvCxnSpPr>
+        <p:spPr>
+          <a:xfrm>
+            <a:off x="6208776" y="2048256"/>
+            <a:ext cx="2624328" cy="0"/>
+          </a:xfrm>
+          <a:prstGeom prst="line">
+            <a:avLst/>
+          </a:prstGeom>
+          <a:ln w="12700">
+            <a:solidFill>
+              <a:srgbClr val="000000"/>
+            </a:solidFill>
+          </a:ln>
+          <a:effectLst/>
+        </p:spPr>
+      </p:cxnSp>
+      <p:sp>
+        <p:nvSpPr>
+          <p:cNvPr id="13" name="TextBox 12"/>
+          <p:cNvSpPr txBox="1"/>
+          <p:nvPr/>
+        </p:nvSpPr>
+        <p:spPr>
+          <a:xfrm>
+            <a:off x="6208776" y="2231136"/>
+            <a:ext cx="2624328" cy="4023360"/>
+          </a:xfrm>
+          <a:prstGeom prst="rect">
+            <a:avLst/>
+          </a:prstGeom>
+          <a:noFill/>
+        </p:spPr>
+        <p:txBody>
+          <a:bodyPr wrap="square" anchor="t" lIns="0" rIns="0" tIns="0" bIns="0">
+            <a:spAutoFit/>
+          </a:bodyPr>
+          <a:lstStyle/>
+          <a:p>
+            <a:pPr algn="l">
+              <a:lnSpc>
+                <a:spcPct val="120000"/>
+              </a:lnSpc>
+              <a:spcAft>
+                <a:spcPts val="1600"/>
+              </a:spcAft>
+            </a:pPr>
+            <a:r>
+              <a:rPr sz="1050" b="0">
+                <a:solidFill>
+                  <a:srgbClr val="000000"/>
+                </a:solidFill>
+                <a:latin typeface="Arial"/>
+              </a:rPr>
+              <a:t>•  </a:t>
+            </a:r>
+            <a:r>
+              <a:rPr sz="1050" b="0">
+                <a:solidFill>
+                  <a:srgbClr val="000000"/>
+                </a:solidFill>
+                <a:latin typeface="Arial"/>
+              </a:rPr>
+              <a:t>Ops-led and engineer-supported — the business owned the outcome</a:t>
+            </a:r>
+          </a:p>
+          <a:p>
+            <a:pPr algn="l">
+              <a:lnSpc>
+                <a:spcPct val="120000"/>
+              </a:lnSpc>
+              <a:spcAft>
+                <a:spcPts val="1600"/>
+              </a:spcAft>
+            </a:pPr>
+            <a:r>
+              <a:rPr sz="1050" b="0">
+                <a:solidFill>
+                  <a:srgbClr val="000000"/>
+                </a:solidFill>
+                <a:latin typeface="Arial"/>
+              </a:rPr>
+              <a:t>•  </a:t>
+            </a:r>
+            <a:r>
+              <a:rPr sz="1050" b="0">
+                <a:solidFill>
+                  <a:srgbClr val="000000"/>
+                </a:solidFill>
+                <a:latin typeface="Arial"/>
+              </a:rPr>
+              <a:t>City learnings codified into playbooks and reused globally</a:t>
+            </a:r>
+          </a:p>
+          <a:p>
+            <a:pPr algn="l">
+              <a:lnSpc>
+                <a:spcPct val="120000"/>
+              </a:lnSpc>
+              <a:spcAft>
+                <a:spcPts val="1600"/>
+              </a:spcAft>
+            </a:pPr>
+            <a:r>
+              <a:rPr sz="1050" b="0">
+                <a:solidFill>
+                  <a:srgbClr val="000000"/>
+                </a:solidFill>
+                <a:latin typeface="Arial"/>
+              </a:rPr>
+              <a:t>•  </a:t>
+            </a:r>
+            <a:r>
+              <a:rPr sz="1050" b="0">
+                <a:solidFill>
+                  <a:srgbClr val="000000"/>
+                </a:solidFill>
+                <a:latin typeface="Arial"/>
+              </a:rPr>
+              <a:t>Matured from internal practice into an external commercial offering</a:t>
+            </a:r>
+          </a:p>
+        </p:txBody>
+      </p:sp>
+      <p:sp>
+        <p:nvSpPr>
+          <p:cNvPr id="14" name="TextBox 13"/>
+          <p:cNvSpPr txBox="1"/>
+          <p:nvPr/>
+        </p:nvSpPr>
+        <p:spPr>
+          <a:xfrm>
+            <a:off x="9061704" y="1755648"/>
+            <a:ext cx="2624328" cy="256032"/>
+          </a:xfrm>
+          <a:prstGeom prst="rect">
+            <a:avLst/>
+          </a:prstGeom>
+          <a:noFill/>
+        </p:spPr>
+        <p:txBody>
+          <a:bodyPr wrap="square" anchor="t" lIns="0" rIns="0" tIns="0" bIns="0">
+            <a:spAutoFit/>
+          </a:bodyPr>
+          <a:lstStyle/>
+          <a:p>
+            <a:pPr algn="l">
+              <a:lnSpc>
+                <a:spcPct val="100000"/>
+              </a:lnSpc>
+              <a:spcAft>
+                <a:spcPts val="0"/>
+              </a:spcAft>
+            </a:pPr>
+            <a:r>
+              <a:rPr sz="1050" b="1">
+                <a:solidFill>
+                  <a:srgbClr val="000000"/>
+                </a:solidFill>
+                <a:latin typeface="Arial"/>
+              </a:rPr>
+              <a:t>Impact to date</a:t>
+            </a:r>
+          </a:p>
+        </p:txBody>
+      </p:sp>
+      <p:cxnSp>
+        <p:nvCxnSpPr>
+          <p:cNvPr id="15" name="Connector 14"/>
+          <p:cNvCxnSpPr/>
+          <p:nvPr/>
+        </p:nvCxnSpPr>
+        <p:spPr>
+          <a:xfrm>
+            <a:off x="9061704" y="2048256"/>
+            <a:ext cx="2624328" cy="0"/>
+          </a:xfrm>
+          <a:prstGeom prst="line">
+            <a:avLst/>
+          </a:prstGeom>
+          <a:ln w="12700">
+            <a:solidFill>
+              <a:srgbClr val="000000"/>
+            </a:solidFill>
+          </a:ln>
+          <a:effectLst/>
+        </p:spPr>
+      </p:cxnSp>
+      <p:sp>
+        <p:nvSpPr>
+          <p:cNvPr id="16" name="TextBox 15"/>
+          <p:cNvSpPr txBox="1"/>
+          <p:nvPr/>
+        </p:nvSpPr>
+        <p:spPr>
+          <a:xfrm>
+            <a:off x="9061704" y="2231136"/>
+            <a:ext cx="2624328" cy="4023360"/>
+          </a:xfrm>
+          <a:prstGeom prst="rect">
+            <a:avLst/>
+          </a:prstGeom>
+          <a:noFill/>
+        </p:spPr>
+        <p:txBody>
+          <a:bodyPr wrap="square" anchor="t" lIns="0" rIns="0" tIns="0" bIns="0">
+            <a:spAutoFit/>
+          </a:bodyPr>
+          <a:lstStyle/>
+          <a:p>
+            <a:pPr algn="l">
+              <a:lnSpc>
+                <a:spcPct val="120000"/>
+              </a:lnSpc>
+              <a:spcAft>
+                <a:spcPts val="1600"/>
+              </a:spcAft>
+            </a:pPr>
+            <a:r>
+              <a:rPr sz="1050" b="0">
+                <a:solidFill>
+                  <a:srgbClr val="000000"/>
+                </a:solidFill>
+                <a:latin typeface="Arial"/>
+              </a:rPr>
+              <a:t>•  </a:t>
+            </a:r>
+            <a:r>
+              <a:rPr sz="1050" b="0">
+                <a:solidFill>
+                  <a:srgbClr val="000000"/>
+                </a:solidFill>
+                <a:latin typeface="Arial"/>
+              </a:rPr>
+              <a:t>Embedded pairing publicly cited as central to rapid multi-market expansion</a:t>
+            </a:r>
+          </a:p>
+          <a:p>
+            <a:pPr algn="l">
+              <a:lnSpc>
+                <a:spcPct val="120000"/>
+              </a:lnSpc>
+              <a:spcAft>
+                <a:spcPts val="1600"/>
+              </a:spcAft>
+            </a:pPr>
+            <a:r>
+              <a:rPr sz="1050" b="0">
+                <a:solidFill>
+                  <a:srgbClr val="000000"/>
+                </a:solidFill>
+                <a:latin typeface="Arial"/>
+              </a:rPr>
+              <a:t>•  </a:t>
+            </a:r>
+            <a:r>
+              <a:rPr sz="1050" b="0">
+                <a:solidFill>
+                  <a:srgbClr val="000000"/>
+                </a:solidFill>
+                <a:latin typeface="Arial"/>
+              </a:rPr>
+              <a:t>Enabled local marketplace tuning at global scale</a:t>
+            </a:r>
+          </a:p>
+          <a:p>
+            <a:pPr algn="l">
+              <a:lnSpc>
+                <a:spcPct val="120000"/>
+              </a:lnSpc>
+              <a:spcAft>
+                <a:spcPts val="1600"/>
+              </a:spcAft>
+            </a:pPr>
+            <a:r>
+              <a:rPr sz="1050" b="0">
+                <a:solidFill>
+                  <a:srgbClr val="000000"/>
+                </a:solidFill>
+                <a:latin typeface="Arial"/>
+              </a:rPr>
+              <a:t>•  </a:t>
+            </a:r>
+            <a:r>
+              <a:rPr sz="1050" b="0">
+                <a:solidFill>
+                  <a:srgbClr val="000000"/>
+                </a:solidFill>
+                <a:latin typeface="Arial"/>
+              </a:rPr>
+              <a:t>Basis for the Uber AI Solutions business line</a:t>
+            </a:r>
+          </a:p>
+        </p:txBody>
+      </p:sp>
+      <p:cxnSp>
+        <p:nvCxnSpPr>
+          <p:cNvPr id="17" name="Connector 16"/>
+          <p:cNvCxnSpPr/>
+          <p:nvPr/>
+        </p:nvCxnSpPr>
+        <p:spPr>
+          <a:xfrm>
+            <a:off x="502920" y="6510528"/>
+            <a:ext cx="11185855" cy="0"/>
+          </a:xfrm>
+          <a:prstGeom prst="line">
+            <a:avLst/>
+          </a:prstGeom>
+          <a:ln w="6350">
+            <a:solidFill>
+              <a:srgbClr val="BFBFBF"/>
+            </a:solidFill>
+          </a:ln>
+          <a:effectLst/>
+        </p:spPr>
+      </p:cxnSp>
+      <p:sp>
+        <p:nvSpPr>
+          <p:cNvPr id="18" name="TextBox 17"/>
+          <p:cNvSpPr txBox="1"/>
+          <p:nvPr/>
+        </p:nvSpPr>
+        <p:spPr>
+          <a:xfrm>
+            <a:off x="502920" y="6583680"/>
+            <a:ext cx="9601200" cy="228600"/>
+          </a:xfrm>
+          <a:prstGeom prst="rect">
+            <a:avLst/>
+          </a:prstGeom>
+          <a:noFill/>
+        </p:spPr>
+        <p:txBody>
+          <a:bodyPr wrap="square" anchor="t" lIns="0" rIns="0" tIns="0" bIns="0">
+            <a:spAutoFit/>
+          </a:bodyPr>
+          <a:lstStyle/>
+          <a:p>
+            <a:pPr algn="l">
+              <a:lnSpc>
+                <a:spcPct val="100000"/>
+              </a:lnSpc>
+              <a:spcAft>
+                <a:spcPts val="0"/>
+              </a:spcAft>
+            </a:pPr>
+            <a:r>
+              <a:rPr sz="750" b="0">
+                <a:solidFill>
+                  <a:srgbClr val="8C8C8C"/>
+                </a:solidFill>
+                <a:latin typeface="Arial"/>
+              </a:rPr>
+              <a:t>Source: Uber public statements, engineering blog and press coverage</a:t>
+            </a:r>
+          </a:p>
+        </p:txBody>
+      </p:sp>
+      <p:sp>
+        <p:nvSpPr>
+          <p:cNvPr id="19" name="TextBox 18"/>
+          <p:cNvSpPr txBox="1"/>
+          <p:nvPr/>
+        </p:nvSpPr>
+        <p:spPr>
+          <a:xfrm>
+            <a:off x="11228832" y="6583680"/>
+            <a:ext cx="457200" cy="228600"/>
+          </a:xfrm>
+          <a:prstGeom prst="rect">
+            <a:avLst/>
+          </a:prstGeom>
+          <a:noFill/>
+        </p:spPr>
+        <p:txBody>
+          <a:bodyPr wrap="square" anchor="t" lIns="0" rIns="0" tIns="0" bIns="0">
+            <a:spAutoFit/>
+          </a:bodyPr>
+          <a:lstStyle/>
+          <a:p>
+            <a:pPr algn="r">
+              <a:lnSpc>
+                <a:spcPct val="100000"/>
+              </a:lnSpc>
+              <a:spcAft>
+                <a:spcPts val="0"/>
+              </a:spcAft>
+            </a:pPr>
+            <a:r>
+              <a:rPr sz="800" b="0">
+                <a:solidFill>
+                  <a:srgbClr val="8C8C8C"/>
+                </a:solidFill>
+                <a:latin typeface="Arial"/>
+              </a:rPr>
+              <a:t>7</a:t>
+            </a:r>
+          </a:p>
+        </p:txBody>
+      </p:sp>
+    </p:spTree>
+  </p:cSld>
+  <p:clrMapOvr>
+    <a:masterClrMapping/>
+  </p:clrMapOvr>
+</p:sld>
+</file>
+
+<file path=ppt/slides/slide8.xml><?xml version="1.0" encoding="utf-8"?>
+<p:sld xmlns:a="http://schemas.openxmlformats.org/drawingml/2006/main" xmlns:p="http://schemas.openxmlformats.org/presentationml/2006/main" xmlns:r="http://schemas.openxmlformats.org/officeDocument/2006/relationships">
+  <p:cSld>
+    <p:spTree>
+      <p:nvGrpSpPr>
+        <p:cNvPr id="1" name=""/>
+        <p:cNvGrpSpPr/>
+        <p:nvPr/>
+      </p:nvGrpSpPr>
+      <p:grpSpPr/>
+      <p:sp>
+        <p:nvSpPr>
+          <p:cNvPr id="2" name="TextBox 1"/>
+          <p:cNvSpPr txBox="1"/>
+          <p:nvPr/>
+        </p:nvSpPr>
+        <p:spPr>
+          <a:xfrm>
+            <a:off x="502920" y="292608"/>
+            <a:ext cx="11185855" cy="685800"/>
+          </a:xfrm>
+          <a:prstGeom prst="rect">
+            <a:avLst/>
+          </a:prstGeom>
+          <a:noFill/>
+        </p:spPr>
+        <p:txBody>
+          <a:bodyPr wrap="square" anchor="t" lIns="0" rIns="0" tIns="0" bIns="0">
+            <a:spAutoFit/>
+          </a:bodyPr>
+          <a:lstStyle/>
+          <a:p>
+            <a:pPr algn="l">
+              <a:lnSpc>
+                <a:spcPct val="105000"/>
+              </a:lnSpc>
+              <a:spcAft>
+                <a:spcPts val="0"/>
+              </a:spcAft>
+            </a:pPr>
+            <a:r>
+              <a:rPr sz="1800" b="1">
+                <a:solidFill>
+                  <a:srgbClr val="000000"/>
+                </a:solidFill>
+                <a:latin typeface="Arial"/>
+              </a:rPr>
+              <a:t>OpenAI built a forward-deployed function to turn frontier models into deployed enterprise systems</a:t>
+            </a:r>
+          </a:p>
+        </p:txBody>
+      </p:sp>
+      <p:cxnSp>
+        <p:nvCxnSpPr>
+          <p:cNvPr id="3" name="Connector 2"/>
+          <p:cNvCxnSpPr/>
+          <p:nvPr/>
+        </p:nvCxnSpPr>
+        <p:spPr>
+          <a:xfrm>
+            <a:off x="502920" y="896112"/>
+            <a:ext cx="11185855" cy="0"/>
+          </a:xfrm>
+          <a:prstGeom prst="line">
+            <a:avLst/>
+          </a:prstGeom>
+          <a:ln w="19050">
+            <a:solidFill>
+              <a:srgbClr val="000000"/>
+            </a:solidFill>
+          </a:ln>
+          <a:effectLst/>
+        </p:spPr>
+      </p:cxnSp>
+      <p:sp>
+        <p:nvSpPr>
+          <p:cNvPr id="4" name="TextBox 3"/>
+          <p:cNvSpPr txBox="1"/>
+          <p:nvPr/>
+        </p:nvSpPr>
+        <p:spPr>
+          <a:xfrm>
+            <a:off x="502920" y="1005840"/>
+            <a:ext cx="11185855" cy="320040"/>
+          </a:xfrm>
+          <a:prstGeom prst="rect">
+            <a:avLst/>
+          </a:prstGeom>
+          <a:noFill/>
+        </p:spPr>
+        <p:txBody>
+          <a:bodyPr wrap="square" anchor="t" lIns="0" rIns="0" tIns="0" bIns="0">
+            <a:spAutoFit/>
+          </a:bodyPr>
+          <a:lstStyle/>
+          <a:p>
+            <a:pPr algn="l">
+              <a:lnSpc>
+                <a:spcPct val="105000"/>
+              </a:lnSpc>
+              <a:spcAft>
+                <a:spcPts val="0"/>
+              </a:spcAft>
+            </a:pPr>
+            <a:r>
+              <a:rPr sz="1600" b="1">
+                <a:solidFill>
+                  <a:srgbClr val="000000"/>
+                </a:solidFill>
+                <a:latin typeface="Arial"/>
+              </a:rPr>
+              <a:t>Backup: OpenAI — model, motivation, differentiation and impact</a:t>
+            </a:r>
+          </a:p>
+        </p:txBody>
+      </p:sp>
+      <p:sp>
+        <p:nvSpPr>
+          <p:cNvPr id="5" name="TextBox 4"/>
+          <p:cNvSpPr txBox="1"/>
+          <p:nvPr/>
+        </p:nvSpPr>
+        <p:spPr>
+          <a:xfrm>
+            <a:off x="502920" y="1755648"/>
+            <a:ext cx="2624328" cy="256032"/>
+          </a:xfrm>
+          <a:prstGeom prst="rect">
+            <a:avLst/>
+          </a:prstGeom>
+          <a:noFill/>
+        </p:spPr>
+        <p:txBody>
+          <a:bodyPr wrap="square" anchor="t" lIns="0" rIns="0" tIns="0" bIns="0">
+            <a:spAutoFit/>
+          </a:bodyPr>
+          <a:lstStyle/>
+          <a:p>
+            <a:pPr algn="l">
+              <a:lnSpc>
+                <a:spcPct val="100000"/>
+              </a:lnSpc>
+              <a:spcAft>
+                <a:spcPts val="0"/>
+              </a:spcAft>
+            </a:pPr>
+            <a:r>
+              <a:rPr sz="1050" b="1">
+                <a:solidFill>
+                  <a:srgbClr val="000000"/>
+                </a:solidFill>
+                <a:latin typeface="Arial"/>
+              </a:rPr>
+              <a:t>What the model looks like</a:t>
+            </a:r>
+          </a:p>
+        </p:txBody>
+      </p:sp>
+      <p:cxnSp>
+        <p:nvCxnSpPr>
+          <p:cNvPr id="6" name="Connector 5"/>
+          <p:cNvCxnSpPr/>
+          <p:nvPr/>
+        </p:nvCxnSpPr>
+        <p:spPr>
+          <a:xfrm>
+            <a:off x="502920" y="2048256"/>
+            <a:ext cx="2624328" cy="0"/>
+          </a:xfrm>
+          <a:prstGeom prst="line">
+            <a:avLst/>
+          </a:prstGeom>
+          <a:ln w="12700">
+            <a:solidFill>
+              <a:srgbClr val="000000"/>
+            </a:solidFill>
+          </a:ln>
+          <a:effectLst/>
+        </p:spPr>
+      </p:cxnSp>
+      <p:sp>
+        <p:nvSpPr>
+          <p:cNvPr id="7" name="TextBox 6"/>
+          <p:cNvSpPr txBox="1"/>
+          <p:nvPr/>
+        </p:nvSpPr>
+        <p:spPr>
+          <a:xfrm>
+            <a:off x="502920" y="2231136"/>
+            <a:ext cx="2624328" cy="4023360"/>
+          </a:xfrm>
+          <a:prstGeom prst="rect">
+            <a:avLst/>
+          </a:prstGeom>
+          <a:noFill/>
+        </p:spPr>
+        <p:txBody>
+          <a:bodyPr wrap="square" anchor="t" lIns="0" rIns="0" tIns="0" bIns="0">
+            <a:spAutoFit/>
+          </a:bodyPr>
+          <a:lstStyle/>
+          <a:p>
+            <a:pPr algn="l">
+              <a:lnSpc>
+                <a:spcPct val="120000"/>
+              </a:lnSpc>
+              <a:spcAft>
+                <a:spcPts val="1600"/>
+              </a:spcAft>
+            </a:pPr>
+            <a:r>
+              <a:rPr sz="1050" b="0">
+                <a:solidFill>
+                  <a:srgbClr val="000000"/>
+                </a:solidFill>
+                <a:latin typeface="Arial"/>
+              </a:rPr>
+              <a:t>•  </a:t>
+            </a:r>
+            <a:r>
+              <a:rPr sz="1050" b="0">
+                <a:solidFill>
+                  <a:srgbClr val="000000"/>
+                </a:solidFill>
+                <a:latin typeface="Arial"/>
+              </a:rPr>
+              <a:t>FDE pods embed within enterprise customer accounts</a:t>
+            </a:r>
+          </a:p>
+          <a:p>
+            <a:pPr algn="l">
+              <a:lnSpc>
+                <a:spcPct val="120000"/>
+              </a:lnSpc>
+              <a:spcAft>
+                <a:spcPts val="1600"/>
+              </a:spcAft>
+            </a:pPr>
+            <a:r>
+              <a:rPr sz="1050" b="0">
+                <a:solidFill>
+                  <a:srgbClr val="000000"/>
+                </a:solidFill>
+                <a:latin typeface="Arial"/>
+              </a:rPr>
+              <a:t>•  </a:t>
+            </a:r>
+            <a:r>
+              <a:rPr sz="1050" b="0">
+                <a:solidFill>
+                  <a:srgbClr val="000000"/>
+                </a:solidFill>
+                <a:latin typeface="Arial"/>
+              </a:rPr>
+              <a:t>Build production agent and workflow deployments on OpenAI models</a:t>
+            </a:r>
+          </a:p>
+          <a:p>
+            <a:pPr algn="l">
+              <a:lnSpc>
+                <a:spcPct val="120000"/>
+              </a:lnSpc>
+              <a:spcAft>
+                <a:spcPts val="1600"/>
+              </a:spcAft>
+            </a:pPr>
+            <a:r>
+              <a:rPr sz="1050" b="0">
+                <a:solidFill>
+                  <a:srgbClr val="000000"/>
+                </a:solidFill>
+                <a:latin typeface="Arial"/>
+              </a:rPr>
+              <a:t>•  </a:t>
+            </a:r>
+            <a:r>
+              <a:rPr sz="1050" b="0">
+                <a:solidFill>
+                  <a:srgbClr val="000000"/>
+                </a:solidFill>
+                <a:latin typeface="Arial"/>
+              </a:rPr>
+              <a:t>Scope spans integration, evaluation and adoption support</a:t>
+            </a:r>
+          </a:p>
+        </p:txBody>
+      </p:sp>
+      <p:sp>
+        <p:nvSpPr>
+          <p:cNvPr id="8" name="TextBox 7"/>
+          <p:cNvSpPr txBox="1"/>
+          <p:nvPr/>
+        </p:nvSpPr>
+        <p:spPr>
+          <a:xfrm>
+            <a:off x="3355848" y="1755648"/>
+            <a:ext cx="2624328" cy="256032"/>
+          </a:xfrm>
+          <a:prstGeom prst="rect">
+            <a:avLst/>
+          </a:prstGeom>
+          <a:noFill/>
+        </p:spPr>
+        <p:txBody>
+          <a:bodyPr wrap="square" anchor="t" lIns="0" rIns="0" tIns="0" bIns="0">
+            <a:spAutoFit/>
+          </a:bodyPr>
+          <a:lstStyle/>
+          <a:p>
+            <a:pPr algn="l">
+              <a:lnSpc>
+                <a:spcPct val="100000"/>
+              </a:lnSpc>
+              <a:spcAft>
+                <a:spcPts val="0"/>
+              </a:spcAft>
+            </a:pPr>
+            <a:r>
+              <a:rPr sz="1050" b="1">
+                <a:solidFill>
+                  <a:srgbClr val="000000"/>
+                </a:solidFill>
+                <a:latin typeface="Arial"/>
+              </a:rPr>
+              <a:t>Why they moved to it</a:t>
+            </a:r>
+          </a:p>
+        </p:txBody>
+      </p:sp>
+      <p:cxnSp>
+        <p:nvCxnSpPr>
+          <p:cNvPr id="9" name="Connector 8"/>
+          <p:cNvCxnSpPr/>
+          <p:nvPr/>
+        </p:nvCxnSpPr>
+        <p:spPr>
+          <a:xfrm>
+            <a:off x="3355848" y="2048256"/>
+            <a:ext cx="2624328" cy="0"/>
+          </a:xfrm>
+          <a:prstGeom prst="line">
+            <a:avLst/>
+          </a:prstGeom>
+          <a:ln w="12700">
+            <a:solidFill>
+              <a:srgbClr val="000000"/>
+            </a:solidFill>
+          </a:ln>
+          <a:effectLst/>
+        </p:spPr>
+      </p:cxnSp>
+      <p:sp>
+        <p:nvSpPr>
+          <p:cNvPr id="10" name="TextBox 9"/>
+          <p:cNvSpPr txBox="1"/>
+          <p:nvPr/>
+        </p:nvSpPr>
+        <p:spPr>
+          <a:xfrm>
+            <a:off x="3355848" y="2231136"/>
+            <a:ext cx="2624328" cy="4023360"/>
+          </a:xfrm>
+          <a:prstGeom prst="rect">
+            <a:avLst/>
+          </a:prstGeom>
+          <a:noFill/>
+        </p:spPr>
+        <p:txBody>
+          <a:bodyPr wrap="square" anchor="t" lIns="0" rIns="0" tIns="0" bIns="0">
+            <a:spAutoFit/>
+          </a:bodyPr>
+          <a:lstStyle/>
+          <a:p>
+            <a:pPr algn="l">
+              <a:lnSpc>
+                <a:spcPct val="120000"/>
+              </a:lnSpc>
+              <a:spcAft>
+                <a:spcPts val="1600"/>
+              </a:spcAft>
+            </a:pPr>
+            <a:r>
+              <a:rPr sz="1050" b="0">
+                <a:solidFill>
+                  <a:srgbClr val="000000"/>
+                </a:solidFill>
+                <a:latin typeface="Arial"/>
+              </a:rPr>
+              <a:t>•  </a:t>
+            </a:r>
+            <a:r>
+              <a:rPr sz="1050" b="0">
+                <a:solidFill>
+                  <a:srgbClr val="000000"/>
+                </a:solidFill>
+                <a:latin typeface="Arial"/>
+              </a:rPr>
+              <a:t>Model capability outpaced enterprise ability to absorb it</a:t>
+            </a:r>
+          </a:p>
+          <a:p>
+            <a:pPr algn="l">
+              <a:lnSpc>
+                <a:spcPct val="120000"/>
+              </a:lnSpc>
+              <a:spcAft>
+                <a:spcPts val="1600"/>
+              </a:spcAft>
+            </a:pPr>
+            <a:r>
+              <a:rPr sz="1050" b="0">
+                <a:solidFill>
+                  <a:srgbClr val="000000"/>
+                </a:solidFill>
+                <a:latin typeface="Arial"/>
+              </a:rPr>
+              <a:t>•  </a:t>
+            </a:r>
+            <a:r>
+              <a:rPr sz="1050" b="0">
+                <a:solidFill>
+                  <a:srgbClr val="000000"/>
+                </a:solidFill>
+                <a:latin typeface="Arial"/>
+              </a:rPr>
+              <a:t>API access alone did not convert into production use cases</a:t>
+            </a:r>
+          </a:p>
+          <a:p>
+            <a:pPr algn="l">
+              <a:lnSpc>
+                <a:spcPct val="120000"/>
+              </a:lnSpc>
+              <a:spcAft>
+                <a:spcPts val="1600"/>
+              </a:spcAft>
+            </a:pPr>
+            <a:r>
+              <a:rPr sz="1050" b="0">
+                <a:solidFill>
+                  <a:srgbClr val="000000"/>
+                </a:solidFill>
+                <a:latin typeface="Arial"/>
+              </a:rPr>
+              <a:t>•  </a:t>
+            </a:r>
+            <a:r>
+              <a:rPr sz="1050" b="0">
+                <a:solidFill>
+                  <a:srgbClr val="000000"/>
+                </a:solidFill>
+                <a:latin typeface="Arial"/>
+              </a:rPr>
+              <a:t>Competition for enterprise adoption intensified</a:t>
+            </a:r>
+          </a:p>
+        </p:txBody>
+      </p:sp>
+      <p:sp>
+        <p:nvSpPr>
+          <p:cNvPr id="11" name="TextBox 10"/>
+          <p:cNvSpPr txBox="1"/>
+          <p:nvPr/>
+        </p:nvSpPr>
+        <p:spPr>
+          <a:xfrm>
+            <a:off x="6208776" y="1755648"/>
+            <a:ext cx="2624328" cy="256032"/>
+          </a:xfrm>
+          <a:prstGeom prst="rect">
+            <a:avLst/>
+          </a:prstGeom>
+          <a:noFill/>
+        </p:spPr>
+        <p:txBody>
+          <a:bodyPr wrap="square" anchor="t" lIns="0" rIns="0" tIns="0" bIns="0">
+            <a:spAutoFit/>
+          </a:bodyPr>
+          <a:lstStyle/>
+          <a:p>
+            <a:pPr algn="l">
+              <a:lnSpc>
+                <a:spcPct val="100000"/>
+              </a:lnSpc>
+              <a:spcAft>
+                <a:spcPts val="0"/>
+              </a:spcAft>
+            </a:pPr>
+            <a:r>
+              <a:rPr sz="1050" b="1">
+                <a:solidFill>
+                  <a:srgbClr val="000000"/>
+                </a:solidFill>
+                <a:latin typeface="Arial"/>
+              </a:rPr>
+              <a:t>What sets it apart</a:t>
+            </a:r>
+          </a:p>
+        </p:txBody>
+      </p:sp>
+      <p:cxnSp>
+        <p:nvCxnSpPr>
+          <p:cNvPr id="12" name="Connector 11"/>
+          <p:cNvCxnSpPr/>
+          <p:nvPr/>
+        </p:nvCxnSpPr>
+        <p:spPr>
+          <a:xfrm>
+            <a:off x="6208776" y="2048256"/>
+            <a:ext cx="2624328" cy="0"/>
+          </a:xfrm>
+          <a:prstGeom prst="line">
+            <a:avLst/>
+          </a:prstGeom>
+          <a:ln w="12700">
+            <a:solidFill>
+              <a:srgbClr val="000000"/>
+            </a:solidFill>
+          </a:ln>
+          <a:effectLst/>
+        </p:spPr>
+      </p:cxnSp>
+      <p:sp>
+        <p:nvSpPr>
+          <p:cNvPr id="13" name="TextBox 12"/>
+          <p:cNvSpPr txBox="1"/>
+          <p:nvPr/>
+        </p:nvSpPr>
+        <p:spPr>
+          <a:xfrm>
+            <a:off x="6208776" y="2231136"/>
+            <a:ext cx="2624328" cy="4023360"/>
+          </a:xfrm>
+          <a:prstGeom prst="rect">
+            <a:avLst/>
+          </a:prstGeom>
+          <a:noFill/>
+        </p:spPr>
+        <p:txBody>
+          <a:bodyPr wrap="square" anchor="t" lIns="0" rIns="0" tIns="0" bIns="0">
+            <a:spAutoFit/>
+          </a:bodyPr>
+          <a:lstStyle/>
+          <a:p>
+            <a:pPr algn="l">
+              <a:lnSpc>
+                <a:spcPct val="120000"/>
+              </a:lnSpc>
+              <a:spcAft>
+                <a:spcPts val="1600"/>
+              </a:spcAft>
+            </a:pPr>
+            <a:r>
+              <a:rPr sz="1050" b="0">
+                <a:solidFill>
+                  <a:srgbClr val="000000"/>
+                </a:solidFill>
+                <a:latin typeface="Arial"/>
+              </a:rPr>
+              <a:t>•  </a:t>
+            </a:r>
+            <a:r>
+              <a:rPr sz="1050" b="0">
+                <a:solidFill>
+                  <a:srgbClr val="000000"/>
+                </a:solidFill>
+                <a:latin typeface="Arial"/>
+              </a:rPr>
+              <a:t>Proximity to frontier research within customer engagements</a:t>
+            </a:r>
+          </a:p>
+          <a:p>
+            <a:pPr algn="l">
+              <a:lnSpc>
+                <a:spcPct val="120000"/>
+              </a:lnSpc>
+              <a:spcAft>
+                <a:spcPts val="1600"/>
+              </a:spcAft>
+            </a:pPr>
+            <a:r>
+              <a:rPr sz="1050" b="0">
+                <a:solidFill>
+                  <a:srgbClr val="000000"/>
+                </a:solidFill>
+                <a:latin typeface="Arial"/>
+              </a:rPr>
+              <a:t>•  </a:t>
+            </a:r>
+            <a:r>
+              <a:rPr sz="1050" b="0">
+                <a:solidFill>
+                  <a:srgbClr val="000000"/>
+                </a:solidFill>
+                <a:latin typeface="Arial"/>
+              </a:rPr>
+              <a:t>Field signal shapes model and product priorities</a:t>
+            </a:r>
+          </a:p>
+          <a:p>
+            <a:pPr algn="l">
+              <a:lnSpc>
+                <a:spcPct val="120000"/>
+              </a:lnSpc>
+              <a:spcAft>
+                <a:spcPts val="1600"/>
+              </a:spcAft>
+            </a:pPr>
+            <a:r>
+              <a:rPr sz="1050" b="0">
+                <a:solidFill>
+                  <a:srgbClr val="000000"/>
+                </a:solidFill>
+                <a:latin typeface="Arial"/>
+              </a:rPr>
+              <a:t>•  </a:t>
+            </a:r>
+            <a:r>
+              <a:rPr sz="1050" b="0">
+                <a:solidFill>
+                  <a:srgbClr val="000000"/>
+                </a:solidFill>
+                <a:latin typeface="Arial"/>
+              </a:rPr>
+              <a:t>Deployment patterns feed reusable product features</a:t>
+            </a:r>
+          </a:p>
+        </p:txBody>
+      </p:sp>
+      <p:sp>
+        <p:nvSpPr>
+          <p:cNvPr id="14" name="TextBox 13"/>
+          <p:cNvSpPr txBox="1"/>
+          <p:nvPr/>
+        </p:nvSpPr>
+        <p:spPr>
+          <a:xfrm>
+            <a:off x="9061704" y="1755648"/>
+            <a:ext cx="2624328" cy="256032"/>
+          </a:xfrm>
+          <a:prstGeom prst="rect">
+            <a:avLst/>
+          </a:prstGeom>
+          <a:noFill/>
+        </p:spPr>
+        <p:txBody>
+          <a:bodyPr wrap="square" anchor="t" lIns="0" rIns="0" tIns="0" bIns="0">
+            <a:spAutoFit/>
+          </a:bodyPr>
+          <a:lstStyle/>
+          <a:p>
+            <a:pPr algn="l">
+              <a:lnSpc>
+                <a:spcPct val="100000"/>
+              </a:lnSpc>
+              <a:spcAft>
+                <a:spcPts val="0"/>
+              </a:spcAft>
+            </a:pPr>
+            <a:r>
+              <a:rPr sz="1050" b="1">
+                <a:solidFill>
+                  <a:srgbClr val="000000"/>
+                </a:solidFill>
+                <a:latin typeface="Arial"/>
+              </a:rPr>
+              <a:t>Impact to date</a:t>
+            </a:r>
+          </a:p>
+        </p:txBody>
+      </p:sp>
+      <p:cxnSp>
+        <p:nvCxnSpPr>
+          <p:cNvPr id="15" name="Connector 14"/>
+          <p:cNvCxnSpPr/>
+          <p:nvPr/>
+        </p:nvCxnSpPr>
+        <p:spPr>
+          <a:xfrm>
+            <a:off x="9061704" y="2048256"/>
+            <a:ext cx="2624328" cy="0"/>
+          </a:xfrm>
+          <a:prstGeom prst="line">
+            <a:avLst/>
+          </a:prstGeom>
+          <a:ln w="12700">
+            <a:solidFill>
+              <a:srgbClr val="000000"/>
+            </a:solidFill>
+          </a:ln>
+          <a:effectLst/>
+        </p:spPr>
+      </p:cxnSp>
+      <p:sp>
+        <p:nvSpPr>
+          <p:cNvPr id="16" name="TextBox 15"/>
+          <p:cNvSpPr txBox="1"/>
+          <p:nvPr/>
+        </p:nvSpPr>
+        <p:spPr>
+          <a:xfrm>
+            <a:off x="9061704" y="2231136"/>
+            <a:ext cx="2624328" cy="4023360"/>
+          </a:xfrm>
+          <a:prstGeom prst="rect">
+            <a:avLst/>
+          </a:prstGeom>
+          <a:noFill/>
+        </p:spPr>
+        <p:txBody>
+          <a:bodyPr wrap="square" anchor="t" lIns="0" rIns="0" tIns="0" bIns="0">
+            <a:spAutoFit/>
+          </a:bodyPr>
+          <a:lstStyle/>
+          <a:p>
+            <a:pPr algn="l">
+              <a:lnSpc>
+                <a:spcPct val="120000"/>
+              </a:lnSpc>
+              <a:spcAft>
+                <a:spcPts val="1600"/>
+              </a:spcAft>
+            </a:pPr>
+            <a:r>
+              <a:rPr sz="1050" b="0">
+                <a:solidFill>
+                  <a:srgbClr val="000000"/>
+                </a:solidFill>
+                <a:latin typeface="Arial"/>
+              </a:rPr>
+              <a:t>•  </a:t>
+            </a:r>
+            <a:r>
+              <a:rPr sz="1050" b="0">
+                <a:solidFill>
+                  <a:srgbClr val="000000"/>
+                </a:solidFill>
+                <a:latin typeface="Arial"/>
+              </a:rPr>
+              <a:t>Positions FDEs as core to enterprise adoption</a:t>
+            </a:r>
+          </a:p>
+          <a:p>
+            <a:pPr algn="l">
+              <a:lnSpc>
+                <a:spcPct val="120000"/>
+              </a:lnSpc>
+              <a:spcAft>
+                <a:spcPts val="1600"/>
+              </a:spcAft>
+            </a:pPr>
+            <a:r>
+              <a:rPr sz="1050" b="0">
+                <a:solidFill>
+                  <a:srgbClr val="000000"/>
+                </a:solidFill>
+                <a:latin typeface="Arial"/>
+              </a:rPr>
+              <a:t>•  </a:t>
+            </a:r>
+            <a:r>
+              <a:rPr sz="1050" b="0">
+                <a:solidFill>
+                  <a:srgbClr val="000000"/>
+                </a:solidFill>
+                <a:latin typeface="Arial"/>
+              </a:rPr>
+              <a:t>Enterprise agent deployments built with embedded teams publicly showcased</a:t>
+            </a:r>
+          </a:p>
+        </p:txBody>
+      </p:sp>
+      <p:cxnSp>
+        <p:nvCxnSpPr>
+          <p:cNvPr id="17" name="Connector 16"/>
+          <p:cNvCxnSpPr/>
+          <p:nvPr/>
+        </p:nvCxnSpPr>
+        <p:spPr>
+          <a:xfrm>
+            <a:off x="502920" y="6510528"/>
+            <a:ext cx="11185855" cy="0"/>
+          </a:xfrm>
+          <a:prstGeom prst="line">
+            <a:avLst/>
+          </a:prstGeom>
+          <a:ln w="6350">
+            <a:solidFill>
+              <a:srgbClr val="BFBFBF"/>
+            </a:solidFill>
+          </a:ln>
+          <a:effectLst/>
+        </p:spPr>
+      </p:cxnSp>
+      <p:sp>
+        <p:nvSpPr>
+          <p:cNvPr id="18" name="TextBox 17"/>
+          <p:cNvSpPr txBox="1"/>
+          <p:nvPr/>
+        </p:nvSpPr>
+        <p:spPr>
+          <a:xfrm>
+            <a:off x="502920" y="6583680"/>
+            <a:ext cx="9601200" cy="228600"/>
+          </a:xfrm>
+          <a:prstGeom prst="rect">
+            <a:avLst/>
+          </a:prstGeom>
+          <a:noFill/>
+        </p:spPr>
+        <p:txBody>
+          <a:bodyPr wrap="square" anchor="t" lIns="0" rIns="0" tIns="0" bIns="0">
+            <a:spAutoFit/>
+          </a:bodyPr>
+          <a:lstStyle/>
+          <a:p>
+            <a:pPr algn="l">
+              <a:lnSpc>
+                <a:spcPct val="100000"/>
+              </a:lnSpc>
+              <a:spcAft>
+                <a:spcPts val="0"/>
+              </a:spcAft>
+            </a:pPr>
+            <a:r>
+              <a:rPr sz="750" b="0">
+                <a:solidFill>
+                  <a:srgbClr val="8C8C8C"/>
+                </a:solidFill>
+                <a:latin typeface="Arial"/>
+              </a:rPr>
+              <a:t>Source: OpenAI public statements, hiring posts and press coverage</a:t>
+            </a:r>
+          </a:p>
+        </p:txBody>
+      </p:sp>
+      <p:sp>
+        <p:nvSpPr>
+          <p:cNvPr id="19" name="TextBox 18"/>
+          <p:cNvSpPr txBox="1"/>
+          <p:nvPr/>
+        </p:nvSpPr>
+        <p:spPr>
+          <a:xfrm>
+            <a:off x="11228832" y="6583680"/>
+            <a:ext cx="457200" cy="228600"/>
+          </a:xfrm>
+          <a:prstGeom prst="rect">
+            <a:avLst/>
+          </a:prstGeom>
+          <a:noFill/>
+        </p:spPr>
+        <p:txBody>
+          <a:bodyPr wrap="square" anchor="t" lIns="0" rIns="0" tIns="0" bIns="0">
+            <a:spAutoFit/>
+          </a:bodyPr>
+          <a:lstStyle/>
+          <a:p>
+            <a:pPr algn="r">
+              <a:lnSpc>
+                <a:spcPct val="100000"/>
+              </a:lnSpc>
+              <a:spcAft>
+                <a:spcPts val="0"/>
+              </a:spcAft>
+            </a:pPr>
+            <a:r>
+              <a:rPr sz="800" b="0">
+                <a:solidFill>
+                  <a:srgbClr val="8C8C8C"/>
+                </a:solidFill>
+                <a:latin typeface="Arial"/>
+              </a:rPr>
+              <a:t>8</a:t>
+            </a:r>
+          </a:p>
+        </p:txBody>
+      </p:sp>
+    </p:spTree>
+  </p:cSld>
+  <p:clrMapOvr>
+    <a:masterClrMapping/>
+  </p:clrMapOvr>
+</p:sld>
+</file>
+
+<file path=ppt/slides/slide9.xml><?xml version="1.0" encoding="utf-8"?>
+<p:sld xmlns:a="http://schemas.openxmlformats.org/drawingml/2006/main" xmlns:p="http://schemas.openxmlformats.org/presentationml/2006/main" xmlns:r="http://schemas.openxmlformats.org/officeDocument/2006/relationships">
+  <p:cSld>
+    <p:spTree>
+      <p:nvGrpSpPr>
+        <p:cNvPr id="1" name=""/>
+        <p:cNvGrpSpPr/>
+        <p:nvPr/>
+      </p:nvGrpSpPr>
+      <p:grpSpPr/>
+      <p:sp>
+        <p:nvSpPr>
+          <p:cNvPr id="2" name="TextBox 1"/>
+          <p:cNvSpPr txBox="1"/>
+          <p:nvPr/>
+        </p:nvSpPr>
+        <p:spPr>
+          <a:xfrm>
+            <a:off x="502920" y="292608"/>
+            <a:ext cx="11185855" cy="685800"/>
+          </a:xfrm>
+          <a:prstGeom prst="rect">
+            <a:avLst/>
+          </a:prstGeom>
+          <a:noFill/>
+        </p:spPr>
+        <p:txBody>
+          <a:bodyPr wrap="square" anchor="t" lIns="0" rIns="0" tIns="0" bIns="0">
+            <a:spAutoFit/>
+          </a:bodyPr>
+          <a:lstStyle/>
+          <a:p>
+            <a:pPr algn="l">
+              <a:lnSpc>
+                <a:spcPct val="105000"/>
+              </a:lnSpc>
+              <a:spcAft>
+                <a:spcPts val="0"/>
+              </a:spcAft>
+            </a:pPr>
+            <a:r>
+              <a:rPr sz="1800" b="1">
+                <a:solidFill>
+                  <a:srgbClr val="000000"/>
+                </a:solidFill>
+                <a:latin typeface="Arial"/>
+              </a:rPr>
+              <a:t>ElevenLabs uses forward-deployed engineers to compress time-to-production for enterprise voice agents</a:t>
+            </a:r>
+          </a:p>
+        </p:txBody>
+      </p:sp>
+      <p:cxnSp>
+        <p:nvCxnSpPr>
+          <p:cNvPr id="3" name="Connector 2"/>
+          <p:cNvCxnSpPr/>
+          <p:nvPr/>
+        </p:nvCxnSpPr>
+        <p:spPr>
+          <a:xfrm>
+            <a:off x="502920" y="896112"/>
+            <a:ext cx="11185855" cy="0"/>
+          </a:xfrm>
+          <a:prstGeom prst="line">
+            <a:avLst/>
+          </a:prstGeom>
+          <a:ln w="19050">
+            <a:solidFill>
+              <a:srgbClr val="000000"/>
+            </a:solidFill>
+          </a:ln>
+          <a:effectLst/>
+        </p:spPr>
+      </p:cxnSp>
+      <p:sp>
+        <p:nvSpPr>
+          <p:cNvPr id="4" name="TextBox 3"/>
+          <p:cNvSpPr txBox="1"/>
+          <p:nvPr/>
+        </p:nvSpPr>
+        <p:spPr>
+          <a:xfrm>
+            <a:off x="502920" y="1005840"/>
+            <a:ext cx="11185855" cy="320040"/>
+          </a:xfrm>
+          <a:prstGeom prst="rect">
+            <a:avLst/>
+          </a:prstGeom>
+          <a:noFill/>
+        </p:spPr>
+        <p:txBody>
+          <a:bodyPr wrap="square" anchor="t" lIns="0" rIns="0" tIns="0" bIns="0">
+            <a:spAutoFit/>
+          </a:bodyPr>
+          <a:lstStyle/>
+          <a:p>
+            <a:pPr algn="l">
+              <a:lnSpc>
+                <a:spcPct val="105000"/>
+              </a:lnSpc>
+              <a:spcAft>
+                <a:spcPts val="0"/>
+              </a:spcAft>
+            </a:pPr>
+            <a:r>
+              <a:rPr sz="1600" b="1">
+                <a:solidFill>
+                  <a:srgbClr val="000000"/>
+                </a:solidFill>
+                <a:latin typeface="Arial"/>
+              </a:rPr>
+              <a:t>Backup: ElevenLabs — model, motivation, differentiation and impact</a:t>
+            </a:r>
+          </a:p>
+        </p:txBody>
+      </p:sp>
+      <p:sp>
+        <p:nvSpPr>
+          <p:cNvPr id="5" name="TextBox 4"/>
+          <p:cNvSpPr txBox="1"/>
+          <p:nvPr/>
+        </p:nvSpPr>
+        <p:spPr>
+          <a:xfrm>
+            <a:off x="502920" y="1755648"/>
+            <a:ext cx="2624328" cy="256032"/>
+          </a:xfrm>
+          <a:prstGeom prst="rect">
+            <a:avLst/>
+          </a:prstGeom>
+          <a:noFill/>
+        </p:spPr>
+        <p:txBody>
+          <a:bodyPr wrap="square" anchor="t" lIns="0" rIns="0" tIns="0" bIns="0">
+            <a:spAutoFit/>
+          </a:bodyPr>
+          <a:lstStyle/>
+          <a:p>
+            <a:pPr algn="l">
+              <a:lnSpc>
+                <a:spcPct val="100000"/>
+              </a:lnSpc>
+              <a:spcAft>
+                <a:spcPts val="0"/>
+              </a:spcAft>
+            </a:pPr>
+            <a:r>
+              <a:rPr sz="1050" b="1">
+                <a:solidFill>
+                  <a:srgbClr val="000000"/>
+                </a:solidFill>
+                <a:latin typeface="Arial"/>
+              </a:rPr>
+              <a:t>What the model looks like</a:t>
+            </a:r>
+          </a:p>
+        </p:txBody>
+      </p:sp>
+      <p:cxnSp>
+        <p:nvCxnSpPr>
+          <p:cNvPr id="6" name="Connector 5"/>
+          <p:cNvCxnSpPr/>
+          <p:nvPr/>
+        </p:nvCxnSpPr>
+        <p:spPr>
+          <a:xfrm>
+            <a:off x="502920" y="2048256"/>
+            <a:ext cx="2624328" cy="0"/>
+          </a:xfrm>
+          <a:prstGeom prst="line">
+            <a:avLst/>
+          </a:prstGeom>
+          <a:ln w="12700">
+            <a:solidFill>
+              <a:srgbClr val="000000"/>
+            </a:solidFill>
+          </a:ln>
+          <a:effectLst/>
+        </p:spPr>
+      </p:cxnSp>
+      <p:sp>
+        <p:nvSpPr>
+          <p:cNvPr id="7" name="TextBox 6"/>
+          <p:cNvSpPr txBox="1"/>
+          <p:nvPr/>
+        </p:nvSpPr>
+        <p:spPr>
+          <a:xfrm>
+            <a:off x="502920" y="2231136"/>
+            <a:ext cx="2624328" cy="4023360"/>
+          </a:xfrm>
+          <a:prstGeom prst="rect">
+            <a:avLst/>
+          </a:prstGeom>
+          <a:noFill/>
+        </p:spPr>
+        <p:txBody>
+          <a:bodyPr wrap="square" anchor="t" lIns="0" rIns="0" tIns="0" bIns="0">
+            <a:spAutoFit/>
+          </a:bodyPr>
+          <a:lstStyle/>
+          <a:p>
+            <a:pPr algn="l">
+              <a:lnSpc>
+                <a:spcPct val="120000"/>
+              </a:lnSpc>
+              <a:spcAft>
+                <a:spcPts val="1600"/>
+              </a:spcAft>
+            </a:pPr>
+            <a:r>
+              <a:rPr sz="1050" b="0">
+                <a:solidFill>
+                  <a:srgbClr val="000000"/>
+                </a:solidFill>
+                <a:latin typeface="Arial"/>
+              </a:rPr>
+              <a:t>•  </a:t>
+            </a:r>
+            <a:r>
+              <a:rPr sz="1050" b="0">
+                <a:solidFill>
+                  <a:srgbClr val="000000"/>
+                </a:solidFill>
+                <a:latin typeface="Arial"/>
+              </a:rPr>
+              <a:t>FDEs co-build production voice agents with customer engineering teams</a:t>
+            </a:r>
+          </a:p>
+          <a:p>
+            <a:pPr algn="l">
+              <a:lnSpc>
+                <a:spcPct val="120000"/>
+              </a:lnSpc>
+              <a:spcAft>
+                <a:spcPts val="1600"/>
+              </a:spcAft>
+            </a:pPr>
+            <a:r>
+              <a:rPr sz="1050" b="0">
+                <a:solidFill>
+                  <a:srgbClr val="000000"/>
+                </a:solidFill>
+                <a:latin typeface="Arial"/>
+              </a:rPr>
+              <a:t>•  </a:t>
+            </a:r>
+            <a:r>
+              <a:rPr sz="1050" b="0">
+                <a:solidFill>
+                  <a:srgbClr val="000000"/>
+                </a:solidFill>
+                <a:latin typeface="Arial"/>
+              </a:rPr>
+              <a:t>Engagements run end-to-end: design, integration, evaluation, launch</a:t>
+            </a:r>
+          </a:p>
+        </p:txBody>
+      </p:sp>
+      <p:sp>
+        <p:nvSpPr>
+          <p:cNvPr id="8" name="TextBox 7"/>
+          <p:cNvSpPr txBox="1"/>
+          <p:nvPr/>
+        </p:nvSpPr>
+        <p:spPr>
+          <a:xfrm>
+            <a:off x="3355848" y="1755648"/>
+            <a:ext cx="2624328" cy="256032"/>
+          </a:xfrm>
+          <a:prstGeom prst="rect">
+            <a:avLst/>
+          </a:prstGeom>
+          <a:noFill/>
+        </p:spPr>
+        <p:txBody>
+          <a:bodyPr wrap="square" anchor="t" lIns="0" rIns="0" tIns="0" bIns="0">
+            <a:spAutoFit/>
+          </a:bodyPr>
+          <a:lstStyle/>
+          <a:p>
+            <a:pPr algn="l">
+              <a:lnSpc>
+                <a:spcPct val="100000"/>
+              </a:lnSpc>
+              <a:spcAft>
+                <a:spcPts val="0"/>
+              </a:spcAft>
+            </a:pPr>
+            <a:r>
+              <a:rPr sz="1050" b="1">
+                <a:solidFill>
+                  <a:srgbClr val="000000"/>
+                </a:solidFill>
+                <a:latin typeface="Arial"/>
+              </a:rPr>
+              <a:t>Why they moved to it</a:t>
+            </a:r>
+          </a:p>
+        </p:txBody>
+      </p:sp>
+      <p:cxnSp>
+        <p:nvCxnSpPr>
+          <p:cNvPr id="9" name="Connector 8"/>
+          <p:cNvCxnSpPr/>
+          <p:nvPr/>
+        </p:nvCxnSpPr>
+        <p:spPr>
+          <a:xfrm>
+            <a:off x="3355848" y="2048256"/>
+            <a:ext cx="2624328" cy="0"/>
+          </a:xfrm>
+          <a:prstGeom prst="line">
+            <a:avLst/>
+          </a:prstGeom>
+          <a:ln w="12700">
+            <a:solidFill>
+              <a:srgbClr val="000000"/>
+            </a:solidFill>
+          </a:ln>
+          <a:effectLst/>
+        </p:spPr>
+      </p:cxnSp>
+      <p:sp>
+        <p:nvSpPr>
+          <p:cNvPr id="10" name="TextBox 9"/>
+          <p:cNvSpPr txBox="1"/>
+          <p:nvPr/>
+        </p:nvSpPr>
+        <p:spPr>
+          <a:xfrm>
+            <a:off x="3355848" y="2231136"/>
+            <a:ext cx="2624328" cy="4023360"/>
+          </a:xfrm>
+          <a:prstGeom prst="rect">
+            <a:avLst/>
+          </a:prstGeom>
+          <a:noFill/>
+        </p:spPr>
+        <p:txBody>
+          <a:bodyPr wrap="square" anchor="t" lIns="0" rIns="0" tIns="0" bIns="0">
+            <a:spAutoFit/>
+          </a:bodyPr>
+          <a:lstStyle/>
+          <a:p>
+            <a:pPr algn="l">
+              <a:lnSpc>
+                <a:spcPct val="120000"/>
+              </a:lnSpc>
+              <a:spcAft>
+                <a:spcPts val="1600"/>
+              </a:spcAft>
+            </a:pPr>
+            <a:r>
+              <a:rPr sz="1050" b="0">
+                <a:solidFill>
+                  <a:srgbClr val="000000"/>
+                </a:solidFill>
+                <a:latin typeface="Arial"/>
+              </a:rPr>
+              <a:t>•  </a:t>
+            </a:r>
+            <a:r>
+              <a:rPr sz="1050" b="0">
+                <a:solidFill>
+                  <a:srgbClr val="000000"/>
+                </a:solidFill>
+                <a:latin typeface="Arial"/>
+              </a:rPr>
+              <a:t>Voice agents demand domain-specific tuning customers could not do alone</a:t>
+            </a:r>
+          </a:p>
+          <a:p>
+            <a:pPr algn="l">
+              <a:lnSpc>
+                <a:spcPct val="120000"/>
+              </a:lnSpc>
+              <a:spcAft>
+                <a:spcPts val="1600"/>
+              </a:spcAft>
+            </a:pPr>
+            <a:r>
+              <a:rPr sz="1050" b="0">
+                <a:solidFill>
+                  <a:srgbClr val="000000"/>
+                </a:solidFill>
+                <a:latin typeface="Arial"/>
+              </a:rPr>
+              <a:t>•  </a:t>
+            </a:r>
+            <a:r>
+              <a:rPr sz="1050" b="0">
+                <a:solidFill>
+                  <a:srgbClr val="000000"/>
+                </a:solidFill>
+                <a:latin typeface="Arial"/>
+              </a:rPr>
+              <a:t>Enterprise buyers required proof in production, not demonstrations</a:t>
+            </a:r>
+          </a:p>
+        </p:txBody>
+      </p:sp>
+      <p:sp>
+        <p:nvSpPr>
+          <p:cNvPr id="11" name="TextBox 10"/>
+          <p:cNvSpPr txBox="1"/>
+          <p:nvPr/>
+        </p:nvSpPr>
+        <p:spPr>
+          <a:xfrm>
+            <a:off x="6208776" y="1755648"/>
+            <a:ext cx="2624328" cy="256032"/>
+          </a:xfrm>
+          <a:prstGeom prst="rect">
+            <a:avLst/>
+          </a:prstGeom>
+          <a:noFill/>
+        </p:spPr>
+        <p:txBody>
+          <a:bodyPr wrap="square" anchor="t" lIns="0" rIns="0" tIns="0" bIns="0">
+            <a:spAutoFit/>
+          </a:bodyPr>
+          <a:lstStyle/>
+          <a:p>
+            <a:pPr algn="l">
+              <a:lnSpc>
+                <a:spcPct val="100000"/>
+              </a:lnSpc>
+              <a:spcAft>
+                <a:spcPts val="0"/>
+              </a:spcAft>
+            </a:pPr>
+            <a:r>
+              <a:rPr sz="1050" b="1">
+                <a:solidFill>
+                  <a:srgbClr val="000000"/>
+                </a:solidFill>
+                <a:latin typeface="Arial"/>
+              </a:rPr>
+              <a:t>What sets it apart</a:t>
+            </a:r>
+          </a:p>
+        </p:txBody>
+      </p:sp>
+      <p:cxnSp>
+        <p:nvCxnSpPr>
+          <p:cNvPr id="12" name="Connector 11"/>
+          <p:cNvCxnSpPr/>
+          <p:nvPr/>
+        </p:nvCxnSpPr>
+        <p:spPr>
+          <a:xfrm>
+            <a:off x="6208776" y="2048256"/>
+            <a:ext cx="2624328" cy="0"/>
+          </a:xfrm>
+          <a:prstGeom prst="line">
+            <a:avLst/>
+          </a:prstGeom>
+          <a:ln w="12700">
+            <a:solidFill>
+              <a:srgbClr val="000000"/>
+            </a:solidFill>
+          </a:ln>
+          <a:effectLst/>
+        </p:spPr>
+      </p:cxnSp>
+      <p:sp>
+        <p:nvSpPr>
+          <p:cNvPr id="13" name="TextBox 12"/>
+          <p:cNvSpPr txBox="1"/>
+          <p:nvPr/>
+        </p:nvSpPr>
+        <p:spPr>
+          <a:xfrm>
+            <a:off x="6208776" y="2231136"/>
+            <a:ext cx="2624328" cy="4023360"/>
+          </a:xfrm>
+          <a:prstGeom prst="rect">
+            <a:avLst/>
+          </a:prstGeom>
+          <a:noFill/>
+        </p:spPr>
+        <p:txBody>
+          <a:bodyPr wrap="square" anchor="t" lIns="0" rIns="0" tIns="0" bIns="0">
+            <a:spAutoFit/>
+          </a:bodyPr>
+          <a:lstStyle/>
+          <a:p>
+            <a:pPr algn="l">
+              <a:lnSpc>
+                <a:spcPct val="120000"/>
+              </a:lnSpc>
+              <a:spcAft>
+                <a:spcPts val="1600"/>
+              </a:spcAft>
+            </a:pPr>
+            <a:r>
+              <a:rPr sz="1050" b="0">
+                <a:solidFill>
+                  <a:srgbClr val="000000"/>
+                </a:solidFill>
+                <a:latin typeface="Arial"/>
+              </a:rPr>
+              <a:t>•  </a:t>
+            </a:r>
+            <a:r>
+              <a:rPr sz="1050" b="0">
+                <a:solidFill>
+                  <a:srgbClr val="000000"/>
+                </a:solidFill>
+                <a:latin typeface="Arial"/>
+              </a:rPr>
+              <a:t>Deep voice and audio specialization applied inside customer stacks</a:t>
+            </a:r>
+          </a:p>
+          <a:p>
+            <a:pPr algn="l">
+              <a:lnSpc>
+                <a:spcPct val="120000"/>
+              </a:lnSpc>
+              <a:spcAft>
+                <a:spcPts val="1600"/>
+              </a:spcAft>
+            </a:pPr>
+            <a:r>
+              <a:rPr sz="1050" b="0">
+                <a:solidFill>
+                  <a:srgbClr val="000000"/>
+                </a:solidFill>
+                <a:latin typeface="Arial"/>
+              </a:rPr>
+              <a:t>•  </a:t>
+            </a:r>
+            <a:r>
+              <a:rPr sz="1050" b="0">
+                <a:solidFill>
+                  <a:srgbClr val="000000"/>
+                </a:solidFill>
+                <a:latin typeface="Arial"/>
+              </a:rPr>
+              <a:t>Embedded talent lets a small company deliver enterprise-grade deployments</a:t>
+            </a:r>
+          </a:p>
+        </p:txBody>
+      </p:sp>
+      <p:sp>
+        <p:nvSpPr>
+          <p:cNvPr id="14" name="TextBox 13"/>
+          <p:cNvSpPr txBox="1"/>
+          <p:nvPr/>
+        </p:nvSpPr>
+        <p:spPr>
+          <a:xfrm>
+            <a:off x="9061704" y="1755648"/>
+            <a:ext cx="2624328" cy="256032"/>
+          </a:xfrm>
+          <a:prstGeom prst="rect">
+            <a:avLst/>
+          </a:prstGeom>
+          <a:noFill/>
+        </p:spPr>
+        <p:txBody>
+          <a:bodyPr wrap="square" anchor="t" lIns="0" rIns="0" tIns="0" bIns="0">
+            <a:spAutoFit/>
+          </a:bodyPr>
+          <a:lstStyle/>
+          <a:p>
+            <a:pPr algn="l">
+              <a:lnSpc>
+                <a:spcPct val="100000"/>
+              </a:lnSpc>
+              <a:spcAft>
+                <a:spcPts val="0"/>
+              </a:spcAft>
+            </a:pPr>
+            <a:r>
+              <a:rPr sz="1050" b="1">
+                <a:solidFill>
+                  <a:srgbClr val="000000"/>
+                </a:solidFill>
+                <a:latin typeface="Arial"/>
+              </a:rPr>
+              <a:t>Impact to date</a:t>
+            </a:r>
+          </a:p>
+        </p:txBody>
+      </p:sp>
+      <p:cxnSp>
+        <p:nvCxnSpPr>
+          <p:cNvPr id="15" name="Connector 14"/>
+          <p:cNvCxnSpPr/>
+          <p:nvPr/>
+        </p:nvCxnSpPr>
+        <p:spPr>
+          <a:xfrm>
+            <a:off x="9061704" y="2048256"/>
+            <a:ext cx="2624328" cy="0"/>
+          </a:xfrm>
+          <a:prstGeom prst="line">
+            <a:avLst/>
+          </a:prstGeom>
+          <a:ln w="12700">
+            <a:solidFill>
+              <a:srgbClr val="000000"/>
+            </a:solidFill>
+          </a:ln>
+          <a:effectLst/>
+        </p:spPr>
+      </p:cxnSp>
+      <p:sp>
+        <p:nvSpPr>
+          <p:cNvPr id="16" name="TextBox 15"/>
+          <p:cNvSpPr txBox="1"/>
+          <p:nvPr/>
+        </p:nvSpPr>
+        <p:spPr>
+          <a:xfrm>
+            <a:off x="9061704" y="2231136"/>
+            <a:ext cx="2624328" cy="4023360"/>
+          </a:xfrm>
+          <a:prstGeom prst="rect">
+            <a:avLst/>
+          </a:prstGeom>
+          <a:noFill/>
+        </p:spPr>
+        <p:txBody>
+          <a:bodyPr wrap="square" anchor="t" lIns="0" rIns="0" tIns="0" bIns="0">
+            <a:spAutoFit/>
+          </a:bodyPr>
+          <a:lstStyle/>
+          <a:p>
+            <a:pPr algn="l">
+              <a:lnSpc>
+                <a:spcPct val="120000"/>
+              </a:lnSpc>
+              <a:spcAft>
+                <a:spcPts val="1600"/>
+              </a:spcAft>
+            </a:pPr>
+            <a:r>
+              <a:rPr sz="1050" b="0">
+                <a:solidFill>
+                  <a:srgbClr val="000000"/>
+                </a:solidFill>
+                <a:latin typeface="Arial"/>
+              </a:rPr>
+              <a:t>•  </a:t>
+            </a:r>
+            <a:r>
+              <a:rPr sz="1050" b="0">
+                <a:solidFill>
+                  <a:srgbClr val="000000"/>
+                </a:solidFill>
+                <a:latin typeface="Arial"/>
+              </a:rPr>
+              <a:t>Attributes enterprise expansion to its deployment-led model</a:t>
+            </a:r>
+          </a:p>
+          <a:p>
+            <a:pPr algn="l">
+              <a:lnSpc>
+                <a:spcPct val="120000"/>
+              </a:lnSpc>
+              <a:spcAft>
+                <a:spcPts val="1600"/>
+              </a:spcAft>
+            </a:pPr>
+            <a:r>
+              <a:rPr sz="1050" b="0">
+                <a:solidFill>
+                  <a:srgbClr val="000000"/>
+                </a:solidFill>
+                <a:latin typeface="Arial"/>
+              </a:rPr>
+              <a:t>•  </a:t>
+            </a:r>
+            <a:r>
+              <a:rPr sz="1050" b="0">
+                <a:solidFill>
+                  <a:srgbClr val="000000"/>
+                </a:solidFill>
+                <a:latin typeface="Arial"/>
+              </a:rPr>
+              <a:t>FDE hiring scaled publicly alongside enterprise growth</a:t>
+            </a:r>
+          </a:p>
+        </p:txBody>
+      </p:sp>
+      <p:cxnSp>
+        <p:nvCxnSpPr>
+          <p:cNvPr id="17" name="Connector 16"/>
+          <p:cNvCxnSpPr/>
+          <p:nvPr/>
+        </p:nvCxnSpPr>
+        <p:spPr>
+          <a:xfrm>
+            <a:off x="502920" y="6510528"/>
+            <a:ext cx="11185855" cy="0"/>
+          </a:xfrm>
+          <a:prstGeom prst="line">
+            <a:avLst/>
+          </a:prstGeom>
+          <a:ln w="6350">
+            <a:solidFill>
+              <a:srgbClr val="BFBFBF"/>
+            </a:solidFill>
+          </a:ln>
+          <a:effectLst/>
+        </p:spPr>
+      </p:cxnSp>
+      <p:sp>
+        <p:nvSpPr>
+          <p:cNvPr id="18" name="TextBox 17"/>
+          <p:cNvSpPr txBox="1"/>
+          <p:nvPr/>
+        </p:nvSpPr>
+        <p:spPr>
+          <a:xfrm>
+            <a:off x="502920" y="6583680"/>
+            <a:ext cx="9601200" cy="228600"/>
+          </a:xfrm>
+          <a:prstGeom prst="rect">
+            <a:avLst/>
+          </a:prstGeom>
+          <a:noFill/>
+        </p:spPr>
+        <p:txBody>
+          <a:bodyPr wrap="square" anchor="t" lIns="0" rIns="0" tIns="0" bIns="0">
+            <a:spAutoFit/>
+          </a:bodyPr>
+          <a:lstStyle/>
+          <a:p>
+            <a:pPr algn="l">
+              <a:lnSpc>
+                <a:spcPct val="100000"/>
+              </a:lnSpc>
+              <a:spcAft>
+                <a:spcPts val="0"/>
+              </a:spcAft>
+            </a:pPr>
+            <a:r>
+              <a:rPr sz="750" b="0">
+                <a:solidFill>
+                  <a:srgbClr val="8C8C8C"/>
+                </a:solidFill>
+                <a:latin typeface="Arial"/>
+              </a:rPr>
+              <a:t>Source: ElevenLabs public statements, job postings and press coverage</a:t>
+            </a:r>
+          </a:p>
+        </p:txBody>
+      </p:sp>
+      <p:sp>
+        <p:nvSpPr>
+          <p:cNvPr id="19" name="TextBox 18"/>
+          <p:cNvSpPr txBox="1"/>
+          <p:nvPr/>
+        </p:nvSpPr>
+        <p:spPr>
+          <a:xfrm>
+            <a:off x="11228832" y="6583680"/>
+            <a:ext cx="457200" cy="228600"/>
+          </a:xfrm>
+          <a:prstGeom prst="rect">
+            <a:avLst/>
+          </a:prstGeom>
+          <a:noFill/>
+        </p:spPr>
+        <p:txBody>
+          <a:bodyPr wrap="square" anchor="t" lIns="0" rIns="0" tIns="0" bIns="0">
+            <a:spAutoFit/>
+          </a:bodyPr>
+          <a:lstStyle/>
+          <a:p>
+            <a:pPr algn="r">
+              <a:lnSpc>
+                <a:spcPct val="100000"/>
+              </a:lnSpc>
+              <a:spcAft>
+                <a:spcPts val="0"/>
+              </a:spcAft>
+            </a:pPr>
+            <a:r>
+              <a:rPr sz="800" b="0">
+                <a:solidFill>
+                  <a:srgbClr val="8C8C8C"/>
+                </a:solidFill>
+                <a:latin typeface="Arial"/>
+              </a:rPr>
+              <a:t>9</a:t>
             </a:r>
           </a:p>
         </p:txBody>

--- a/Forward-Deployed-Engineering_Executive-Deck.pptx
+++ b/Forward-Deployed-Engineering_Executive-Deck.pptx
@@ -4504,7 +4504,7 @@
         <p:spPr>
           <a:xfrm>
             <a:off x="502920" y="292608"/>
-            <a:ext cx="11185855" cy="685800"/>
+            <a:ext cx="10408615" cy="685800"/>
           </a:xfrm>
           <a:prstGeom prst="rect">
             <a:avLst/>
@@ -4537,9 +4537,33 @@
           </a:p>
         </p:txBody>
       </p:sp>
+      <p:pic>
+        <p:nvPicPr>
+          <p:cNvPr id="3" name="Picture 2" descr="stripe.png"/>
+          <p:cNvPicPr>
+            <a:picLocks noChangeAspect="1"/>
+          </p:cNvPicPr>
+          <p:nvPr/>
+        </p:nvPicPr>
+        <p:blipFill>
+          <a:blip r:embed="rId2"/>
+          <a:stretch>
+            <a:fillRect/>
+          </a:stretch>
+        </p:blipFill>
+        <p:spPr>
+          <a:xfrm>
+            <a:off x="11231575" y="274320"/>
+            <a:ext cx="457200" cy="457200"/>
+          </a:xfrm>
+          <a:prstGeom prst="rect">
+            <a:avLst/>
+          </a:prstGeom>
+        </p:spPr>
+      </p:pic>
       <p:cxnSp>
         <p:nvCxnSpPr>
-          <p:cNvPr id="3" name="Connector 2"/>
+          <p:cNvPr id="4" name="Connector 3"/>
           <p:cNvCxnSpPr/>
           <p:nvPr/>
         </p:nvCxnSpPr>
@@ -4561,7 +4585,7 @@
       </p:cxnSp>
       <p:sp>
         <p:nvSpPr>
-          <p:cNvPr id="4" name="TextBox 3"/>
+          <p:cNvPr id="5" name="TextBox 4"/>
           <p:cNvSpPr txBox="1"/>
           <p:nvPr/>
         </p:nvSpPr>
@@ -4603,7 +4627,7 @@
       </p:sp>
       <p:sp>
         <p:nvSpPr>
-          <p:cNvPr id="5" name="TextBox 4"/>
+          <p:cNvPr id="6" name="TextBox 5"/>
           <p:cNvSpPr txBox="1"/>
           <p:nvPr/>
         </p:nvSpPr>
@@ -4645,7 +4669,7 @@
       </p:sp>
       <p:cxnSp>
         <p:nvCxnSpPr>
-          <p:cNvPr id="6" name="Connector 5"/>
+          <p:cNvPr id="7" name="Connector 6"/>
           <p:cNvCxnSpPr/>
           <p:nvPr/>
         </p:nvCxnSpPr>
@@ -4667,7 +4691,7 @@
       </p:cxnSp>
       <p:sp>
         <p:nvSpPr>
-          <p:cNvPr id="7" name="TextBox 6"/>
+          <p:cNvPr id="8" name="TextBox 7"/>
           <p:cNvSpPr txBox="1"/>
           <p:nvPr/>
         </p:nvSpPr>
@@ -4774,7 +4798,7 @@
       </p:sp>
       <p:sp>
         <p:nvSpPr>
-          <p:cNvPr id="8" name="TextBox 7"/>
+          <p:cNvPr id="9" name="TextBox 8"/>
           <p:cNvSpPr txBox="1"/>
           <p:nvPr/>
         </p:nvSpPr>
@@ -4816,7 +4840,7 @@
       </p:sp>
       <p:cxnSp>
         <p:nvCxnSpPr>
-          <p:cNvPr id="9" name="Connector 8"/>
+          <p:cNvPr id="10" name="Connector 9"/>
           <p:cNvCxnSpPr/>
           <p:nvPr/>
         </p:nvCxnSpPr>
@@ -4838,7 +4862,7 @@
       </p:cxnSp>
       <p:sp>
         <p:nvSpPr>
-          <p:cNvPr id="10" name="TextBox 9"/>
+          <p:cNvPr id="11" name="TextBox 10"/>
           <p:cNvSpPr txBox="1"/>
           <p:nvPr/>
         </p:nvSpPr>
@@ -4917,7 +4941,7 @@
       </p:sp>
       <p:sp>
         <p:nvSpPr>
-          <p:cNvPr id="11" name="TextBox 10"/>
+          <p:cNvPr id="12" name="TextBox 11"/>
           <p:cNvSpPr txBox="1"/>
           <p:nvPr/>
         </p:nvSpPr>
@@ -4959,7 +4983,7 @@
       </p:sp>
       <p:cxnSp>
         <p:nvCxnSpPr>
-          <p:cNvPr id="12" name="Connector 11"/>
+          <p:cNvPr id="13" name="Connector 12"/>
           <p:cNvCxnSpPr/>
           <p:nvPr/>
         </p:nvCxnSpPr>
@@ -4981,7 +5005,7 @@
       </p:cxnSp>
       <p:sp>
         <p:nvSpPr>
-          <p:cNvPr id="13" name="TextBox 12"/>
+          <p:cNvPr id="14" name="TextBox 13"/>
           <p:cNvSpPr txBox="1"/>
           <p:nvPr/>
         </p:nvSpPr>
@@ -5060,7 +5084,7 @@
       </p:sp>
       <p:sp>
         <p:nvSpPr>
-          <p:cNvPr id="14" name="TextBox 13"/>
+          <p:cNvPr id="15" name="TextBox 14"/>
           <p:cNvSpPr txBox="1"/>
           <p:nvPr/>
         </p:nvSpPr>
@@ -5102,7 +5126,7 @@
       </p:sp>
       <p:cxnSp>
         <p:nvCxnSpPr>
-          <p:cNvPr id="15" name="Connector 14"/>
+          <p:cNvPr id="16" name="Connector 15"/>
           <p:cNvCxnSpPr/>
           <p:nvPr/>
         </p:nvCxnSpPr>
@@ -5124,7 +5148,7 @@
       </p:cxnSp>
       <p:sp>
         <p:nvSpPr>
-          <p:cNvPr id="16" name="TextBox 15"/>
+          <p:cNvPr id="17" name="TextBox 16"/>
           <p:cNvSpPr txBox="1"/>
           <p:nvPr/>
         </p:nvSpPr>
@@ -5203,7 +5227,7 @@
       </p:sp>
       <p:cxnSp>
         <p:nvCxnSpPr>
-          <p:cNvPr id="17" name="Connector 16"/>
+          <p:cNvPr id="18" name="Connector 17"/>
           <p:cNvCxnSpPr/>
           <p:nvPr/>
         </p:nvCxnSpPr>
@@ -5225,7 +5249,7 @@
       </p:cxnSp>
       <p:sp>
         <p:nvSpPr>
-          <p:cNvPr id="18" name="TextBox 17"/>
+          <p:cNvPr id="19" name="TextBox 18"/>
           <p:cNvSpPr txBox="1"/>
           <p:nvPr/>
         </p:nvSpPr>
@@ -5267,7 +5291,7 @@
       </p:sp>
       <p:sp>
         <p:nvSpPr>
-          <p:cNvPr id="19" name="TextBox 18"/>
+          <p:cNvPr id="20" name="TextBox 19"/>
           <p:cNvSpPr txBox="1"/>
           <p:nvPr/>
         </p:nvSpPr>
@@ -5334,7 +5358,7 @@
         <p:spPr>
           <a:xfrm>
             <a:off x="502920" y="292608"/>
-            <a:ext cx="11185855" cy="685800"/>
+            <a:ext cx="10408615" cy="685800"/>
           </a:xfrm>
           <a:prstGeom prst="rect">
             <a:avLst/>
@@ -5367,9 +5391,33 @@
           </a:p>
         </p:txBody>
       </p:sp>
+      <p:pic>
+        <p:nvPicPr>
+          <p:cNvPr id="3" name="Picture 2" descr="brex.png"/>
+          <p:cNvPicPr>
+            <a:picLocks noChangeAspect="1"/>
+          </p:cNvPicPr>
+          <p:nvPr/>
+        </p:nvPicPr>
+        <p:blipFill>
+          <a:blip r:embed="rId2"/>
+          <a:stretch>
+            <a:fillRect/>
+          </a:stretch>
+        </p:blipFill>
+        <p:spPr>
+          <a:xfrm>
+            <a:off x="11231575" y="274320"/>
+            <a:ext cx="457200" cy="457200"/>
+          </a:xfrm>
+          <a:prstGeom prst="rect">
+            <a:avLst/>
+          </a:prstGeom>
+        </p:spPr>
+      </p:pic>
       <p:cxnSp>
         <p:nvCxnSpPr>
-          <p:cNvPr id="3" name="Connector 2"/>
+          <p:cNvPr id="4" name="Connector 3"/>
           <p:cNvCxnSpPr/>
           <p:nvPr/>
         </p:nvCxnSpPr>
@@ -5391,7 +5439,7 @@
       </p:cxnSp>
       <p:sp>
         <p:nvSpPr>
-          <p:cNvPr id="4" name="TextBox 3"/>
+          <p:cNvPr id="5" name="TextBox 4"/>
           <p:cNvSpPr txBox="1"/>
           <p:nvPr/>
         </p:nvSpPr>
@@ -5433,7 +5481,7 @@
       </p:sp>
       <p:sp>
         <p:nvSpPr>
-          <p:cNvPr id="5" name="TextBox 4"/>
+          <p:cNvPr id="6" name="TextBox 5"/>
           <p:cNvSpPr txBox="1"/>
           <p:nvPr/>
         </p:nvSpPr>
@@ -5475,7 +5523,7 @@
       </p:sp>
       <p:cxnSp>
         <p:nvCxnSpPr>
-          <p:cNvPr id="6" name="Connector 5"/>
+          <p:cNvPr id="7" name="Connector 6"/>
           <p:cNvCxnSpPr/>
           <p:nvPr/>
         </p:nvCxnSpPr>
@@ -5497,7 +5545,7 @@
       </p:cxnSp>
       <p:sp>
         <p:nvSpPr>
-          <p:cNvPr id="7" name="TextBox 6"/>
+          <p:cNvPr id="8" name="TextBox 7"/>
           <p:cNvSpPr txBox="1"/>
           <p:nvPr/>
         </p:nvSpPr>
@@ -5604,7 +5652,7 @@
       </p:sp>
       <p:sp>
         <p:nvSpPr>
-          <p:cNvPr id="8" name="TextBox 7"/>
+          <p:cNvPr id="9" name="TextBox 8"/>
           <p:cNvSpPr txBox="1"/>
           <p:nvPr/>
         </p:nvSpPr>
@@ -5646,7 +5694,7 @@
       </p:sp>
       <p:cxnSp>
         <p:nvCxnSpPr>
-          <p:cNvPr id="9" name="Connector 8"/>
+          <p:cNvPr id="10" name="Connector 9"/>
           <p:cNvCxnSpPr/>
           <p:nvPr/>
         </p:nvCxnSpPr>
@@ -5668,7 +5716,7 @@
       </p:cxnSp>
       <p:sp>
         <p:nvSpPr>
-          <p:cNvPr id="10" name="TextBox 9"/>
+          <p:cNvPr id="11" name="TextBox 10"/>
           <p:cNvSpPr txBox="1"/>
           <p:nvPr/>
         </p:nvSpPr>
@@ -5747,7 +5795,7 @@
       </p:sp>
       <p:sp>
         <p:nvSpPr>
-          <p:cNvPr id="11" name="TextBox 10"/>
+          <p:cNvPr id="12" name="TextBox 11"/>
           <p:cNvSpPr txBox="1"/>
           <p:nvPr/>
         </p:nvSpPr>
@@ -5789,7 +5837,7 @@
       </p:sp>
       <p:cxnSp>
         <p:nvCxnSpPr>
-          <p:cNvPr id="12" name="Connector 11"/>
+          <p:cNvPr id="13" name="Connector 12"/>
           <p:cNvCxnSpPr/>
           <p:nvPr/>
         </p:nvCxnSpPr>
@@ -5811,7 +5859,7 @@
       </p:cxnSp>
       <p:sp>
         <p:nvSpPr>
-          <p:cNvPr id="13" name="TextBox 12"/>
+          <p:cNvPr id="14" name="TextBox 13"/>
           <p:cNvSpPr txBox="1"/>
           <p:nvPr/>
         </p:nvSpPr>
@@ -5890,7 +5938,7 @@
       </p:sp>
       <p:sp>
         <p:nvSpPr>
-          <p:cNvPr id="14" name="TextBox 13"/>
+          <p:cNvPr id="15" name="TextBox 14"/>
           <p:cNvSpPr txBox="1"/>
           <p:nvPr/>
         </p:nvSpPr>
@@ -5932,7 +5980,7 @@
       </p:sp>
       <p:cxnSp>
         <p:nvCxnSpPr>
-          <p:cNvPr id="15" name="Connector 14"/>
+          <p:cNvPr id="16" name="Connector 15"/>
           <p:cNvCxnSpPr/>
           <p:nvPr/>
         </p:nvCxnSpPr>
@@ -5954,7 +6002,7 @@
       </p:cxnSp>
       <p:sp>
         <p:nvSpPr>
-          <p:cNvPr id="16" name="TextBox 15"/>
+          <p:cNvPr id="17" name="TextBox 16"/>
           <p:cNvSpPr txBox="1"/>
           <p:nvPr/>
         </p:nvSpPr>
@@ -6033,7 +6081,7 @@
       </p:sp>
       <p:cxnSp>
         <p:nvCxnSpPr>
-          <p:cNvPr id="17" name="Connector 16"/>
+          <p:cNvPr id="18" name="Connector 17"/>
           <p:cNvCxnSpPr/>
           <p:nvPr/>
         </p:nvCxnSpPr>
@@ -6055,7 +6103,7 @@
       </p:cxnSp>
       <p:sp>
         <p:nvSpPr>
-          <p:cNvPr id="18" name="TextBox 17"/>
+          <p:cNvPr id="19" name="TextBox 18"/>
           <p:cNvSpPr txBox="1"/>
           <p:nvPr/>
         </p:nvSpPr>
@@ -6097,7 +6145,7 @@
       </p:sp>
       <p:sp>
         <p:nvSpPr>
-          <p:cNvPr id="19" name="TextBox 18"/>
+          <p:cNvPr id="20" name="TextBox 19"/>
           <p:cNvSpPr txBox="1"/>
           <p:nvPr/>
         </p:nvSpPr>
@@ -12470,7 +12518,7 @@
         <p:spPr>
           <a:xfrm>
             <a:off x="502920" y="292608"/>
-            <a:ext cx="11185855" cy="685800"/>
+            <a:ext cx="10408615" cy="685800"/>
           </a:xfrm>
           <a:prstGeom prst="rect">
             <a:avLst/>
@@ -12503,9 +12551,33 @@
           </a:p>
         </p:txBody>
       </p:sp>
+      <p:pic>
+        <p:nvPicPr>
+          <p:cNvPr id="3" name="Picture 2" descr="palantir.png"/>
+          <p:cNvPicPr>
+            <a:picLocks noChangeAspect="1"/>
+          </p:cNvPicPr>
+          <p:nvPr/>
+        </p:nvPicPr>
+        <p:blipFill>
+          <a:blip r:embed="rId2"/>
+          <a:stretch>
+            <a:fillRect/>
+          </a:stretch>
+        </p:blipFill>
+        <p:spPr>
+          <a:xfrm>
+            <a:off x="11231575" y="274320"/>
+            <a:ext cx="457200" cy="457200"/>
+          </a:xfrm>
+          <a:prstGeom prst="rect">
+            <a:avLst/>
+          </a:prstGeom>
+        </p:spPr>
+      </p:pic>
       <p:cxnSp>
         <p:nvCxnSpPr>
-          <p:cNvPr id="3" name="Connector 2"/>
+          <p:cNvPr id="4" name="Connector 3"/>
           <p:cNvCxnSpPr/>
           <p:nvPr/>
         </p:nvCxnSpPr>
@@ -12527,7 +12599,7 @@
       </p:cxnSp>
       <p:sp>
         <p:nvSpPr>
-          <p:cNvPr id="4" name="TextBox 3"/>
+          <p:cNvPr id="5" name="TextBox 4"/>
           <p:cNvSpPr txBox="1"/>
           <p:nvPr/>
         </p:nvSpPr>
@@ -12569,7 +12641,7 @@
       </p:sp>
       <p:sp>
         <p:nvSpPr>
-          <p:cNvPr id="5" name="TextBox 4"/>
+          <p:cNvPr id="6" name="TextBox 5"/>
           <p:cNvSpPr txBox="1"/>
           <p:nvPr/>
         </p:nvSpPr>
@@ -12611,7 +12683,7 @@
       </p:sp>
       <p:cxnSp>
         <p:nvCxnSpPr>
-          <p:cNvPr id="6" name="Connector 5"/>
+          <p:cNvPr id="7" name="Connector 6"/>
           <p:cNvCxnSpPr/>
           <p:nvPr/>
         </p:nvCxnSpPr>
@@ -12633,7 +12705,7 @@
       </p:cxnSp>
       <p:sp>
         <p:nvSpPr>
-          <p:cNvPr id="7" name="TextBox 6"/>
+          <p:cNvPr id="8" name="TextBox 7"/>
           <p:cNvSpPr txBox="1"/>
           <p:nvPr/>
         </p:nvSpPr>
@@ -12768,7 +12840,7 @@
       </p:sp>
       <p:sp>
         <p:nvSpPr>
-          <p:cNvPr id="8" name="TextBox 7"/>
+          <p:cNvPr id="9" name="TextBox 8"/>
           <p:cNvSpPr txBox="1"/>
           <p:nvPr/>
         </p:nvSpPr>
@@ -12810,7 +12882,7 @@
       </p:sp>
       <p:cxnSp>
         <p:nvCxnSpPr>
-          <p:cNvPr id="9" name="Connector 8"/>
+          <p:cNvPr id="10" name="Connector 9"/>
           <p:cNvCxnSpPr/>
           <p:nvPr/>
         </p:nvCxnSpPr>
@@ -12832,7 +12904,7 @@
       </p:cxnSp>
       <p:sp>
         <p:nvSpPr>
-          <p:cNvPr id="10" name="TextBox 9"/>
+          <p:cNvPr id="11" name="TextBox 10"/>
           <p:cNvSpPr txBox="1"/>
           <p:nvPr/>
         </p:nvSpPr>
@@ -12939,7 +13011,7 @@
       </p:sp>
       <p:sp>
         <p:nvSpPr>
-          <p:cNvPr id="11" name="TextBox 10"/>
+          <p:cNvPr id="12" name="TextBox 11"/>
           <p:cNvSpPr txBox="1"/>
           <p:nvPr/>
         </p:nvSpPr>
@@ -12981,7 +13053,7 @@
       </p:sp>
       <p:cxnSp>
         <p:nvCxnSpPr>
-          <p:cNvPr id="12" name="Connector 11"/>
+          <p:cNvPr id="13" name="Connector 12"/>
           <p:cNvCxnSpPr/>
           <p:nvPr/>
         </p:nvCxnSpPr>
@@ -13003,7 +13075,7 @@
       </p:cxnSp>
       <p:sp>
         <p:nvSpPr>
-          <p:cNvPr id="13" name="TextBox 12"/>
+          <p:cNvPr id="14" name="TextBox 13"/>
           <p:cNvSpPr txBox="1"/>
           <p:nvPr/>
         </p:nvSpPr>
@@ -13110,7 +13182,7 @@
       </p:sp>
       <p:sp>
         <p:nvSpPr>
-          <p:cNvPr id="14" name="TextBox 13"/>
+          <p:cNvPr id="15" name="TextBox 14"/>
           <p:cNvSpPr txBox="1"/>
           <p:nvPr/>
         </p:nvSpPr>
@@ -13152,7 +13224,7 @@
       </p:sp>
       <p:cxnSp>
         <p:nvCxnSpPr>
-          <p:cNvPr id="15" name="Connector 14"/>
+          <p:cNvPr id="16" name="Connector 15"/>
           <p:cNvCxnSpPr/>
           <p:nvPr/>
         </p:nvCxnSpPr>
@@ -13174,7 +13246,7 @@
       </p:cxnSp>
       <p:sp>
         <p:nvSpPr>
-          <p:cNvPr id="16" name="TextBox 15"/>
+          <p:cNvPr id="17" name="TextBox 16"/>
           <p:cNvSpPr txBox="1"/>
           <p:nvPr/>
         </p:nvSpPr>
@@ -13281,7 +13353,7 @@
       </p:sp>
       <p:cxnSp>
         <p:nvCxnSpPr>
-          <p:cNvPr id="17" name="Connector 16"/>
+          <p:cNvPr id="18" name="Connector 17"/>
           <p:cNvCxnSpPr/>
           <p:nvPr/>
         </p:nvCxnSpPr>
@@ -13303,7 +13375,7 @@
       </p:cxnSp>
       <p:sp>
         <p:nvSpPr>
-          <p:cNvPr id="18" name="TextBox 17"/>
+          <p:cNvPr id="19" name="TextBox 18"/>
           <p:cNvSpPr txBox="1"/>
           <p:nvPr/>
         </p:nvSpPr>
@@ -13345,7 +13417,7 @@
       </p:sp>
       <p:sp>
         <p:nvSpPr>
-          <p:cNvPr id="19" name="TextBox 18"/>
+          <p:cNvPr id="20" name="TextBox 19"/>
           <p:cNvSpPr txBox="1"/>
           <p:nvPr/>
         </p:nvSpPr>
@@ -13412,7 +13484,7 @@
         <p:spPr>
           <a:xfrm>
             <a:off x="502920" y="292608"/>
-            <a:ext cx="11185855" cy="685800"/>
+            <a:ext cx="10408615" cy="685800"/>
           </a:xfrm>
           <a:prstGeom prst="rect">
             <a:avLst/>
@@ -13445,9 +13517,33 @@
           </a:p>
         </p:txBody>
       </p:sp>
+      <p:pic>
+        <p:nvPicPr>
+          <p:cNvPr id="3" name="Picture 2" descr="uber.png"/>
+          <p:cNvPicPr>
+            <a:picLocks noChangeAspect="1"/>
+          </p:cNvPicPr>
+          <p:nvPr/>
+        </p:nvPicPr>
+        <p:blipFill>
+          <a:blip r:embed="rId2"/>
+          <a:stretch>
+            <a:fillRect/>
+          </a:stretch>
+        </p:blipFill>
+        <p:spPr>
+          <a:xfrm>
+            <a:off x="11231575" y="274320"/>
+            <a:ext cx="457200" cy="457200"/>
+          </a:xfrm>
+          <a:prstGeom prst="rect">
+            <a:avLst/>
+          </a:prstGeom>
+        </p:spPr>
+      </p:pic>
       <p:cxnSp>
         <p:nvCxnSpPr>
-          <p:cNvPr id="3" name="Connector 2"/>
+          <p:cNvPr id="4" name="Connector 3"/>
           <p:cNvCxnSpPr/>
           <p:nvPr/>
         </p:nvCxnSpPr>
@@ -13469,7 +13565,7 @@
       </p:cxnSp>
       <p:sp>
         <p:nvSpPr>
-          <p:cNvPr id="4" name="TextBox 3"/>
+          <p:cNvPr id="5" name="TextBox 4"/>
           <p:cNvSpPr txBox="1"/>
           <p:nvPr/>
         </p:nvSpPr>
@@ -13511,7 +13607,7 @@
       </p:sp>
       <p:sp>
         <p:nvSpPr>
-          <p:cNvPr id="5" name="TextBox 4"/>
+          <p:cNvPr id="6" name="TextBox 5"/>
           <p:cNvSpPr txBox="1"/>
           <p:nvPr/>
         </p:nvSpPr>
@@ -13553,7 +13649,7 @@
       </p:sp>
       <p:cxnSp>
         <p:nvCxnSpPr>
-          <p:cNvPr id="6" name="Connector 5"/>
+          <p:cNvPr id="7" name="Connector 6"/>
           <p:cNvCxnSpPr/>
           <p:nvPr/>
         </p:nvCxnSpPr>
@@ -13575,7 +13671,7 @@
       </p:cxnSp>
       <p:sp>
         <p:nvSpPr>
-          <p:cNvPr id="7" name="TextBox 6"/>
+          <p:cNvPr id="8" name="TextBox 7"/>
           <p:cNvSpPr txBox="1"/>
           <p:nvPr/>
         </p:nvSpPr>
@@ -13682,7 +13778,7 @@
       </p:sp>
       <p:sp>
         <p:nvSpPr>
-          <p:cNvPr id="8" name="TextBox 7"/>
+          <p:cNvPr id="9" name="TextBox 8"/>
           <p:cNvSpPr txBox="1"/>
           <p:nvPr/>
         </p:nvSpPr>
@@ -13724,7 +13820,7 @@
       </p:sp>
       <p:cxnSp>
         <p:nvCxnSpPr>
-          <p:cNvPr id="9" name="Connector 8"/>
+          <p:cNvPr id="10" name="Connector 9"/>
           <p:cNvCxnSpPr/>
           <p:nvPr/>
         </p:nvCxnSpPr>
@@ -13746,7 +13842,7 @@
       </p:cxnSp>
       <p:sp>
         <p:nvSpPr>
-          <p:cNvPr id="10" name="TextBox 9"/>
+          <p:cNvPr id="11" name="TextBox 10"/>
           <p:cNvSpPr txBox="1"/>
           <p:nvPr/>
         </p:nvSpPr>
@@ -13853,7 +13949,7 @@
       </p:sp>
       <p:sp>
         <p:nvSpPr>
-          <p:cNvPr id="11" name="TextBox 10"/>
+          <p:cNvPr id="12" name="TextBox 11"/>
           <p:cNvSpPr txBox="1"/>
           <p:nvPr/>
         </p:nvSpPr>
@@ -13895,7 +13991,7 @@
       </p:sp>
       <p:cxnSp>
         <p:nvCxnSpPr>
-          <p:cNvPr id="12" name="Connector 11"/>
+          <p:cNvPr id="13" name="Connector 12"/>
           <p:cNvCxnSpPr/>
           <p:nvPr/>
         </p:nvCxnSpPr>
@@ -13917,7 +14013,7 @@
       </p:cxnSp>
       <p:sp>
         <p:nvSpPr>
-          <p:cNvPr id="13" name="TextBox 12"/>
+          <p:cNvPr id="14" name="TextBox 13"/>
           <p:cNvSpPr txBox="1"/>
           <p:nvPr/>
         </p:nvSpPr>
@@ -14024,7 +14120,7 @@
       </p:sp>
       <p:sp>
         <p:nvSpPr>
-          <p:cNvPr id="14" name="TextBox 13"/>
+          <p:cNvPr id="15" name="TextBox 14"/>
           <p:cNvSpPr txBox="1"/>
           <p:nvPr/>
         </p:nvSpPr>
@@ -14066,7 +14162,7 @@
       </p:sp>
       <p:cxnSp>
         <p:nvCxnSpPr>
-          <p:cNvPr id="15" name="Connector 14"/>
+          <p:cNvPr id="16" name="Connector 15"/>
           <p:cNvCxnSpPr/>
           <p:nvPr/>
         </p:nvCxnSpPr>
@@ -14088,7 +14184,7 @@
       </p:cxnSp>
       <p:sp>
         <p:nvSpPr>
-          <p:cNvPr id="16" name="TextBox 15"/>
+          <p:cNvPr id="17" name="TextBox 16"/>
           <p:cNvSpPr txBox="1"/>
           <p:nvPr/>
         </p:nvSpPr>
@@ -14195,7 +14291,7 @@
       </p:sp>
       <p:cxnSp>
         <p:nvCxnSpPr>
-          <p:cNvPr id="17" name="Connector 16"/>
+          <p:cNvPr id="18" name="Connector 17"/>
           <p:cNvCxnSpPr/>
           <p:nvPr/>
         </p:nvCxnSpPr>
@@ -14217,7 +14313,7 @@
       </p:cxnSp>
       <p:sp>
         <p:nvSpPr>
-          <p:cNvPr id="18" name="TextBox 17"/>
+          <p:cNvPr id="19" name="TextBox 18"/>
           <p:cNvSpPr txBox="1"/>
           <p:nvPr/>
         </p:nvSpPr>
@@ -14259,7 +14355,7 @@
       </p:sp>
       <p:sp>
         <p:nvSpPr>
-          <p:cNvPr id="19" name="TextBox 18"/>
+          <p:cNvPr id="20" name="TextBox 19"/>
           <p:cNvSpPr txBox="1"/>
           <p:nvPr/>
         </p:nvSpPr>
@@ -14326,7 +14422,7 @@
         <p:spPr>
           <a:xfrm>
             <a:off x="502920" y="292608"/>
-            <a:ext cx="11185855" cy="685800"/>
+            <a:ext cx="10408615" cy="685800"/>
           </a:xfrm>
           <a:prstGeom prst="rect">
             <a:avLst/>
@@ -14359,9 +14455,33 @@
           </a:p>
         </p:txBody>
       </p:sp>
+      <p:pic>
+        <p:nvPicPr>
+          <p:cNvPr id="3" name="Picture 2" descr="openai.png"/>
+          <p:cNvPicPr>
+            <a:picLocks noChangeAspect="1"/>
+          </p:cNvPicPr>
+          <p:nvPr/>
+        </p:nvPicPr>
+        <p:blipFill>
+          <a:blip r:embed="rId2"/>
+          <a:stretch>
+            <a:fillRect/>
+          </a:stretch>
+        </p:blipFill>
+        <p:spPr>
+          <a:xfrm>
+            <a:off x="11231575" y="274320"/>
+            <a:ext cx="457200" cy="457200"/>
+          </a:xfrm>
+          <a:prstGeom prst="rect">
+            <a:avLst/>
+          </a:prstGeom>
+        </p:spPr>
+      </p:pic>
       <p:cxnSp>
         <p:nvCxnSpPr>
-          <p:cNvPr id="3" name="Connector 2"/>
+          <p:cNvPr id="4" name="Connector 3"/>
           <p:cNvCxnSpPr/>
           <p:nvPr/>
         </p:nvCxnSpPr>
@@ -14383,7 +14503,7 @@
       </p:cxnSp>
       <p:sp>
         <p:nvSpPr>
-          <p:cNvPr id="4" name="TextBox 3"/>
+          <p:cNvPr id="5" name="TextBox 4"/>
           <p:cNvSpPr txBox="1"/>
           <p:nvPr/>
         </p:nvSpPr>
@@ -14425,7 +14545,7 @@
       </p:sp>
       <p:sp>
         <p:nvSpPr>
-          <p:cNvPr id="5" name="TextBox 4"/>
+          <p:cNvPr id="6" name="TextBox 5"/>
           <p:cNvSpPr txBox="1"/>
           <p:nvPr/>
         </p:nvSpPr>
@@ -14467,7 +14587,7 @@
       </p:sp>
       <p:cxnSp>
         <p:nvCxnSpPr>
-          <p:cNvPr id="6" name="Connector 5"/>
+          <p:cNvPr id="7" name="Connector 6"/>
           <p:cNvCxnSpPr/>
           <p:nvPr/>
         </p:nvCxnSpPr>
@@ -14489,7 +14609,7 @@
       </p:cxnSp>
       <p:sp>
         <p:nvSpPr>
-          <p:cNvPr id="7" name="TextBox 6"/>
+          <p:cNvPr id="8" name="TextBox 7"/>
           <p:cNvSpPr txBox="1"/>
           <p:nvPr/>
         </p:nvSpPr>
@@ -14596,7 +14716,7 @@
       </p:sp>
       <p:sp>
         <p:nvSpPr>
-          <p:cNvPr id="8" name="TextBox 7"/>
+          <p:cNvPr id="9" name="TextBox 8"/>
           <p:cNvSpPr txBox="1"/>
           <p:nvPr/>
         </p:nvSpPr>
@@ -14638,7 +14758,7 @@
       </p:sp>
       <p:cxnSp>
         <p:nvCxnSpPr>
-          <p:cNvPr id="9" name="Connector 8"/>
+          <p:cNvPr id="10" name="Connector 9"/>
           <p:cNvCxnSpPr/>
           <p:nvPr/>
         </p:nvCxnSpPr>
@@ -14660,7 +14780,7 @@
       </p:cxnSp>
       <p:sp>
         <p:nvSpPr>
-          <p:cNvPr id="10" name="TextBox 9"/>
+          <p:cNvPr id="11" name="TextBox 10"/>
           <p:cNvSpPr txBox="1"/>
           <p:nvPr/>
         </p:nvSpPr>
@@ -14767,7 +14887,7 @@
       </p:sp>
       <p:sp>
         <p:nvSpPr>
-          <p:cNvPr id="11" name="TextBox 10"/>
+          <p:cNvPr id="12" name="TextBox 11"/>
           <p:cNvSpPr txBox="1"/>
           <p:nvPr/>
         </p:nvSpPr>
@@ -14809,7 +14929,7 @@
       </p:sp>
       <p:cxnSp>
         <p:nvCxnSpPr>
-          <p:cNvPr id="12" name="Connector 11"/>
+          <p:cNvPr id="13" name="Connector 12"/>
           <p:cNvCxnSpPr/>
           <p:nvPr/>
         </p:nvCxnSpPr>
@@ -14831,7 +14951,7 @@
       </p:cxnSp>
       <p:sp>
         <p:nvSpPr>
-          <p:cNvPr id="13" name="TextBox 12"/>
+          <p:cNvPr id="14" name="TextBox 13"/>
           <p:cNvSpPr txBox="1"/>
           <p:nvPr/>
         </p:nvSpPr>
@@ -14938,7 +15058,7 @@
       </p:sp>
       <p:sp>
         <p:nvSpPr>
-          <p:cNvPr id="14" name="TextBox 13"/>
+          <p:cNvPr id="15" name="TextBox 14"/>
           <p:cNvSpPr txBox="1"/>
           <p:nvPr/>
         </p:nvSpPr>
@@ -14980,7 +15100,7 @@
       </p:sp>
       <p:cxnSp>
         <p:nvCxnSpPr>
-          <p:cNvPr id="15" name="Connector 14"/>
+          <p:cNvPr id="16" name="Connector 15"/>
           <p:cNvCxnSpPr/>
           <p:nvPr/>
         </p:nvCxnSpPr>
@@ -15002,7 +15122,7 @@
       </p:cxnSp>
       <p:sp>
         <p:nvSpPr>
-          <p:cNvPr id="16" name="TextBox 15"/>
+          <p:cNvPr id="17" name="TextBox 16"/>
           <p:cNvSpPr txBox="1"/>
           <p:nvPr/>
         </p:nvSpPr>
@@ -15081,7 +15201,7 @@
       </p:sp>
       <p:cxnSp>
         <p:nvCxnSpPr>
-          <p:cNvPr id="17" name="Connector 16"/>
+          <p:cNvPr id="18" name="Connector 17"/>
           <p:cNvCxnSpPr/>
           <p:nvPr/>
         </p:nvCxnSpPr>
@@ -15103,7 +15223,7 @@
       </p:cxnSp>
       <p:sp>
         <p:nvSpPr>
-          <p:cNvPr id="18" name="TextBox 17"/>
+          <p:cNvPr id="19" name="TextBox 18"/>
           <p:cNvSpPr txBox="1"/>
           <p:nvPr/>
         </p:nvSpPr>
@@ -15145,7 +15265,7 @@
       </p:sp>
       <p:sp>
         <p:nvSpPr>
-          <p:cNvPr id="19" name="TextBox 18"/>
+          <p:cNvPr id="20" name="TextBox 19"/>
           <p:cNvSpPr txBox="1"/>
           <p:nvPr/>
         </p:nvSpPr>
@@ -15212,7 +15332,7 @@
         <p:spPr>
           <a:xfrm>
             <a:off x="502920" y="292608"/>
-            <a:ext cx="11185855" cy="685800"/>
+            <a:ext cx="10408615" cy="685800"/>
           </a:xfrm>
           <a:prstGeom prst="rect">
             <a:avLst/>
@@ -15245,9 +15365,33 @@
           </a:p>
         </p:txBody>
       </p:sp>
+      <p:pic>
+        <p:nvPicPr>
+          <p:cNvPr id="3" name="Picture 2" descr="elevenlabs.png"/>
+          <p:cNvPicPr>
+            <a:picLocks noChangeAspect="1"/>
+          </p:cNvPicPr>
+          <p:nvPr/>
+        </p:nvPicPr>
+        <p:blipFill>
+          <a:blip r:embed="rId2"/>
+          <a:stretch>
+            <a:fillRect/>
+          </a:stretch>
+        </p:blipFill>
+        <p:spPr>
+          <a:xfrm>
+            <a:off x="11231575" y="274320"/>
+            <a:ext cx="457200" cy="457200"/>
+          </a:xfrm>
+          <a:prstGeom prst="rect">
+            <a:avLst/>
+          </a:prstGeom>
+        </p:spPr>
+      </p:pic>
       <p:cxnSp>
         <p:nvCxnSpPr>
-          <p:cNvPr id="3" name="Connector 2"/>
+          <p:cNvPr id="4" name="Connector 3"/>
           <p:cNvCxnSpPr/>
           <p:nvPr/>
         </p:nvCxnSpPr>
@@ -15269,7 +15413,7 @@
       </p:cxnSp>
       <p:sp>
         <p:nvSpPr>
-          <p:cNvPr id="4" name="TextBox 3"/>
+          <p:cNvPr id="5" name="TextBox 4"/>
           <p:cNvSpPr txBox="1"/>
           <p:nvPr/>
         </p:nvSpPr>
@@ -15311,7 +15455,7 @@
       </p:sp>
       <p:sp>
         <p:nvSpPr>
-          <p:cNvPr id="5" name="TextBox 4"/>
+          <p:cNvPr id="6" name="TextBox 5"/>
           <p:cNvSpPr txBox="1"/>
           <p:nvPr/>
         </p:nvSpPr>
@@ -15353,7 +15497,7 @@
       </p:sp>
       <p:cxnSp>
         <p:nvCxnSpPr>
-          <p:cNvPr id="6" name="Connector 5"/>
+          <p:cNvPr id="7" name="Connector 6"/>
           <p:cNvCxnSpPr/>
           <p:nvPr/>
         </p:nvCxnSpPr>
@@ -15375,7 +15519,7 @@
       </p:cxnSp>
       <p:sp>
         <p:nvSpPr>
-          <p:cNvPr id="7" name="TextBox 6"/>
+          <p:cNvPr id="8" name="TextBox 7"/>
           <p:cNvSpPr txBox="1"/>
           <p:nvPr/>
         </p:nvSpPr>
@@ -15454,7 +15598,7 @@
       </p:sp>
       <p:sp>
         <p:nvSpPr>
-          <p:cNvPr id="8" name="TextBox 7"/>
+          <p:cNvPr id="9" name="TextBox 8"/>
           <p:cNvSpPr txBox="1"/>
           <p:nvPr/>
         </p:nvSpPr>
@@ -15496,7 +15640,7 @@
       </p:sp>
       <p:cxnSp>
         <p:nvCxnSpPr>
-          <p:cNvPr id="9" name="Connector 8"/>
+          <p:cNvPr id="10" name="Connector 9"/>
           <p:cNvCxnSpPr/>
           <p:nvPr/>
         </p:nvCxnSpPr>
@@ -15518,7 +15662,7 @@
       </p:cxnSp>
       <p:sp>
         <p:nvSpPr>
-          <p:cNvPr id="10" name="TextBox 9"/>
+          <p:cNvPr id="11" name="TextBox 10"/>
           <p:cNvSpPr txBox="1"/>
           <p:nvPr/>
         </p:nvSpPr>
@@ -15597,7 +15741,7 @@
       </p:sp>
       <p:sp>
         <p:nvSpPr>
-          <p:cNvPr id="11" name="TextBox 10"/>
+          <p:cNvPr id="12" name="TextBox 11"/>
           <p:cNvSpPr txBox="1"/>
           <p:nvPr/>
         </p:nvSpPr>
@@ -15639,7 +15783,7 @@
       </p:sp>
       <p:cxnSp>
         <p:nvCxnSpPr>
-          <p:cNvPr id="12" name="Connector 11"/>
+          <p:cNvPr id="13" name="Connector 12"/>
           <p:cNvCxnSpPr/>
           <p:nvPr/>
         </p:nvCxnSpPr>
@@ -15661,7 +15805,7 @@
       </p:cxnSp>
       <p:sp>
         <p:nvSpPr>
-          <p:cNvPr id="13" name="TextBox 12"/>
+          <p:cNvPr id="14" name="TextBox 13"/>
           <p:cNvSpPr txBox="1"/>
           <p:nvPr/>
         </p:nvSpPr>
@@ -15740,7 +15884,7 @@
       </p:sp>
       <p:sp>
         <p:nvSpPr>
-          <p:cNvPr id="14" name="TextBox 13"/>
+          <p:cNvPr id="15" name="TextBox 14"/>
           <p:cNvSpPr txBox="1"/>
           <p:nvPr/>
         </p:nvSpPr>
@@ -15782,7 +15926,7 @@
       </p:sp>
       <p:cxnSp>
         <p:nvCxnSpPr>
-          <p:cNvPr id="15" name="Connector 14"/>
+          <p:cNvPr id="16" name="Connector 15"/>
           <p:cNvCxnSpPr/>
           <p:nvPr/>
         </p:nvCxnSpPr>
@@ -15804,7 +15948,7 @@
       </p:cxnSp>
       <p:sp>
         <p:nvSpPr>
-          <p:cNvPr id="16" name="TextBox 15"/>
+          <p:cNvPr id="17" name="TextBox 16"/>
           <p:cNvSpPr txBox="1"/>
           <p:nvPr/>
         </p:nvSpPr>
@@ -15883,7 +16027,7 @@
       </p:sp>
       <p:cxnSp>
         <p:nvCxnSpPr>
-          <p:cNvPr id="17" name="Connector 16"/>
+          <p:cNvPr id="18" name="Connector 17"/>
           <p:cNvCxnSpPr/>
           <p:nvPr/>
         </p:nvCxnSpPr>
@@ -15905,7 +16049,7 @@
       </p:cxnSp>
       <p:sp>
         <p:nvSpPr>
-          <p:cNvPr id="18" name="TextBox 17"/>
+          <p:cNvPr id="19" name="TextBox 18"/>
           <p:cNvSpPr txBox="1"/>
           <p:nvPr/>
         </p:nvSpPr>
@@ -15947,7 +16091,7 @@
       </p:sp>
       <p:sp>
         <p:nvSpPr>
-          <p:cNvPr id="19" name="TextBox 18"/>
+          <p:cNvPr id="20" name="TextBox 19"/>
           <p:cNvSpPr txBox="1"/>
           <p:nvPr/>
         </p:nvSpPr>

--- a/Forward-Deployed-Engineering_Executive-Deck.pptx
+++ b/Forward-Deployed-Engineering_Executive-Deck.pptx
@@ -3720,7 +3720,7 @@
                           </a:solidFill>
                           <a:latin typeface="Arial"/>
                         </a:rPr>
-                        <a:t>Originator of the FDE model; engineers deploy on-site to build on Foundry and AIP</a:t>
+                        <a:t>Originator of the FDE model; 'Delta' engineers and 'Echo' strategists deploy on-site on Foundry and AIP</a:t>
                       </a:r>
                     </a:p>
                   </a:txBody>
@@ -3747,7 +3747,7 @@
                           </a:solidFill>
                           <a:latin typeface="Arial"/>
                         </a:rPr>
-                        <a:t>Credits FDE-led AIP bootcamps for accelerating US commercial growth on earnings calls</a:t>
+                        <a:t>US commercial revenue growth accelerated from +64% to +133% YoY over five quarters; 134% net retention</a:t>
                       </a:r>
                     </a:p>
                   </a:txBody>
@@ -3803,7 +3803,7 @@
                           </a:solidFill>
                           <a:latin typeface="Arial"/>
                         </a:rPr>
-                        <a:t>Engineers embedded with city operations teams; model now offered externally via Uber AI Solutions</a:t>
+                        <a:t>City teams with local P&amp;L scaled via a central launch playbook; 'Agentic Pods' now embed AI engineers</a:t>
                       </a:r>
                     </a:p>
                   </a:txBody>
@@ -3830,7 +3830,7 @@
                           </a:solidFill>
                           <a:latin typeface="Arial"/>
                         </a:rPr>
-                        <a:t>Embedded ops–engineering pairing publicly cited as central to city-by-city scaling</a:t>
+                        <a:t>~400 markets launched; Uber AI Solutions unit now in 30 countries with 50+ enterprise customers</a:t>
                       </a:r>
                     </a:p>
                   </a:txBody>
@@ -3886,7 +3886,7 @@
                           </a:solidFill>
                           <a:latin typeface="Arial"/>
                         </a:rPr>
-                        <a:t>FDE teams embed with enterprise customers to build agentic deployments</a:t>
+                        <a:t>FDE function (since Jan 2025) embeds with enterprises to take frontier models to production</a:t>
                       </a:r>
                     </a:p>
                   </a:txBody>
@@ -3913,7 +3913,7 @@
                           </a:solidFill>
                           <a:latin typeface="Arial"/>
                         </a:rPr>
-                        <a:t>Positions FDEs as core to converting frontier models into enterprise adoption</a:t>
+                        <a:t>Enterprise &gt;40% of revenue; 9M business users; $4B deployment venture launched May 2026</a:t>
                       </a:r>
                     </a:p>
                   </a:txBody>
@@ -3969,7 +3969,7 @@
                           </a:solidFill>
                           <a:latin typeface="Arial"/>
                         </a:rPr>
-                        <a:t>FDEs co-build production voice agents with customer engineering teams</a:t>
+                        <a:t>FDEs co-build production voice agents inside customer infrastructure</a:t>
                       </a:r>
                     </a:p>
                   </a:txBody>
@@ -3996,7 +3996,7 @@
                           </a:solidFill>
                           <a:latin typeface="Arial"/>
                         </a:rPr>
-                        <a:t>Attributes enterprise expansion to its deployment-led engineering model</a:t>
+                        <a:t>$0 to $500M ARR in ~3.5 years; enterprise agent deployments live in 4–8 weeks</a:t>
                       </a:r>
                     </a:p>
                   </a:txBody>
@@ -4052,7 +4052,7 @@
                           </a:solidFill>
                           <a:latin typeface="Arial"/>
                         </a:rPr>
-                        <a:t>Engineers work directly with users; solution engineers embedded in key accounts</a:t>
+                        <a:t>'Users first' engineering culture; solutions architects embedded in enterprise accounts</a:t>
                       </a:r>
                     </a:p>
                   </a:txBody>
@@ -4079,7 +4079,7 @@
                           </a:solidFill>
                           <a:latin typeface="Arial"/>
                         </a:rPr>
-                        <a:t>User-proximate engineering credited for product velocity and enterprise wins</a:t>
+                        <a:t>$1.9T volume in 2025 (+34% YoY); 90% of Dow Jones constituents run on Stripe</a:t>
                       </a:r>
                     </a:p>
                   </a:txBody>
@@ -4135,7 +4135,7 @@
                           </a:solidFill>
                           <a:latin typeface="Arial"/>
                         </a:rPr>
-                        <a:t>AI engineers embedded in internal teams to redesign core workflows</a:t>
+                        <a:t>'Forward Deployed Agent Builders' embed with internal teams to automate core workflows</a:t>
                       </a:r>
                     </a:p>
                   </a:txBody>
@@ -4162,7 +4162,7 @@
                           </a:solidFill>
                           <a:latin typeface="Arial"/>
                         </a:rPr>
-                        <a:t>Leadership reports company-wide daily AI usage from the embedded rollout</a:t>
+                        <a:t>Onboarding auto-approval 0→40% in weeks; manual identity reviews down 70%; responses 90% faster</a:t>
                       </a:r>
                     </a:p>
                   </a:txBody>
@@ -4218,7 +4218,7 @@
                           </a:solidFill>
                           <a:latin typeface="Arial"/>
                         </a:rPr>
-                        <a:t>FDEs work alongside customer engineers during onboarding and expansion</a:t>
+                        <a:t>Embedded customer engineering: solutions engineers and technical account managers own integrations</a:t>
                       </a:r>
                     </a:p>
                   </a:txBody>
@@ -4245,7 +4245,7 @@
                           </a:solidFill>
                           <a:latin typeface="Arial"/>
                         </a:rPr>
-                        <a:t>Publicly cites materially faster enterprise integrations</a:t>
+                        <a:t>&gt;$500M ARR in 2025 (~40% YoY), profitable; 1,000+ enterprise customers; &gt;1M new connections daily</a:t>
                       </a:r>
                     </a:p>
                   </a:txBody>
@@ -4401,8 +4401,8 @@
         </p:nvSpPr>
         <p:spPr>
           <a:xfrm>
-            <a:off x="502920" y="6583680"/>
-            <a:ext cx="9601200" cy="228600"/>
+            <a:off x="502920" y="6565392"/>
+            <a:ext cx="10332720" cy="274320"/>
           </a:xfrm>
           <a:prstGeom prst="rect">
             <a:avLst/>
@@ -4417,20 +4417,20 @@
           <a:p>
             <a:pPr algn="l">
               <a:lnSpc>
-                <a:spcPct val="100000"/>
+                <a:spcPct val="110000"/>
               </a:lnSpc>
               <a:spcAft>
                 <a:spcPts val="0"/>
               </a:spcAft>
             </a:pPr>
             <a:r>
-              <a:rPr sz="750" b="0">
+              <a:rPr sz="700" b="0">
                 <a:solidFill>
                   <a:srgbClr val="8C8C8C"/>
                 </a:solidFill>
                 <a:latin typeface="Arial"/>
               </a:rPr>
-              <a:t>Source: Company earnings calls, engineering blogs and public statements. Outcomes as publicly reported; not independently verified.</a:t>
+              <a:t>Source: company SEC filings, earnings calls, annual letters, blogs and press reporting, 2014–2026; company-by-company detail and citations in backup</a:t>
             </a:r>
           </a:p>
         </p:txBody>
@@ -4532,7 +4532,7 @@
                 </a:solidFill>
                 <a:latin typeface="Arial"/>
               </a:rPr>
-              <a:t>Stripe's user-proximate engineering culture is a long-standing form of forward deployment</a:t>
+              <a:t>Stripe institutionalized user-proximate engineering a decade before it had a name</a:t>
             </a:r>
           </a:p>
         </p:txBody>
@@ -4697,8 +4697,8 @@
         </p:nvSpPr>
         <p:spPr>
           <a:xfrm>
-            <a:off x="502920" y="2231136"/>
-            <a:ext cx="2624328" cy="4023360"/>
+            <a:off x="502920" y="2194560"/>
+            <a:ext cx="2624328" cy="2834640"/>
           </a:xfrm>
           <a:prstGeom prst="rect">
             <a:avLst/>
@@ -4713,14 +4713,14 @@
           <a:p>
             <a:pPr algn="l">
               <a:lnSpc>
-                <a:spcPct val="120000"/>
-              </a:lnSpc>
-              <a:spcAft>
-                <a:spcPts val="1600"/>
-              </a:spcAft>
-            </a:pPr>
-            <a:r>
-              <a:rPr sz="1050" b="0">
+                <a:spcPct val="115000"/>
+              </a:lnSpc>
+              <a:spcAft>
+                <a:spcPts val="900"/>
+              </a:spcAft>
+            </a:pPr>
+            <a:r>
+              <a:rPr sz="900" b="0">
                 <a:solidFill>
                   <a:srgbClr val="000000"/>
                 </a:solidFill>
@@ -4729,26 +4729,35 @@
               <a:t>•  </a:t>
             </a:r>
             <a:r>
-              <a:rPr sz="1050" b="0">
-                <a:solidFill>
-                  <a:srgbClr val="000000"/>
-                </a:solidFill>
-                <a:latin typeface="Arial"/>
-              </a:rPr>
-              <a:t>Engineers work directly with users — a founding practice</a:t>
-            </a:r>
-          </a:p>
-          <a:p>
-            <a:pPr algn="l">
-              <a:lnSpc>
-                <a:spcPct val="120000"/>
-              </a:lnSpc>
-              <a:spcAft>
-                <a:spcPts val="1600"/>
-              </a:spcAft>
-            </a:pPr>
-            <a:r>
-              <a:rPr sz="1050" b="0">
+              <a:rPr sz="900" b="0">
+                <a:solidFill>
+                  <a:srgbClr val="000000"/>
+                </a:solidFill>
+                <a:latin typeface="Arial"/>
+              </a:rPr>
+              <a:t>“Users first” is a codified operating principle: work backwards from user needs</a:t>
+            </a:r>
+            <a:r>
+              <a:rPr sz="700" b="0">
+                <a:solidFill>
+                  <a:srgbClr val="8C8C8C"/>
+                </a:solidFill>
+                <a:latin typeface="Arial"/>
+              </a:rPr>
+              <a:t>  (stripe.com)</a:t>
+            </a:r>
+          </a:p>
+          <a:p>
+            <a:pPr algn="l">
+              <a:lnSpc>
+                <a:spcPct val="115000"/>
+              </a:lnSpc>
+              <a:spcAft>
+                <a:spcPts val="900"/>
+              </a:spcAft>
+            </a:pPr>
+            <a:r>
+              <a:rPr sz="900" b="0">
                 <a:solidFill>
                   <a:srgbClr val="000000"/>
                 </a:solidFill>
@@ -4757,26 +4766,35 @@
               <a:t>•  </a:t>
             </a:r>
             <a:r>
-              <a:rPr sz="1050" b="0">
-                <a:solidFill>
-                  <a:srgbClr val="000000"/>
-                </a:solidFill>
-                <a:latin typeface="Arial"/>
-              </a:rPr>
-              <a:t>Solution engineers embedded in key enterprise accounts</a:t>
-            </a:r>
-          </a:p>
-          <a:p>
-            <a:pPr algn="l">
-              <a:lnSpc>
-                <a:spcPct val="120000"/>
-              </a:lnSpc>
-              <a:spcAft>
-                <a:spcPts val="1600"/>
-              </a:spcAft>
-            </a:pPr>
-            <a:r>
-              <a:rPr sz="1050" b="0">
+              <a:rPr sz="900" b="0">
+                <a:solidFill>
+                  <a:srgbClr val="000000"/>
+                </a:solidFill>
+                <a:latin typeface="Arial"/>
+              </a:rPr>
+              <a:t>A customer joins the first 30 minutes of the executive team meeting every other week, before ~40 leaders</a:t>
+            </a:r>
+            <a:r>
+              <a:rPr sz="700" b="0">
+                <a:solidFill>
+                  <a:srgbClr val="8C8C8C"/>
+                </a:solidFill>
+                <a:latin typeface="Arial"/>
+              </a:rPr>
+              <a:t>  (P. Collison, Apr 2025)</a:t>
+            </a:r>
+          </a:p>
+          <a:p>
+            <a:pPr algn="l">
+              <a:lnSpc>
+                <a:spcPct val="115000"/>
+              </a:lnSpc>
+              <a:spcAft>
+                <a:spcPts val="900"/>
+              </a:spcAft>
+            </a:pPr>
+            <a:r>
+              <a:rPr sz="900" b="0">
                 <a:solidFill>
                   <a:srgbClr val="000000"/>
                 </a:solidFill>
@@ -4785,13 +4803,59 @@
               <a:t>•  </a:t>
             </a:r>
             <a:r>
-              <a:rPr sz="1050" b="0">
-                <a:solidFill>
-                  <a:srgbClr val="000000"/>
-                </a:solidFill>
-                <a:latin typeface="Arial"/>
-              </a:rPr>
-              <a:t>Direct user contact expected of product engineers</a:t>
+              <a:rPr sz="900" b="0">
+                <a:solidFill>
+                  <a:srgbClr val="000000"/>
+                </a:solidFill>
+                <a:latin typeface="Arial"/>
+              </a:rPr>
+              <a:t>Friction logging: engineers and leaders walk product flows as users and log every snag</a:t>
+            </a:r>
+            <a:r>
+              <a:rPr sz="700" b="0">
+                <a:solidFill>
+                  <a:srgbClr val="8C8C8C"/>
+                </a:solidFill>
+                <a:latin typeface="Arial"/>
+              </a:rPr>
+              <a:t>  (Stripe DevRel)</a:t>
+            </a:r>
+          </a:p>
+          <a:p>
+            <a:pPr algn="l">
+              <a:lnSpc>
+                <a:spcPct val="115000"/>
+              </a:lnSpc>
+              <a:spcAft>
+                <a:spcPts val="900"/>
+              </a:spcAft>
+            </a:pPr>
+            <a:r>
+              <a:rPr sz="900" b="0">
+                <a:solidFill>
+                  <a:srgbClr val="000000"/>
+                </a:solidFill>
+                <a:latin typeface="Arial"/>
+              </a:rPr>
+              <a:t>•  </a:t>
+            </a:r>
+            <a:r>
+              <a:rPr sz="900" b="0">
+                <a:solidFill>
+                  <a:srgbClr val="000000"/>
+                </a:solidFill>
+                <a:latin typeface="Arial"/>
+              </a:rPr>
+              <a:t>Solutions architects and professional services embedded in enterprise accounts</a:t>
+            </a:r>
+            <a:r>
+              <a:rPr sz="700" b="0">
+                <a:solidFill>
+                  <a:srgbClr val="8C8C8C"/>
+                </a:solidFill>
+                <a:latin typeface="Arial"/>
+              </a:rPr>
+              <a:t>  (stripe.com)</a:t>
             </a:r>
           </a:p>
         </p:txBody>
@@ -4868,8 +4932,8 @@
         </p:nvSpPr>
         <p:spPr>
           <a:xfrm>
-            <a:off x="3355848" y="2231136"/>
-            <a:ext cx="2624328" cy="4023360"/>
+            <a:off x="3355848" y="2194560"/>
+            <a:ext cx="2624328" cy="2834640"/>
           </a:xfrm>
           <a:prstGeom prst="rect">
             <a:avLst/>
@@ -4884,14 +4948,14 @@
           <a:p>
             <a:pPr algn="l">
               <a:lnSpc>
-                <a:spcPct val="120000"/>
-              </a:lnSpc>
-              <a:spcAft>
-                <a:spcPts val="1600"/>
-              </a:spcAft>
-            </a:pPr>
-            <a:r>
-              <a:rPr sz="1050" b="0">
+                <a:spcPct val="115000"/>
+              </a:lnSpc>
+              <a:spcAft>
+                <a:spcPts val="900"/>
+              </a:spcAft>
+            </a:pPr>
+            <a:r>
+              <a:rPr sz="900" b="0">
                 <a:solidFill>
                   <a:srgbClr val="000000"/>
                 </a:solidFill>
@@ -4900,7 +4964,7 @@
               <a:t>•  </a:t>
             </a:r>
             <a:r>
-              <a:rPr sz="1050" b="0">
+              <a:rPr sz="900" b="0">
                 <a:solidFill>
                   <a:srgbClr val="000000"/>
                 </a:solidFill>
@@ -4912,14 +4976,14 @@
           <a:p>
             <a:pPr algn="l">
               <a:lnSpc>
-                <a:spcPct val="120000"/>
-              </a:lnSpc>
-              <a:spcAft>
-                <a:spcPts val="1600"/>
-              </a:spcAft>
-            </a:pPr>
-            <a:r>
-              <a:rPr sz="1050" b="0">
+                <a:spcPct val="115000"/>
+              </a:lnSpc>
+              <a:spcAft>
+                <a:spcPts val="900"/>
+              </a:spcAft>
+            </a:pPr>
+            <a:r>
+              <a:rPr sz="900" b="0">
                 <a:solidFill>
                   <a:srgbClr val="000000"/>
                 </a:solidFill>
@@ -4928,13 +4992,22 @@
               <a:t>•  </a:t>
             </a:r>
             <a:r>
-              <a:rPr sz="1050" b="0">
-                <a:solidFill>
-                  <a:srgbClr val="000000"/>
-                </a:solidFill>
-                <a:latin typeface="Arial"/>
-              </a:rPr>
-              <a:t>Enterprise payments complexity could not be specified remotely</a:t>
+              <a:rPr sz="900" b="0">
+                <a:solidFill>
+                  <a:srgbClr val="000000"/>
+                </a:solidFill>
+                <a:latin typeface="Arial"/>
+              </a:rPr>
+              <a:t>Stripe ran for years without product managers — engineers own scoping and user contact</a:t>
+            </a:r>
+            <a:r>
+              <a:rPr sz="700" b="0">
+                <a:solidFill>
+                  <a:srgbClr val="8C8C8C"/>
+                </a:solidFill>
+                <a:latin typeface="Arial"/>
+              </a:rPr>
+              <a:t>  (Pragmatic Engineer, 2023)</a:t>
             </a:r>
           </a:p>
         </p:txBody>
@@ -5011,8 +5084,8 @@
         </p:nvSpPr>
         <p:spPr>
           <a:xfrm>
-            <a:off x="6208776" y="2231136"/>
-            <a:ext cx="2624328" cy="4023360"/>
+            <a:off x="6208776" y="2194560"/>
+            <a:ext cx="2624328" cy="2834640"/>
           </a:xfrm>
           <a:prstGeom prst="rect">
             <a:avLst/>
@@ -5027,14 +5100,14 @@
           <a:p>
             <a:pPr algn="l">
               <a:lnSpc>
-                <a:spcPct val="120000"/>
-              </a:lnSpc>
-              <a:spcAft>
-                <a:spcPts val="1600"/>
-              </a:spcAft>
-            </a:pPr>
-            <a:r>
-              <a:rPr sz="1050" b="0">
+                <a:spcPct val="115000"/>
+              </a:lnSpc>
+              <a:spcAft>
+                <a:spcPts val="900"/>
+              </a:spcAft>
+            </a:pPr>
+            <a:r>
+              <a:rPr sz="900" b="0">
                 <a:solidFill>
                   <a:srgbClr val="000000"/>
                 </a:solidFill>
@@ -5043,26 +5116,26 @@
               <a:t>•  </a:t>
             </a:r>
             <a:r>
-              <a:rPr sz="1050" b="0">
-                <a:solidFill>
-                  <a:srgbClr val="000000"/>
-                </a:solidFill>
-                <a:latin typeface="Arial"/>
-              </a:rPr>
-              <a:t>Cultural rather than organizational — proximity is the default</a:t>
-            </a:r>
-          </a:p>
-          <a:p>
-            <a:pPr algn="l">
-              <a:lnSpc>
-                <a:spcPct val="120000"/>
-              </a:lnSpc>
-              <a:spcAft>
-                <a:spcPts val="1600"/>
-              </a:spcAft>
-            </a:pPr>
-            <a:r>
-              <a:rPr sz="1050" b="0">
+              <a:rPr sz="900" b="0">
+                <a:solidFill>
+                  <a:srgbClr val="000000"/>
+                </a:solidFill>
+                <a:latin typeface="Arial"/>
+              </a:rPr>
+              <a:t>Cultural rather than organizational: proximity is expected of every engineer and screened in interviews</a:t>
+            </a:r>
+          </a:p>
+          <a:p>
+            <a:pPr algn="l">
+              <a:lnSpc>
+                <a:spcPct val="115000"/>
+              </a:lnSpc>
+              <a:spcAft>
+                <a:spcPts val="900"/>
+              </a:spcAft>
+            </a:pPr>
+            <a:r>
+              <a:rPr sz="900" b="0">
                 <a:solidFill>
                   <a:srgbClr val="000000"/>
                 </a:solidFill>
@@ -5071,13 +5144,13 @@
               <a:t>•  </a:t>
             </a:r>
             <a:r>
-              <a:rPr sz="1050" b="0">
-                <a:solidFill>
-                  <a:srgbClr val="000000"/>
-                </a:solidFill>
-                <a:latin typeface="Arial"/>
-              </a:rPr>
-              <a:t>API design shaped by continuous developer feedback</a:t>
+              <a:rPr sz="900" b="0">
+                <a:solidFill>
+                  <a:srgbClr val="000000"/>
+                </a:solidFill>
+                <a:latin typeface="Arial"/>
+              </a:rPr>
+              <a:t>Onboarding puts every hire in front of users: build an integration, answer real support tickets</a:t>
             </a:r>
           </a:p>
         </p:txBody>
@@ -5154,8 +5227,8 @@
         </p:nvSpPr>
         <p:spPr>
           <a:xfrm>
-            <a:off x="9061704" y="2231136"/>
-            <a:ext cx="2624328" cy="4023360"/>
+            <a:off x="9061704" y="2194560"/>
+            <a:ext cx="2624328" cy="2834640"/>
           </a:xfrm>
           <a:prstGeom prst="rect">
             <a:avLst/>
@@ -5170,14 +5243,14 @@
           <a:p>
             <a:pPr algn="l">
               <a:lnSpc>
-                <a:spcPct val="120000"/>
-              </a:lnSpc>
-              <a:spcAft>
-                <a:spcPts val="1600"/>
-              </a:spcAft>
-            </a:pPr>
-            <a:r>
-              <a:rPr sz="1050" b="0">
+                <a:spcPct val="115000"/>
+              </a:lnSpc>
+              <a:spcAft>
+                <a:spcPts val="900"/>
+              </a:spcAft>
+            </a:pPr>
+            <a:r>
+              <a:rPr sz="900" b="0">
                 <a:solidFill>
                   <a:srgbClr val="000000"/>
                 </a:solidFill>
@@ -5186,26 +5259,35 @@
               <a:t>•  </a:t>
             </a:r>
             <a:r>
-              <a:rPr sz="1050" b="0">
-                <a:solidFill>
-                  <a:srgbClr val="000000"/>
-                </a:solidFill>
-                <a:latin typeface="Arial"/>
-              </a:rPr>
-              <a:t>User-proximate engineering credited for product velocity and enterprise wins</a:t>
-            </a:r>
-          </a:p>
-          <a:p>
-            <a:pPr algn="l">
-              <a:lnSpc>
-                <a:spcPct val="120000"/>
-              </a:lnSpc>
-              <a:spcAft>
-                <a:spcPts val="1600"/>
-              </a:spcAft>
-            </a:pPr>
-            <a:r>
-              <a:rPr sz="1050" b="0">
+              <a:rPr sz="900" b="0">
+                <a:solidFill>
+                  <a:srgbClr val="000000"/>
+                </a:solidFill>
+                <a:latin typeface="Arial"/>
+              </a:rPr>
+              <a:t>$1.9T processed in 2025, +34% YoY — roughly 1.6% of global GDP</a:t>
+            </a:r>
+            <a:r>
+              <a:rPr sz="700" b="0">
+                <a:solidFill>
+                  <a:srgbClr val="8C8C8C"/>
+                </a:solidFill>
+                <a:latin typeface="Arial"/>
+              </a:rPr>
+              <a:t>  (2025 annual letter)</a:t>
+            </a:r>
+          </a:p>
+          <a:p>
+            <a:pPr algn="l">
+              <a:lnSpc>
+                <a:spcPct val="115000"/>
+              </a:lnSpc>
+              <a:spcAft>
+                <a:spcPts val="900"/>
+              </a:spcAft>
+            </a:pPr>
+            <a:r>
+              <a:rPr sz="900" b="0">
                 <a:solidFill>
                   <a:srgbClr val="000000"/>
                 </a:solidFill>
@@ -5214,20 +5296,187 @@
               <a:t>•  </a:t>
             </a:r>
             <a:r>
-              <a:rPr sz="1050" b="0">
-                <a:solidFill>
-                  <a:srgbClr val="000000"/>
-                </a:solidFill>
-                <a:latin typeface="Arial"/>
-              </a:rPr>
-              <a:t>Developer experience widely treated as the industry benchmark</a:t>
+              <a:rPr sz="900" b="0">
+                <a:solidFill>
+                  <a:srgbClr val="000000"/>
+                </a:solidFill>
+                <a:latin typeface="Arial"/>
+              </a:rPr>
+              <a:t>90% of Dow Jones constituents and 80% of the Nasdaq 100 run on Stripe</a:t>
+            </a:r>
+            <a:r>
+              <a:rPr sz="700" b="0">
+                <a:solidFill>
+                  <a:srgbClr val="8C8C8C"/>
+                </a:solidFill>
+                <a:latin typeface="Arial"/>
+              </a:rPr>
+              <a:t>  (2025 annual letter)</a:t>
+            </a:r>
+          </a:p>
+          <a:p>
+            <a:pPr algn="l">
+              <a:lnSpc>
+                <a:spcPct val="115000"/>
+              </a:lnSpc>
+              <a:spcAft>
+                <a:spcPts val="900"/>
+              </a:spcAft>
+            </a:pPr>
+            <a:r>
+              <a:rPr sz="900" b="0">
+                <a:solidFill>
+                  <a:srgbClr val="000000"/>
+                </a:solidFill>
+                <a:latin typeface="Arial"/>
+              </a:rPr>
+              <a:t>•  </a:t>
+            </a:r>
+            <a:r>
+              <a:rPr sz="900" b="0">
+                <a:solidFill>
+                  <a:srgbClr val="000000"/>
+                </a:solidFill>
+                <a:latin typeface="Arial"/>
+              </a:rPr>
+              <a:t>Businesses on Stripe grew ~7x faster than S&amp;P 500 revenue in aggregate</a:t>
+            </a:r>
+            <a:r>
+              <a:rPr sz="700" b="0">
+                <a:solidFill>
+                  <a:srgbClr val="8C8C8C"/>
+                </a:solidFill>
+                <a:latin typeface="Arial"/>
+              </a:rPr>
+              <a:t>  (2024 annual letter)</a:t>
+            </a:r>
+          </a:p>
+        </p:txBody>
+      </p:sp>
+      <p:sp>
+        <p:nvSpPr>
+          <p:cNvPr id="18" name="Rectangle 17"/>
+          <p:cNvSpPr/>
+          <p:nvPr/>
+        </p:nvSpPr>
+        <p:spPr>
+          <a:xfrm>
+            <a:off x="502920" y="5230368"/>
+            <a:ext cx="11185855" cy="987552"/>
+          </a:xfrm>
+          <a:prstGeom prst="rect">
+            <a:avLst/>
+          </a:prstGeom>
+          <a:solidFill>
+            <a:srgbClr val="F2F2F2"/>
+          </a:solidFill>
+          <a:ln>
+            <a:noFill/>
+          </a:ln>
+          <a:effectLst/>
+        </p:spPr>
+        <p:txBody>
+          <a:bodyPr rtlCol="0" anchor="ctr" lIns="54864" rIns="54864" tIns="18288" bIns="18288"/>
+          <a:lstStyle/>
+          <a:p>
+            <a:pPr algn="ctr"/>
+          </a:p>
+        </p:txBody>
+      </p:sp>
+      <p:sp>
+        <p:nvSpPr>
+          <p:cNvPr id="19" name="Rectangle 18"/>
+          <p:cNvSpPr/>
+          <p:nvPr/>
+        </p:nvSpPr>
+        <p:spPr>
+          <a:xfrm>
+            <a:off x="502920" y="5230368"/>
+            <a:ext cx="36576" cy="987552"/>
+          </a:xfrm>
+          <a:prstGeom prst="rect">
+            <a:avLst/>
+          </a:prstGeom>
+          <a:solidFill>
+            <a:srgbClr val="000000"/>
+          </a:solidFill>
+          <a:ln>
+            <a:noFill/>
+          </a:ln>
+          <a:effectLst/>
+        </p:spPr>
+        <p:txBody>
+          <a:bodyPr rtlCol="0" anchor="ctr" lIns="54864" rIns="54864" tIns="18288" bIns="18288"/>
+          <a:lstStyle/>
+          <a:p>
+            <a:pPr algn="ctr"/>
+          </a:p>
+        </p:txBody>
+      </p:sp>
+      <p:sp>
+        <p:nvSpPr>
+          <p:cNvPr id="20" name="TextBox 19"/>
+          <p:cNvSpPr txBox="1"/>
+          <p:nvPr/>
+        </p:nvSpPr>
+        <p:spPr>
+          <a:xfrm>
+            <a:off x="704088" y="5230368"/>
+            <a:ext cx="10783519" cy="987552"/>
+          </a:xfrm>
+          <a:prstGeom prst="rect">
+            <a:avLst/>
+          </a:prstGeom>
+          <a:noFill/>
+        </p:spPr>
+        <p:txBody>
+          <a:bodyPr wrap="square" anchor="ctr" lIns="0" rIns="0" tIns="0" bIns="0">
+            <a:spAutoFit/>
+          </a:bodyPr>
+          <a:lstStyle/>
+          <a:p>
+            <a:pPr algn="l">
+              <a:lnSpc>
+                <a:spcPct val="115000"/>
+              </a:lnSpc>
+              <a:spcAft>
+                <a:spcPts val="400"/>
+              </a:spcAft>
+            </a:pPr>
+            <a:r>
+              <a:rPr sz="1000" b="0">
+                <a:solidFill>
+                  <a:srgbClr val="000000"/>
+                </a:solidFill>
+                <a:latin typeface="Arial"/>
+              </a:rPr>
+              <a:t>“Every other week, we have a customer join for the first 30 minutes of our management team meeting: they share their candid feedback, and ~40 leaders from across Stripe listen.”</a:t>
+            </a:r>
+          </a:p>
+          <a:p>
+            <a:pPr algn="l">
+              <a:lnSpc>
+                <a:spcPct val="115000"/>
+              </a:lnSpc>
+              <a:spcAft>
+                <a:spcPts val="400"/>
+              </a:spcAft>
+            </a:pPr>
+            <a:r>
+              <a:rPr sz="850" b="1">
+                <a:solidFill>
+                  <a:srgbClr val="595959"/>
+                </a:solidFill>
+                <a:latin typeface="Arial"/>
+              </a:rPr>
+              <a:t>— Patrick Collison, co-founder and CEO, Apr 2025</a:t>
             </a:r>
           </a:p>
         </p:txBody>
       </p:sp>
       <p:cxnSp>
         <p:nvCxnSpPr>
-          <p:cNvPr id="18" name="Connector 17"/>
+          <p:cNvPr id="21" name="Connector 20"/>
           <p:cNvCxnSpPr/>
           <p:nvPr/>
         </p:nvCxnSpPr>
@@ -5249,14 +5498,14 @@
       </p:cxnSp>
       <p:sp>
         <p:nvSpPr>
-          <p:cNvPr id="19" name="TextBox 18"/>
+          <p:cNvPr id="22" name="TextBox 21"/>
           <p:cNvSpPr txBox="1"/>
           <p:nvPr/>
         </p:nvSpPr>
         <p:spPr>
           <a:xfrm>
-            <a:off x="502920" y="6583680"/>
-            <a:ext cx="9601200" cy="228600"/>
+            <a:off x="502920" y="6565392"/>
+            <a:ext cx="10332720" cy="274320"/>
           </a:xfrm>
           <a:prstGeom prst="rect">
             <a:avLst/>
@@ -5271,27 +5520,27 @@
           <a:p>
             <a:pPr algn="l">
               <a:lnSpc>
-                <a:spcPct val="100000"/>
+                <a:spcPct val="110000"/>
               </a:lnSpc>
               <a:spcAft>
                 <a:spcPts val="0"/>
               </a:spcAft>
             </a:pPr>
             <a:r>
-              <a:rPr sz="750" b="0">
+              <a:rPr sz="700" b="0">
                 <a:solidFill>
                   <a:srgbClr val="8C8C8C"/>
                 </a:solidFill>
                 <a:latin typeface="Arial"/>
               </a:rPr>
-              <a:t>Source: Stripe public statements, founder interviews and press coverage</a:t>
-            </a:r>
-          </a:p>
-        </p:txBody>
-      </p:sp>
-      <p:sp>
-        <p:nvSpPr>
-          <p:cNvPr id="20" name="TextBox 19"/>
+              <a:t>Sources: Stripe annual letters (Feb 2025; Feb 2026); Stripe operating principles (stripe.com/jobs/culture); TechCrunch (Apr 2025); The Pragmatic Engineer (Dec 2023)</a:t>
+            </a:r>
+          </a:p>
+        </p:txBody>
+      </p:sp>
+      <p:sp>
+        <p:nvSpPr>
+          <p:cNvPr id="23" name="TextBox 22"/>
           <p:cNvSpPr txBox="1"/>
           <p:nvPr/>
         </p:nvSpPr>
@@ -5551,8 +5800,8 @@
         </p:nvSpPr>
         <p:spPr>
           <a:xfrm>
-            <a:off x="502920" y="2231136"/>
-            <a:ext cx="2624328" cy="4023360"/>
+            <a:off x="502920" y="2194560"/>
+            <a:ext cx="2624328" cy="2834640"/>
           </a:xfrm>
           <a:prstGeom prst="rect">
             <a:avLst/>
@@ -5567,14 +5816,14 @@
           <a:p>
             <a:pPr algn="l">
               <a:lnSpc>
-                <a:spcPct val="120000"/>
-              </a:lnSpc>
-              <a:spcAft>
-                <a:spcPts val="1600"/>
-              </a:spcAft>
-            </a:pPr>
-            <a:r>
-              <a:rPr sz="1050" b="0">
+                <a:spcPct val="115000"/>
+              </a:lnSpc>
+              <a:spcAft>
+                <a:spcPts val="900"/>
+              </a:spcAft>
+            </a:pPr>
+            <a:r>
+              <a:rPr sz="900" b="0">
                 <a:solidFill>
                   <a:srgbClr val="000000"/>
                 </a:solidFill>
@@ -5583,26 +5832,35 @@
               <a:t>•  </a:t>
             </a:r>
             <a:r>
-              <a:rPr sz="1050" b="0">
-                <a:solidFill>
-                  <a:srgbClr val="000000"/>
-                </a:solidFill>
-                <a:latin typeface="Arial"/>
-              </a:rPr>
-              <a:t>AI engineers embedded within internal business teams</a:t>
-            </a:r>
-          </a:p>
-          <a:p>
-            <a:pPr algn="l">
-              <a:lnSpc>
-                <a:spcPct val="120000"/>
-              </a:lnSpc>
-              <a:spcAft>
-                <a:spcPts val="1600"/>
-              </a:spcAft>
-            </a:pPr>
-            <a:r>
-              <a:rPr sz="1050" b="0">
+              <a:rPr sz="900" b="0">
+                <a:solidFill>
+                  <a:srgbClr val="000000"/>
+                </a:solidFill>
+                <a:latin typeface="Arial"/>
+              </a:rPr>
+              <a:t>A formal role: 'Forward Deployed Agent Builder' engineers “embed with partner teams”, shadow the work, then ship agents that take over workflows</a:t>
+            </a:r>
+            <a:r>
+              <a:rPr sz="700" b="0">
+                <a:solidFill>
+                  <a:srgbClr val="8C8C8C"/>
+                </a:solidFill>
+                <a:latin typeface="Arial"/>
+              </a:rPr>
+              <a:t>  (Brex careers)</a:t>
+            </a:r>
+          </a:p>
+          <a:p>
+            <a:pPr algn="l">
+              <a:lnSpc>
+                <a:spcPct val="115000"/>
+              </a:lnSpc>
+              <a:spcAft>
+                <a:spcPts val="900"/>
+              </a:spcAft>
+            </a:pPr>
+            <a:r>
+              <a:rPr sz="900" b="0">
                 <a:solidFill>
                   <a:srgbClr val="000000"/>
                 </a:solidFill>
@@ -5611,26 +5869,35 @@
               <a:t>•  </a:t>
             </a:r>
             <a:r>
-              <a:rPr sz="1050" b="0">
-                <a:solidFill>
-                  <a:srgbClr val="000000"/>
-                </a:solidFill>
-                <a:latin typeface="Arial"/>
-              </a:rPr>
-              <a:t>Core workflows redesigned around AI-native tooling</a:t>
-            </a:r>
-          </a:p>
-          <a:p>
-            <a:pPr algn="l">
-              <a:lnSpc>
-                <a:spcPct val="120000"/>
-              </a:lnSpc>
-              <a:spcAft>
-                <a:spcPts val="1600"/>
-              </a:spcAft>
-            </a:pPr>
-            <a:r>
-              <a:rPr sz="1050" b="0">
+              <a:rPr sz="900" b="0">
+                <a:solidFill>
+                  <a:srgbClr val="000000"/>
+                </a:solidFill>
+                <a:latin typeface="Arial"/>
+              </a:rPr>
+              <a:t>Three-pillar strategy: corporate AI, operational AI (owned by the COO) and product AI</a:t>
+            </a:r>
+            <a:r>
+              <a:rPr sz="700" b="0">
+                <a:solidFill>
+                  <a:srgbClr val="8C8C8C"/>
+                </a:solidFill>
+                <a:latin typeface="Arial"/>
+              </a:rPr>
+              <a:t>  (Latent.Space, Feb 2026)</a:t>
+            </a:r>
+          </a:p>
+          <a:p>
+            <a:pPr algn="l">
+              <a:lnSpc>
+                <a:spcPct val="115000"/>
+              </a:lnSpc>
+              <a:spcAft>
+                <a:spcPts val="900"/>
+              </a:spcAft>
+            </a:pPr>
+            <a:r>
+              <a:rPr sz="900" b="0">
                 <a:solidFill>
                   <a:srgbClr val="000000"/>
                 </a:solidFill>
@@ -5639,13 +5906,22 @@
               <a:t>•  </a:t>
             </a:r>
             <a:r>
-              <a:rPr sz="1050" b="0">
-                <a:solidFill>
-                  <a:srgbClr val="000000"/>
-                </a:solidFill>
-                <a:latin typeface="Arial"/>
-              </a:rPr>
-              <a:t>Adoption managed as an explicit leadership mandate</a:t>
+              <a:rPr sz="900" b="0">
+                <a:solidFill>
+                  <a:srgbClr val="000000"/>
+                </a:solidFill>
+                <a:latin typeface="Arial"/>
+              </a:rPr>
+              <a:t>~1,000 approved AI tools; each engineer holds a $50/month self-serve budget</a:t>
+            </a:r>
+            <a:r>
+              <a:rPr sz="700" b="0">
+                <a:solidFill>
+                  <a:srgbClr val="8C8C8C"/>
+                </a:solidFill>
+                <a:latin typeface="Arial"/>
+              </a:rPr>
+              <a:t>  (TechCrunch, Jul 2025)</a:t>
             </a:r>
           </a:p>
         </p:txBody>
@@ -5722,8 +5998,8 @@
         </p:nvSpPr>
         <p:spPr>
           <a:xfrm>
-            <a:off x="3355848" y="2231136"/>
-            <a:ext cx="2624328" cy="4023360"/>
+            <a:off x="3355848" y="2194560"/>
+            <a:ext cx="2624328" cy="2834640"/>
           </a:xfrm>
           <a:prstGeom prst="rect">
             <a:avLst/>
@@ -5738,14 +6014,14 @@
           <a:p>
             <a:pPr algn="l">
               <a:lnSpc>
-                <a:spcPct val="120000"/>
-              </a:lnSpc>
-              <a:spcAft>
-                <a:spcPts val="1600"/>
-              </a:spcAft>
-            </a:pPr>
-            <a:r>
-              <a:rPr sz="1050" b="0">
+                <a:spcPct val="115000"/>
+              </a:lnSpc>
+              <a:spcAft>
+                <a:spcPts val="900"/>
+              </a:spcAft>
+            </a:pPr>
+            <a:r>
+              <a:rPr sz="900" b="0">
                 <a:solidFill>
                   <a:srgbClr val="000000"/>
                 </a:solidFill>
@@ -5754,26 +6030,35 @@
               <a:t>•  </a:t>
             </a:r>
             <a:r>
-              <a:rPr sz="1050" b="0">
-                <a:solidFill>
-                  <a:srgbClr val="000000"/>
-                </a:solidFill>
-                <a:latin typeface="Arial"/>
-              </a:rPr>
-              <a:t>Fintech margin pressure demanded step-change productivity</a:t>
-            </a:r>
-          </a:p>
-          <a:p>
-            <a:pPr algn="l">
-              <a:lnSpc>
-                <a:spcPct val="120000"/>
-              </a:lnSpc>
-              <a:spcAft>
-                <a:spcPts val="1600"/>
-              </a:spcAft>
-            </a:pPr>
-            <a:r>
-              <a:rPr sz="1050" b="0">
+              <a:rPr sz="900" b="0">
+                <a:solidFill>
+                  <a:srgbClr val="000000"/>
+                </a:solidFill>
+                <a:latin typeface="Arial"/>
+              </a:rPr>
+              <a:t>The founding question: “If we were starting Brex today, how would we build?”</a:t>
+            </a:r>
+            <a:r>
+              <a:rPr sz="700" b="0">
+                <a:solidFill>
+                  <a:srgbClr val="8C8C8C"/>
+                </a:solidFill>
+                <a:latin typeface="Arial"/>
+              </a:rPr>
+              <a:t>  (Brex Journal, Aug 2025)</a:t>
+            </a:r>
+          </a:p>
+          <a:p>
+            <a:pPr algn="l">
+              <a:lnSpc>
+                <a:spcPct val="115000"/>
+              </a:lnSpc>
+              <a:spcAft>
+                <a:spcPts val="900"/>
+              </a:spcAft>
+            </a:pPr>
+            <a:r>
+              <a:rPr sz="900" b="0">
                 <a:solidFill>
                   <a:srgbClr val="000000"/>
                 </a:solidFill>
@@ -5782,13 +6067,13 @@
               <a:t>•  </a:t>
             </a:r>
             <a:r>
-              <a:rPr sz="1050" b="0">
-                <a:solidFill>
-                  <a:srgbClr val="000000"/>
-                </a:solidFill>
-                <a:latin typeface="Arial"/>
-              </a:rPr>
-              <a:t>Leadership prioritized internal AI adoption ahead of external products</a:t>
+              <a:rPr sz="900" b="0">
+                <a:solidFill>
+                  <a:srgbClr val="000000"/>
+                </a:solidFill>
+                <a:latin typeface="Arial"/>
+              </a:rPr>
+              <a:t>Fintech margin pressure demanded step-change productivity; BPO strategy shifted to agents</a:t>
             </a:r>
           </a:p>
         </p:txBody>
@@ -5865,8 +6150,8 @@
         </p:nvSpPr>
         <p:spPr>
           <a:xfrm>
-            <a:off x="6208776" y="2231136"/>
-            <a:ext cx="2624328" cy="4023360"/>
+            <a:off x="6208776" y="2194560"/>
+            <a:ext cx="2624328" cy="2834640"/>
           </a:xfrm>
           <a:prstGeom prst="rect">
             <a:avLst/>
@@ -5881,14 +6166,14 @@
           <a:p>
             <a:pPr algn="l">
               <a:lnSpc>
-                <a:spcPct val="120000"/>
-              </a:lnSpc>
-              <a:spcAft>
-                <a:spcPts val="1600"/>
-              </a:spcAft>
-            </a:pPr>
-            <a:r>
-              <a:rPr sz="1050" b="0">
+                <a:spcPct val="115000"/>
+              </a:lnSpc>
+              <a:spcAft>
+                <a:spcPts val="900"/>
+              </a:spcAft>
+            </a:pPr>
+            <a:r>
+              <a:rPr sz="900" b="0">
                 <a:solidFill>
                   <a:srgbClr val="000000"/>
                 </a:solidFill>
@@ -5897,26 +6182,35 @@
               <a:t>•  </a:t>
             </a:r>
             <a:r>
-              <a:rPr sz="1050" b="0">
-                <a:solidFill>
-                  <a:srgbClr val="000000"/>
-                </a:solidFill>
-                <a:latin typeface="Arial"/>
-              </a:rPr>
-              <a:t>Internal-first: its own operations serve as the proving ground</a:t>
-            </a:r>
-          </a:p>
-          <a:p>
-            <a:pPr algn="l">
-              <a:lnSpc>
-                <a:spcPct val="120000"/>
-              </a:lnSpc>
-              <a:spcAft>
-                <a:spcPts val="1600"/>
-              </a:spcAft>
-            </a:pPr>
-            <a:r>
-              <a:rPr sz="1050" b="0">
+              <a:rPr sz="900" b="0">
+                <a:solidFill>
+                  <a:srgbClr val="000000"/>
+                </a:solidFill>
+                <a:latin typeface="Arial"/>
+              </a:rPr>
+              <a:t>Adoption is engineered, not assumed: four AI-fluency levels feed performance reviews; coding interviews require AI</a:t>
+            </a:r>
+            <a:r>
+              <a:rPr sz="700" b="0">
+                <a:solidFill>
+                  <a:srgbClr val="8C8C8C"/>
+                </a:solidFill>
+                <a:latin typeface="Arial"/>
+              </a:rPr>
+              <a:t>  (Semafor, Sept 2025)</a:t>
+            </a:r>
+          </a:p>
+          <a:p>
+            <a:pPr algn="l">
+              <a:lnSpc>
+                <a:spcPct val="115000"/>
+              </a:lnSpc>
+              <a:spcAft>
+                <a:spcPts val="900"/>
+              </a:spcAft>
+            </a:pPr>
+            <a:r>
+              <a:rPr sz="900" b="0">
                 <a:solidFill>
                   <a:srgbClr val="000000"/>
                 </a:solidFill>
@@ -5925,13 +6219,22 @@
               <a:t>•  </a:t>
             </a:r>
             <a:r>
-              <a:rPr sz="1050" b="0">
-                <a:solidFill>
-                  <a:srgbClr val="000000"/>
-                </a:solidFill>
-                <a:latin typeface="Arial"/>
-              </a:rPr>
-              <a:t>Embedded engineers accountable for adoption, not just delivery</a:t>
+              <a:rPr sz="900" b="0">
+                <a:solidFill>
+                  <a:srgbClr val="000000"/>
+                </a:solidFill>
+                <a:latin typeface="Arial"/>
+              </a:rPr>
+              <a:t>225+ spot bonuses paid for employee AI projects</a:t>
+            </a:r>
+            <a:r>
+              <a:rPr sz="700" b="0">
+                <a:solidFill>
+                  <a:srgbClr val="8C8C8C"/>
+                </a:solidFill>
+                <a:latin typeface="Arial"/>
+              </a:rPr>
+              <a:t>  (Dec 2025)</a:t>
             </a:r>
           </a:p>
         </p:txBody>
@@ -6008,8 +6311,8 @@
         </p:nvSpPr>
         <p:spPr>
           <a:xfrm>
-            <a:off x="9061704" y="2231136"/>
-            <a:ext cx="2624328" cy="4023360"/>
+            <a:off x="9061704" y="2194560"/>
+            <a:ext cx="2624328" cy="2834640"/>
           </a:xfrm>
           <a:prstGeom prst="rect">
             <a:avLst/>
@@ -6024,14 +6327,14 @@
           <a:p>
             <a:pPr algn="l">
               <a:lnSpc>
-                <a:spcPct val="120000"/>
-              </a:lnSpc>
-              <a:spcAft>
-                <a:spcPts val="1600"/>
-              </a:spcAft>
-            </a:pPr>
-            <a:r>
-              <a:rPr sz="1050" b="0">
+                <a:spcPct val="115000"/>
+              </a:lnSpc>
+              <a:spcAft>
+                <a:spcPts val="900"/>
+              </a:spcAft>
+            </a:pPr>
+            <a:r>
+              <a:rPr sz="900" b="0">
                 <a:solidFill>
                   <a:srgbClr val="000000"/>
                 </a:solidFill>
@@ -6040,26 +6343,35 @@
               <a:t>•  </a:t>
             </a:r>
             <a:r>
-              <a:rPr sz="1050" b="0">
-                <a:solidFill>
-                  <a:srgbClr val="000000"/>
-                </a:solidFill>
-                <a:latin typeface="Arial"/>
-              </a:rPr>
-              <a:t>Leadership reports company-wide daily AI usage</a:t>
-            </a:r>
-          </a:p>
-          <a:p>
-            <a:pPr algn="l">
-              <a:lnSpc>
-                <a:spcPct val="120000"/>
-              </a:lnSpc>
-              <a:spcAft>
-                <a:spcPts val="1600"/>
-              </a:spcAft>
-            </a:pPr>
-            <a:r>
-              <a:rPr sz="1050" b="0">
+              <a:rPr sz="900" b="0">
+                <a:solidFill>
+                  <a:srgbClr val="000000"/>
+                </a:solidFill>
+                <a:latin typeface="Arial"/>
+              </a:rPr>
+              <a:t>Onboarding rebuilt around agents: auto-approval from 0% to 40% in weeks; manual identity reviews down 70%</a:t>
+            </a:r>
+            <a:r>
+              <a:rPr sz="700" b="0">
+                <a:solidFill>
+                  <a:srgbClr val="8C8C8C"/>
+                </a:solidFill>
+                <a:latin typeface="Arial"/>
+              </a:rPr>
+              <a:t>  (Brex Journal, Jan 2026)</a:t>
+            </a:r>
+          </a:p>
+          <a:p>
+            <a:pPr algn="l">
+              <a:lnSpc>
+                <a:spcPct val="115000"/>
+              </a:lnSpc>
+              <a:spcAft>
+                <a:spcPts val="900"/>
+              </a:spcAft>
+            </a:pPr>
+            <a:r>
+              <a:rPr sz="900" b="0">
                 <a:solidFill>
                   <a:srgbClr val="000000"/>
                 </a:solidFill>
@@ -6068,20 +6380,187 @@
               <a:t>•  </a:t>
             </a:r>
             <a:r>
-              <a:rPr sz="1050" b="0">
-                <a:solidFill>
-                  <a:srgbClr val="000000"/>
-                </a:solidFill>
-                <a:latin typeface="Arial"/>
-              </a:rPr>
-              <a:t>Workflow redesign publicly discussed as a productivity driver</a:t>
+              <a:rPr sz="900" b="0">
+                <a:solidFill>
+                  <a:srgbClr val="000000"/>
+                </a:solidFill>
+                <a:latin typeface="Arial"/>
+              </a:rPr>
+              <a:t>Customer responses 90% faster; ~15,000 customer hours saved per year</a:t>
+            </a:r>
+            <a:r>
+              <a:rPr sz="700" b="0">
+                <a:solidFill>
+                  <a:srgbClr val="8C8C8C"/>
+                </a:solidFill>
+                <a:latin typeface="Arial"/>
+              </a:rPr>
+              <a:t>  (First Round, 2025)</a:t>
+            </a:r>
+          </a:p>
+          <a:p>
+            <a:pPr algn="l">
+              <a:lnSpc>
+                <a:spcPct val="115000"/>
+              </a:lnSpc>
+              <a:spcAft>
+                <a:spcPts val="900"/>
+              </a:spcAft>
+            </a:pPr>
+            <a:r>
+              <a:rPr sz="900" b="0">
+                <a:solidFill>
+                  <a:srgbClr val="000000"/>
+                </a:solidFill>
+                <a:latin typeface="Arial"/>
+              </a:rPr>
+              <a:t>•  </a:t>
+            </a:r>
+            <a:r>
+              <a:rPr sz="900" b="0">
+                <a:solidFill>
+                  <a:srgbClr val="000000"/>
+                </a:solidFill>
+                <a:latin typeface="Arial"/>
+              </a:rPr>
+              <a:t>Onboarding time cut from days to minutes</a:t>
+            </a:r>
+            <a:r>
+              <a:rPr sz="700" b="0">
+                <a:solidFill>
+                  <a:srgbClr val="8C8C8C"/>
+                </a:solidFill>
+                <a:latin typeface="Arial"/>
+              </a:rPr>
+              <a:t>  (Brex Journal, Jan 2026)</a:t>
+            </a:r>
+          </a:p>
+        </p:txBody>
+      </p:sp>
+      <p:sp>
+        <p:nvSpPr>
+          <p:cNvPr id="18" name="Rectangle 17"/>
+          <p:cNvSpPr/>
+          <p:nvPr/>
+        </p:nvSpPr>
+        <p:spPr>
+          <a:xfrm>
+            <a:off x="502920" y="5230368"/>
+            <a:ext cx="11185855" cy="987552"/>
+          </a:xfrm>
+          <a:prstGeom prst="rect">
+            <a:avLst/>
+          </a:prstGeom>
+          <a:solidFill>
+            <a:srgbClr val="F2F2F2"/>
+          </a:solidFill>
+          <a:ln>
+            <a:noFill/>
+          </a:ln>
+          <a:effectLst/>
+        </p:spPr>
+        <p:txBody>
+          <a:bodyPr rtlCol="0" anchor="ctr" lIns="54864" rIns="54864" tIns="18288" bIns="18288"/>
+          <a:lstStyle/>
+          <a:p>
+            <a:pPr algn="ctr"/>
+          </a:p>
+        </p:txBody>
+      </p:sp>
+      <p:sp>
+        <p:nvSpPr>
+          <p:cNvPr id="19" name="Rectangle 18"/>
+          <p:cNvSpPr/>
+          <p:nvPr/>
+        </p:nvSpPr>
+        <p:spPr>
+          <a:xfrm>
+            <a:off x="502920" y="5230368"/>
+            <a:ext cx="36576" cy="987552"/>
+          </a:xfrm>
+          <a:prstGeom prst="rect">
+            <a:avLst/>
+          </a:prstGeom>
+          <a:solidFill>
+            <a:srgbClr val="000000"/>
+          </a:solidFill>
+          <a:ln>
+            <a:noFill/>
+          </a:ln>
+          <a:effectLst/>
+        </p:spPr>
+        <p:txBody>
+          <a:bodyPr rtlCol="0" anchor="ctr" lIns="54864" rIns="54864" tIns="18288" bIns="18288"/>
+          <a:lstStyle/>
+          <a:p>
+            <a:pPr algn="ctr"/>
+          </a:p>
+        </p:txBody>
+      </p:sp>
+      <p:sp>
+        <p:nvSpPr>
+          <p:cNvPr id="20" name="TextBox 19"/>
+          <p:cNvSpPr txBox="1"/>
+          <p:nvPr/>
+        </p:nvSpPr>
+        <p:spPr>
+          <a:xfrm>
+            <a:off x="704088" y="5230368"/>
+            <a:ext cx="10783519" cy="987552"/>
+          </a:xfrm>
+          <a:prstGeom prst="rect">
+            <a:avLst/>
+          </a:prstGeom>
+          <a:noFill/>
+        </p:spPr>
+        <p:txBody>
+          <a:bodyPr wrap="square" anchor="ctr" lIns="0" rIns="0" tIns="0" bIns="0">
+            <a:spAutoFit/>
+          </a:bodyPr>
+          <a:lstStyle/>
+          <a:p>
+            <a:pPr algn="l">
+              <a:lnSpc>
+                <a:spcPct val="115000"/>
+              </a:lnSpc>
+              <a:spcAft>
+                <a:spcPts val="400"/>
+              </a:spcAft>
+            </a:pPr>
+            <a:r>
+              <a:rPr sz="1000" b="0">
+                <a:solidFill>
+                  <a:srgbClr val="000000"/>
+                </a:solidFill>
+                <a:latin typeface="Arial"/>
+              </a:rPr>
+              <a:t>“I knew we needed to be AI-native on all our manual tasks, which meant shifting our BPO strategy, which meant agents doing the work, which meant managers overseeing agents and people.”</a:t>
+            </a:r>
+          </a:p>
+          <a:p>
+            <a:pPr algn="l">
+              <a:lnSpc>
+                <a:spcPct val="115000"/>
+              </a:lnSpc>
+              <a:spcAft>
+                <a:spcPts val="400"/>
+              </a:spcAft>
+            </a:pPr>
+            <a:r>
+              <a:rPr sz="850" b="1">
+                <a:solidFill>
+                  <a:srgbClr val="595959"/>
+                </a:solidFill>
+                <a:latin typeface="Arial"/>
+              </a:rPr>
+              <a:t>— Camilla Matias, COO, Brex, First Round Review, 2025</a:t>
             </a:r>
           </a:p>
         </p:txBody>
       </p:sp>
       <p:cxnSp>
         <p:nvCxnSpPr>
-          <p:cNvPr id="18" name="Connector 17"/>
+          <p:cNvPr id="21" name="Connector 20"/>
           <p:cNvCxnSpPr/>
           <p:nvPr/>
         </p:nvCxnSpPr>
@@ -6103,14 +6582,14 @@
       </p:cxnSp>
       <p:sp>
         <p:nvSpPr>
-          <p:cNvPr id="19" name="TextBox 18"/>
+          <p:cNvPr id="22" name="TextBox 21"/>
           <p:cNvSpPr txBox="1"/>
           <p:nvPr/>
         </p:nvSpPr>
         <p:spPr>
           <a:xfrm>
-            <a:off x="502920" y="6583680"/>
-            <a:ext cx="9601200" cy="228600"/>
+            <a:off x="502920" y="6565392"/>
+            <a:ext cx="10332720" cy="274320"/>
           </a:xfrm>
           <a:prstGeom prst="rect">
             <a:avLst/>
@@ -6125,27 +6604,27 @@
           <a:p>
             <a:pPr algn="l">
               <a:lnSpc>
-                <a:spcPct val="100000"/>
+                <a:spcPct val="110000"/>
               </a:lnSpc>
               <a:spcAft>
                 <a:spcPts val="0"/>
               </a:spcAft>
             </a:pPr>
             <a:r>
-              <a:rPr sz="750" b="0">
+              <a:rPr sz="700" b="0">
                 <a:solidFill>
                   <a:srgbClr val="8C8C8C"/>
                 </a:solidFill>
                 <a:latin typeface="Arial"/>
               </a:rPr>
-              <a:t>Source: Brex leadership statements and press coverage</a:t>
-            </a:r>
-          </a:p>
-        </p:txBody>
-      </p:sp>
-      <p:sp>
-        <p:nvSpPr>
-          <p:cNvPr id="20" name="TextBox 19"/>
+              <a:t>Sources: Brex Journal (Aug 2025; Jan 2026); Brex careers ('Forward Deployed Agent Builder'); TechCrunch (Jul 2025); First Round Review (2025); Semafor (Sept 2025); Latent.Space (Feb 2026)</a:t>
+            </a:r>
+          </a:p>
+        </p:txBody>
+      </p:sp>
+      <p:sp>
+        <p:nvSpPr>
+          <p:cNvPr id="23" name="TextBox 22"/>
           <p:cNvSpPr txBox="1"/>
           <p:nvPr/>
         </p:nvSpPr>
@@ -6240,7 +6719,7 @@
                 </a:solidFill>
                 <a:latin typeface="Arial"/>
               </a:rPr>
-              <a:t>Plaid deploys engineers into customer integration teams to make integrations faster and stickier</a:t>
+              <a:t>Plaid runs forward deployment in all but name: embedded engineers drive integration and expansion</a:t>
             </a:r>
           </a:p>
         </p:txBody>
@@ -6381,8 +6860,8 @@
         </p:nvSpPr>
         <p:spPr>
           <a:xfrm>
-            <a:off x="502920" y="2231136"/>
-            <a:ext cx="2624328" cy="4023360"/>
+            <a:off x="502920" y="2194560"/>
+            <a:ext cx="2624328" cy="2834640"/>
           </a:xfrm>
           <a:prstGeom prst="rect">
             <a:avLst/>
@@ -6397,14 +6876,14 @@
           <a:p>
             <a:pPr algn="l">
               <a:lnSpc>
-                <a:spcPct val="120000"/>
-              </a:lnSpc>
-              <a:spcAft>
-                <a:spcPts val="1600"/>
-              </a:spcAft>
-            </a:pPr>
-            <a:r>
-              <a:rPr sz="1050" b="0">
+                <a:spcPct val="115000"/>
+              </a:lnSpc>
+              <a:spcAft>
+                <a:spcPts val="900"/>
+              </a:spcAft>
+            </a:pPr>
+            <a:r>
+              <a:rPr sz="900" b="0">
                 <a:solidFill>
                   <a:srgbClr val="000000"/>
                 </a:solidFill>
@@ -6413,26 +6892,35 @@
               <a:t>•  </a:t>
             </a:r>
             <a:r>
-              <a:rPr sz="1050" b="0">
-                <a:solidFill>
-                  <a:srgbClr val="000000"/>
-                </a:solidFill>
-                <a:latin typeface="Arial"/>
-              </a:rPr>
-              <a:t>FDEs work alongside customer engineers during onboarding and expansion</a:t>
-            </a:r>
-          </a:p>
-          <a:p>
-            <a:pPr algn="l">
-              <a:lnSpc>
-                <a:spcPct val="120000"/>
-              </a:lnSpc>
-              <a:spcAft>
-                <a:spcPts val="1600"/>
-              </a:spcAft>
-            </a:pPr>
-            <a:r>
-              <a:rPr sz="1050" b="0">
+              <a:rPr sz="900" b="0">
+                <a:solidFill>
+                  <a:srgbClr val="000000"/>
+                </a:solidFill>
+                <a:latin typeface="Arial"/>
+              </a:rPr>
+              <a:t>A 'Customer Engineering &amp; Solutions' organization: solutions engineers design and implement customer integrations</a:t>
+            </a:r>
+            <a:r>
+              <a:rPr sz="700" b="0">
+                <a:solidFill>
+                  <a:srgbClr val="8C8C8C"/>
+                </a:solidFill>
+                <a:latin typeface="Arial"/>
+              </a:rPr>
+              <a:t>  (Plaid careers)</a:t>
+            </a:r>
+          </a:p>
+          <a:p>
+            <a:pPr algn="l">
+              <a:lnSpc>
+                <a:spcPct val="115000"/>
+              </a:lnSpc>
+              <a:spcAft>
+                <a:spcPts val="900"/>
+              </a:spcAft>
+            </a:pPr>
+            <a:r>
+              <a:rPr sz="900" b="0">
                 <a:solidFill>
                   <a:srgbClr val="000000"/>
                 </a:solidFill>
@@ -6441,13 +6929,59 @@
               <a:t>•  </a:t>
             </a:r>
             <a:r>
-              <a:rPr sz="1050" b="0">
-                <a:solidFill>
-                  <a:srgbClr val="000000"/>
-                </a:solidFill>
-                <a:latin typeface="Arial"/>
-              </a:rPr>
-              <a:t>Hands-on integration work against customer systems</a:t>
+              <a:rPr sz="900" b="0">
+                <a:solidFill>
+                  <a:srgbClr val="000000"/>
+                </a:solidFill>
+                <a:latin typeface="Arial"/>
+              </a:rPr>
+              <a:t>Technical account managers own post-sales technical strategy and track integration health and adoption</a:t>
+            </a:r>
+            <a:r>
+              <a:rPr sz="700" b="0">
+                <a:solidFill>
+                  <a:srgbClr val="8C8C8C"/>
+                </a:solidFill>
+                <a:latin typeface="Arial"/>
+              </a:rPr>
+              <a:t>  (Plaid careers)</a:t>
+            </a:r>
+          </a:p>
+          <a:p>
+            <a:pPr algn="l">
+              <a:lnSpc>
+                <a:spcPct val="115000"/>
+              </a:lnSpc>
+              <a:spcAft>
+                <a:spcPts val="900"/>
+              </a:spcAft>
+            </a:pPr>
+            <a:r>
+              <a:rPr sz="900" b="0">
+                <a:solidFill>
+                  <a:srgbClr val="000000"/>
+                </a:solidFill>
+                <a:latin typeface="Arial"/>
+              </a:rPr>
+              <a:t>•  </a:t>
+            </a:r>
+            <a:r>
+              <a:rPr sz="900" b="0">
+                <a:solidFill>
+                  <a:srgbClr val="000000"/>
+                </a:solidFill>
+                <a:latin typeface="Arial"/>
+              </a:rPr>
+              <a:t>Product engineers work in pods that iterate with selected customers before building anything</a:t>
+            </a:r>
+            <a:r>
+              <a:rPr sz="700" b="0">
+                <a:solidFill>
+                  <a:srgbClr val="8C8C8C"/>
+                </a:solidFill>
+                <a:latin typeface="Arial"/>
+              </a:rPr>
+              <a:t>  (Plaid blog, 2022)</a:t>
             </a:r>
           </a:p>
         </p:txBody>
@@ -6524,8 +7058,8 @@
         </p:nvSpPr>
         <p:spPr>
           <a:xfrm>
-            <a:off x="3355848" y="2231136"/>
-            <a:ext cx="2624328" cy="4023360"/>
+            <a:off x="3355848" y="2194560"/>
+            <a:ext cx="2624328" cy="2834640"/>
           </a:xfrm>
           <a:prstGeom prst="rect">
             <a:avLst/>
@@ -6540,14 +7074,14 @@
           <a:p>
             <a:pPr algn="l">
               <a:lnSpc>
-                <a:spcPct val="120000"/>
-              </a:lnSpc>
-              <a:spcAft>
-                <a:spcPts val="1600"/>
-              </a:spcAft>
-            </a:pPr>
-            <a:r>
-              <a:rPr sz="1050" b="0">
+                <a:spcPct val="115000"/>
+              </a:lnSpc>
+              <a:spcAft>
+                <a:spcPts val="900"/>
+              </a:spcAft>
+            </a:pPr>
+            <a:r>
+              <a:rPr sz="900" b="0">
                 <a:solidFill>
                   <a:srgbClr val="000000"/>
                 </a:solidFill>
@@ -6556,26 +7090,26 @@
               <a:t>•  </a:t>
             </a:r>
             <a:r>
-              <a:rPr sz="1050" b="0">
-                <a:solidFill>
-                  <a:srgbClr val="000000"/>
-                </a:solidFill>
-                <a:latin typeface="Arial"/>
-              </a:rPr>
-              <a:t>Integration timelines gated revenue for Plaid and its customers</a:t>
-            </a:r>
-          </a:p>
-          <a:p>
-            <a:pPr algn="l">
-              <a:lnSpc>
-                <a:spcPct val="120000"/>
-              </a:lnSpc>
-              <a:spcAft>
-                <a:spcPts val="1600"/>
-              </a:spcAft>
-            </a:pPr>
-            <a:r>
-              <a:rPr sz="1050" b="0">
+              <a:rPr sz="900" b="0">
+                <a:solidFill>
+                  <a:srgbClr val="000000"/>
+                </a:solidFill>
+                <a:latin typeface="Arial"/>
+              </a:rPr>
+              <a:t>Bank-data integrations gate customer revenue; complexity exceeded documentation-led support</a:t>
+            </a:r>
+          </a:p>
+          <a:p>
+            <a:pPr algn="l">
+              <a:lnSpc>
+                <a:spcPct val="115000"/>
+              </a:lnSpc>
+              <a:spcAft>
+                <a:spcPts val="900"/>
+              </a:spcAft>
+            </a:pPr>
+            <a:r>
+              <a:rPr sz="900" b="0">
                 <a:solidFill>
                   <a:srgbClr val="000000"/>
                 </a:solidFill>
@@ -6584,13 +7118,22 @@
               <a:t>•  </a:t>
             </a:r>
             <a:r>
-              <a:rPr sz="1050" b="0">
-                <a:solidFill>
-                  <a:srgbClr val="000000"/>
-                </a:solidFill>
-                <a:latin typeface="Arial"/>
-              </a:rPr>
-              <a:t>Bank and fintech data complexity exceeded documentation-led support</a:t>
+              <a:rPr sz="900" b="0">
+                <a:solidFill>
+                  <a:srgbClr val="000000"/>
+                </a:solidFill>
+                <a:latin typeface="Arial"/>
+              </a:rPr>
+              <a:t>Expansion is driven by embedded technical staff, not by sales alone</a:t>
+            </a:r>
+            <a:r>
+              <a:rPr sz="700" b="0">
+                <a:solidFill>
+                  <a:srgbClr val="8C8C8C"/>
+                </a:solidFill>
+                <a:latin typeface="Arial"/>
+              </a:rPr>
+              <a:t>  (Plaid careers)</a:t>
             </a:r>
           </a:p>
         </p:txBody>
@@ -6667,8 +7210,8 @@
         </p:nvSpPr>
         <p:spPr>
           <a:xfrm>
-            <a:off x="6208776" y="2231136"/>
-            <a:ext cx="2624328" cy="4023360"/>
+            <a:off x="6208776" y="2194560"/>
+            <a:ext cx="2624328" cy="2834640"/>
           </a:xfrm>
           <a:prstGeom prst="rect">
             <a:avLst/>
@@ -6683,14 +7226,14 @@
           <a:p>
             <a:pPr algn="l">
               <a:lnSpc>
-                <a:spcPct val="120000"/>
-              </a:lnSpc>
-              <a:spcAft>
-                <a:spcPts val="1600"/>
-              </a:spcAft>
-            </a:pPr>
-            <a:r>
-              <a:rPr sz="1050" b="0">
+                <a:spcPct val="115000"/>
+              </a:lnSpc>
+              <a:spcAft>
+                <a:spcPts val="900"/>
+              </a:spcAft>
+            </a:pPr>
+            <a:r>
+              <a:rPr sz="900" b="0">
                 <a:solidFill>
                   <a:srgbClr val="000000"/>
                 </a:solidFill>
@@ -6699,26 +7242,26 @@
               <a:t>•  </a:t>
             </a:r>
             <a:r>
-              <a:rPr sz="1050" b="0">
-                <a:solidFill>
-                  <a:srgbClr val="000000"/>
-                </a:solidFill>
-                <a:latin typeface="Arial"/>
-              </a:rPr>
-              <a:t>Deep bank and fintech data expertise applied in customer codebases</a:t>
-            </a:r>
-          </a:p>
-          <a:p>
-            <a:pPr algn="l">
-              <a:lnSpc>
-                <a:spcPct val="120000"/>
-              </a:lnSpc>
-              <a:spcAft>
-                <a:spcPts val="1600"/>
-              </a:spcAft>
-            </a:pPr>
-            <a:r>
-              <a:rPr sz="1050" b="0">
+              <a:rPr sz="900" b="0">
+                <a:solidFill>
+                  <a:srgbClr val="000000"/>
+                </a:solidFill>
+                <a:latin typeface="Arial"/>
+              </a:rPr>
+              <a:t>Forward-deployed outcomes without the title — the embedded roles sit in solutions engineering</a:t>
+            </a:r>
+          </a:p>
+          <a:p>
+            <a:pPr algn="l">
+              <a:lnSpc>
+                <a:spcPct val="115000"/>
+              </a:lnSpc>
+              <a:spcAft>
+                <a:spcPts val="900"/>
+              </a:spcAft>
+            </a:pPr>
+            <a:r>
+              <a:rPr sz="900" b="0">
                 <a:solidFill>
                   <a:srgbClr val="000000"/>
                 </a:solidFill>
@@ -6727,13 +7270,22 @@
               <a:t>•  </a:t>
             </a:r>
             <a:r>
-              <a:rPr sz="1050" b="0">
-                <a:solidFill>
-                  <a:srgbClr val="000000"/>
-                </a:solidFill>
-                <a:latin typeface="Arial"/>
-              </a:rPr>
-              <a:t>Embedded position surfaces product gaps early</a:t>
+              <a:rPr sz="900" b="0">
+                <a:solidFill>
+                  <a:srgbClr val="000000"/>
+                </a:solidFill>
+                <a:latin typeface="Arial"/>
+              </a:rPr>
+              <a:t>Developer experience as strategy: “a few lines of code” to reach thousands of institutions</a:t>
+            </a:r>
+            <a:r>
+              <a:rPr sz="700" b="0">
+                <a:solidFill>
+                  <a:srgbClr val="8C8C8C"/>
+                </a:solidFill>
+                <a:latin typeface="Arial"/>
+              </a:rPr>
+              <a:t>  (Plaid docs)</a:t>
             </a:r>
           </a:p>
         </p:txBody>
@@ -6810,8 +7362,8 @@
         </p:nvSpPr>
         <p:spPr>
           <a:xfrm>
-            <a:off x="9061704" y="2231136"/>
-            <a:ext cx="2624328" cy="4023360"/>
+            <a:off x="9061704" y="2194560"/>
+            <a:ext cx="2624328" cy="2834640"/>
           </a:xfrm>
           <a:prstGeom prst="rect">
             <a:avLst/>
@@ -6826,14 +7378,14 @@
           <a:p>
             <a:pPr algn="l">
               <a:lnSpc>
-                <a:spcPct val="120000"/>
-              </a:lnSpc>
-              <a:spcAft>
-                <a:spcPts val="1600"/>
-              </a:spcAft>
-            </a:pPr>
-            <a:r>
-              <a:rPr sz="1050" b="0">
+                <a:spcPct val="115000"/>
+              </a:lnSpc>
+              <a:spcAft>
+                <a:spcPts val="900"/>
+              </a:spcAft>
+            </a:pPr>
+            <a:r>
+              <a:rPr sz="900" b="0">
                 <a:solidFill>
                   <a:srgbClr val="000000"/>
                 </a:solidFill>
@@ -6842,26 +7394,35 @@
               <a:t>•  </a:t>
             </a:r>
             <a:r>
-              <a:rPr sz="1050" b="0">
-                <a:solidFill>
-                  <a:srgbClr val="000000"/>
-                </a:solidFill>
-                <a:latin typeface="Arial"/>
-              </a:rPr>
-              <a:t>Publicly cites materially faster enterprise integrations</a:t>
-            </a:r>
-          </a:p>
-          <a:p>
-            <a:pPr algn="l">
-              <a:lnSpc>
-                <a:spcPct val="120000"/>
-              </a:lnSpc>
-              <a:spcAft>
-                <a:spcPts val="1600"/>
-              </a:spcAft>
-            </a:pPr>
-            <a:r>
-              <a:rPr sz="1050" b="0">
+              <a:rPr sz="900" b="0">
+                <a:solidFill>
+                  <a:srgbClr val="000000"/>
+                </a:solidFill>
+                <a:latin typeface="Arial"/>
+              </a:rPr>
+              <a:t>&gt;$500M ARR in 2025, ~40% YoY, profitable</a:t>
+            </a:r>
+            <a:r>
+              <a:rPr sz="700" b="0">
+                <a:solidFill>
+                  <a:srgbClr val="8C8C8C"/>
+                </a:solidFill>
+                <a:latin typeface="Arial"/>
+              </a:rPr>
+              <a:t>  (2025 shareholder letter)</a:t>
+            </a:r>
+          </a:p>
+          <a:p>
+            <a:pPr algn="l">
+              <a:lnSpc>
+                <a:spcPct val="115000"/>
+              </a:lnSpc>
+              <a:spcAft>
+                <a:spcPts val="900"/>
+              </a:spcAft>
+            </a:pPr>
+            <a:r>
+              <a:rPr sz="900" b="0">
                 <a:solidFill>
                   <a:srgbClr val="000000"/>
                 </a:solidFill>
@@ -6870,20 +7431,187 @@
               <a:t>•  </a:t>
             </a:r>
             <a:r>
-              <a:rPr sz="1050" b="0">
-                <a:solidFill>
-                  <a:srgbClr val="000000"/>
-                </a:solidFill>
-                <a:latin typeface="Arial"/>
-              </a:rPr>
-              <a:t>Deeper, harder-to-displace customer relationships</a:t>
+              <a:rPr sz="900" b="0">
+                <a:solidFill>
+                  <a:srgbClr val="000000"/>
+                </a:solidFill>
+                <a:latin typeface="Arial"/>
+              </a:rPr>
+              <a:t>1,000+ enterprise customers of ~8,000 total by mid-2024</a:t>
+            </a:r>
+            <a:r>
+              <a:rPr sz="700" b="0">
+                <a:solidFill>
+                  <a:srgbClr val="8C8C8C"/>
+                </a:solidFill>
+                <a:latin typeface="Arial"/>
+              </a:rPr>
+              <a:t>  (TechCrunch, Jun 2024)</a:t>
+            </a:r>
+          </a:p>
+          <a:p>
+            <a:pPr algn="l">
+              <a:lnSpc>
+                <a:spcPct val="115000"/>
+              </a:lnSpc>
+              <a:spcAft>
+                <a:spcPts val="900"/>
+              </a:spcAft>
+            </a:pPr>
+            <a:r>
+              <a:rPr sz="900" b="0">
+                <a:solidFill>
+                  <a:srgbClr val="000000"/>
+                </a:solidFill>
+                <a:latin typeface="Arial"/>
+              </a:rPr>
+              <a:t>•  </a:t>
+            </a:r>
+            <a:r>
+              <a:rPr sz="900" b="0">
+                <a:solidFill>
+                  <a:srgbClr val="000000"/>
+                </a:solidFill>
+                <a:latin typeface="Arial"/>
+              </a:rPr>
+              <a:t>&gt;1M new data connections daily; 12,000+ institutions; 1 in 2 US adults have connected via Plaid</a:t>
+            </a:r>
+            <a:r>
+              <a:rPr sz="700" b="0">
+                <a:solidFill>
+                  <a:srgbClr val="8C8C8C"/>
+                </a:solidFill>
+                <a:latin typeface="Arial"/>
+              </a:rPr>
+              <a:t>  (Plaid, 2026)</a:t>
+            </a:r>
+          </a:p>
+        </p:txBody>
+      </p:sp>
+      <p:sp>
+        <p:nvSpPr>
+          <p:cNvPr id="17" name="Rectangle 16"/>
+          <p:cNvSpPr/>
+          <p:nvPr/>
+        </p:nvSpPr>
+        <p:spPr>
+          <a:xfrm>
+            <a:off x="502920" y="5230368"/>
+            <a:ext cx="11185855" cy="987552"/>
+          </a:xfrm>
+          <a:prstGeom prst="rect">
+            <a:avLst/>
+          </a:prstGeom>
+          <a:solidFill>
+            <a:srgbClr val="F2F2F2"/>
+          </a:solidFill>
+          <a:ln>
+            <a:noFill/>
+          </a:ln>
+          <a:effectLst/>
+        </p:spPr>
+        <p:txBody>
+          <a:bodyPr rtlCol="0" anchor="ctr" lIns="54864" rIns="54864" tIns="18288" bIns="18288"/>
+          <a:lstStyle/>
+          <a:p>
+            <a:pPr algn="ctr"/>
+          </a:p>
+        </p:txBody>
+      </p:sp>
+      <p:sp>
+        <p:nvSpPr>
+          <p:cNvPr id="18" name="Rectangle 17"/>
+          <p:cNvSpPr/>
+          <p:nvPr/>
+        </p:nvSpPr>
+        <p:spPr>
+          <a:xfrm>
+            <a:off x="502920" y="5230368"/>
+            <a:ext cx="36576" cy="987552"/>
+          </a:xfrm>
+          <a:prstGeom prst="rect">
+            <a:avLst/>
+          </a:prstGeom>
+          <a:solidFill>
+            <a:srgbClr val="000000"/>
+          </a:solidFill>
+          <a:ln>
+            <a:noFill/>
+          </a:ln>
+          <a:effectLst/>
+        </p:spPr>
+        <p:txBody>
+          <a:bodyPr rtlCol="0" anchor="ctr" lIns="54864" rIns="54864" tIns="18288" bIns="18288"/>
+          <a:lstStyle/>
+          <a:p>
+            <a:pPr algn="ctr"/>
+          </a:p>
+        </p:txBody>
+      </p:sp>
+      <p:sp>
+        <p:nvSpPr>
+          <p:cNvPr id="19" name="TextBox 18"/>
+          <p:cNvSpPr txBox="1"/>
+          <p:nvPr/>
+        </p:nvSpPr>
+        <p:spPr>
+          <a:xfrm>
+            <a:off x="704088" y="5230368"/>
+            <a:ext cx="10783519" cy="987552"/>
+          </a:xfrm>
+          <a:prstGeom prst="rect">
+            <a:avLst/>
+          </a:prstGeom>
+          <a:noFill/>
+        </p:spPr>
+        <p:txBody>
+          <a:bodyPr wrap="square" anchor="ctr" lIns="0" rIns="0" tIns="0" bIns="0">
+            <a:spAutoFit/>
+          </a:bodyPr>
+          <a:lstStyle/>
+          <a:p>
+            <a:pPr algn="l">
+              <a:lnSpc>
+                <a:spcPct val="115000"/>
+              </a:lnSpc>
+              <a:spcAft>
+                <a:spcPts val="400"/>
+              </a:spcAft>
+            </a:pPr>
+            <a:r>
+              <a:rPr sz="1000" b="0">
+                <a:solidFill>
+                  <a:srgbClr val="000000"/>
+                </a:solidFill>
+                <a:latin typeface="Arial"/>
+              </a:rPr>
+              <a:t>“We're trying to identify the lowest level engineer, [and] build a fantastic experience for them… Someone's able to quickly build something in our sandbox.”</a:t>
+            </a:r>
+          </a:p>
+          <a:p>
+            <a:pPr algn="l">
+              <a:lnSpc>
+                <a:spcPct val="115000"/>
+              </a:lnSpc>
+              <a:spcAft>
+                <a:spcPts val="400"/>
+              </a:spcAft>
+            </a:pPr>
+            <a:r>
+              <a:rPr sz="850" b="1">
+                <a:solidFill>
+                  <a:srgbClr val="595959"/>
+                </a:solidFill>
+                <a:latin typeface="Arial"/>
+              </a:rPr>
+              <a:t>— Zach Perret, co-founder and CEO, 2020 interview (via Contrary Research)</a:t>
             </a:r>
           </a:p>
         </p:txBody>
       </p:sp>
       <p:cxnSp>
         <p:nvCxnSpPr>
-          <p:cNvPr id="17" name="Connector 16"/>
+          <p:cNvPr id="20" name="Connector 19"/>
           <p:cNvCxnSpPr/>
           <p:nvPr/>
         </p:nvCxnSpPr>
@@ -6905,14 +7633,14 @@
       </p:cxnSp>
       <p:sp>
         <p:nvSpPr>
-          <p:cNvPr id="18" name="TextBox 17"/>
+          <p:cNvPr id="21" name="TextBox 20"/>
           <p:cNvSpPr txBox="1"/>
           <p:nvPr/>
         </p:nvSpPr>
         <p:spPr>
           <a:xfrm>
-            <a:off x="502920" y="6583680"/>
-            <a:ext cx="9601200" cy="228600"/>
+            <a:off x="502920" y="6565392"/>
+            <a:ext cx="10332720" cy="274320"/>
           </a:xfrm>
           <a:prstGeom prst="rect">
             <a:avLst/>
@@ -6927,27 +7655,27 @@
           <a:p>
             <a:pPr algn="l">
               <a:lnSpc>
-                <a:spcPct val="100000"/>
+                <a:spcPct val="110000"/>
               </a:lnSpc>
               <a:spcAft>
                 <a:spcPts val="0"/>
               </a:spcAft>
             </a:pPr>
             <a:r>
-              <a:rPr sz="750" b="0">
+              <a:rPr sz="700" b="0">
                 <a:solidFill>
                   <a:srgbClr val="8C8C8C"/>
                 </a:solidFill>
                 <a:latin typeface="Arial"/>
               </a:rPr>
-              <a:t>Source: Plaid public statements, job postings and press coverage</a:t>
-            </a:r>
-          </a:p>
-        </p:txBody>
-      </p:sp>
-      <p:sp>
-        <p:nvSpPr>
-          <p:cNvPr id="19" name="TextBox 18"/>
+              <a:t>Sources: Plaid 2025 shareholder letter (Jan 2026); Plaid careers and blog; TechCrunch (Jun 2024; Apr 2025); Bloomberg (Jan 2025); Contrary Research</a:t>
+            </a:r>
+          </a:p>
+        </p:txBody>
+      </p:sp>
+      <p:sp>
+        <p:nvSpPr>
+          <p:cNvPr id="22" name="TextBox 21"/>
           <p:cNvSpPr txBox="1"/>
           <p:nvPr/>
         </p:nvSpPr>
@@ -7611,7 +8339,7 @@
                 </a:solidFill>
                 <a:latin typeface="Arial"/>
               </a:rPr>
-              <a:t>On-site FDEs building on Foundry and AIP</a:t>
+              <a:t>On-site 'Deltas' build; 'Echoes' own the domain</a:t>
             </a:r>
           </a:p>
           <a:p>
@@ -7639,7 +8367,7 @@
                 </a:solidFill>
                 <a:latin typeface="Arial"/>
               </a:rPr>
-              <a:t>Two-role split — domain specialists and product engineers</a:t>
+              <a:t>AIP bootcamps as the primary sales motion</a:t>
             </a:r>
           </a:p>
           <a:p>
@@ -7782,7 +8510,7 @@
                 </a:solidFill>
                 <a:latin typeface="Arial"/>
               </a:rPr>
-              <a:t>Engineers inside city operations teams</a:t>
+              <a:t>City GMs with P&amp;L; central launch playbook</a:t>
             </a:r>
           </a:p>
           <a:p>
@@ -7810,7 +8538,7 @@
                 </a:solidFill>
                 <a:latin typeface="Arial"/>
               </a:rPr>
-              <a:t>Ops data loop tuned market by market</a:t>
+              <a:t>Playbook refined across ~400 market launches</a:t>
             </a:r>
           </a:p>
           <a:p>
@@ -7838,7 +8566,7 @@
                 </a:solidFill>
                 <a:latin typeface="Arial"/>
               </a:rPr>
-              <a:t>Speed of launch and scale per city</a:t>
+              <a:t>Market entry speed; now sold externally</a:t>
             </a:r>
           </a:p>
         </p:txBody>
@@ -7953,7 +8681,7 @@
                 </a:solidFill>
                 <a:latin typeface="Arial"/>
               </a:rPr>
-              <a:t>FDE pods within enterprise accounts</a:t>
+              <a:t>FDE pods in enterprise accounts since 2025</a:t>
             </a:r>
           </a:p>
           <a:p>
@@ -7981,7 +8709,7 @@
                 </a:solidFill>
                 <a:latin typeface="Arial"/>
               </a:rPr>
-              <a:t>Proximity to frontier research</a:t>
+              <a:t>Frontier research proximity; $4B deployment arm</a:t>
             </a:r>
           </a:p>
           <a:p>
@@ -8124,7 +8852,7 @@
                 </a:solidFill>
                 <a:latin typeface="Arial"/>
               </a:rPr>
-              <a:t>FDEs co-build with client engineers</a:t>
+              <a:t>FDEs co-build in customer infrastructure</a:t>
             </a:r>
           </a:p>
           <a:p>
@@ -8152,7 +8880,7 @@
                 </a:solidFill>
                 <a:latin typeface="Arial"/>
               </a:rPr>
-              <a:t>Deep voice and audio specialization</a:t>
+              <a:t>Voice specialization; live in 4–8 weeks</a:t>
             </a:r>
           </a:p>
           <a:p>
@@ -8180,7 +8908,7 @@
                 </a:solidFill>
                 <a:latin typeface="Arial"/>
               </a:rPr>
-              <a:t>Fastest path to live voice agents</a:t>
+              <a:t>Fastest path to production voice agents</a:t>
             </a:r>
           </a:p>
         </p:txBody>
@@ -8295,7 +9023,7 @@
                 </a:solidFill>
                 <a:latin typeface="Arial"/>
               </a:rPr>
-              <a:t>Engineers paired directly with users</a:t>
+              <a:t>Engineers work backwards from users</a:t>
             </a:r>
           </a:p>
           <a:p>
@@ -8323,7 +9051,7 @@
                 </a:solidFill>
                 <a:latin typeface="Arial"/>
               </a:rPr>
-              <a:t>Developer empathy and API craft</a:t>
+              <a:t>Customers inside the exec cadence; friction logs</a:t>
             </a:r>
           </a:p>
           <a:p>
@@ -8466,7 +9194,7 @@
                 </a:solidFill>
                 <a:latin typeface="Arial"/>
               </a:rPr>
-              <a:t>AI engineers embedded in internal teams</a:t>
+              <a:t>Forward-deployed agent builders in internal teams</a:t>
             </a:r>
           </a:p>
           <a:p>
@@ -8494,7 +9222,7 @@
                 </a:solidFill>
                 <a:latin typeface="Arial"/>
               </a:rPr>
-              <a:t>Internal-first automation of own workflows</a:t>
+              <a:t>Adoption tied to reviews, hiring and bonuses</a:t>
             </a:r>
           </a:p>
           <a:p>
@@ -8522,7 +9250,7 @@
                 </a:solidFill>
                 <a:latin typeface="Arial"/>
               </a:rPr>
-              <a:t>Company-wide productivity gains</a:t>
+              <a:t>AI-native operations</a:t>
             </a:r>
           </a:p>
         </p:txBody>
@@ -8637,7 +9365,7 @@
                 </a:solidFill>
                 <a:latin typeface="Arial"/>
               </a:rPr>
-              <a:t>FDEs inside customer integration teams</a:t>
+              <a:t>Solutions engineers embedded in integrations</a:t>
             </a:r>
           </a:p>
           <a:p>
@@ -8665,7 +9393,7 @@
                 </a:solidFill>
                 <a:latin typeface="Arial"/>
               </a:rPr>
-              <a:t>Deep bank and fintech data expertise</a:t>
+              <a:t>Product pods co-develop with customers</a:t>
             </a:r>
           </a:p>
           <a:p>
@@ -8693,7 +9421,7 @@
                 </a:solidFill>
                 <a:latin typeface="Arial"/>
               </a:rPr>
-              <a:t>Faster, stickier integrations</a:t>
+              <a:t>Faster, stickier network growth</a:t>
             </a:r>
           </a:p>
         </p:txBody>
@@ -8839,8 +9567,8 @@
         </p:nvSpPr>
         <p:spPr>
           <a:xfrm>
-            <a:off x="502920" y="6583680"/>
-            <a:ext cx="9601200" cy="228600"/>
+            <a:off x="502920" y="6565392"/>
+            <a:ext cx="10332720" cy="274320"/>
           </a:xfrm>
           <a:prstGeom prst="rect">
             <a:avLst/>
@@ -8855,20 +9583,20 @@
           <a:p>
             <a:pPr algn="l">
               <a:lnSpc>
-                <a:spcPct val="100000"/>
+                <a:spcPct val="110000"/>
               </a:lnSpc>
               <a:spcAft>
                 <a:spcPts val="0"/>
               </a:spcAft>
             </a:pPr>
             <a:r>
-              <a:rPr sz="750" b="0">
+              <a:rPr sz="700" b="0">
                 <a:solidFill>
                   <a:srgbClr val="8C8C8C"/>
                 </a:solidFill>
                 <a:latin typeface="Arial"/>
               </a:rPr>
-              <a:t>Source: Company engineering blogs, job postings and public statements</a:t>
+              <a:t>Source: company engineering blogs, careers pages and public statements; detail and citations in backup</a:t>
             </a:r>
           </a:p>
         </p:txBody>
@@ -12422,7 +13150,7 @@
                 </a:solidFill>
                 <a:latin typeface="Arial"/>
               </a:rPr>
-              <a:t>One-pager per exemplar: model, motivation, differentiation and impact</a:t>
+              <a:t>One-pager per exemplar: model, motivation, differentiation and impact — with published data, quotes and citations</a:t>
             </a:r>
           </a:p>
         </p:txBody>
@@ -12711,8 +13439,8 @@
         </p:nvSpPr>
         <p:spPr>
           <a:xfrm>
-            <a:off x="502920" y="2231136"/>
-            <a:ext cx="2624328" cy="4023360"/>
+            <a:off x="502920" y="2194560"/>
+            <a:ext cx="2624328" cy="2834640"/>
           </a:xfrm>
           <a:prstGeom prst="rect">
             <a:avLst/>
@@ -12727,14 +13455,14 @@
           <a:p>
             <a:pPr algn="l">
               <a:lnSpc>
-                <a:spcPct val="120000"/>
-              </a:lnSpc>
-              <a:spcAft>
-                <a:spcPts val="1600"/>
-              </a:spcAft>
-            </a:pPr>
-            <a:r>
-              <a:rPr sz="1050" b="0">
+                <a:spcPct val="115000"/>
+              </a:lnSpc>
+              <a:spcAft>
+                <a:spcPts val="900"/>
+              </a:spcAft>
+            </a:pPr>
+            <a:r>
+              <a:rPr sz="900" b="0">
                 <a:solidFill>
                   <a:srgbClr val="000000"/>
                 </a:solidFill>
@@ -12743,26 +13471,35 @@
               <a:t>•  </a:t>
             </a:r>
             <a:r>
-              <a:rPr sz="1050" b="0">
-                <a:solidFill>
-                  <a:srgbClr val="000000"/>
-                </a:solidFill>
-                <a:latin typeface="Arial"/>
-              </a:rPr>
-              <a:t>FDEs deploy on-site within customer operations</a:t>
-            </a:r>
-          </a:p>
-          <a:p>
-            <a:pPr algn="l">
-              <a:lnSpc>
-                <a:spcPct val="120000"/>
-              </a:lnSpc>
-              <a:spcAft>
-                <a:spcPts val="1600"/>
-              </a:spcAft>
-            </a:pPr>
-            <a:r>
-              <a:rPr sz="1050" b="0">
+              <a:rPr sz="900" b="0">
+                <a:solidFill>
+                  <a:srgbClr val="000000"/>
+                </a:solidFill>
+                <a:latin typeface="Arial"/>
+              </a:rPr>
+              <a:t>'Delta' engineers write production code on site; 'Echo' strategists own the domain problem</a:t>
+            </a:r>
+            <a:r>
+              <a:rPr sz="700" b="0">
+                <a:solidFill>
+                  <a:srgbClr val="8C8C8C"/>
+                </a:solidFill>
+                <a:latin typeface="Arial"/>
+              </a:rPr>
+              <a:t>  (Palantir blog)</a:t>
+            </a:r>
+          </a:p>
+          <a:p>
+            <a:pPr algn="l">
+              <a:lnSpc>
+                <a:spcPct val="115000"/>
+              </a:lnSpc>
+              <a:spcAft>
+                <a:spcPts val="900"/>
+              </a:spcAft>
+            </a:pPr>
+            <a:r>
+              <a:rPr sz="900" b="0">
                 <a:solidFill>
                   <a:srgbClr val="000000"/>
                 </a:solidFill>
@@ -12771,26 +13508,35 @@
               <a:t>•  </a:t>
             </a:r>
             <a:r>
-              <a:rPr sz="1050" b="0">
-                <a:solidFill>
-                  <a:srgbClr val="000000"/>
-                </a:solidFill>
-                <a:latin typeface="Arial"/>
-              </a:rPr>
-              <a:t>Two roles: domain-facing specialists and product-focused engineers</a:t>
-            </a:r>
-          </a:p>
-          <a:p>
-            <a:pPr algn="l">
-              <a:lnSpc>
-                <a:spcPct val="120000"/>
-              </a:lnSpc>
-              <a:spcAft>
-                <a:spcPts val="1600"/>
-              </a:spcAft>
-            </a:pPr>
-            <a:r>
-              <a:rPr sz="1050" b="0">
+              <a:rPr sz="900" b="0">
+                <a:solidFill>
+                  <a:srgbClr val="000000"/>
+                </a:solidFill>
+                <a:latin typeface="Arial"/>
+              </a:rPr>
+              <a:t>Product teams build the platforms; Deltas deploy them at the customer — field work feeds the roadmap</a:t>
+            </a:r>
+            <a:r>
+              <a:rPr sz="700" b="0">
+                <a:solidFill>
+                  <a:srgbClr val="8C8C8C"/>
+                </a:solidFill>
+                <a:latin typeface="Arial"/>
+              </a:rPr>
+              <a:t>  (Palantir blog)</a:t>
+            </a:r>
+          </a:p>
+          <a:p>
+            <a:pPr algn="l">
+              <a:lnSpc>
+                <a:spcPct val="115000"/>
+              </a:lnSpc>
+              <a:spcAft>
+                <a:spcPts val="900"/>
+              </a:spcAft>
+            </a:pPr>
+            <a:r>
+              <a:rPr sz="900" b="0">
                 <a:solidFill>
                   <a:srgbClr val="000000"/>
                 </a:solidFill>
@@ -12799,41 +13545,22 @@
               <a:t>•  </a:t>
             </a:r>
             <a:r>
-              <a:rPr sz="1050" b="0">
-                <a:solidFill>
-                  <a:srgbClr val="000000"/>
-                </a:solidFill>
-                <a:latin typeface="Arial"/>
-              </a:rPr>
-              <a:t>Build directly on Foundry and AIP against live customer data</a:t>
-            </a:r>
-          </a:p>
-          <a:p>
-            <a:pPr algn="l">
-              <a:lnSpc>
-                <a:spcPct val="120000"/>
-              </a:lnSpc>
-              <a:spcAft>
-                <a:spcPts val="1600"/>
-              </a:spcAft>
-            </a:pPr>
-            <a:r>
-              <a:rPr sz="1050" b="0">
-                <a:solidFill>
-                  <a:srgbClr val="000000"/>
-                </a:solidFill>
-                <a:latin typeface="Arial"/>
-              </a:rPr>
-              <a:t>•  </a:t>
-            </a:r>
-            <a:r>
-              <a:rPr sz="1050" b="0">
-                <a:solidFill>
-                  <a:srgbClr val="000000"/>
-                </a:solidFill>
-                <a:latin typeface="Arial"/>
-              </a:rPr>
-              <a:t>Multi-week bootcamps deliver working software before contracts scale</a:t>
+              <a:rPr sz="900" b="0">
+                <a:solidFill>
+                  <a:srgbClr val="000000"/>
+                </a:solidFill>
+                <a:latin typeface="Arial"/>
+              </a:rPr>
+              <a:t>AIP bootcamps: 1–5-day builds on the customer's own data, launched Sept 2023</a:t>
+            </a:r>
+            <a:r>
+              <a:rPr sz="700" b="0">
+                <a:solidFill>
+                  <a:srgbClr val="8C8C8C"/>
+                </a:solidFill>
+                <a:latin typeface="Arial"/>
+              </a:rPr>
+              <a:t>  (Palantir blog)</a:t>
             </a:r>
           </a:p>
         </p:txBody>
@@ -12910,8 +13637,8 @@
         </p:nvSpPr>
         <p:spPr>
           <a:xfrm>
-            <a:off x="3355848" y="2231136"/>
-            <a:ext cx="2624328" cy="4023360"/>
+            <a:off x="3355848" y="2194560"/>
+            <a:ext cx="2624328" cy="2834640"/>
           </a:xfrm>
           <a:prstGeom prst="rect">
             <a:avLst/>
@@ -12926,14 +13653,14 @@
           <a:p>
             <a:pPr algn="l">
               <a:lnSpc>
-                <a:spcPct val="120000"/>
-              </a:lnSpc>
-              <a:spcAft>
-                <a:spcPts val="1600"/>
-              </a:spcAft>
-            </a:pPr>
-            <a:r>
-              <a:rPr sz="1050" b="0">
+                <a:spcPct val="115000"/>
+              </a:lnSpc>
+              <a:spcAft>
+                <a:spcPts val="900"/>
+              </a:spcAft>
+            </a:pPr>
+            <a:r>
+              <a:rPr sz="900" b="0">
                 <a:solidFill>
                   <a:srgbClr val="000000"/>
                 </a:solidFill>
@@ -12942,26 +13669,26 @@
               <a:t>•  </a:t>
             </a:r>
             <a:r>
-              <a:rPr sz="1050" b="0">
-                <a:solidFill>
-                  <a:srgbClr val="000000"/>
-                </a:solidFill>
-                <a:latin typeface="Arial"/>
-              </a:rPr>
-              <a:t>Government and industrial clients could not specify requirements upfront</a:t>
-            </a:r>
-          </a:p>
-          <a:p>
-            <a:pPr algn="l">
-              <a:lnSpc>
-                <a:spcPct val="120000"/>
-              </a:lnSpc>
-              <a:spcAft>
-                <a:spcPts val="1600"/>
-              </a:spcAft>
-            </a:pPr>
-            <a:r>
-              <a:rPr sz="1050" b="0">
+              <a:rPr sz="900" b="0">
+                <a:solidFill>
+                  <a:srgbClr val="000000"/>
+                </a:solidFill>
+                <a:latin typeface="Arial"/>
+              </a:rPr>
+              <a:t>Government and industrial clients could not specify requirements upfront; FDE role created ~2006 by Shyam Sankar, employee #13, now CTO</a:t>
+            </a:r>
+          </a:p>
+          <a:p>
+            <a:pPr algn="l">
+              <a:lnSpc>
+                <a:spcPct val="115000"/>
+              </a:lnSpc>
+              <a:spcAft>
+                <a:spcPts val="900"/>
+              </a:spcAft>
+            </a:pPr>
+            <a:r>
+              <a:rPr sz="900" b="0">
                 <a:solidFill>
                   <a:srgbClr val="000000"/>
                 </a:solidFill>
@@ -12970,41 +13697,22 @@
               <a:t>•  </a:t>
             </a:r>
             <a:r>
-              <a:rPr sz="1050" b="0">
-                <a:solidFill>
-                  <a:srgbClr val="000000"/>
-                </a:solidFill>
-                <a:latin typeface="Arial"/>
-              </a:rPr>
-              <a:t>Complex, sensitive data environments demanded on-site iteration</a:t>
-            </a:r>
-          </a:p>
-          <a:p>
-            <a:pPr algn="l">
-              <a:lnSpc>
-                <a:spcPct val="120000"/>
-              </a:lnSpc>
-              <a:spcAft>
-                <a:spcPts val="1600"/>
-              </a:spcAft>
-            </a:pPr>
-            <a:r>
-              <a:rPr sz="1050" b="0">
-                <a:solidFill>
-                  <a:srgbClr val="000000"/>
-                </a:solidFill>
-                <a:latin typeface="Arial"/>
-              </a:rPr>
-              <a:t>•  </a:t>
-            </a:r>
-            <a:r>
-              <a:rPr sz="1050" b="0">
-                <a:solidFill>
-                  <a:srgbClr val="000000"/>
-                </a:solidFill>
-                <a:latin typeface="Arial"/>
-              </a:rPr>
-              <a:t>Conventional software sales failed to demonstrate value in these settings</a:t>
+              <a:rPr sz="900" b="0">
+                <a:solidFill>
+                  <a:srgbClr val="000000"/>
+                </a:solidFill>
+                <a:latin typeface="Arial"/>
+              </a:rPr>
+              <a:t>Months-long pilots failed to prove value; bootcamps compress “what used to take three months” into days</a:t>
+            </a:r>
+            <a:r>
+              <a:rPr sz="700" b="0">
+                <a:solidFill>
+                  <a:srgbClr val="8C8C8C"/>
+                </a:solidFill>
+                <a:latin typeface="Arial"/>
+              </a:rPr>
+              <a:t>  (Q1 2024 earnings call)</a:t>
             </a:r>
           </a:p>
         </p:txBody>
@@ -13081,8 +13789,8 @@
         </p:nvSpPr>
         <p:spPr>
           <a:xfrm>
-            <a:off x="6208776" y="2231136"/>
-            <a:ext cx="2624328" cy="4023360"/>
+            <a:off x="6208776" y="2194560"/>
+            <a:ext cx="2624328" cy="2834640"/>
           </a:xfrm>
           <a:prstGeom prst="rect">
             <a:avLst/>
@@ -13097,14 +13805,14 @@
           <a:p>
             <a:pPr algn="l">
               <a:lnSpc>
-                <a:spcPct val="120000"/>
-              </a:lnSpc>
-              <a:spcAft>
-                <a:spcPts val="1600"/>
-              </a:spcAft>
-            </a:pPr>
-            <a:r>
-              <a:rPr sz="1050" b="0">
+                <a:spcPct val="115000"/>
+              </a:lnSpc>
+              <a:spcAft>
+                <a:spcPts val="900"/>
+              </a:spcAft>
+            </a:pPr>
+            <a:r>
+              <a:rPr sz="900" b="0">
                 <a:solidFill>
                   <a:srgbClr val="000000"/>
                 </a:solidFill>
@@ -13113,26 +13821,35 @@
               <a:t>•  </a:t>
             </a:r>
             <a:r>
-              <a:rPr sz="1050" b="0">
-                <a:solidFill>
-                  <a:srgbClr val="000000"/>
-                </a:solidFill>
-                <a:latin typeface="Arial"/>
-              </a:rPr>
-              <a:t>FDE is the core commercial motion, not a services add-on</a:t>
-            </a:r>
-          </a:p>
-          <a:p>
-            <a:pPr algn="l">
-              <a:lnSpc>
-                <a:spcPct val="120000"/>
-              </a:lnSpc>
-              <a:spcAft>
-                <a:spcPts val="1600"/>
-              </a:spcAft>
-            </a:pPr>
-            <a:r>
-              <a:rPr sz="1050" b="0">
+              <a:rPr sz="900" b="0">
+                <a:solidFill>
+                  <a:srgbClr val="000000"/>
+                </a:solidFill>
+                <a:latin typeface="Arial"/>
+              </a:rPr>
+              <a:t>Bootcamps are the primary go-to-market, not a services add-on: 560+ run across 465 organizations in the first four months</a:t>
+            </a:r>
+            <a:r>
+              <a:rPr sz="700" b="0">
+                <a:solidFill>
+                  <a:srgbClr val="8C8C8C"/>
+                </a:solidFill>
+                <a:latin typeface="Arial"/>
+              </a:rPr>
+              <a:t>  (Q4 2023 earnings call)</a:t>
+            </a:r>
+          </a:p>
+          <a:p>
+            <a:pPr algn="l">
+              <a:lnSpc>
+                <a:spcPct val="115000"/>
+              </a:lnSpc>
+              <a:spcAft>
+                <a:spcPts val="900"/>
+              </a:spcAft>
+            </a:pPr>
+            <a:r>
+              <a:rPr sz="900" b="0">
                 <a:solidFill>
                   <a:srgbClr val="000000"/>
                 </a:solidFill>
@@ -13141,26 +13858,35 @@
               <a:t>•  </a:t>
             </a:r>
             <a:r>
-              <a:rPr sz="1050" b="0">
-                <a:solidFill>
-                  <a:srgbClr val="000000"/>
-                </a:solidFill>
-                <a:latin typeface="Arial"/>
-              </a:rPr>
-              <a:t>Field learnings flow directly into the product roadmap</a:t>
-            </a:r>
-          </a:p>
-          <a:p>
-            <a:pPr algn="l">
-              <a:lnSpc>
-                <a:spcPct val="120000"/>
-              </a:lnSpc>
-              <a:spcAft>
-                <a:spcPts val="1600"/>
-              </a:spcAft>
-            </a:pPr>
-            <a:r>
-              <a:rPr sz="1050" b="0">
+              <a:rPr sz="900" b="0">
+                <a:solidFill>
+                  <a:srgbClr val="000000"/>
+                </a:solidFill>
+                <a:latin typeface="Arial"/>
+              </a:rPr>
+              <a:t>Described by Bloomberg as Palantir's “AI sales secret weapon”; cited 21 times on one earnings call</a:t>
+            </a:r>
+            <a:r>
+              <a:rPr sz="700" b="0">
+                <a:solidFill>
+                  <a:srgbClr val="8C8C8C"/>
+                </a:solidFill>
+                <a:latin typeface="Arial"/>
+              </a:rPr>
+              <a:t>  (Bloomberg, Apr 2024)</a:t>
+            </a:r>
+          </a:p>
+          <a:p>
+            <a:pPr algn="l">
+              <a:lnSpc>
+                <a:spcPct val="115000"/>
+              </a:lnSpc>
+              <a:spcAft>
+                <a:spcPts val="900"/>
+              </a:spcAft>
+            </a:pPr>
+            <a:r>
+              <a:rPr sz="900" b="0">
                 <a:solidFill>
                   <a:srgbClr val="000000"/>
                 </a:solidFill>
@@ -13169,13 +13895,22 @@
               <a:t>•  </a:t>
             </a:r>
             <a:r>
-              <a:rPr sz="1050" b="0">
-                <a:solidFill>
-                  <a:srgbClr val="000000"/>
-                </a:solidFill>
-                <a:latin typeface="Arial"/>
-              </a:rPr>
-              <a:t>Engineers ship product code — not consulting deliverables</a:t>
+              <a:rPr sz="900" b="0">
+                <a:solidFill>
+                  <a:srgbClr val="000000"/>
+                </a:solidFill>
+                <a:latin typeface="Arial"/>
+              </a:rPr>
+              <a:t>Model now copied by OpenAI, Anthropic and defense tech</a:t>
+            </a:r>
+            <a:r>
+              <a:rPr sz="700" b="0">
+                <a:solidFill>
+                  <a:srgbClr val="8C8C8C"/>
+                </a:solidFill>
+                <a:latin typeface="Arial"/>
+              </a:rPr>
+              <a:t>  (Forbes, Jul 2026)</a:t>
             </a:r>
           </a:p>
         </p:txBody>
@@ -13252,8 +13987,8 @@
         </p:nvSpPr>
         <p:spPr>
           <a:xfrm>
-            <a:off x="9061704" y="2231136"/>
-            <a:ext cx="2624328" cy="4023360"/>
+            <a:off x="9061704" y="2194560"/>
+            <a:ext cx="2624328" cy="2834640"/>
           </a:xfrm>
           <a:prstGeom prst="rect">
             <a:avLst/>
@@ -13268,14 +14003,14 @@
           <a:p>
             <a:pPr algn="l">
               <a:lnSpc>
-                <a:spcPct val="120000"/>
-              </a:lnSpc>
-              <a:spcAft>
-                <a:spcPts val="1600"/>
-              </a:spcAft>
-            </a:pPr>
-            <a:r>
-              <a:rPr sz="1050" b="0">
+                <a:spcPct val="115000"/>
+              </a:lnSpc>
+              <a:spcAft>
+                <a:spcPts val="900"/>
+              </a:spcAft>
+            </a:pPr>
+            <a:r>
+              <a:rPr sz="900" b="0">
                 <a:solidFill>
                   <a:srgbClr val="000000"/>
                 </a:solidFill>
@@ -13284,26 +14019,35 @@
               <a:t>•  </a:t>
             </a:r>
             <a:r>
-              <a:rPr sz="1050" b="0">
-                <a:solidFill>
-                  <a:srgbClr val="000000"/>
-                </a:solidFill>
-                <a:latin typeface="Arial"/>
-              </a:rPr>
-              <a:t>Credits FDE-led AIP bootcamps for accelerating US commercial growth on earnings calls</a:t>
-            </a:r>
-          </a:p>
-          <a:p>
-            <a:pPr algn="l">
-              <a:lnSpc>
-                <a:spcPct val="120000"/>
-              </a:lnSpc>
-              <a:spcAft>
-                <a:spcPts val="1600"/>
-              </a:spcAft>
-            </a:pPr>
-            <a:r>
-              <a:rPr sz="1050" b="0">
+              <a:rPr sz="900" b="0">
+                <a:solidFill>
+                  <a:srgbClr val="000000"/>
+                </a:solidFill>
+                <a:latin typeface="Arial"/>
+              </a:rPr>
+              <a:t>US commercial revenue growth accelerated from +64% to +133% YoY across five quarters</a:t>
+            </a:r>
+            <a:r>
+              <a:rPr sz="700" b="0">
+                <a:solidFill>
+                  <a:srgbClr val="8C8C8C"/>
+                </a:solidFill>
+                <a:latin typeface="Arial"/>
+              </a:rPr>
+              <a:t>  (SEC filings, Q4 2024–Q1 2026)</a:t>
+            </a:r>
+          </a:p>
+          <a:p>
+            <a:pPr algn="l">
+              <a:lnSpc>
+                <a:spcPct val="115000"/>
+              </a:lnSpc>
+              <a:spcAft>
+                <a:spcPts val="900"/>
+              </a:spcAft>
+            </a:pPr>
+            <a:r>
+              <a:rPr sz="900" b="0">
                 <a:solidFill>
                   <a:srgbClr val="000000"/>
                 </a:solidFill>
@@ -13312,26 +14056,35 @@
               <a:t>•  </a:t>
             </a:r>
             <a:r>
-              <a:rPr sz="1050" b="0">
-                <a:solidFill>
-                  <a:srgbClr val="000000"/>
-                </a:solidFill>
-                <a:latin typeface="Arial"/>
-              </a:rPr>
-              <a:t>Sustained expansion within existing accounts publicly highlighted</a:t>
-            </a:r>
-          </a:p>
-          <a:p>
-            <a:pPr algn="l">
-              <a:lnSpc>
-                <a:spcPct val="120000"/>
-              </a:lnSpc>
-              <a:spcAft>
-                <a:spcPts val="1600"/>
-              </a:spcAft>
-            </a:pPr>
-            <a:r>
-              <a:rPr sz="1050" b="0">
+              <a:rPr sz="900" b="0">
+                <a:solidFill>
+                  <a:srgbClr val="000000"/>
+                </a:solidFill>
+                <a:latin typeface="Arial"/>
+              </a:rPr>
+              <a:t>Seven-figure deals signed 5 and 16 days after bootcamps</a:t>
+            </a:r>
+            <a:r>
+              <a:rPr sz="700" b="0">
+                <a:solidFill>
+                  <a:srgbClr val="8C8C8C"/>
+                </a:solidFill>
+                <a:latin typeface="Arial"/>
+              </a:rPr>
+              <a:t>  (2024 earnings calls)</a:t>
+            </a:r>
+          </a:p>
+          <a:p>
+            <a:pPr algn="l">
+              <a:lnSpc>
+                <a:spcPct val="115000"/>
+              </a:lnSpc>
+              <a:spcAft>
+                <a:spcPts val="900"/>
+              </a:spcAft>
+            </a:pPr>
+            <a:r>
+              <a:rPr sz="900" b="0">
                 <a:solidFill>
                   <a:srgbClr val="000000"/>
                 </a:solidFill>
@@ -13340,20 +14093,150 @@
               <a:t>•  </a:t>
             </a:r>
             <a:r>
-              <a:rPr sz="1050" b="0">
-                <a:solidFill>
-                  <a:srgbClr val="000000"/>
-                </a:solidFill>
-                <a:latin typeface="Arial"/>
-              </a:rPr>
-              <a:t>Model now widely emulated across the industry</a:t>
+              <a:rPr sz="900" b="0">
+                <a:solidFill>
+                  <a:srgbClr val="000000"/>
+                </a:solidFill>
+                <a:latin typeface="Arial"/>
+              </a:rPr>
+              <a:t>Net dollar retention 134%; $2.8B total contract value closed in a single quarter</a:t>
+            </a:r>
+            <a:r>
+              <a:rPr sz="700" b="0">
+                <a:solidFill>
+                  <a:srgbClr val="8C8C8C"/>
+                </a:solidFill>
+                <a:latin typeface="Arial"/>
+              </a:rPr>
+              <a:t>  (Q3 2025 earnings)</a:t>
+            </a:r>
+          </a:p>
+        </p:txBody>
+      </p:sp>
+      <p:sp>
+        <p:nvSpPr>
+          <p:cNvPr id="18" name="Rectangle 17"/>
+          <p:cNvSpPr/>
+          <p:nvPr/>
+        </p:nvSpPr>
+        <p:spPr>
+          <a:xfrm>
+            <a:off x="502920" y="5230368"/>
+            <a:ext cx="11185855" cy="987552"/>
+          </a:xfrm>
+          <a:prstGeom prst="rect">
+            <a:avLst/>
+          </a:prstGeom>
+          <a:solidFill>
+            <a:srgbClr val="F2F2F2"/>
+          </a:solidFill>
+          <a:ln>
+            <a:noFill/>
+          </a:ln>
+          <a:effectLst/>
+        </p:spPr>
+        <p:txBody>
+          <a:bodyPr rtlCol="0" anchor="ctr" lIns="54864" rIns="54864" tIns="18288" bIns="18288"/>
+          <a:lstStyle/>
+          <a:p>
+            <a:pPr algn="ctr"/>
+          </a:p>
+        </p:txBody>
+      </p:sp>
+      <p:sp>
+        <p:nvSpPr>
+          <p:cNvPr id="19" name="Rectangle 18"/>
+          <p:cNvSpPr/>
+          <p:nvPr/>
+        </p:nvSpPr>
+        <p:spPr>
+          <a:xfrm>
+            <a:off x="502920" y="5230368"/>
+            <a:ext cx="36576" cy="987552"/>
+          </a:xfrm>
+          <a:prstGeom prst="rect">
+            <a:avLst/>
+          </a:prstGeom>
+          <a:solidFill>
+            <a:srgbClr val="000000"/>
+          </a:solidFill>
+          <a:ln>
+            <a:noFill/>
+          </a:ln>
+          <a:effectLst/>
+        </p:spPr>
+        <p:txBody>
+          <a:bodyPr rtlCol="0" anchor="ctr" lIns="54864" rIns="54864" tIns="18288" bIns="18288"/>
+          <a:lstStyle/>
+          <a:p>
+            <a:pPr algn="ctr"/>
+          </a:p>
+        </p:txBody>
+      </p:sp>
+      <p:sp>
+        <p:nvSpPr>
+          <p:cNvPr id="20" name="TextBox 19"/>
+          <p:cNvSpPr txBox="1"/>
+          <p:nvPr/>
+        </p:nvSpPr>
+        <p:spPr>
+          <a:xfrm>
+            <a:off x="704088" y="5230368"/>
+            <a:ext cx="10783519" cy="987552"/>
+          </a:xfrm>
+          <a:prstGeom prst="rect">
+            <a:avLst/>
+          </a:prstGeom>
+          <a:noFill/>
+        </p:spPr>
+        <p:txBody>
+          <a:bodyPr wrap="square" anchor="ctr" lIns="0" rIns="0" tIns="0" bIns="0">
+            <a:spAutoFit/>
+          </a:bodyPr>
+          <a:lstStyle/>
+          <a:p>
+            <a:pPr algn="l">
+              <a:lnSpc>
+                <a:spcPct val="115000"/>
+              </a:lnSpc>
+              <a:spcAft>
+                <a:spcPts val="400"/>
+              </a:spcAft>
+            </a:pPr>
+            <a:r>
+              <a:rPr sz="1000" b="0">
+                <a:solidFill>
+                  <a:srgbClr val="000000"/>
+                </a:solidFill>
+                <a:latin typeface="Arial"/>
+              </a:rPr>
+              <a:t>“In October, we set a goal of executing 500 AIP bootcamps within one year. We have already blown that goal out of the water, having completed more than 560 bootcamps across 465 organizations to-date.”</a:t>
+            </a:r>
+          </a:p>
+          <a:p>
+            <a:pPr algn="l">
+              <a:lnSpc>
+                <a:spcPct val="115000"/>
+              </a:lnSpc>
+              <a:spcAft>
+                <a:spcPts val="400"/>
+              </a:spcAft>
+            </a:pPr>
+            <a:r>
+              <a:rPr sz="850" b="1">
+                <a:solidFill>
+                  <a:srgbClr val="595959"/>
+                </a:solidFill>
+                <a:latin typeface="Arial"/>
+              </a:rPr>
+              <a:t>— Ryan Taylor, Chief Revenue Officer, Q4 2023 earnings call, Feb 2024</a:t>
             </a:r>
           </a:p>
         </p:txBody>
       </p:sp>
       <p:cxnSp>
         <p:nvCxnSpPr>
-          <p:cNvPr id="18" name="Connector 17"/>
+          <p:cNvPr id="21" name="Connector 20"/>
           <p:cNvCxnSpPr/>
           <p:nvPr/>
         </p:nvCxnSpPr>
@@ -13375,14 +14258,14 @@
       </p:cxnSp>
       <p:sp>
         <p:nvSpPr>
-          <p:cNvPr id="19" name="TextBox 18"/>
+          <p:cNvPr id="22" name="TextBox 21"/>
           <p:cNvSpPr txBox="1"/>
           <p:nvPr/>
         </p:nvSpPr>
         <p:spPr>
           <a:xfrm>
-            <a:off x="502920" y="6583680"/>
-            <a:ext cx="9601200" cy="228600"/>
+            <a:off x="502920" y="6565392"/>
+            <a:ext cx="10332720" cy="274320"/>
           </a:xfrm>
           <a:prstGeom prst="rect">
             <a:avLst/>
@@ -13397,27 +14280,27 @@
           <a:p>
             <a:pPr algn="l">
               <a:lnSpc>
-                <a:spcPct val="100000"/>
+                <a:spcPct val="110000"/>
               </a:lnSpc>
               <a:spcAft>
                 <a:spcPts val="0"/>
               </a:spcAft>
             </a:pPr>
             <a:r>
-              <a:rPr sz="750" b="0">
+              <a:rPr sz="700" b="0">
                 <a:solidFill>
                   <a:srgbClr val="8C8C8C"/>
                 </a:solidFill>
                 <a:latin typeface="Arial"/>
               </a:rPr>
-              <a:t>Source: Palantir earnings calls, S-1 and public statements</a:t>
-            </a:r>
-          </a:p>
-        </p:txBody>
-      </p:sp>
-      <p:sp>
-        <p:nvSpPr>
-          <p:cNvPr id="20" name="TextBox 19"/>
+              <a:t>Sources: Palantir SEC 8-K filings and earnings-call transcripts, Q4 2023–Q1 2026; Palantir blog ('Dev versus Delta'; AIP bootcamps); Bloomberg (Apr 23, 2024); Forbes (Jul 10, 2026)</a:t>
+            </a:r>
+          </a:p>
+        </p:txBody>
+      </p:sp>
+      <p:sp>
+        <p:nvSpPr>
+          <p:cNvPr id="23" name="TextBox 22"/>
           <p:cNvSpPr txBox="1"/>
           <p:nvPr/>
         </p:nvSpPr>
@@ -13512,7 +14395,7 @@
                 </a:solidFill>
                 <a:latin typeface="Arial"/>
               </a:rPr>
-              <a:t>Uber's embedded ops–engineering pairing powered city-by-city scaling and is now a product it sells</a:t>
+              <a:t>Uber scaled city by city on embedded operating teams — and now sells the deployment model it built</a:t>
             </a:r>
           </a:p>
         </p:txBody>
@@ -13677,8 +14560,8 @@
         </p:nvSpPr>
         <p:spPr>
           <a:xfrm>
-            <a:off x="502920" y="2231136"/>
-            <a:ext cx="2624328" cy="4023360"/>
+            <a:off x="502920" y="2194560"/>
+            <a:ext cx="2624328" cy="2834640"/>
           </a:xfrm>
           <a:prstGeom prst="rect">
             <a:avLst/>
@@ -13693,14 +14576,14 @@
           <a:p>
             <a:pPr algn="l">
               <a:lnSpc>
-                <a:spcPct val="120000"/>
-              </a:lnSpc>
-              <a:spcAft>
-                <a:spcPts val="1600"/>
-              </a:spcAft>
-            </a:pPr>
-            <a:r>
-              <a:rPr sz="1050" b="0">
+                <a:spcPct val="115000"/>
+              </a:lnSpc>
+              <a:spcAft>
+                <a:spcPts val="900"/>
+              </a:spcAft>
+            </a:pPr>
+            <a:r>
+              <a:rPr sz="900" b="0">
                 <a:solidFill>
                   <a:srgbClr val="000000"/>
                 </a:solidFill>
@@ -13709,26 +14592,35 @@
               <a:t>•  </a:t>
             </a:r>
             <a:r>
-              <a:rPr sz="1050" b="0">
-                <a:solidFill>
-                  <a:srgbClr val="000000"/>
-                </a:solidFill>
-                <a:latin typeface="Arial"/>
-              </a:rPr>
-              <a:t>Engineers embedded with city operations teams through the scaling era</a:t>
-            </a:r>
-          </a:p>
-          <a:p>
-            <a:pPr algn="l">
-              <a:lnSpc>
-                <a:spcPct val="120000"/>
-              </a:lnSpc>
-              <a:spcAft>
-                <a:spcPts val="1600"/>
-              </a:spcAft>
-            </a:pPr>
-            <a:r>
-              <a:rPr sz="1050" b="0">
+              <a:rPr sz="900" b="0">
+                <a:solidFill>
+                  <a:srgbClr val="000000"/>
+                </a:solidFill>
+                <a:latin typeface="Arial"/>
+              </a:rPr>
+              <a:t>City teams ran with local P&amp;L: a general manager — “the CEO of the city” — plus operations and marketing leads</a:t>
+            </a:r>
+            <a:r>
+              <a:rPr sz="700" b="0">
+                <a:solidFill>
+                  <a:srgbClr val="8C8C8C"/>
+                </a:solidFill>
+                <a:latin typeface="Arial"/>
+              </a:rPr>
+              <a:t>  (Fortune, 2015)</a:t>
+            </a:r>
+          </a:p>
+          <a:p>
+            <a:pPr algn="l">
+              <a:lnSpc>
+                <a:spcPct val="115000"/>
+              </a:lnSpc>
+              <a:spcAft>
+                <a:spcPts val="900"/>
+              </a:spcAft>
+            </a:pPr>
+            <a:r>
+              <a:rPr sz="900" b="0">
                 <a:solidFill>
                   <a:srgbClr val="000000"/>
                 </a:solidFill>
@@ -13737,26 +14629,35 @@
               <a:t>•  </a:t>
             </a:r>
             <a:r>
-              <a:rPr sz="1050" b="0">
-                <a:solidFill>
-                  <a:srgbClr val="000000"/>
-                </a:solidFill>
-                <a:latin typeface="Arial"/>
-              </a:rPr>
-              <a:t>City teams owned the P&amp;L; engineers tuned marketplace levers locally</a:t>
-            </a:r>
-          </a:p>
-          <a:p>
-            <a:pPr algn="l">
-              <a:lnSpc>
-                <a:spcPct val="120000"/>
-              </a:lnSpc>
-              <a:spcAft>
-                <a:spcPts val="1600"/>
-              </a:spcAft>
-            </a:pPr>
-            <a:r>
-              <a:rPr sz="1050" b="0">
+              <a:rPr sz="900" b="0">
+                <a:solidFill>
+                  <a:srgbClr val="000000"/>
+                </a:solidFill>
+                <a:latin typeface="Arial"/>
+              </a:rPr>
+              <a:t>A central launcher team parachuted in with a continuously updated playbook, then handed off</a:t>
+            </a:r>
+            <a:r>
+              <a:rPr sz="700" b="0">
+                <a:solidFill>
+                  <a:srgbClr val="8C8C8C"/>
+                </a:solidFill>
+                <a:latin typeface="Arial"/>
+              </a:rPr>
+              <a:t>  (Bloomberg, 2014)</a:t>
+            </a:r>
+          </a:p>
+          <a:p>
+            <a:pPr algn="l">
+              <a:lnSpc>
+                <a:spcPct val="115000"/>
+              </a:lnSpc>
+              <a:spcAft>
+                <a:spcPts val="900"/>
+              </a:spcAft>
+            </a:pPr>
+            <a:r>
+              <a:rPr sz="900" b="0">
                 <a:solidFill>
                   <a:srgbClr val="000000"/>
                 </a:solidFill>
@@ -13765,13 +14666,22 @@
               <a:t>•  </a:t>
             </a:r>
             <a:r>
-              <a:rPr sz="1050" b="0">
-                <a:solidFill>
-                  <a:srgbClr val="000000"/>
-                </a:solidFill>
-                <a:latin typeface="Arial"/>
-              </a:rPr>
-              <a:t>Model now offered externally to enterprises via Uber AI Solutions</a:t>
+              <a:rPr sz="900" b="0">
+                <a:solidFill>
+                  <a:srgbClr val="000000"/>
+                </a:solidFill>
+                <a:latin typeface="Arial"/>
+              </a:rPr>
+              <a:t>2026: 'Agentic Pods' embed Uber's most AI-proficient engineers in finance, legal and HR</a:t>
+            </a:r>
+            <a:r>
+              <a:rPr sz="700" b="0">
+                <a:solidFill>
+                  <a:srgbClr val="8C8C8C"/>
+                </a:solidFill>
+                <a:latin typeface="Arial"/>
+              </a:rPr>
+              <a:t>  (Pragmatic Engineer, 2026)</a:t>
             </a:r>
           </a:p>
         </p:txBody>
@@ -13848,8 +14758,8 @@
         </p:nvSpPr>
         <p:spPr>
           <a:xfrm>
-            <a:off x="3355848" y="2231136"/>
-            <a:ext cx="2624328" cy="4023360"/>
+            <a:off x="3355848" y="2194560"/>
+            <a:ext cx="2624328" cy="2834640"/>
           </a:xfrm>
           <a:prstGeom prst="rect">
             <a:avLst/>
@@ -13864,14 +14774,14 @@
           <a:p>
             <a:pPr algn="l">
               <a:lnSpc>
-                <a:spcPct val="120000"/>
-              </a:lnSpc>
-              <a:spcAft>
-                <a:spcPts val="1600"/>
-              </a:spcAft>
-            </a:pPr>
-            <a:r>
-              <a:rPr sz="1050" b="0">
+                <a:spcPct val="115000"/>
+              </a:lnSpc>
+              <a:spcAft>
+                <a:spcPts val="900"/>
+              </a:spcAft>
+            </a:pPr>
+            <a:r>
+              <a:rPr sz="900" b="0">
                 <a:solidFill>
                   <a:srgbClr val="000000"/>
                 </a:solidFill>
@@ -13880,26 +14790,26 @@
               <a:t>•  </a:t>
             </a:r>
             <a:r>
-              <a:rPr sz="1050" b="0">
-                <a:solidFill>
-                  <a:srgbClr val="000000"/>
-                </a:solidFill>
-                <a:latin typeface="Arial"/>
-              </a:rPr>
-              <a:t>Every city market behaved differently; central roadmaps were too slow</a:t>
-            </a:r>
-          </a:p>
-          <a:p>
-            <a:pPr algn="l">
-              <a:lnSpc>
-                <a:spcPct val="120000"/>
-              </a:lnSpc>
-              <a:spcAft>
-                <a:spcPts val="1600"/>
-              </a:spcAft>
-            </a:pPr>
-            <a:r>
-              <a:rPr sz="1050" b="0">
+              <a:rPr sz="900" b="0">
+                <a:solidFill>
+                  <a:srgbClr val="000000"/>
+                </a:solidFill>
+                <a:latin typeface="Arial"/>
+              </a:rPr>
+              <a:t>Every market behaved differently; central roadmaps were too slow for winner-take-most competition</a:t>
+            </a:r>
+          </a:p>
+          <a:p>
+            <a:pPr algn="l">
+              <a:lnSpc>
+                <a:spcPct val="115000"/>
+              </a:lnSpc>
+              <a:spcAft>
+                <a:spcPts val="900"/>
+              </a:spcAft>
+            </a:pPr>
+            <a:r>
+              <a:rPr sz="900" b="0">
                 <a:solidFill>
                   <a:srgbClr val="000000"/>
                 </a:solidFill>
@@ -13908,41 +14818,22 @@
               <a:t>•  </a:t>
             </a:r>
             <a:r>
-              <a:rPr sz="1050" b="0">
-                <a:solidFill>
-                  <a:srgbClr val="000000"/>
-                </a:solidFill>
-                <a:latin typeface="Arial"/>
-              </a:rPr>
-              <a:t>Launch speed was existential in winner-take-most markets</a:t>
-            </a:r>
-          </a:p>
-          <a:p>
-            <a:pPr algn="l">
-              <a:lnSpc>
-                <a:spcPct val="120000"/>
-              </a:lnSpc>
-              <a:spcAft>
-                <a:spcPts val="1600"/>
-              </a:spcAft>
-            </a:pPr>
-            <a:r>
-              <a:rPr sz="1050" b="0">
-                <a:solidFill>
-                  <a:srgbClr val="000000"/>
-                </a:solidFill>
-                <a:latin typeface="Arial"/>
-              </a:rPr>
-              <a:t>•  </a:t>
-            </a:r>
-            <a:r>
-              <a:rPr sz="1050" b="0">
-                <a:solidFill>
-                  <a:srgbClr val="000000"/>
-                </a:solidFill>
-                <a:latin typeface="Arial"/>
-              </a:rPr>
-              <a:t>Operational data lived in the field, not at headquarters</a:t>
+              <a:rPr sz="900" b="0">
+                <a:solidFill>
+                  <a:srgbClr val="000000"/>
+                </a:solidFill>
+                <a:latin typeface="Arial"/>
+              </a:rPr>
+              <a:t>Launch speed was existential — a new city opened every other day at the late-2014 peak</a:t>
+            </a:r>
+            <a:r>
+              <a:rPr sz="700" b="0">
+                <a:solidFill>
+                  <a:srgbClr val="8C8C8C"/>
+                </a:solidFill>
+                <a:latin typeface="Arial"/>
+              </a:rPr>
+              <a:t>  (Bloomberg, Nov 2014)</a:t>
             </a:r>
           </a:p>
         </p:txBody>
@@ -14019,8 +14910,8 @@
         </p:nvSpPr>
         <p:spPr>
           <a:xfrm>
-            <a:off x="6208776" y="2231136"/>
-            <a:ext cx="2624328" cy="4023360"/>
+            <a:off x="6208776" y="2194560"/>
+            <a:ext cx="2624328" cy="2834640"/>
           </a:xfrm>
           <a:prstGeom prst="rect">
             <a:avLst/>
@@ -14035,14 +14926,14 @@
           <a:p>
             <a:pPr algn="l">
               <a:lnSpc>
-                <a:spcPct val="120000"/>
-              </a:lnSpc>
-              <a:spcAft>
-                <a:spcPts val="1600"/>
-              </a:spcAft>
-            </a:pPr>
-            <a:r>
-              <a:rPr sz="1050" b="0">
+                <a:spcPct val="115000"/>
+              </a:lnSpc>
+              <a:spcAft>
+                <a:spcPts val="900"/>
+              </a:spcAft>
+            </a:pPr>
+            <a:r>
+              <a:rPr sz="900" b="0">
                 <a:solidFill>
                   <a:srgbClr val="000000"/>
                 </a:solidFill>
@@ -14051,26 +14942,35 @@
               <a:t>•  </a:t>
             </a:r>
             <a:r>
-              <a:rPr sz="1050" b="0">
-                <a:solidFill>
-                  <a:srgbClr val="000000"/>
-                </a:solidFill>
-                <a:latin typeface="Arial"/>
-              </a:rPr>
-              <a:t>Ops-led and engineer-supported — the business owned the outcome</a:t>
-            </a:r>
-          </a:p>
-          <a:p>
-            <a:pPr algn="l">
-              <a:lnSpc>
-                <a:spcPct val="120000"/>
-              </a:lnSpc>
-              <a:spcAft>
-                <a:spcPts val="1600"/>
-              </a:spcAft>
-            </a:pPr>
-            <a:r>
-              <a:rPr sz="1050" b="0">
+              <a:rPr sz="900" b="0">
+                <a:solidFill>
+                  <a:srgbClr val="000000"/>
+                </a:solidFill>
+                <a:latin typeface="Arial"/>
+              </a:rPr>
+              <a:t>Ops-led with local P&amp;L ownership; playbook codified learnings across ~400 market launches</a:t>
+            </a:r>
+            <a:r>
+              <a:rPr sz="700" b="0">
+                <a:solidFill>
+                  <a:srgbClr val="8C8C8C"/>
+                </a:solidFill>
+                <a:latin typeface="Arial"/>
+              </a:rPr>
+              <a:t>  (Fortune, 2015)</a:t>
+            </a:r>
+          </a:p>
+          <a:p>
+            <a:pPr algn="l">
+              <a:lnSpc>
+                <a:spcPct val="115000"/>
+              </a:lnSpc>
+              <a:spcAft>
+                <a:spcPts val="900"/>
+              </a:spcAft>
+            </a:pPr>
+            <a:r>
+              <a:rPr sz="900" b="0">
                 <a:solidFill>
                   <a:srgbClr val="000000"/>
                 </a:solidFill>
@@ -14079,41 +14979,22 @@
               <a:t>•  </a:t>
             </a:r>
             <a:r>
-              <a:rPr sz="1050" b="0">
-                <a:solidFill>
-                  <a:srgbClr val="000000"/>
-                </a:solidFill>
-                <a:latin typeface="Arial"/>
-              </a:rPr>
-              <a:t>City learnings codified into playbooks and reused globally</a:t>
-            </a:r>
-          </a:p>
-          <a:p>
-            <a:pPr algn="l">
-              <a:lnSpc>
-                <a:spcPct val="120000"/>
-              </a:lnSpc>
-              <a:spcAft>
-                <a:spcPts val="1600"/>
-              </a:spcAft>
-            </a:pPr>
-            <a:r>
-              <a:rPr sz="1050" b="0">
-                <a:solidFill>
-                  <a:srgbClr val="000000"/>
-                </a:solidFill>
-                <a:latin typeface="Arial"/>
-              </a:rPr>
-              <a:t>•  </a:t>
-            </a:r>
-            <a:r>
-              <a:rPr sz="1050" b="0">
-                <a:solidFill>
-                  <a:srgbClr val="000000"/>
-                </a:solidFill>
-                <a:latin typeface="Arial"/>
-              </a:rPr>
-              <a:t>Matured from internal practice into an external commercial offering</a:t>
+              <a:rPr sz="900" b="0">
+                <a:solidFill>
+                  <a:srgbClr val="000000"/>
+                </a:solidFill>
+                <a:latin typeface="Arial"/>
+              </a:rPr>
+              <a:t>The capability became a product: Uber AI Solutions sells data, evaluation and deployment services externally</a:t>
+            </a:r>
+            <a:r>
+              <a:rPr sz="700" b="0">
+                <a:solidFill>
+                  <a:srgbClr val="8C8C8C"/>
+                </a:solidFill>
+                <a:latin typeface="Arial"/>
+              </a:rPr>
+              <a:t>  (Uber, Jun 2025)</a:t>
             </a:r>
           </a:p>
         </p:txBody>
@@ -14190,8 +15071,8 @@
         </p:nvSpPr>
         <p:spPr>
           <a:xfrm>
-            <a:off x="9061704" y="2231136"/>
-            <a:ext cx="2624328" cy="4023360"/>
+            <a:off x="9061704" y="2194560"/>
+            <a:ext cx="2624328" cy="2834640"/>
           </a:xfrm>
           <a:prstGeom prst="rect">
             <a:avLst/>
@@ -14206,14 +15087,14 @@
           <a:p>
             <a:pPr algn="l">
               <a:lnSpc>
-                <a:spcPct val="120000"/>
-              </a:lnSpc>
-              <a:spcAft>
-                <a:spcPts val="1600"/>
-              </a:spcAft>
-            </a:pPr>
-            <a:r>
-              <a:rPr sz="1050" b="0">
+                <a:spcPct val="115000"/>
+              </a:lnSpc>
+              <a:spcAft>
+                <a:spcPts val="900"/>
+              </a:spcAft>
+            </a:pPr>
+            <a:r>
+              <a:rPr sz="900" b="0">
                 <a:solidFill>
                   <a:srgbClr val="000000"/>
                 </a:solidFill>
@@ -14222,26 +15103,35 @@
               <a:t>•  </a:t>
             </a:r>
             <a:r>
-              <a:rPr sz="1050" b="0">
-                <a:solidFill>
-                  <a:srgbClr val="000000"/>
-                </a:solidFill>
-                <a:latin typeface="Arial"/>
-              </a:rPr>
-              <a:t>Embedded pairing publicly cited as central to rapid multi-market expansion</a:t>
-            </a:r>
-          </a:p>
-          <a:p>
-            <a:pPr algn="l">
-              <a:lnSpc>
-                <a:spcPct val="120000"/>
-              </a:lnSpc>
-              <a:spcAft>
-                <a:spcPts val="1600"/>
-              </a:spcAft>
-            </a:pPr>
-            <a:r>
-              <a:rPr sz="1050" b="0">
+              <a:rPr sz="900" b="0">
+                <a:solidFill>
+                  <a:srgbClr val="000000"/>
+                </a:solidFill>
+                <a:latin typeface="Arial"/>
+              </a:rPr>
+              <a:t>66 to 266 cities in 2014 alone; 10,000+ cities today</a:t>
+            </a:r>
+            <a:r>
+              <a:rPr sz="700" b="0">
+                <a:solidFill>
+                  <a:srgbClr val="8C8C8C"/>
+                </a:solidFill>
+                <a:latin typeface="Arial"/>
+              </a:rPr>
+              <a:t>  (Forbes, 2014; Uber Newsroom)</a:t>
+            </a:r>
+          </a:p>
+          <a:p>
+            <a:pPr algn="l">
+              <a:lnSpc>
+                <a:spcPct val="115000"/>
+              </a:lnSpc>
+              <a:spcAft>
+                <a:spcPts val="900"/>
+              </a:spcAft>
+            </a:pPr>
+            <a:r>
+              <a:rPr sz="900" b="0">
                 <a:solidFill>
                   <a:srgbClr val="000000"/>
                 </a:solidFill>
@@ -14250,26 +15140,35 @@
               <a:t>•  </a:t>
             </a:r>
             <a:r>
-              <a:rPr sz="1050" b="0">
-                <a:solidFill>
-                  <a:srgbClr val="000000"/>
-                </a:solidFill>
-                <a:latin typeface="Arial"/>
-              </a:rPr>
-              <a:t>Enabled local marketplace tuning at global scale</a:t>
-            </a:r>
-          </a:p>
-          <a:p>
-            <a:pPr algn="l">
-              <a:lnSpc>
-                <a:spcPct val="120000"/>
-              </a:lnSpc>
-              <a:spcAft>
-                <a:spcPts val="1600"/>
-              </a:spcAft>
-            </a:pPr>
-            <a:r>
-              <a:rPr sz="1050" b="0">
+              <a:rPr sz="900" b="0">
+                <a:solidFill>
+                  <a:srgbClr val="000000"/>
+                </a:solidFill>
+                <a:latin typeface="Arial"/>
+              </a:rPr>
+              <a:t>Uber AI Solutions reached 30 countries and 50+ corporate customers by mid-2025</a:t>
+            </a:r>
+            <a:r>
+              <a:rPr sz="700" b="0">
+                <a:solidFill>
+                  <a:srgbClr val="8C8C8C"/>
+                </a:solidFill>
+                <a:latin typeface="Arial"/>
+              </a:rPr>
+              <a:t>  (Uber IR; Forbes, Jun 2025)</a:t>
+            </a:r>
+          </a:p>
+          <a:p>
+            <a:pPr algn="l">
+              <a:lnSpc>
+                <a:spcPct val="115000"/>
+              </a:lnSpc>
+              <a:spcAft>
+                <a:spcPts val="900"/>
+              </a:spcAft>
+            </a:pPr>
+            <a:r>
+              <a:rPr sz="900" b="0">
                 <a:solidFill>
                   <a:srgbClr val="000000"/>
                 </a:solidFill>
@@ -14278,20 +15177,150 @@
               <a:t>•  </a:t>
             </a:r>
             <a:r>
-              <a:rPr sz="1050" b="0">
-                <a:solidFill>
-                  <a:srgbClr val="000000"/>
-                </a:solidFill>
-                <a:latin typeface="Arial"/>
-              </a:rPr>
-              <a:t>Basis for the Uber AI Solutions business line</a:t>
+              <a:rPr sz="900" b="0">
+                <a:solidFill>
+                  <a:srgbClr val="000000"/>
+                </a:solidFill>
+                <a:latin typeface="Arial"/>
+              </a:rPr>
+              <a:t>16 internal AI pods completed in the program's first two months</a:t>
+            </a:r>
+            <a:r>
+              <a:rPr sz="700" b="0">
+                <a:solidFill>
+                  <a:srgbClr val="8C8C8C"/>
+                </a:solidFill>
+                <a:latin typeface="Arial"/>
+              </a:rPr>
+              <a:t>  (2026)</a:t>
+            </a:r>
+          </a:p>
+        </p:txBody>
+      </p:sp>
+      <p:sp>
+        <p:nvSpPr>
+          <p:cNvPr id="18" name="Rectangle 17"/>
+          <p:cNvSpPr/>
+          <p:nvPr/>
+        </p:nvSpPr>
+        <p:spPr>
+          <a:xfrm>
+            <a:off x="502920" y="5230368"/>
+            <a:ext cx="11185855" cy="987552"/>
+          </a:xfrm>
+          <a:prstGeom prst="rect">
+            <a:avLst/>
+          </a:prstGeom>
+          <a:solidFill>
+            <a:srgbClr val="F2F2F2"/>
+          </a:solidFill>
+          <a:ln>
+            <a:noFill/>
+          </a:ln>
+          <a:effectLst/>
+        </p:spPr>
+        <p:txBody>
+          <a:bodyPr rtlCol="0" anchor="ctr" lIns="54864" rIns="54864" tIns="18288" bIns="18288"/>
+          <a:lstStyle/>
+          <a:p>
+            <a:pPr algn="ctr"/>
+          </a:p>
+        </p:txBody>
+      </p:sp>
+      <p:sp>
+        <p:nvSpPr>
+          <p:cNvPr id="19" name="Rectangle 18"/>
+          <p:cNvSpPr/>
+          <p:nvPr/>
+        </p:nvSpPr>
+        <p:spPr>
+          <a:xfrm>
+            <a:off x="502920" y="5230368"/>
+            <a:ext cx="36576" cy="987552"/>
+          </a:xfrm>
+          <a:prstGeom prst="rect">
+            <a:avLst/>
+          </a:prstGeom>
+          <a:solidFill>
+            <a:srgbClr val="000000"/>
+          </a:solidFill>
+          <a:ln>
+            <a:noFill/>
+          </a:ln>
+          <a:effectLst/>
+        </p:spPr>
+        <p:txBody>
+          <a:bodyPr rtlCol="0" anchor="ctr" lIns="54864" rIns="54864" tIns="18288" bIns="18288"/>
+          <a:lstStyle/>
+          <a:p>
+            <a:pPr algn="ctr"/>
+          </a:p>
+        </p:txBody>
+      </p:sp>
+      <p:sp>
+        <p:nvSpPr>
+          <p:cNvPr id="20" name="TextBox 19"/>
+          <p:cNvSpPr txBox="1"/>
+          <p:nvPr/>
+        </p:nvSpPr>
+        <p:spPr>
+          <a:xfrm>
+            <a:off x="704088" y="5230368"/>
+            <a:ext cx="10783519" cy="987552"/>
+          </a:xfrm>
+          <a:prstGeom prst="rect">
+            <a:avLst/>
+          </a:prstGeom>
+          <a:noFill/>
+        </p:spPr>
+        <p:txBody>
+          <a:bodyPr wrap="square" anchor="ctr" lIns="0" rIns="0" tIns="0" bIns="0">
+            <a:spAutoFit/>
+          </a:bodyPr>
+          <a:lstStyle/>
+          <a:p>
+            <a:pPr algn="l">
+              <a:lnSpc>
+                <a:spcPct val="115000"/>
+              </a:lnSpc>
+              <a:spcAft>
+                <a:spcPts val="400"/>
+              </a:spcAft>
+            </a:pPr>
+            <a:r>
+              <a:rPr sz="1000" b="0">
+                <a:solidFill>
+                  <a:srgbClr val="000000"/>
+                </a:solidFill>
+                <a:latin typeface="Arial"/>
+              </a:rPr>
+              <a:t>“We're bringing together Uber's platform, people, and AI systems to help other organizations build smarter AI more quickly.”</a:t>
+            </a:r>
+          </a:p>
+          <a:p>
+            <a:pPr algn="l">
+              <a:lnSpc>
+                <a:spcPct val="115000"/>
+              </a:lnSpc>
+              <a:spcAft>
+                <a:spcPts val="400"/>
+              </a:spcAft>
+            </a:pPr>
+            <a:r>
+              <a:rPr sz="850" b="1">
+                <a:solidFill>
+                  <a:srgbClr val="595959"/>
+                </a:solidFill>
+                <a:latin typeface="Arial"/>
+              </a:rPr>
+              <a:t>— Megha Yethadka, GM, Uber AI Solutions, press release, Jun 2025</a:t>
             </a:r>
           </a:p>
         </p:txBody>
       </p:sp>
       <p:cxnSp>
         <p:nvCxnSpPr>
-          <p:cNvPr id="18" name="Connector 17"/>
+          <p:cNvPr id="21" name="Connector 20"/>
           <p:cNvCxnSpPr/>
           <p:nvPr/>
         </p:nvCxnSpPr>
@@ -14313,14 +15342,14 @@
       </p:cxnSp>
       <p:sp>
         <p:nvSpPr>
-          <p:cNvPr id="19" name="TextBox 18"/>
+          <p:cNvPr id="22" name="TextBox 21"/>
           <p:cNvSpPr txBox="1"/>
           <p:nvPr/>
         </p:nvSpPr>
         <p:spPr>
           <a:xfrm>
-            <a:off x="502920" y="6583680"/>
-            <a:ext cx="9601200" cy="228600"/>
+            <a:off x="502920" y="6565392"/>
+            <a:ext cx="10332720" cy="274320"/>
           </a:xfrm>
           <a:prstGeom prst="rect">
             <a:avLst/>
@@ -14335,27 +15364,27 @@
           <a:p>
             <a:pPr algn="l">
               <a:lnSpc>
-                <a:spcPct val="100000"/>
+                <a:spcPct val="110000"/>
               </a:lnSpc>
               <a:spcAft>
                 <a:spcPts val="0"/>
               </a:spcAft>
             </a:pPr>
             <a:r>
-              <a:rPr sz="750" b="0">
+              <a:rPr sz="700" b="0">
                 <a:solidFill>
                   <a:srgbClr val="8C8C8C"/>
                 </a:solidFill>
                 <a:latin typeface="Arial"/>
               </a:rPr>
-              <a:t>Source: Uber public statements, engineering blog and press coverage</a:t>
-            </a:r>
-          </a:p>
-        </p:txBody>
-      </p:sp>
-      <p:sp>
-        <p:nvSpPr>
-          <p:cNvPr id="20" name="TextBox 19"/>
+              <a:t>Sources: Uber IR press release (Jun 20, 2025); Forbes (Dec 2014; Jun 2025); Bloomberg Businessweek (Nov 2014); Fortune (Sept 2015); Uber Newsroom; Pragmatic Engineer (2026)</a:t>
+            </a:r>
+          </a:p>
+        </p:txBody>
+      </p:sp>
+      <p:sp>
+        <p:nvSpPr>
+          <p:cNvPr id="23" name="TextBox 22"/>
           <p:cNvSpPr txBox="1"/>
           <p:nvPr/>
         </p:nvSpPr>
@@ -14615,8 +15644,8 @@
         </p:nvSpPr>
         <p:spPr>
           <a:xfrm>
-            <a:off x="502920" y="2231136"/>
-            <a:ext cx="2624328" cy="4023360"/>
+            <a:off x="502920" y="2194560"/>
+            <a:ext cx="2624328" cy="2834640"/>
           </a:xfrm>
           <a:prstGeom prst="rect">
             <a:avLst/>
@@ -14631,14 +15660,14 @@
           <a:p>
             <a:pPr algn="l">
               <a:lnSpc>
-                <a:spcPct val="120000"/>
-              </a:lnSpc>
-              <a:spcAft>
-                <a:spcPts val="1600"/>
-              </a:spcAft>
-            </a:pPr>
-            <a:r>
-              <a:rPr sz="1050" b="0">
+                <a:spcPct val="115000"/>
+              </a:lnSpc>
+              <a:spcAft>
+                <a:spcPts val="900"/>
+              </a:spcAft>
+            </a:pPr>
+            <a:r>
+              <a:rPr sz="900" b="0">
                 <a:solidFill>
                   <a:srgbClr val="000000"/>
                 </a:solidFill>
@@ -14647,26 +15676,35 @@
               <a:t>•  </a:t>
             </a:r>
             <a:r>
-              <a:rPr sz="1050" b="0">
-                <a:solidFill>
-                  <a:srgbClr val="000000"/>
-                </a:solidFill>
-                <a:latin typeface="Arial"/>
-              </a:rPr>
-              <a:t>FDE pods embed within enterprise customer accounts</a:t>
-            </a:r>
-          </a:p>
-          <a:p>
-            <a:pPr algn="l">
-              <a:lnSpc>
-                <a:spcPct val="120000"/>
-              </a:lnSpc>
-              <a:spcAft>
-                <a:spcPts val="1600"/>
-              </a:spcAft>
-            </a:pPr>
-            <a:r>
-              <a:rPr sz="1050" b="0">
+              <a:rPr sz="900" b="0">
+                <a:solidFill>
+                  <a:srgbClr val="000000"/>
+                </a:solidFill>
+                <a:latin typeface="Arial"/>
+              </a:rPr>
+              <a:t>FDE function created Jan 2025 under Colin Jarvis; pods own discovery through production, with ~50% travel</a:t>
+            </a:r>
+            <a:r>
+              <a:rPr sz="700" b="0">
+                <a:solidFill>
+                  <a:srgbClr val="8C8C8C"/>
+                </a:solidFill>
+                <a:latin typeface="Arial"/>
+              </a:rPr>
+              <a:t>  (OpenAI careers)</a:t>
+            </a:r>
+          </a:p>
+          <a:p>
+            <a:pPr algn="l">
+              <a:lnSpc>
+                <a:spcPct val="115000"/>
+              </a:lnSpc>
+              <a:spcAft>
+                <a:spcPts val="900"/>
+              </a:spcAft>
+            </a:pPr>
+            <a:r>
+              <a:rPr sz="900" b="0">
                 <a:solidFill>
                   <a:srgbClr val="000000"/>
                 </a:solidFill>
@@ -14675,26 +15713,35 @@
               <a:t>•  </a:t>
             </a:r>
             <a:r>
-              <a:rPr sz="1050" b="0">
-                <a:solidFill>
-                  <a:srgbClr val="000000"/>
-                </a:solidFill>
-                <a:latin typeface="Arial"/>
-              </a:rPr>
-              <a:t>Build production agent and workflow deployments on OpenAI models</a:t>
-            </a:r>
-          </a:p>
-          <a:p>
-            <a:pPr algn="l">
-              <a:lnSpc>
-                <a:spcPct val="120000"/>
-              </a:lnSpc>
-              <a:spcAft>
-                <a:spcPts val="1600"/>
-              </a:spcAft>
-            </a:pPr>
-            <a:r>
-              <a:rPr sz="1050" b="0">
+              <a:rPr sz="900" b="0">
+                <a:solidFill>
+                  <a:srgbClr val="000000"/>
+                </a:solidFill>
+                <a:latin typeface="Arial"/>
+              </a:rPr>
+              <a:t>Engagements priced from $10M; clients include Morgan Stanley, T-Mobile and the US Department of Defense</a:t>
+            </a:r>
+            <a:r>
+              <a:rPr sz="700" b="0">
+                <a:solidFill>
+                  <a:srgbClr val="8C8C8C"/>
+                </a:solidFill>
+                <a:latin typeface="Arial"/>
+              </a:rPr>
+              <a:t>  (The Information, Jul 2025)</a:t>
+            </a:r>
+          </a:p>
+          <a:p>
+            <a:pPr algn="l">
+              <a:lnSpc>
+                <a:spcPct val="115000"/>
+              </a:lnSpc>
+              <a:spcAft>
+                <a:spcPts val="900"/>
+              </a:spcAft>
+            </a:pPr>
+            <a:r>
+              <a:rPr sz="900" b="0">
                 <a:solidFill>
                   <a:srgbClr val="000000"/>
                 </a:solidFill>
@@ -14703,13 +15750,22 @@
               <a:t>•  </a:t>
             </a:r>
             <a:r>
-              <a:rPr sz="1050" b="0">
-                <a:solidFill>
-                  <a:srgbClr val="000000"/>
-                </a:solidFill>
-                <a:latin typeface="Arial"/>
-              </a:rPr>
-              <a:t>Scope spans integration, evaluation and adoption support</a:t>
+              <a:rPr sz="900" b="0">
+                <a:solidFill>
+                  <a:srgbClr val="000000"/>
+                </a:solidFill>
+                <a:latin typeface="Arial"/>
+              </a:rPr>
+              <a:t>May 2026: model spun into the OpenAI Deployment Company with $4B committed and ~150 FDEs via the Tomoro acquisition</a:t>
+            </a:r>
+            <a:r>
+              <a:rPr sz="700" b="0">
+                <a:solidFill>
+                  <a:srgbClr val="8C8C8C"/>
+                </a:solidFill>
+                <a:latin typeface="Arial"/>
+              </a:rPr>
+              <a:t>  (OpenAI, May 2026)</a:t>
             </a:r>
           </a:p>
         </p:txBody>
@@ -14786,8 +15842,8 @@
         </p:nvSpPr>
         <p:spPr>
           <a:xfrm>
-            <a:off x="3355848" y="2231136"/>
-            <a:ext cx="2624328" cy="4023360"/>
+            <a:off x="3355848" y="2194560"/>
+            <a:ext cx="2624328" cy="2834640"/>
           </a:xfrm>
           <a:prstGeom prst="rect">
             <a:avLst/>
@@ -14802,14 +15858,14 @@
           <a:p>
             <a:pPr algn="l">
               <a:lnSpc>
-                <a:spcPct val="120000"/>
-              </a:lnSpc>
-              <a:spcAft>
-                <a:spcPts val="1600"/>
-              </a:spcAft>
-            </a:pPr>
-            <a:r>
-              <a:rPr sz="1050" b="0">
+                <a:spcPct val="115000"/>
+              </a:lnSpc>
+              <a:spcAft>
+                <a:spcPts val="900"/>
+              </a:spcAft>
+            </a:pPr>
+            <a:r>
+              <a:rPr sz="900" b="0">
                 <a:solidFill>
                   <a:srgbClr val="000000"/>
                 </a:solidFill>
@@ -14818,26 +15874,26 @@
               <a:t>•  </a:t>
             </a:r>
             <a:r>
-              <a:rPr sz="1050" b="0">
-                <a:solidFill>
-                  <a:srgbClr val="000000"/>
-                </a:solidFill>
-                <a:latin typeface="Arial"/>
-              </a:rPr>
-              <a:t>Model capability outpaced enterprise ability to absorb it</a:t>
-            </a:r>
-          </a:p>
-          <a:p>
-            <a:pPr algn="l">
-              <a:lnSpc>
-                <a:spcPct val="120000"/>
-              </a:lnSpc>
-              <a:spcAft>
-                <a:spcPts val="1600"/>
-              </a:spcAft>
-            </a:pPr>
-            <a:r>
-              <a:rPr sz="1050" b="0">
+              <a:rPr sz="900" b="0">
+                <a:solidFill>
+                  <a:srgbClr val="000000"/>
+                </a:solidFill>
+                <a:latin typeface="Arial"/>
+              </a:rPr>
+              <a:t>Model capability outpaced enterprises' ability to absorb it; API access alone did not convert to production</a:t>
+            </a:r>
+          </a:p>
+          <a:p>
+            <a:pPr algn="l">
+              <a:lnSpc>
+                <a:spcPct val="115000"/>
+              </a:lnSpc>
+              <a:spcAft>
+                <a:spcPts val="900"/>
+              </a:spcAft>
+            </a:pPr>
+            <a:r>
+              <a:rPr sz="900" b="0">
                 <a:solidFill>
                   <a:srgbClr val="000000"/>
                 </a:solidFill>
@@ -14846,41 +15902,22 @@
               <a:t>•  </a:t>
             </a:r>
             <a:r>
-              <a:rPr sz="1050" b="0">
-                <a:solidFill>
-                  <a:srgbClr val="000000"/>
-                </a:solidFill>
-                <a:latin typeface="Arial"/>
-              </a:rPr>
-              <a:t>API access alone did not convert into production use cases</a:t>
-            </a:r>
-          </a:p>
-          <a:p>
-            <a:pPr algn="l">
-              <a:lnSpc>
-                <a:spcPct val="120000"/>
-              </a:lnSpc>
-              <a:spcAft>
-                <a:spcPts val="1600"/>
-              </a:spcAft>
-            </a:pPr>
-            <a:r>
-              <a:rPr sz="1050" b="0">
-                <a:solidFill>
-                  <a:srgbClr val="000000"/>
-                </a:solidFill>
-                <a:latin typeface="Arial"/>
-              </a:rPr>
-              <a:t>•  </a:t>
-            </a:r>
-            <a:r>
-              <a:rPr sz="1050" b="0">
-                <a:solidFill>
-                  <a:srgbClr val="000000"/>
-                </a:solidFill>
-                <a:latin typeface="Arial"/>
-              </a:rPr>
-              <a:t>Competition for enterprise adoption intensified</a:t>
+              <a:rPr sz="900" b="0">
+                <a:solidFill>
+                  <a:srgbClr val="000000"/>
+                </a:solidFill>
+                <a:latin typeface="Arial"/>
+              </a:rPr>
+              <a:t>Playbook imported deliberately — many early FDE hires came from Palantir</a:t>
+            </a:r>
+            <a:r>
+              <a:rPr sz="700" b="0">
+                <a:solidFill>
+                  <a:srgbClr val="8C8C8C"/>
+                </a:solidFill>
+                <a:latin typeface="Arial"/>
+              </a:rPr>
+              <a:t>  (The Information, Jul 2025)</a:t>
             </a:r>
           </a:p>
         </p:txBody>
@@ -14957,8 +15994,8 @@
         </p:nvSpPr>
         <p:spPr>
           <a:xfrm>
-            <a:off x="6208776" y="2231136"/>
-            <a:ext cx="2624328" cy="4023360"/>
+            <a:off x="6208776" y="2194560"/>
+            <a:ext cx="2624328" cy="2834640"/>
           </a:xfrm>
           <a:prstGeom prst="rect">
             <a:avLst/>
@@ -14973,14 +16010,14 @@
           <a:p>
             <a:pPr algn="l">
               <a:lnSpc>
-                <a:spcPct val="120000"/>
-              </a:lnSpc>
-              <a:spcAft>
-                <a:spcPts val="1600"/>
-              </a:spcAft>
-            </a:pPr>
-            <a:r>
-              <a:rPr sz="1050" b="0">
+                <a:spcPct val="115000"/>
+              </a:lnSpc>
+              <a:spcAft>
+                <a:spcPts val="900"/>
+              </a:spcAft>
+            </a:pPr>
+            <a:r>
+              <a:rPr sz="900" b="0">
                 <a:solidFill>
                   <a:srgbClr val="000000"/>
                 </a:solidFill>
@@ -14989,26 +16026,26 @@
               <a:t>•  </a:t>
             </a:r>
             <a:r>
-              <a:rPr sz="1050" b="0">
-                <a:solidFill>
-                  <a:srgbClr val="000000"/>
-                </a:solidFill>
-                <a:latin typeface="Arial"/>
-              </a:rPr>
-              <a:t>Proximity to frontier research within customer engagements</a:t>
-            </a:r>
-          </a:p>
-          <a:p>
-            <a:pPr algn="l">
-              <a:lnSpc>
-                <a:spcPct val="120000"/>
-              </a:lnSpc>
-              <a:spcAft>
-                <a:spcPts val="1600"/>
-              </a:spcAft>
-            </a:pPr>
-            <a:r>
-              <a:rPr sz="1050" b="0">
+              <a:rPr sz="900" b="0">
+                <a:solidFill>
+                  <a:srgbClr val="000000"/>
+                </a:solidFill>
+                <a:latin typeface="Arial"/>
+              </a:rPr>
+              <a:t>Frontier research proximity inside customer accounts</a:t>
+            </a:r>
+          </a:p>
+          <a:p>
+            <a:pPr algn="l">
+              <a:lnSpc>
+                <a:spcPct val="115000"/>
+              </a:lnSpc>
+              <a:spcAft>
+                <a:spcPts val="900"/>
+              </a:spcAft>
+            </a:pPr>
+            <a:r>
+              <a:rPr sz="900" b="0">
                 <a:solidFill>
                   <a:srgbClr val="000000"/>
                 </a:solidFill>
@@ -15017,41 +16054,22 @@
               <a:t>•  </a:t>
             </a:r>
             <a:r>
-              <a:rPr sz="1050" b="0">
-                <a:solidFill>
-                  <a:srgbClr val="000000"/>
-                </a:solidFill>
-                <a:latin typeface="Arial"/>
-              </a:rPr>
-              <a:t>Field signal shapes model and product priorities</a:t>
-            </a:r>
-          </a:p>
-          <a:p>
-            <a:pPr algn="l">
-              <a:lnSpc>
-                <a:spcPct val="120000"/>
-              </a:lnSpc>
-              <a:spcAft>
-                <a:spcPts val="1600"/>
-              </a:spcAft>
-            </a:pPr>
-            <a:r>
-              <a:rPr sz="1050" b="0">
-                <a:solidFill>
-                  <a:srgbClr val="000000"/>
-                </a:solidFill>
-                <a:latin typeface="Arial"/>
-              </a:rPr>
-              <a:t>•  </a:t>
-            </a:r>
-            <a:r>
-              <a:rPr sz="1050" b="0">
-                <a:solidFill>
-                  <a:srgbClr val="000000"/>
-                </a:solidFill>
-                <a:latin typeface="Arial"/>
-              </a:rPr>
-              <a:t>Deployment patterns feed reusable product features</a:t>
+              <a:rPr sz="900" b="0">
+                <a:solidFill>
+                  <a:srgbClr val="000000"/>
+                </a:solidFill>
+                <a:latin typeface="Arial"/>
+              </a:rPr>
+              <a:t>Scaled beyond internal hiring: a majority-owned deployment venture plus alliances with McKinsey, BCG, Accenture and Capgemini</a:t>
+            </a:r>
+            <a:r>
+              <a:rPr sz="700" b="0">
+                <a:solidFill>
+                  <a:srgbClr val="8C8C8C"/>
+                </a:solidFill>
+                <a:latin typeface="Arial"/>
+              </a:rPr>
+              <a:t>  (OpenAI, May 2026)</a:t>
             </a:r>
           </a:p>
         </p:txBody>
@@ -15128,8 +16146,8 @@
         </p:nvSpPr>
         <p:spPr>
           <a:xfrm>
-            <a:off x="9061704" y="2231136"/>
-            <a:ext cx="2624328" cy="4023360"/>
+            <a:off x="9061704" y="2194560"/>
+            <a:ext cx="2624328" cy="2834640"/>
           </a:xfrm>
           <a:prstGeom prst="rect">
             <a:avLst/>
@@ -15144,14 +16162,14 @@
           <a:p>
             <a:pPr algn="l">
               <a:lnSpc>
-                <a:spcPct val="120000"/>
-              </a:lnSpc>
-              <a:spcAft>
-                <a:spcPts val="1600"/>
-              </a:spcAft>
-            </a:pPr>
-            <a:r>
-              <a:rPr sz="1050" b="0">
+                <a:spcPct val="115000"/>
+              </a:lnSpc>
+              <a:spcAft>
+                <a:spcPts val="900"/>
+              </a:spcAft>
+            </a:pPr>
+            <a:r>
+              <a:rPr sz="900" b="0">
                 <a:solidFill>
                   <a:srgbClr val="000000"/>
                 </a:solidFill>
@@ -15160,26 +16178,35 @@
               <a:t>•  </a:t>
             </a:r>
             <a:r>
-              <a:rPr sz="1050" b="0">
-                <a:solidFill>
-                  <a:srgbClr val="000000"/>
-                </a:solidFill>
-                <a:latin typeface="Arial"/>
-              </a:rPr>
-              <a:t>Positions FDEs as core to enterprise adoption</a:t>
-            </a:r>
-          </a:p>
-          <a:p>
-            <a:pPr algn="l">
-              <a:lnSpc>
-                <a:spcPct val="120000"/>
-              </a:lnSpc>
-              <a:spcAft>
-                <a:spcPts val="1600"/>
-              </a:spcAft>
-            </a:pPr>
-            <a:r>
-              <a:rPr sz="1050" b="0">
+              <a:rPr sz="900" b="0">
+                <a:solidFill>
+                  <a:srgbClr val="000000"/>
+                </a:solidFill>
+                <a:latin typeface="Arial"/>
+              </a:rPr>
+              <a:t>Enterprise is now &gt;40% of revenue, tracking to parity with consumer by end-2026</a:t>
+            </a:r>
+            <a:r>
+              <a:rPr sz="700" b="0">
+                <a:solidFill>
+                  <a:srgbClr val="8C8C8C"/>
+                </a:solidFill>
+                <a:latin typeface="Arial"/>
+              </a:rPr>
+              <a:t>  (OpenAI, 2026)</a:t>
+            </a:r>
+          </a:p>
+          <a:p>
+            <a:pPr algn="l">
+              <a:lnSpc>
+                <a:spcPct val="115000"/>
+              </a:lnSpc>
+              <a:spcAft>
+                <a:spcPts val="900"/>
+              </a:spcAft>
+            </a:pPr>
+            <a:r>
+              <a:rPr sz="900" b="0">
                 <a:solidFill>
                   <a:srgbClr val="000000"/>
                 </a:solidFill>
@@ -15188,20 +16215,187 @@
               <a:t>•  </a:t>
             </a:r>
             <a:r>
-              <a:rPr sz="1050" b="0">
-                <a:solidFill>
-                  <a:srgbClr val="000000"/>
-                </a:solidFill>
-                <a:latin typeface="Arial"/>
-              </a:rPr>
-              <a:t>Enterprise agent deployments built with embedded teams publicly showcased</a:t>
+              <a:rPr sz="900" b="0">
+                <a:solidFill>
+                  <a:srgbClr val="000000"/>
+                </a:solidFill>
+                <a:latin typeface="Arial"/>
+              </a:rPr>
+              <a:t>9M paying business users in Feb 2026, up from 3M in Jun 2025</a:t>
+            </a:r>
+            <a:r>
+              <a:rPr sz="700" b="0">
+                <a:solidFill>
+                  <a:srgbClr val="8C8C8C"/>
+                </a:solidFill>
+                <a:latin typeface="Arial"/>
+              </a:rPr>
+              <a:t>  (OpenAI; CNBC)</a:t>
+            </a:r>
+          </a:p>
+          <a:p>
+            <a:pPr algn="l">
+              <a:lnSpc>
+                <a:spcPct val="115000"/>
+              </a:lnSpc>
+              <a:spcAft>
+                <a:spcPts val="900"/>
+              </a:spcAft>
+            </a:pPr>
+            <a:r>
+              <a:rPr sz="900" b="0">
+                <a:solidFill>
+                  <a:srgbClr val="000000"/>
+                </a:solidFill>
+                <a:latin typeface="Arial"/>
+              </a:rPr>
+              <a:t>•  </a:t>
+            </a:r>
+            <a:r>
+              <a:rPr sz="900" b="0">
+                <a:solidFill>
+                  <a:srgbClr val="000000"/>
+                </a:solidFill>
+                <a:latin typeface="Arial"/>
+              </a:rPr>
+              <a:t>Go-to-market organization grew from ~50 to 700+ people in 18 months</a:t>
+            </a:r>
+            <a:r>
+              <a:rPr sz="700" b="0">
+                <a:solidFill>
+                  <a:srgbClr val="8C8C8C"/>
+                </a:solidFill>
+                <a:latin typeface="Arial"/>
+              </a:rPr>
+              <a:t>  (CNBC, Aug 2025)</a:t>
+            </a:r>
+          </a:p>
+        </p:txBody>
+      </p:sp>
+      <p:sp>
+        <p:nvSpPr>
+          <p:cNvPr id="18" name="Rectangle 17"/>
+          <p:cNvSpPr/>
+          <p:nvPr/>
+        </p:nvSpPr>
+        <p:spPr>
+          <a:xfrm>
+            <a:off x="502920" y="5230368"/>
+            <a:ext cx="11185855" cy="987552"/>
+          </a:xfrm>
+          <a:prstGeom prst="rect">
+            <a:avLst/>
+          </a:prstGeom>
+          <a:solidFill>
+            <a:srgbClr val="F2F2F2"/>
+          </a:solidFill>
+          <a:ln>
+            <a:noFill/>
+          </a:ln>
+          <a:effectLst/>
+        </p:spPr>
+        <p:txBody>
+          <a:bodyPr rtlCol="0" anchor="ctr" lIns="54864" rIns="54864" tIns="18288" bIns="18288"/>
+          <a:lstStyle/>
+          <a:p>
+            <a:pPr algn="ctr"/>
+          </a:p>
+        </p:txBody>
+      </p:sp>
+      <p:sp>
+        <p:nvSpPr>
+          <p:cNvPr id="19" name="Rectangle 18"/>
+          <p:cNvSpPr/>
+          <p:nvPr/>
+        </p:nvSpPr>
+        <p:spPr>
+          <a:xfrm>
+            <a:off x="502920" y="5230368"/>
+            <a:ext cx="36576" cy="987552"/>
+          </a:xfrm>
+          <a:prstGeom prst="rect">
+            <a:avLst/>
+          </a:prstGeom>
+          <a:solidFill>
+            <a:srgbClr val="000000"/>
+          </a:solidFill>
+          <a:ln>
+            <a:noFill/>
+          </a:ln>
+          <a:effectLst/>
+        </p:spPr>
+        <p:txBody>
+          <a:bodyPr rtlCol="0" anchor="ctr" lIns="54864" rIns="54864" tIns="18288" bIns="18288"/>
+          <a:lstStyle/>
+          <a:p>
+            <a:pPr algn="ctr"/>
+          </a:p>
+        </p:txBody>
+      </p:sp>
+      <p:sp>
+        <p:nvSpPr>
+          <p:cNvPr id="20" name="TextBox 19"/>
+          <p:cNvSpPr txBox="1"/>
+          <p:nvPr/>
+        </p:nvSpPr>
+        <p:spPr>
+          <a:xfrm>
+            <a:off x="704088" y="5230368"/>
+            <a:ext cx="10783519" cy="987552"/>
+          </a:xfrm>
+          <a:prstGeom prst="rect">
+            <a:avLst/>
+          </a:prstGeom>
+          <a:noFill/>
+        </p:spPr>
+        <p:txBody>
+          <a:bodyPr wrap="square" anchor="ctr" lIns="0" rIns="0" tIns="0" bIns="0">
+            <a:spAutoFit/>
+          </a:bodyPr>
+          <a:lstStyle/>
+          <a:p>
+            <a:pPr algn="l">
+              <a:lnSpc>
+                <a:spcPct val="115000"/>
+              </a:lnSpc>
+              <a:spcAft>
+                <a:spcPts val="400"/>
+              </a:spcAft>
+            </a:pPr>
+            <a:r>
+              <a:rPr sz="1000" b="0">
+                <a:solidFill>
+                  <a:srgbClr val="000000"/>
+                </a:solidFill>
+                <a:latin typeface="Arial"/>
+              </a:rPr>
+              <a:t>“I see our responsibility as both building the tools and being, in some ways, the most knowledgeable people in the world on how to deploy them.”</a:t>
+            </a:r>
+          </a:p>
+          <a:p>
+            <a:pPr algn="l">
+              <a:lnSpc>
+                <a:spcPct val="115000"/>
+              </a:lnSpc>
+              <a:spcAft>
+                <a:spcPts val="400"/>
+              </a:spcAft>
+            </a:pPr>
+            <a:r>
+              <a:rPr sz="850" b="1">
+                <a:solidFill>
+                  <a:srgbClr val="595959"/>
+                </a:solidFill>
+                <a:latin typeface="Arial"/>
+              </a:rPr>
+              <a:t>— Brad Lightcap, COO, OpenAI, CNBC, Aug 2025</a:t>
             </a:r>
           </a:p>
         </p:txBody>
       </p:sp>
       <p:cxnSp>
         <p:nvCxnSpPr>
-          <p:cNvPr id="18" name="Connector 17"/>
+          <p:cNvPr id="21" name="Connector 20"/>
           <p:cNvCxnSpPr/>
           <p:nvPr/>
         </p:nvCxnSpPr>
@@ -15223,14 +16417,14 @@
       </p:cxnSp>
       <p:sp>
         <p:nvSpPr>
-          <p:cNvPr id="19" name="TextBox 18"/>
+          <p:cNvPr id="22" name="TextBox 21"/>
           <p:cNvSpPr txBox="1"/>
           <p:nvPr/>
         </p:nvSpPr>
         <p:spPr>
           <a:xfrm>
-            <a:off x="502920" y="6583680"/>
-            <a:ext cx="9601200" cy="228600"/>
+            <a:off x="502920" y="6565392"/>
+            <a:ext cx="10332720" cy="274320"/>
           </a:xfrm>
           <a:prstGeom prst="rect">
             <a:avLst/>
@@ -15245,27 +16439,27 @@
           <a:p>
             <a:pPr algn="l">
               <a:lnSpc>
-                <a:spcPct val="100000"/>
+                <a:spcPct val="110000"/>
               </a:lnSpc>
               <a:spcAft>
                 <a:spcPts val="0"/>
               </a:spcAft>
             </a:pPr>
             <a:r>
-              <a:rPr sz="750" b="0">
+              <a:rPr sz="700" b="0">
                 <a:solidFill>
                   <a:srgbClr val="8C8C8C"/>
                 </a:solidFill>
                 <a:latin typeface="Arial"/>
               </a:rPr>
-              <a:t>Source: OpenAI public statements, hiring posts and press coverage</a:t>
-            </a:r>
-          </a:p>
-        </p:txBody>
-      </p:sp>
-      <p:sp>
-        <p:nvSpPr>
-          <p:cNvPr id="20" name="TextBox 19"/>
+              <a:t>Sources: OpenAI announcements and careers pages (2025–26); CNBC (Jun 2025; Aug 2025; May 2026); The Information via The Decoder and Business Standard (Jul 2025)</a:t>
+            </a:r>
+          </a:p>
+        </p:txBody>
+      </p:sp>
+      <p:sp>
+        <p:nvSpPr>
+          <p:cNvPr id="23" name="TextBox 22"/>
           <p:cNvSpPr txBox="1"/>
           <p:nvPr/>
         </p:nvSpPr>
@@ -15525,8 +16719,8 @@
         </p:nvSpPr>
         <p:spPr>
           <a:xfrm>
-            <a:off x="502920" y="2231136"/>
-            <a:ext cx="2624328" cy="4023360"/>
+            <a:off x="502920" y="2194560"/>
+            <a:ext cx="2624328" cy="2834640"/>
           </a:xfrm>
           <a:prstGeom prst="rect">
             <a:avLst/>
@@ -15541,14 +16735,14 @@
           <a:p>
             <a:pPr algn="l">
               <a:lnSpc>
-                <a:spcPct val="120000"/>
-              </a:lnSpc>
-              <a:spcAft>
-                <a:spcPts val="1600"/>
-              </a:spcAft>
-            </a:pPr>
-            <a:r>
-              <a:rPr sz="1050" b="0">
+                <a:spcPct val="115000"/>
+              </a:lnSpc>
+              <a:spcAft>
+                <a:spcPts val="900"/>
+              </a:spcAft>
+            </a:pPr>
+            <a:r>
+              <a:rPr sz="900" b="0">
                 <a:solidFill>
                   <a:srgbClr val="000000"/>
                 </a:solidFill>
@@ -15557,26 +16751,35 @@
               <a:t>•  </a:t>
             </a:r>
             <a:r>
-              <a:rPr sz="1050" b="0">
-                <a:solidFill>
-                  <a:srgbClr val="000000"/>
-                </a:solidFill>
-                <a:latin typeface="Arial"/>
-              </a:rPr>
-              <a:t>FDEs co-build production voice agents with customer engineering teams</a:t>
-            </a:r>
-          </a:p>
-          <a:p>
-            <a:pPr algn="l">
-              <a:lnSpc>
-                <a:spcPct val="120000"/>
-              </a:lnSpc>
-              <a:spcAft>
-                <a:spcPts val="1600"/>
-              </a:spcAft>
-            </a:pPr>
-            <a:r>
-              <a:rPr sz="1050" b="0">
+              <a:rPr sz="900" b="0">
+                <a:solidFill>
+                  <a:srgbClr val="000000"/>
+                </a:solidFill>
+                <a:latin typeface="Arial"/>
+              </a:rPr>
+              <a:t>FDEs work “shoulder-to-shoulder with customers, from pre-sales evaluation through post-sales implementation”, building inside customer infrastructure</a:t>
+            </a:r>
+            <a:r>
+              <a:rPr sz="700" b="0">
+                <a:solidFill>
+                  <a:srgbClr val="8C8C8C"/>
+                </a:solidFill>
+                <a:latin typeface="Arial"/>
+              </a:rPr>
+              <a:t>  (ElevenLabs careers)</a:t>
+            </a:r>
+          </a:p>
+          <a:p>
+            <a:pPr algn="l">
+              <a:lnSpc>
+                <a:spcPct val="115000"/>
+              </a:lnSpc>
+              <a:spcAft>
+                <a:spcPts val="900"/>
+              </a:spcAft>
+            </a:pPr>
+            <a:r>
+              <a:rPr sz="900" b="0">
                 <a:solidFill>
                   <a:srgbClr val="000000"/>
                 </a:solidFill>
@@ -15585,13 +16788,59 @@
               <a:t>•  </a:t>
             </a:r>
             <a:r>
-              <a:rPr sz="1050" b="0">
-                <a:solidFill>
-                  <a:srgbClr val="000000"/>
-                </a:solidFill>
-                <a:latin typeface="Arial"/>
-              </a:rPr>
-              <a:t>Engagements run end-to-end: design, integration, evaluation, launch</a:t>
+              <a:rPr sz="900" b="0">
+                <a:solidFill>
+                  <a:srgbClr val="000000"/>
+                </a:solidFill>
+                <a:latin typeface="Arial"/>
+              </a:rPr>
+              <a:t>Engagements go from scoping to live deployment in 4–8 weeks</a:t>
+            </a:r>
+            <a:r>
+              <a:rPr sz="700" b="0">
+                <a:solidFill>
+                  <a:srgbClr val="8C8C8C"/>
+                </a:solidFill>
+                <a:latin typeface="Arial"/>
+              </a:rPr>
+              <a:t>  (ElevenLabs)</a:t>
+            </a:r>
+          </a:p>
+          <a:p>
+            <a:pPr algn="l">
+              <a:lnSpc>
+                <a:spcPct val="115000"/>
+              </a:lnSpc>
+              <a:spcAft>
+                <a:spcPts val="900"/>
+              </a:spcAft>
+            </a:pPr>
+            <a:r>
+              <a:rPr sz="900" b="0">
+                <a:solidFill>
+                  <a:srgbClr val="000000"/>
+                </a:solidFill>
+                <a:latin typeface="Arial"/>
+              </a:rPr>
+              <a:t>•  </a:t>
+            </a:r>
+            <a:r>
+              <a:rPr sz="900" b="0">
+                <a:solidFill>
+                  <a:srgbClr val="000000"/>
+                </a:solidFill>
+                <a:latin typeface="Arial"/>
+              </a:rPr>
+              <a:t>Multi-track FDE organization — engineers, strategists and graduates — hiring across three continents</a:t>
+            </a:r>
+            <a:r>
+              <a:rPr sz="700" b="0">
+                <a:solidFill>
+                  <a:srgbClr val="8C8C8C"/>
+                </a:solidFill>
+                <a:latin typeface="Arial"/>
+              </a:rPr>
+              <a:t>  (ElevenLabs careers)</a:t>
             </a:r>
           </a:p>
         </p:txBody>
@@ -15668,8 +16917,8 @@
         </p:nvSpPr>
         <p:spPr>
           <a:xfrm>
-            <a:off x="3355848" y="2231136"/>
-            <a:ext cx="2624328" cy="4023360"/>
+            <a:off x="3355848" y="2194560"/>
+            <a:ext cx="2624328" cy="2834640"/>
           </a:xfrm>
           <a:prstGeom prst="rect">
             <a:avLst/>
@@ -15684,14 +16933,14 @@
           <a:p>
             <a:pPr algn="l">
               <a:lnSpc>
-                <a:spcPct val="120000"/>
-              </a:lnSpc>
-              <a:spcAft>
-                <a:spcPts val="1600"/>
-              </a:spcAft>
-            </a:pPr>
-            <a:r>
-              <a:rPr sz="1050" b="0">
+                <a:spcPct val="115000"/>
+              </a:lnSpc>
+              <a:spcAft>
+                <a:spcPts val="900"/>
+              </a:spcAft>
+            </a:pPr>
+            <a:r>
+              <a:rPr sz="900" b="0">
                 <a:solidFill>
                   <a:srgbClr val="000000"/>
                 </a:solidFill>
@@ -15700,26 +16949,35 @@
               <a:t>•  </a:t>
             </a:r>
             <a:r>
-              <a:rPr sz="1050" b="0">
-                <a:solidFill>
-                  <a:srgbClr val="000000"/>
-                </a:solidFill>
-                <a:latin typeface="Arial"/>
-              </a:rPr>
-              <a:t>Voice agents demand domain-specific tuning customers could not do alone</a:t>
-            </a:r>
-          </a:p>
-          <a:p>
-            <a:pPr algn="l">
-              <a:lnSpc>
-                <a:spcPct val="120000"/>
-              </a:lnSpc>
-              <a:spcAft>
-                <a:spcPts val="1600"/>
-              </a:spcAft>
-            </a:pPr>
-            <a:r>
-              <a:rPr sz="1050" b="0">
+              <a:rPr sz="900" b="0">
+                <a:solidFill>
+                  <a:srgbClr val="000000"/>
+                </a:solidFill>
+                <a:latin typeface="Arial"/>
+              </a:rPr>
+              <a:t>CEO Mati Staniszewski is an ex-Palantir deployment strategist; the model was imported deliberately</a:t>
+            </a:r>
+            <a:r>
+              <a:rPr sz="700" b="0">
+                <a:solidFill>
+                  <a:srgbClr val="8C8C8C"/>
+                </a:solidFill>
+                <a:latin typeface="Arial"/>
+              </a:rPr>
+              <a:t>  (Sifted, Mar 2025)</a:t>
+            </a:r>
+          </a:p>
+          <a:p>
+            <a:pPr algn="l">
+              <a:lnSpc>
+                <a:spcPct val="115000"/>
+              </a:lnSpc>
+              <a:spcAft>
+                <a:spcPts val="900"/>
+              </a:spcAft>
+            </a:pPr>
+            <a:r>
+              <a:rPr sz="900" b="0">
                 <a:solidFill>
                   <a:srgbClr val="000000"/>
                 </a:solidFill>
@@ -15728,13 +16986,22 @@
               <a:t>•  </a:t>
             </a:r>
             <a:r>
-              <a:rPr sz="1050" b="0">
-                <a:solidFill>
-                  <a:srgbClr val="000000"/>
-                </a:solidFill>
-                <a:latin typeface="Arial"/>
-              </a:rPr>
-              <a:t>Enterprise buyers required proof in production, not demonstrations</a:t>
+              <a:rPr sz="900" b="0">
+                <a:solidFill>
+                  <a:srgbClr val="000000"/>
+                </a:solidFill>
+                <a:latin typeface="Arial"/>
+              </a:rPr>
+              <a:t>Enterprise buyers demanded production voice agents, not demos; four ex-Palantir FDEs hired through 2024</a:t>
+            </a:r>
+            <a:r>
+              <a:rPr sz="700" b="0">
+                <a:solidFill>
+                  <a:srgbClr val="8C8C8C"/>
+                </a:solidFill>
+                <a:latin typeface="Arial"/>
+              </a:rPr>
+              <a:t>  (Sifted, Mar 2025)</a:t>
             </a:r>
           </a:p>
         </p:txBody>
@@ -15811,8 +17078,8 @@
         </p:nvSpPr>
         <p:spPr>
           <a:xfrm>
-            <a:off x="6208776" y="2231136"/>
-            <a:ext cx="2624328" cy="4023360"/>
+            <a:off x="6208776" y="2194560"/>
+            <a:ext cx="2624328" cy="2834640"/>
           </a:xfrm>
           <a:prstGeom prst="rect">
             <a:avLst/>
@@ -15827,14 +17094,14 @@
           <a:p>
             <a:pPr algn="l">
               <a:lnSpc>
-                <a:spcPct val="120000"/>
-              </a:lnSpc>
-              <a:spcAft>
-                <a:spcPts val="1600"/>
-              </a:spcAft>
-            </a:pPr>
-            <a:r>
-              <a:rPr sz="1050" b="0">
+                <a:spcPct val="115000"/>
+              </a:lnSpc>
+              <a:spcAft>
+                <a:spcPts val="900"/>
+              </a:spcAft>
+            </a:pPr>
+            <a:r>
+              <a:rPr sz="900" b="0">
                 <a:solidFill>
                   <a:srgbClr val="000000"/>
                 </a:solidFill>
@@ -15843,26 +17110,35 @@
               <a:t>•  </a:t>
             </a:r>
             <a:r>
-              <a:rPr sz="1050" b="0">
-                <a:solidFill>
-                  <a:srgbClr val="000000"/>
-                </a:solidFill>
-                <a:latin typeface="Arial"/>
-              </a:rPr>
-              <a:t>Deep voice and audio specialization applied inside customer stacks</a:t>
-            </a:r>
-          </a:p>
-          <a:p>
-            <a:pPr algn="l">
-              <a:lnSpc>
-                <a:spcPct val="120000"/>
-              </a:lnSpc>
-              <a:spcAft>
-                <a:spcPts val="1600"/>
-              </a:spcAft>
-            </a:pPr>
-            <a:r>
-              <a:rPr sz="1050" b="0">
+              <a:rPr sz="900" b="0">
+                <a:solidFill>
+                  <a:srgbClr val="000000"/>
+                </a:solidFill>
+                <a:latin typeface="Arial"/>
+              </a:rPr>
+              <a:t>Deep voice specialization with compliance built in: SOC 2, GDPR, HIPAA, zero-retention options</a:t>
+            </a:r>
+            <a:r>
+              <a:rPr sz="700" b="0">
+                <a:solidFill>
+                  <a:srgbClr val="8C8C8C"/>
+                </a:solidFill>
+                <a:latin typeface="Arial"/>
+              </a:rPr>
+              <a:t>  (ElevenLabs)</a:t>
+            </a:r>
+          </a:p>
+          <a:p>
+            <a:pPr algn="l">
+              <a:lnSpc>
+                <a:spcPct val="115000"/>
+              </a:lnSpc>
+              <a:spcAft>
+                <a:spcPts val="900"/>
+              </a:spcAft>
+            </a:pPr>
+            <a:r>
+              <a:rPr sz="900" b="0">
                 <a:solidFill>
                   <a:srgbClr val="000000"/>
                 </a:solidFill>
@@ -15871,13 +17147,22 @@
               <a:t>•  </a:t>
             </a:r>
             <a:r>
-              <a:rPr sz="1050" b="0">
-                <a:solidFill>
-                  <a:srgbClr val="000000"/>
-                </a:solidFill>
-                <a:latin typeface="Arial"/>
-              </a:rPr>
-              <a:t>Embedded talent lets a small company deliver enterprise-grade deployments</a:t>
+              <a:rPr sz="900" b="0">
+                <a:solidFill>
+                  <a:srgbClr val="000000"/>
+                </a:solidFill>
+                <a:latin typeface="Arial"/>
+              </a:rPr>
+              <a:t>FDEs “have helped hundreds of enterprises launch AI agents”</a:t>
+            </a:r>
+            <a:r>
+              <a:rPr sz="700" b="0">
+                <a:solidFill>
+                  <a:srgbClr val="8C8C8C"/>
+                </a:solidFill>
+                <a:latin typeface="Arial"/>
+              </a:rPr>
+              <a:t>  (ElevenLabs)</a:t>
             </a:r>
           </a:p>
         </p:txBody>
@@ -15954,8 +17239,8 @@
         </p:nvSpPr>
         <p:spPr>
           <a:xfrm>
-            <a:off x="9061704" y="2231136"/>
-            <a:ext cx="2624328" cy="4023360"/>
+            <a:off x="9061704" y="2194560"/>
+            <a:ext cx="2624328" cy="2834640"/>
           </a:xfrm>
           <a:prstGeom prst="rect">
             <a:avLst/>
@@ -15970,14 +17255,14 @@
           <a:p>
             <a:pPr algn="l">
               <a:lnSpc>
-                <a:spcPct val="120000"/>
-              </a:lnSpc>
-              <a:spcAft>
-                <a:spcPts val="1600"/>
-              </a:spcAft>
-            </a:pPr>
-            <a:r>
-              <a:rPr sz="1050" b="0">
+                <a:spcPct val="115000"/>
+              </a:lnSpc>
+              <a:spcAft>
+                <a:spcPts val="900"/>
+              </a:spcAft>
+            </a:pPr>
+            <a:r>
+              <a:rPr sz="900" b="0">
                 <a:solidFill>
                   <a:srgbClr val="000000"/>
                 </a:solidFill>
@@ -15986,26 +17271,35 @@
               <a:t>•  </a:t>
             </a:r>
             <a:r>
-              <a:rPr sz="1050" b="0">
-                <a:solidFill>
-                  <a:srgbClr val="000000"/>
-                </a:solidFill>
-                <a:latin typeface="Arial"/>
-              </a:rPr>
-              <a:t>Attributes enterprise expansion to its deployment-led model</a:t>
-            </a:r>
-          </a:p>
-          <a:p>
-            <a:pPr algn="l">
-              <a:lnSpc>
-                <a:spcPct val="120000"/>
-              </a:lnSpc>
-              <a:spcAft>
-                <a:spcPts val="1600"/>
-              </a:spcAft>
-            </a:pPr>
-            <a:r>
-              <a:rPr sz="1050" b="0">
+              <a:rPr sz="900" b="0">
+                <a:solidFill>
+                  <a:srgbClr val="000000"/>
+                </a:solidFill>
+                <a:latin typeface="Arial"/>
+              </a:rPr>
+              <a:t>ARR: $100M in 20 months, $200M in 10, $330M in 5; $500M by May 2026</a:t>
+            </a:r>
+            <a:r>
+              <a:rPr sz="700" b="0">
+                <a:solidFill>
+                  <a:srgbClr val="8C8C8C"/>
+                </a:solidFill>
+                <a:latin typeface="Arial"/>
+              </a:rPr>
+              <a:t>  (TechCrunch, Jan 2026; ElevenLabs)</a:t>
+            </a:r>
+          </a:p>
+          <a:p>
+            <a:pPr algn="l">
+              <a:lnSpc>
+                <a:spcPct val="115000"/>
+              </a:lnSpc>
+              <a:spcAft>
+                <a:spcPts val="900"/>
+              </a:spcAft>
+            </a:pPr>
+            <a:r>
+              <a:rPr sz="900" b="0">
                 <a:solidFill>
                   <a:srgbClr val="000000"/>
                 </a:solidFill>
@@ -16014,20 +17308,187 @@
               <a:t>•  </a:t>
             </a:r>
             <a:r>
-              <a:rPr sz="1050" b="0">
-                <a:solidFill>
-                  <a:srgbClr val="000000"/>
-                </a:solidFill>
-                <a:latin typeface="Arial"/>
-              </a:rPr>
-              <a:t>FDE hiring scaled publicly alongside enterprise growth</a:t>
+              <a:rPr sz="900" b="0">
+                <a:solidFill>
+                  <a:srgbClr val="000000"/>
+                </a:solidFill>
+                <a:latin typeface="Arial"/>
+              </a:rPr>
+              <a:t>$500M Series D at an $11B valuation, Feb 2026 (Sequoia-led)</a:t>
+            </a:r>
+            <a:r>
+              <a:rPr sz="700" b="0">
+                <a:solidFill>
+                  <a:srgbClr val="8C8C8C"/>
+                </a:solidFill>
+                <a:latin typeface="Arial"/>
+              </a:rPr>
+              <a:t>  (TechCrunch, Feb 2026)</a:t>
+            </a:r>
+          </a:p>
+          <a:p>
+            <a:pPr algn="l">
+              <a:lnSpc>
+                <a:spcPct val="115000"/>
+              </a:lnSpc>
+              <a:spcAft>
+                <a:spcPts val="900"/>
+              </a:spcAft>
+            </a:pPr>
+            <a:r>
+              <a:rPr sz="900" b="0">
+                <a:solidFill>
+                  <a:srgbClr val="000000"/>
+                </a:solidFill>
+                <a:latin typeface="Arial"/>
+              </a:rPr>
+              <a:t>•  </a:t>
+            </a:r>
+            <a:r>
+              <a:rPr sz="900" b="0">
+                <a:solidFill>
+                  <a:srgbClr val="000000"/>
+                </a:solidFill>
+                <a:latin typeface="Arial"/>
+              </a:rPr>
+              <a:t>Revolut: agents serve 4M+ customers in 30+ languages; ticket resolution cut by more than 8x</a:t>
+            </a:r>
+            <a:r>
+              <a:rPr sz="700" b="0">
+                <a:solidFill>
+                  <a:srgbClr val="8C8C8C"/>
+                </a:solidFill>
+                <a:latin typeface="Arial"/>
+              </a:rPr>
+              <a:t>  (ElevenLabs, Jan 2026)</a:t>
+            </a:r>
+          </a:p>
+        </p:txBody>
+      </p:sp>
+      <p:sp>
+        <p:nvSpPr>
+          <p:cNvPr id="18" name="Rectangle 17"/>
+          <p:cNvSpPr/>
+          <p:nvPr/>
+        </p:nvSpPr>
+        <p:spPr>
+          <a:xfrm>
+            <a:off x="502920" y="5230368"/>
+            <a:ext cx="11185855" cy="987552"/>
+          </a:xfrm>
+          <a:prstGeom prst="rect">
+            <a:avLst/>
+          </a:prstGeom>
+          <a:solidFill>
+            <a:srgbClr val="F2F2F2"/>
+          </a:solidFill>
+          <a:ln>
+            <a:noFill/>
+          </a:ln>
+          <a:effectLst/>
+        </p:spPr>
+        <p:txBody>
+          <a:bodyPr rtlCol="0" anchor="ctr" lIns="54864" rIns="54864" tIns="18288" bIns="18288"/>
+          <a:lstStyle/>
+          <a:p>
+            <a:pPr algn="ctr"/>
+          </a:p>
+        </p:txBody>
+      </p:sp>
+      <p:sp>
+        <p:nvSpPr>
+          <p:cNvPr id="19" name="Rectangle 18"/>
+          <p:cNvSpPr/>
+          <p:nvPr/>
+        </p:nvSpPr>
+        <p:spPr>
+          <a:xfrm>
+            <a:off x="502920" y="5230368"/>
+            <a:ext cx="36576" cy="987552"/>
+          </a:xfrm>
+          <a:prstGeom prst="rect">
+            <a:avLst/>
+          </a:prstGeom>
+          <a:solidFill>
+            <a:srgbClr val="000000"/>
+          </a:solidFill>
+          <a:ln>
+            <a:noFill/>
+          </a:ln>
+          <a:effectLst/>
+        </p:spPr>
+        <p:txBody>
+          <a:bodyPr rtlCol="0" anchor="ctr" lIns="54864" rIns="54864" tIns="18288" bIns="18288"/>
+          <a:lstStyle/>
+          <a:p>
+            <a:pPr algn="ctr"/>
+          </a:p>
+        </p:txBody>
+      </p:sp>
+      <p:sp>
+        <p:nvSpPr>
+          <p:cNvPr id="20" name="TextBox 19"/>
+          <p:cNvSpPr txBox="1"/>
+          <p:nvPr/>
+        </p:nvSpPr>
+        <p:spPr>
+          <a:xfrm>
+            <a:off x="704088" y="5230368"/>
+            <a:ext cx="10783519" cy="987552"/>
+          </a:xfrm>
+          <a:prstGeom prst="rect">
+            <a:avLst/>
+          </a:prstGeom>
+          <a:noFill/>
+        </p:spPr>
+        <p:txBody>
+          <a:bodyPr wrap="square" anchor="ctr" lIns="0" rIns="0" tIns="0" bIns="0">
+            <a:spAutoFit/>
+          </a:bodyPr>
+          <a:lstStyle/>
+          <a:p>
+            <a:pPr algn="l">
+              <a:lnSpc>
+                <a:spcPct val="115000"/>
+              </a:lnSpc>
+              <a:spcAft>
+                <a:spcPts val="400"/>
+              </a:spcAft>
+            </a:pPr>
+            <a:r>
+              <a:rPr sz="1000" b="0">
+                <a:solidFill>
+                  <a:srgbClr val="000000"/>
+                </a:solidFill>
+                <a:latin typeface="Arial"/>
+              </a:rPr>
+              <a:t>“It took us 20 months to reach $100 million in ARR, 10 months to reach $200 million, and five months to reach the current number.”</a:t>
+            </a:r>
+          </a:p>
+          <a:p>
+            <a:pPr algn="l">
+              <a:lnSpc>
+                <a:spcPct val="115000"/>
+              </a:lnSpc>
+              <a:spcAft>
+                <a:spcPts val="400"/>
+              </a:spcAft>
+            </a:pPr>
+            <a:r>
+              <a:rPr sz="850" b="1">
+                <a:solidFill>
+                  <a:srgbClr val="595959"/>
+                </a:solidFill>
+                <a:latin typeface="Arial"/>
+              </a:rPr>
+              <a:t>— Mati Staniszewski, co-founder and CEO, Bloomberg interview, Jan 2026</a:t>
             </a:r>
           </a:p>
         </p:txBody>
       </p:sp>
       <p:cxnSp>
         <p:nvCxnSpPr>
-          <p:cNvPr id="18" name="Connector 17"/>
+          <p:cNvPr id="21" name="Connector 20"/>
           <p:cNvCxnSpPr/>
           <p:nvPr/>
         </p:nvCxnSpPr>
@@ -16049,14 +17510,14 @@
       </p:cxnSp>
       <p:sp>
         <p:nvSpPr>
-          <p:cNvPr id="19" name="TextBox 18"/>
+          <p:cNvPr id="22" name="TextBox 21"/>
           <p:cNvSpPr txBox="1"/>
           <p:nvPr/>
         </p:nvSpPr>
         <p:spPr>
           <a:xfrm>
-            <a:off x="502920" y="6583680"/>
-            <a:ext cx="9601200" cy="228600"/>
+            <a:off x="502920" y="6565392"/>
+            <a:ext cx="10332720" cy="274320"/>
           </a:xfrm>
           <a:prstGeom prst="rect">
             <a:avLst/>
@@ -16071,27 +17532,27 @@
           <a:p>
             <a:pPr algn="l">
               <a:lnSpc>
-                <a:spcPct val="100000"/>
+                <a:spcPct val="110000"/>
               </a:lnSpc>
               <a:spcAft>
                 <a:spcPts val="0"/>
               </a:spcAft>
             </a:pPr>
             <a:r>
-              <a:rPr sz="750" b="0">
+              <a:rPr sz="700" b="0">
                 <a:solidFill>
                   <a:srgbClr val="8C8C8C"/>
                 </a:solidFill>
                 <a:latin typeface="Arial"/>
               </a:rPr>
-              <a:t>Source: ElevenLabs public statements, job postings and press coverage</a:t>
-            </a:r>
-          </a:p>
-        </p:txBody>
-      </p:sp>
-      <p:sp>
-        <p:nvSpPr>
-          <p:cNvPr id="20" name="TextBox 19"/>
+              <a:t>Sources: ElevenLabs blog and careers pages (2025–26); TechCrunch (Jan 30, 2025; Jan 13 and Feb 4, 2026); CNBC (Feb and May 2026); Sifted (Mar 2025)</a:t>
+            </a:r>
+          </a:p>
+        </p:txBody>
+      </p:sp>
+      <p:sp>
+        <p:nvSpPr>
+          <p:cNvPr id="23" name="TextBox 22"/>
           <p:cNvSpPr txBox="1"/>
           <p:nvPr/>
         </p:nvSpPr>
